--- a/src/demo/presentation/assets/CWP_Template.pptx
+++ b/src/demo/presentation/assets/CWP_Template.pptx
@@ -4,46 +4,41 @@
   <p:sldMasterIdLst>
     <p:sldMasterId id="2147483678" r:id="rId4"/>
     <p:sldMasterId id="2147483703" r:id="rId5"/>
+    <p:sldMasterId id="2147483745" r:id="rId6"/>
   </p:sldMasterIdLst>
   <p:notesMasterIdLst>
-    <p:notesMasterId r:id="rId18"/>
+    <p:notesMasterId r:id="rId13"/>
   </p:notesMasterIdLst>
   <p:handoutMasterIdLst>
-    <p:handoutMasterId r:id="rId19"/>
+    <p:handoutMasterId r:id="rId14"/>
   </p:handoutMasterIdLst>
   <p:sldIdLst>
-    <p:sldId id="361" r:id="rId6"/>
-    <p:sldId id="401" r:id="rId7"/>
-    <p:sldId id="432" r:id="rId8"/>
-    <p:sldId id="408" r:id="rId9"/>
-    <p:sldId id="434" r:id="rId10"/>
-    <p:sldId id="435" r:id="rId11"/>
-    <p:sldId id="436" r:id="rId12"/>
-    <p:sldId id="438" r:id="rId13"/>
-    <p:sldId id="440" r:id="rId14"/>
-    <p:sldId id="441" r:id="rId15"/>
-    <p:sldId id="442" r:id="rId16"/>
-    <p:sldId id="443" r:id="rId17"/>
+    <p:sldId id="361" r:id="rId7"/>
+    <p:sldId id="444" r:id="rId8"/>
+    <p:sldId id="434" r:id="rId9"/>
+    <p:sldId id="438" r:id="rId10"/>
+    <p:sldId id="441" r:id="rId11"/>
+    <p:sldId id="443" r:id="rId12"/>
   </p:sldIdLst>
   <p:sldSz cx="9906000" cy="6858000" type="A4"/>
   <p:notesSz cx="6797675" cy="9926638"/>
   <p:embeddedFontLst>
     <p:embeddedFont>
       <p:font typeface="Roboto" panose="02000000000000000000" pitchFamily="2" charset="0"/>
-      <p:regular r:id="rId20"/>
-      <p:bold r:id="rId21"/>
-      <p:italic r:id="rId22"/>
-      <p:boldItalic r:id="rId23"/>
+      <p:regular r:id="rId15"/>
+      <p:bold r:id="rId16"/>
+      <p:italic r:id="rId17"/>
+      <p:boldItalic r:id="rId18"/>
     </p:embeddedFont>
     <p:embeddedFont>
       <p:font typeface="Roboto Light" panose="02000000000000000000" pitchFamily="2" charset="0"/>
-      <p:regular r:id="rId24"/>
-      <p:italic r:id="rId25"/>
+      <p:regular r:id="rId19"/>
+      <p:italic r:id="rId20"/>
     </p:embeddedFont>
     <p:embeddedFont>
       <p:font typeface="Roboto Medium" panose="02000000000000000000" pitchFamily="2" charset="0"/>
-      <p:regular r:id="rId26"/>
-      <p:italic r:id="rId27"/>
+      <p:regular r:id="rId21"/>
+      <p:italic r:id="rId22"/>
     </p:embeddedFont>
   </p:embeddedFontLst>
   <p:defaultTextStyle>
@@ -253,7 +248,7 @@
           <a:p>
             <a:fld id="{561635DC-7C77-4EDC-877E-93E281EA2302}" type="datetimeFigureOut">
               <a:rPr lang="en-GB" smtClean="0"/>
-              <a:t>28/07/2026</a:t>
+              <a:t>29/07/2026</a:t>
             </a:fld>
             <a:endParaRPr lang="en-GB"/>
           </a:p>
@@ -418,7 +413,7 @@
           <a:p>
             <a:fld id="{1AC7EAFC-5287-4976-8725-CD476620A400}" type="datetimeFigureOut">
               <a:rPr lang="en-GB" smtClean="0"/>
-              <a:t>28/07/2026</a:t>
+              <a:t>29/07/2026</a:t>
             </a:fld>
             <a:endParaRPr lang="en-GB"/>
           </a:p>
@@ -1048,7 +1043,7 @@
             <a:fld id="{6F80DDAC-FE11-49DC-9261-11C1E994665B}" type="datetimeFigureOut">
               <a:rPr lang="en-GB" smtClean="0"/>
               <a:pPr/>
-              <a:t>28/07/2026</a:t>
+              <a:t>29/07/2026</a:t>
             </a:fld>
             <a:endParaRPr lang="en-GB"/>
           </a:p>
@@ -1300,7 +1295,7 @@
             <a:fld id="{6F80DDAC-FE11-49DC-9261-11C1E994665B}" type="datetimeFigureOut">
               <a:rPr lang="en-GB" smtClean="0"/>
               <a:pPr/>
-              <a:t>28/07/2026</a:t>
+              <a:t>29/07/2026</a:t>
             </a:fld>
             <a:endParaRPr lang="en-GB"/>
           </a:p>
@@ -1586,7 +1581,7 @@
             <a:fld id="{6F80DDAC-FE11-49DC-9261-11C1E994665B}" type="datetimeFigureOut">
               <a:rPr lang="en-GB" smtClean="0"/>
               <a:pPr/>
-              <a:t>28/07/2026</a:t>
+              <a:t>29/07/2026</a:t>
             </a:fld>
             <a:endParaRPr lang="en-GB"/>
           </a:p>
@@ -1705,6 +1700,1644 @@
 </p:sldLayout>
 </file>
 
+<file path=ppt/slideLayouts/slideLayout13.xml><?xml version="1.0" encoding="utf-8"?>
+<p:sldLayout xmlns:a="http://schemas.openxmlformats.org/drawingml/2006/main" xmlns:r="http://schemas.openxmlformats.org/officeDocument/2006/relationships" xmlns:p="http://schemas.openxmlformats.org/presentationml/2006/main" type="title" preserve="1">
+  <p:cSld name="Title Slide">
+    <p:spTree>
+      <p:nvGrpSpPr>
+        <p:cNvPr id="1" name=""/>
+        <p:cNvGrpSpPr/>
+        <p:nvPr/>
+      </p:nvGrpSpPr>
+      <p:grpSpPr>
+        <a:xfrm>
+          <a:off x="0" y="0"/>
+          <a:ext cx="0" cy="0"/>
+          <a:chOff x="0" y="0"/>
+          <a:chExt cx="0" cy="0"/>
+        </a:xfrm>
+      </p:grpSpPr>
+      <p:sp>
+        <p:nvSpPr>
+          <p:cNvPr id="2" name="Title 1">
+            <a:extLst>
+              <a:ext uri="{FF2B5EF4-FFF2-40B4-BE49-F238E27FC236}">
+                <a16:creationId xmlns:a16="http://schemas.microsoft.com/office/drawing/2014/main" id="{D3595819-2C5B-0763-2E8B-04E6752BC387}"/>
+              </a:ext>
+            </a:extLst>
+          </p:cNvPr>
+          <p:cNvSpPr>
+            <a:spLocks noGrp="1"/>
+          </p:cNvSpPr>
+          <p:nvPr>
+            <p:ph type="ctrTitle"/>
+          </p:nvPr>
+        </p:nvSpPr>
+        <p:spPr>
+          <a:xfrm>
+            <a:off x="1238250" y="1122363"/>
+            <a:ext cx="7429500" cy="2387600"/>
+          </a:xfrm>
+        </p:spPr>
+        <p:txBody>
+          <a:bodyPr anchor="b"/>
+          <a:lstStyle>
+            <a:lvl1pPr algn="ctr">
+              <a:defRPr sz="4875"/>
+            </a:lvl1pPr>
+          </a:lstStyle>
+          <a:p>
+            <a:r>
+              <a:rPr lang="en-US"/>
+              <a:t>Click to edit Master title style</a:t>
+            </a:r>
+          </a:p>
+        </p:txBody>
+      </p:sp>
+      <p:sp>
+        <p:nvSpPr>
+          <p:cNvPr id="3" name="Subtitle 2">
+            <a:extLst>
+              <a:ext uri="{FF2B5EF4-FFF2-40B4-BE49-F238E27FC236}">
+                <a16:creationId xmlns:a16="http://schemas.microsoft.com/office/drawing/2014/main" id="{D8ADDE25-AF64-C532-16FC-93EB1FB2957E}"/>
+              </a:ext>
+            </a:extLst>
+          </p:cNvPr>
+          <p:cNvSpPr>
+            <a:spLocks noGrp="1"/>
+          </p:cNvSpPr>
+          <p:nvPr>
+            <p:ph type="subTitle" idx="1"/>
+          </p:nvPr>
+        </p:nvSpPr>
+        <p:spPr>
+          <a:xfrm>
+            <a:off x="1238250" y="3602038"/>
+            <a:ext cx="7429500" cy="1655762"/>
+          </a:xfrm>
+        </p:spPr>
+        <p:txBody>
+          <a:bodyPr/>
+          <a:lstStyle>
+            <a:lvl1pPr marL="0" indent="0" algn="ctr">
+              <a:buNone/>
+              <a:defRPr sz="1950"/>
+            </a:lvl1pPr>
+            <a:lvl2pPr marL="371475" indent="0" algn="ctr">
+              <a:buNone/>
+              <a:defRPr sz="1625"/>
+            </a:lvl2pPr>
+            <a:lvl3pPr marL="742950" indent="0" algn="ctr">
+              <a:buNone/>
+              <a:defRPr sz="1463"/>
+            </a:lvl3pPr>
+            <a:lvl4pPr marL="1114425" indent="0" algn="ctr">
+              <a:buNone/>
+              <a:defRPr sz="1300"/>
+            </a:lvl4pPr>
+            <a:lvl5pPr marL="1485900" indent="0" algn="ctr">
+              <a:buNone/>
+              <a:defRPr sz="1300"/>
+            </a:lvl5pPr>
+            <a:lvl6pPr marL="1857375" indent="0" algn="ctr">
+              <a:buNone/>
+              <a:defRPr sz="1300"/>
+            </a:lvl6pPr>
+            <a:lvl7pPr marL="2228850" indent="0" algn="ctr">
+              <a:buNone/>
+              <a:defRPr sz="1300"/>
+            </a:lvl7pPr>
+            <a:lvl8pPr marL="2600325" indent="0" algn="ctr">
+              <a:buNone/>
+              <a:defRPr sz="1300"/>
+            </a:lvl8pPr>
+            <a:lvl9pPr marL="2971800" indent="0" algn="ctr">
+              <a:buNone/>
+              <a:defRPr sz="1300"/>
+            </a:lvl9pPr>
+          </a:lstStyle>
+          <a:p>
+            <a:r>
+              <a:rPr lang="en-US"/>
+              <a:t>Click to edit Master subtitle style</a:t>
+            </a:r>
+          </a:p>
+        </p:txBody>
+      </p:sp>
+      <p:sp>
+        <p:nvSpPr>
+          <p:cNvPr id="4" name="Date Placeholder 3">
+            <a:extLst>
+              <a:ext uri="{FF2B5EF4-FFF2-40B4-BE49-F238E27FC236}">
+                <a16:creationId xmlns:a16="http://schemas.microsoft.com/office/drawing/2014/main" id="{396A1A39-B8CA-2182-EFF7-2572C798DDB5}"/>
+              </a:ext>
+            </a:extLst>
+          </p:cNvPr>
+          <p:cNvSpPr>
+            <a:spLocks noGrp="1"/>
+          </p:cNvSpPr>
+          <p:nvPr>
+            <p:ph type="dt" sz="half" idx="10"/>
+          </p:nvPr>
+        </p:nvSpPr>
+        <p:spPr/>
+        <p:txBody>
+          <a:bodyPr/>
+          <a:lstStyle/>
+          <a:p>
+            <a:fld id="{6F80DDAC-FE11-49DC-9261-11C1E994665B}" type="datetimeFigureOut">
+              <a:rPr lang="en-GB" smtClean="0"/>
+              <a:pPr/>
+              <a:t>29/07/2026</a:t>
+            </a:fld>
+            <a:endParaRPr lang="en-GB"/>
+          </a:p>
+        </p:txBody>
+      </p:sp>
+      <p:sp>
+        <p:nvSpPr>
+          <p:cNvPr id="5" name="Footer Placeholder 4">
+            <a:extLst>
+              <a:ext uri="{FF2B5EF4-FFF2-40B4-BE49-F238E27FC236}">
+                <a16:creationId xmlns:a16="http://schemas.microsoft.com/office/drawing/2014/main" id="{FD9A4148-14A8-74BB-71CD-7980CAA2AF98}"/>
+              </a:ext>
+            </a:extLst>
+          </p:cNvPr>
+          <p:cNvSpPr>
+            <a:spLocks noGrp="1"/>
+          </p:cNvSpPr>
+          <p:nvPr>
+            <p:ph type="ftr" sz="quarter" idx="11"/>
+          </p:nvPr>
+        </p:nvSpPr>
+        <p:spPr/>
+        <p:txBody>
+          <a:bodyPr/>
+          <a:lstStyle/>
+          <a:p>
+            <a:endParaRPr lang="en-US"/>
+          </a:p>
+        </p:txBody>
+      </p:sp>
+      <p:sp>
+        <p:nvSpPr>
+          <p:cNvPr id="6" name="Slide Number Placeholder 5">
+            <a:extLst>
+              <a:ext uri="{FF2B5EF4-FFF2-40B4-BE49-F238E27FC236}">
+                <a16:creationId xmlns:a16="http://schemas.microsoft.com/office/drawing/2014/main" id="{6374429A-D693-D0D3-F675-C561B12C3E59}"/>
+              </a:ext>
+            </a:extLst>
+          </p:cNvPr>
+          <p:cNvSpPr>
+            <a:spLocks noGrp="1"/>
+          </p:cNvSpPr>
+          <p:nvPr>
+            <p:ph type="sldNum" sz="quarter" idx="12"/>
+          </p:nvPr>
+        </p:nvSpPr>
+        <p:spPr/>
+        <p:txBody>
+          <a:bodyPr/>
+          <a:lstStyle/>
+          <a:p>
+            <a:fld id="{3A73CC0E-67D5-43FD-BD59-BE5F44570CB2}" type="slidenum">
+              <a:rPr lang="en-GB" smtClean="0"/>
+              <a:pPr/>
+              <a:t>‹#›</a:t>
+            </a:fld>
+            <a:endParaRPr lang="en-GB"/>
+          </a:p>
+        </p:txBody>
+      </p:sp>
+    </p:spTree>
+    <p:extLst>
+      <p:ext uri="{BB962C8B-B14F-4D97-AF65-F5344CB8AC3E}">
+        <p14:creationId xmlns:p14="http://schemas.microsoft.com/office/powerpoint/2010/main" val="2596838762"/>
+      </p:ext>
+    </p:extLst>
+  </p:cSld>
+  <p:clrMapOvr>
+    <a:masterClrMapping/>
+  </p:clrMapOvr>
+</p:sldLayout>
+</file>
+
+<file path=ppt/slideLayouts/slideLayout14.xml><?xml version="1.0" encoding="utf-8"?>
+<p:sldLayout xmlns:a="http://schemas.openxmlformats.org/drawingml/2006/main" xmlns:r="http://schemas.openxmlformats.org/officeDocument/2006/relationships" xmlns:p="http://schemas.openxmlformats.org/presentationml/2006/main" type="obj" preserve="1">
+  <p:cSld name="Title and Content">
+    <p:spTree>
+      <p:nvGrpSpPr>
+        <p:cNvPr id="1" name=""/>
+        <p:cNvGrpSpPr/>
+        <p:nvPr/>
+      </p:nvGrpSpPr>
+      <p:grpSpPr>
+        <a:xfrm>
+          <a:off x="0" y="0"/>
+          <a:ext cx="0" cy="0"/>
+          <a:chOff x="0" y="0"/>
+          <a:chExt cx="0" cy="0"/>
+        </a:xfrm>
+      </p:grpSpPr>
+      <p:sp>
+        <p:nvSpPr>
+          <p:cNvPr id="2" name="Title 1">
+            <a:extLst>
+              <a:ext uri="{FF2B5EF4-FFF2-40B4-BE49-F238E27FC236}">
+                <a16:creationId xmlns:a16="http://schemas.microsoft.com/office/drawing/2014/main" id="{34C1C74A-299C-3777-518C-993A0A36FB75}"/>
+              </a:ext>
+            </a:extLst>
+          </p:cNvPr>
+          <p:cNvSpPr>
+            <a:spLocks noGrp="1"/>
+          </p:cNvSpPr>
+          <p:nvPr>
+            <p:ph type="title"/>
+          </p:nvPr>
+        </p:nvSpPr>
+        <p:spPr/>
+        <p:txBody>
+          <a:bodyPr/>
+          <a:lstStyle/>
+          <a:p>
+            <a:r>
+              <a:rPr lang="en-US"/>
+              <a:t>Click to edit Master title style</a:t>
+            </a:r>
+          </a:p>
+        </p:txBody>
+      </p:sp>
+      <p:sp>
+        <p:nvSpPr>
+          <p:cNvPr id="3" name="Content Placeholder 2">
+            <a:extLst>
+              <a:ext uri="{FF2B5EF4-FFF2-40B4-BE49-F238E27FC236}">
+                <a16:creationId xmlns:a16="http://schemas.microsoft.com/office/drawing/2014/main" id="{F9C741E0-D46F-9748-1389-DEA9DF288130}"/>
+              </a:ext>
+            </a:extLst>
+          </p:cNvPr>
+          <p:cNvSpPr>
+            <a:spLocks noGrp="1"/>
+          </p:cNvSpPr>
+          <p:nvPr>
+            <p:ph idx="1"/>
+          </p:nvPr>
+        </p:nvSpPr>
+        <p:spPr/>
+        <p:txBody>
+          <a:bodyPr/>
+          <a:lstStyle/>
+          <a:p>
+            <a:pPr lvl="0"/>
+            <a:r>
+              <a:rPr lang="en-US"/>
+              <a:t>Click to edit Master text styles</a:t>
+            </a:r>
+          </a:p>
+          <a:p>
+            <a:pPr lvl="1"/>
+            <a:r>
+              <a:rPr lang="en-US"/>
+              <a:t>Second level</a:t>
+            </a:r>
+          </a:p>
+          <a:p>
+            <a:pPr lvl="2"/>
+            <a:r>
+              <a:rPr lang="en-US"/>
+              <a:t>Third level</a:t>
+            </a:r>
+          </a:p>
+          <a:p>
+            <a:pPr lvl="3"/>
+            <a:r>
+              <a:rPr lang="en-US"/>
+              <a:t>Fourth level</a:t>
+            </a:r>
+          </a:p>
+          <a:p>
+            <a:pPr lvl="4"/>
+            <a:r>
+              <a:rPr lang="en-US"/>
+              <a:t>Fifth level</a:t>
+            </a:r>
+          </a:p>
+        </p:txBody>
+      </p:sp>
+      <p:sp>
+        <p:nvSpPr>
+          <p:cNvPr id="4" name="Date Placeholder 3">
+            <a:extLst>
+              <a:ext uri="{FF2B5EF4-FFF2-40B4-BE49-F238E27FC236}">
+                <a16:creationId xmlns:a16="http://schemas.microsoft.com/office/drawing/2014/main" id="{8212E565-61C3-7C0F-BCA1-579B433BBC67}"/>
+              </a:ext>
+            </a:extLst>
+          </p:cNvPr>
+          <p:cNvSpPr>
+            <a:spLocks noGrp="1"/>
+          </p:cNvSpPr>
+          <p:nvPr>
+            <p:ph type="dt" sz="half" idx="10"/>
+          </p:nvPr>
+        </p:nvSpPr>
+        <p:spPr/>
+        <p:txBody>
+          <a:bodyPr/>
+          <a:lstStyle/>
+          <a:p>
+            <a:fld id="{6F80DDAC-FE11-49DC-9261-11C1E994665B}" type="datetimeFigureOut">
+              <a:rPr lang="en-GB" smtClean="0"/>
+              <a:pPr/>
+              <a:t>29/07/2026</a:t>
+            </a:fld>
+            <a:endParaRPr lang="en-GB"/>
+          </a:p>
+        </p:txBody>
+      </p:sp>
+      <p:sp>
+        <p:nvSpPr>
+          <p:cNvPr id="5" name="Footer Placeholder 4">
+            <a:extLst>
+              <a:ext uri="{FF2B5EF4-FFF2-40B4-BE49-F238E27FC236}">
+                <a16:creationId xmlns:a16="http://schemas.microsoft.com/office/drawing/2014/main" id="{825A3C1F-1A9B-AC26-34A2-FE3C12AC26EB}"/>
+              </a:ext>
+            </a:extLst>
+          </p:cNvPr>
+          <p:cNvSpPr>
+            <a:spLocks noGrp="1"/>
+          </p:cNvSpPr>
+          <p:nvPr>
+            <p:ph type="ftr" sz="quarter" idx="11"/>
+          </p:nvPr>
+        </p:nvSpPr>
+        <p:spPr/>
+        <p:txBody>
+          <a:bodyPr/>
+          <a:lstStyle/>
+          <a:p>
+            <a:endParaRPr lang="en-US"/>
+          </a:p>
+        </p:txBody>
+      </p:sp>
+      <p:sp>
+        <p:nvSpPr>
+          <p:cNvPr id="6" name="Slide Number Placeholder 5">
+            <a:extLst>
+              <a:ext uri="{FF2B5EF4-FFF2-40B4-BE49-F238E27FC236}">
+                <a16:creationId xmlns:a16="http://schemas.microsoft.com/office/drawing/2014/main" id="{85AD75B3-0B51-C3FC-BD52-AD7739A5BC9A}"/>
+              </a:ext>
+            </a:extLst>
+          </p:cNvPr>
+          <p:cNvSpPr>
+            <a:spLocks noGrp="1"/>
+          </p:cNvSpPr>
+          <p:nvPr>
+            <p:ph type="sldNum" sz="quarter" idx="12"/>
+          </p:nvPr>
+        </p:nvSpPr>
+        <p:spPr/>
+        <p:txBody>
+          <a:bodyPr/>
+          <a:lstStyle/>
+          <a:p>
+            <a:fld id="{3A73CC0E-67D5-43FD-BD59-BE5F44570CB2}" type="slidenum">
+              <a:rPr lang="en-GB" smtClean="0"/>
+              <a:pPr/>
+              <a:t>‹#›</a:t>
+            </a:fld>
+            <a:endParaRPr lang="en-GB"/>
+          </a:p>
+        </p:txBody>
+      </p:sp>
+    </p:spTree>
+    <p:extLst>
+      <p:ext uri="{BB962C8B-B14F-4D97-AF65-F5344CB8AC3E}">
+        <p14:creationId xmlns:p14="http://schemas.microsoft.com/office/powerpoint/2010/main" val="2443293081"/>
+      </p:ext>
+    </p:extLst>
+  </p:cSld>
+  <p:clrMapOvr>
+    <a:masterClrMapping/>
+  </p:clrMapOvr>
+</p:sldLayout>
+</file>
+
+<file path=ppt/slideLayouts/slideLayout15.xml><?xml version="1.0" encoding="utf-8"?>
+<p:sldLayout xmlns:a="http://schemas.openxmlformats.org/drawingml/2006/main" xmlns:r="http://schemas.openxmlformats.org/officeDocument/2006/relationships" xmlns:p="http://schemas.openxmlformats.org/presentationml/2006/main" type="secHead" preserve="1">
+  <p:cSld name="Section Header">
+    <p:spTree>
+      <p:nvGrpSpPr>
+        <p:cNvPr id="1" name=""/>
+        <p:cNvGrpSpPr/>
+        <p:nvPr/>
+      </p:nvGrpSpPr>
+      <p:grpSpPr>
+        <a:xfrm>
+          <a:off x="0" y="0"/>
+          <a:ext cx="0" cy="0"/>
+          <a:chOff x="0" y="0"/>
+          <a:chExt cx="0" cy="0"/>
+        </a:xfrm>
+      </p:grpSpPr>
+      <p:sp>
+        <p:nvSpPr>
+          <p:cNvPr id="2" name="Title 1">
+            <a:extLst>
+              <a:ext uri="{FF2B5EF4-FFF2-40B4-BE49-F238E27FC236}">
+                <a16:creationId xmlns:a16="http://schemas.microsoft.com/office/drawing/2014/main" id="{F7CCCF8F-FC41-BA54-195B-AB0FDD213AD7}"/>
+              </a:ext>
+            </a:extLst>
+          </p:cNvPr>
+          <p:cNvSpPr>
+            <a:spLocks noGrp="1"/>
+          </p:cNvSpPr>
+          <p:nvPr>
+            <p:ph type="title"/>
+          </p:nvPr>
+        </p:nvSpPr>
+        <p:spPr>
+          <a:xfrm>
+            <a:off x="675878" y="1709739"/>
+            <a:ext cx="8543925" cy="2852737"/>
+          </a:xfrm>
+        </p:spPr>
+        <p:txBody>
+          <a:bodyPr anchor="b"/>
+          <a:lstStyle>
+            <a:lvl1pPr>
+              <a:defRPr sz="4875"/>
+            </a:lvl1pPr>
+          </a:lstStyle>
+          <a:p>
+            <a:r>
+              <a:rPr lang="en-US"/>
+              <a:t>Click to edit Master title style</a:t>
+            </a:r>
+          </a:p>
+        </p:txBody>
+      </p:sp>
+      <p:sp>
+        <p:nvSpPr>
+          <p:cNvPr id="3" name="Text Placeholder 2">
+            <a:extLst>
+              <a:ext uri="{FF2B5EF4-FFF2-40B4-BE49-F238E27FC236}">
+                <a16:creationId xmlns:a16="http://schemas.microsoft.com/office/drawing/2014/main" id="{8CED3621-6A4C-891A-4A9F-8CFAB67210F7}"/>
+              </a:ext>
+            </a:extLst>
+          </p:cNvPr>
+          <p:cNvSpPr>
+            <a:spLocks noGrp="1"/>
+          </p:cNvSpPr>
+          <p:nvPr>
+            <p:ph type="body" idx="1"/>
+          </p:nvPr>
+        </p:nvSpPr>
+        <p:spPr>
+          <a:xfrm>
+            <a:off x="675878" y="4589464"/>
+            <a:ext cx="8543925" cy="1500187"/>
+          </a:xfrm>
+        </p:spPr>
+        <p:txBody>
+          <a:bodyPr/>
+          <a:lstStyle>
+            <a:lvl1pPr marL="0" indent="0">
+              <a:buNone/>
+              <a:defRPr sz="1950">
+                <a:solidFill>
+                  <a:schemeClr val="tx1">
+                    <a:tint val="82000"/>
+                  </a:schemeClr>
+                </a:solidFill>
+              </a:defRPr>
+            </a:lvl1pPr>
+            <a:lvl2pPr marL="371475" indent="0">
+              <a:buNone/>
+              <a:defRPr sz="1625">
+                <a:solidFill>
+                  <a:schemeClr val="tx1">
+                    <a:tint val="82000"/>
+                  </a:schemeClr>
+                </a:solidFill>
+              </a:defRPr>
+            </a:lvl2pPr>
+            <a:lvl3pPr marL="742950" indent="0">
+              <a:buNone/>
+              <a:defRPr sz="1463">
+                <a:solidFill>
+                  <a:schemeClr val="tx1">
+                    <a:tint val="82000"/>
+                  </a:schemeClr>
+                </a:solidFill>
+              </a:defRPr>
+            </a:lvl3pPr>
+            <a:lvl4pPr marL="1114425" indent="0">
+              <a:buNone/>
+              <a:defRPr sz="1300">
+                <a:solidFill>
+                  <a:schemeClr val="tx1">
+                    <a:tint val="82000"/>
+                  </a:schemeClr>
+                </a:solidFill>
+              </a:defRPr>
+            </a:lvl4pPr>
+            <a:lvl5pPr marL="1485900" indent="0">
+              <a:buNone/>
+              <a:defRPr sz="1300">
+                <a:solidFill>
+                  <a:schemeClr val="tx1">
+                    <a:tint val="82000"/>
+                  </a:schemeClr>
+                </a:solidFill>
+              </a:defRPr>
+            </a:lvl5pPr>
+            <a:lvl6pPr marL="1857375" indent="0">
+              <a:buNone/>
+              <a:defRPr sz="1300">
+                <a:solidFill>
+                  <a:schemeClr val="tx1">
+                    <a:tint val="82000"/>
+                  </a:schemeClr>
+                </a:solidFill>
+              </a:defRPr>
+            </a:lvl6pPr>
+            <a:lvl7pPr marL="2228850" indent="0">
+              <a:buNone/>
+              <a:defRPr sz="1300">
+                <a:solidFill>
+                  <a:schemeClr val="tx1">
+                    <a:tint val="82000"/>
+                  </a:schemeClr>
+                </a:solidFill>
+              </a:defRPr>
+            </a:lvl7pPr>
+            <a:lvl8pPr marL="2600325" indent="0">
+              <a:buNone/>
+              <a:defRPr sz="1300">
+                <a:solidFill>
+                  <a:schemeClr val="tx1">
+                    <a:tint val="82000"/>
+                  </a:schemeClr>
+                </a:solidFill>
+              </a:defRPr>
+            </a:lvl8pPr>
+            <a:lvl9pPr marL="2971800" indent="0">
+              <a:buNone/>
+              <a:defRPr sz="1300">
+                <a:solidFill>
+                  <a:schemeClr val="tx1">
+                    <a:tint val="82000"/>
+                  </a:schemeClr>
+                </a:solidFill>
+              </a:defRPr>
+            </a:lvl9pPr>
+          </a:lstStyle>
+          <a:p>
+            <a:pPr lvl="0"/>
+            <a:r>
+              <a:rPr lang="en-US"/>
+              <a:t>Click to edit Master text styles</a:t>
+            </a:r>
+          </a:p>
+        </p:txBody>
+      </p:sp>
+      <p:sp>
+        <p:nvSpPr>
+          <p:cNvPr id="4" name="Date Placeholder 3">
+            <a:extLst>
+              <a:ext uri="{FF2B5EF4-FFF2-40B4-BE49-F238E27FC236}">
+                <a16:creationId xmlns:a16="http://schemas.microsoft.com/office/drawing/2014/main" id="{D79F9C5B-09A7-AACE-5899-6C43CC7D6957}"/>
+              </a:ext>
+            </a:extLst>
+          </p:cNvPr>
+          <p:cNvSpPr>
+            <a:spLocks noGrp="1"/>
+          </p:cNvSpPr>
+          <p:nvPr>
+            <p:ph type="dt" sz="half" idx="10"/>
+          </p:nvPr>
+        </p:nvSpPr>
+        <p:spPr/>
+        <p:txBody>
+          <a:bodyPr/>
+          <a:lstStyle/>
+          <a:p>
+            <a:fld id="{6F80DDAC-FE11-49DC-9261-11C1E994665B}" type="datetimeFigureOut">
+              <a:rPr lang="en-GB" smtClean="0"/>
+              <a:pPr/>
+              <a:t>29/07/2026</a:t>
+            </a:fld>
+            <a:endParaRPr lang="en-GB"/>
+          </a:p>
+        </p:txBody>
+      </p:sp>
+      <p:sp>
+        <p:nvSpPr>
+          <p:cNvPr id="5" name="Footer Placeholder 4">
+            <a:extLst>
+              <a:ext uri="{FF2B5EF4-FFF2-40B4-BE49-F238E27FC236}">
+                <a16:creationId xmlns:a16="http://schemas.microsoft.com/office/drawing/2014/main" id="{2418391A-998C-6522-EB07-BBADB269BF14}"/>
+              </a:ext>
+            </a:extLst>
+          </p:cNvPr>
+          <p:cNvSpPr>
+            <a:spLocks noGrp="1"/>
+          </p:cNvSpPr>
+          <p:nvPr>
+            <p:ph type="ftr" sz="quarter" idx="11"/>
+          </p:nvPr>
+        </p:nvSpPr>
+        <p:spPr/>
+        <p:txBody>
+          <a:bodyPr/>
+          <a:lstStyle/>
+          <a:p>
+            <a:endParaRPr lang="en-US"/>
+          </a:p>
+        </p:txBody>
+      </p:sp>
+      <p:sp>
+        <p:nvSpPr>
+          <p:cNvPr id="6" name="Slide Number Placeholder 5">
+            <a:extLst>
+              <a:ext uri="{FF2B5EF4-FFF2-40B4-BE49-F238E27FC236}">
+                <a16:creationId xmlns:a16="http://schemas.microsoft.com/office/drawing/2014/main" id="{B059B3E3-80F3-C318-AE69-CC2389B551D5}"/>
+              </a:ext>
+            </a:extLst>
+          </p:cNvPr>
+          <p:cNvSpPr>
+            <a:spLocks noGrp="1"/>
+          </p:cNvSpPr>
+          <p:nvPr>
+            <p:ph type="sldNum" sz="quarter" idx="12"/>
+          </p:nvPr>
+        </p:nvSpPr>
+        <p:spPr/>
+        <p:txBody>
+          <a:bodyPr/>
+          <a:lstStyle/>
+          <a:p>
+            <a:fld id="{3A73CC0E-67D5-43FD-BD59-BE5F44570CB2}" type="slidenum">
+              <a:rPr lang="en-GB" smtClean="0"/>
+              <a:pPr/>
+              <a:t>‹#›</a:t>
+            </a:fld>
+            <a:endParaRPr lang="en-GB"/>
+          </a:p>
+        </p:txBody>
+      </p:sp>
+    </p:spTree>
+    <p:extLst>
+      <p:ext uri="{BB962C8B-B14F-4D97-AF65-F5344CB8AC3E}">
+        <p14:creationId xmlns:p14="http://schemas.microsoft.com/office/powerpoint/2010/main" val="2828134974"/>
+      </p:ext>
+    </p:extLst>
+  </p:cSld>
+  <p:clrMapOvr>
+    <a:masterClrMapping/>
+  </p:clrMapOvr>
+</p:sldLayout>
+</file>
+
+<file path=ppt/slideLayouts/slideLayout16.xml><?xml version="1.0" encoding="utf-8"?>
+<p:sldLayout xmlns:a="http://schemas.openxmlformats.org/drawingml/2006/main" xmlns:r="http://schemas.openxmlformats.org/officeDocument/2006/relationships" xmlns:p="http://schemas.openxmlformats.org/presentationml/2006/main" type="twoObj" preserve="1">
+  <p:cSld name="Two Content">
+    <p:spTree>
+      <p:nvGrpSpPr>
+        <p:cNvPr id="1" name=""/>
+        <p:cNvGrpSpPr/>
+        <p:nvPr/>
+      </p:nvGrpSpPr>
+      <p:grpSpPr>
+        <a:xfrm>
+          <a:off x="0" y="0"/>
+          <a:ext cx="0" cy="0"/>
+          <a:chOff x="0" y="0"/>
+          <a:chExt cx="0" cy="0"/>
+        </a:xfrm>
+      </p:grpSpPr>
+      <p:sp>
+        <p:nvSpPr>
+          <p:cNvPr id="2" name="Title 1">
+            <a:extLst>
+              <a:ext uri="{FF2B5EF4-FFF2-40B4-BE49-F238E27FC236}">
+                <a16:creationId xmlns:a16="http://schemas.microsoft.com/office/drawing/2014/main" id="{9EE593B0-5543-FD72-265C-601978B645A7}"/>
+              </a:ext>
+            </a:extLst>
+          </p:cNvPr>
+          <p:cNvSpPr>
+            <a:spLocks noGrp="1"/>
+          </p:cNvSpPr>
+          <p:nvPr>
+            <p:ph type="title"/>
+          </p:nvPr>
+        </p:nvSpPr>
+        <p:spPr/>
+        <p:txBody>
+          <a:bodyPr/>
+          <a:lstStyle/>
+          <a:p>
+            <a:r>
+              <a:rPr lang="en-US"/>
+              <a:t>Click to edit Master title style</a:t>
+            </a:r>
+          </a:p>
+        </p:txBody>
+      </p:sp>
+      <p:sp>
+        <p:nvSpPr>
+          <p:cNvPr id="3" name="Content Placeholder 2">
+            <a:extLst>
+              <a:ext uri="{FF2B5EF4-FFF2-40B4-BE49-F238E27FC236}">
+                <a16:creationId xmlns:a16="http://schemas.microsoft.com/office/drawing/2014/main" id="{B7717A1B-1A5C-C49C-1DCB-A4D85232FE22}"/>
+              </a:ext>
+            </a:extLst>
+          </p:cNvPr>
+          <p:cNvSpPr>
+            <a:spLocks noGrp="1"/>
+          </p:cNvSpPr>
+          <p:nvPr>
+            <p:ph sz="half" idx="1"/>
+          </p:nvPr>
+        </p:nvSpPr>
+        <p:spPr>
+          <a:xfrm>
+            <a:off x="681038" y="1825625"/>
+            <a:ext cx="4210050" cy="4351338"/>
+          </a:xfrm>
+        </p:spPr>
+        <p:txBody>
+          <a:bodyPr/>
+          <a:lstStyle/>
+          <a:p>
+            <a:pPr lvl="0"/>
+            <a:r>
+              <a:rPr lang="en-US"/>
+              <a:t>Click to edit Master text styles</a:t>
+            </a:r>
+          </a:p>
+          <a:p>
+            <a:pPr lvl="1"/>
+            <a:r>
+              <a:rPr lang="en-US"/>
+              <a:t>Second level</a:t>
+            </a:r>
+          </a:p>
+          <a:p>
+            <a:pPr lvl="2"/>
+            <a:r>
+              <a:rPr lang="en-US"/>
+              <a:t>Third level</a:t>
+            </a:r>
+          </a:p>
+          <a:p>
+            <a:pPr lvl="3"/>
+            <a:r>
+              <a:rPr lang="en-US"/>
+              <a:t>Fourth level</a:t>
+            </a:r>
+          </a:p>
+          <a:p>
+            <a:pPr lvl="4"/>
+            <a:r>
+              <a:rPr lang="en-US"/>
+              <a:t>Fifth level</a:t>
+            </a:r>
+          </a:p>
+        </p:txBody>
+      </p:sp>
+      <p:sp>
+        <p:nvSpPr>
+          <p:cNvPr id="4" name="Content Placeholder 3">
+            <a:extLst>
+              <a:ext uri="{FF2B5EF4-FFF2-40B4-BE49-F238E27FC236}">
+                <a16:creationId xmlns:a16="http://schemas.microsoft.com/office/drawing/2014/main" id="{48866F6E-92F7-4DE2-94AA-93F66ECA0EB9}"/>
+              </a:ext>
+            </a:extLst>
+          </p:cNvPr>
+          <p:cNvSpPr>
+            <a:spLocks noGrp="1"/>
+          </p:cNvSpPr>
+          <p:nvPr>
+            <p:ph sz="half" idx="2"/>
+          </p:nvPr>
+        </p:nvSpPr>
+        <p:spPr>
+          <a:xfrm>
+            <a:off x="5014913" y="1825625"/>
+            <a:ext cx="4210050" cy="4351338"/>
+          </a:xfrm>
+        </p:spPr>
+        <p:txBody>
+          <a:bodyPr/>
+          <a:lstStyle/>
+          <a:p>
+            <a:pPr lvl="0"/>
+            <a:r>
+              <a:rPr lang="en-US"/>
+              <a:t>Click to edit Master text styles</a:t>
+            </a:r>
+          </a:p>
+          <a:p>
+            <a:pPr lvl="1"/>
+            <a:r>
+              <a:rPr lang="en-US"/>
+              <a:t>Second level</a:t>
+            </a:r>
+          </a:p>
+          <a:p>
+            <a:pPr lvl="2"/>
+            <a:r>
+              <a:rPr lang="en-US"/>
+              <a:t>Third level</a:t>
+            </a:r>
+          </a:p>
+          <a:p>
+            <a:pPr lvl="3"/>
+            <a:r>
+              <a:rPr lang="en-US"/>
+              <a:t>Fourth level</a:t>
+            </a:r>
+          </a:p>
+          <a:p>
+            <a:pPr lvl="4"/>
+            <a:r>
+              <a:rPr lang="en-US"/>
+              <a:t>Fifth level</a:t>
+            </a:r>
+          </a:p>
+        </p:txBody>
+      </p:sp>
+      <p:sp>
+        <p:nvSpPr>
+          <p:cNvPr id="5" name="Date Placeholder 4">
+            <a:extLst>
+              <a:ext uri="{FF2B5EF4-FFF2-40B4-BE49-F238E27FC236}">
+                <a16:creationId xmlns:a16="http://schemas.microsoft.com/office/drawing/2014/main" id="{B139B6FA-F1AE-16C1-0F53-BED48027C798}"/>
+              </a:ext>
+            </a:extLst>
+          </p:cNvPr>
+          <p:cNvSpPr>
+            <a:spLocks noGrp="1"/>
+          </p:cNvSpPr>
+          <p:nvPr>
+            <p:ph type="dt" sz="half" idx="10"/>
+          </p:nvPr>
+        </p:nvSpPr>
+        <p:spPr/>
+        <p:txBody>
+          <a:bodyPr/>
+          <a:lstStyle/>
+          <a:p>
+            <a:fld id="{6F80DDAC-FE11-49DC-9261-11C1E994665B}" type="datetimeFigureOut">
+              <a:rPr lang="en-GB" smtClean="0"/>
+              <a:pPr/>
+              <a:t>29/07/2026</a:t>
+            </a:fld>
+            <a:endParaRPr lang="en-GB"/>
+          </a:p>
+        </p:txBody>
+      </p:sp>
+      <p:sp>
+        <p:nvSpPr>
+          <p:cNvPr id="6" name="Footer Placeholder 5">
+            <a:extLst>
+              <a:ext uri="{FF2B5EF4-FFF2-40B4-BE49-F238E27FC236}">
+                <a16:creationId xmlns:a16="http://schemas.microsoft.com/office/drawing/2014/main" id="{3303BDA8-F3F8-F242-735E-85C7C2C32E6E}"/>
+              </a:ext>
+            </a:extLst>
+          </p:cNvPr>
+          <p:cNvSpPr>
+            <a:spLocks noGrp="1"/>
+          </p:cNvSpPr>
+          <p:nvPr>
+            <p:ph type="ftr" sz="quarter" idx="11"/>
+          </p:nvPr>
+        </p:nvSpPr>
+        <p:spPr/>
+        <p:txBody>
+          <a:bodyPr/>
+          <a:lstStyle/>
+          <a:p>
+            <a:endParaRPr lang="en-US"/>
+          </a:p>
+        </p:txBody>
+      </p:sp>
+      <p:sp>
+        <p:nvSpPr>
+          <p:cNvPr id="7" name="Slide Number Placeholder 6">
+            <a:extLst>
+              <a:ext uri="{FF2B5EF4-FFF2-40B4-BE49-F238E27FC236}">
+                <a16:creationId xmlns:a16="http://schemas.microsoft.com/office/drawing/2014/main" id="{F915B592-7087-A77B-3B2B-1D78D9EBEC80}"/>
+              </a:ext>
+            </a:extLst>
+          </p:cNvPr>
+          <p:cNvSpPr>
+            <a:spLocks noGrp="1"/>
+          </p:cNvSpPr>
+          <p:nvPr>
+            <p:ph type="sldNum" sz="quarter" idx="12"/>
+          </p:nvPr>
+        </p:nvSpPr>
+        <p:spPr/>
+        <p:txBody>
+          <a:bodyPr/>
+          <a:lstStyle/>
+          <a:p>
+            <a:fld id="{3A73CC0E-67D5-43FD-BD59-BE5F44570CB2}" type="slidenum">
+              <a:rPr lang="en-GB" smtClean="0"/>
+              <a:pPr/>
+              <a:t>‹#›</a:t>
+            </a:fld>
+            <a:endParaRPr lang="en-GB"/>
+          </a:p>
+        </p:txBody>
+      </p:sp>
+    </p:spTree>
+    <p:extLst>
+      <p:ext uri="{BB962C8B-B14F-4D97-AF65-F5344CB8AC3E}">
+        <p14:creationId xmlns:p14="http://schemas.microsoft.com/office/powerpoint/2010/main" val="2617435831"/>
+      </p:ext>
+    </p:extLst>
+  </p:cSld>
+  <p:clrMapOvr>
+    <a:masterClrMapping/>
+  </p:clrMapOvr>
+</p:sldLayout>
+</file>
+
+<file path=ppt/slideLayouts/slideLayout17.xml><?xml version="1.0" encoding="utf-8"?>
+<p:sldLayout xmlns:a="http://schemas.openxmlformats.org/drawingml/2006/main" xmlns:r="http://schemas.openxmlformats.org/officeDocument/2006/relationships" xmlns:p="http://schemas.openxmlformats.org/presentationml/2006/main" type="twoTxTwoObj" preserve="1">
+  <p:cSld name="Comparison">
+    <p:spTree>
+      <p:nvGrpSpPr>
+        <p:cNvPr id="1" name=""/>
+        <p:cNvGrpSpPr/>
+        <p:nvPr/>
+      </p:nvGrpSpPr>
+      <p:grpSpPr>
+        <a:xfrm>
+          <a:off x="0" y="0"/>
+          <a:ext cx="0" cy="0"/>
+          <a:chOff x="0" y="0"/>
+          <a:chExt cx="0" cy="0"/>
+        </a:xfrm>
+      </p:grpSpPr>
+      <p:sp>
+        <p:nvSpPr>
+          <p:cNvPr id="2" name="Title 1">
+            <a:extLst>
+              <a:ext uri="{FF2B5EF4-FFF2-40B4-BE49-F238E27FC236}">
+                <a16:creationId xmlns:a16="http://schemas.microsoft.com/office/drawing/2014/main" id="{CB6784EC-9816-8C42-4A2D-296F1A38341E}"/>
+              </a:ext>
+            </a:extLst>
+          </p:cNvPr>
+          <p:cNvSpPr>
+            <a:spLocks noGrp="1"/>
+          </p:cNvSpPr>
+          <p:nvPr>
+            <p:ph type="title"/>
+          </p:nvPr>
+        </p:nvSpPr>
+        <p:spPr>
+          <a:xfrm>
+            <a:off x="682328" y="365126"/>
+            <a:ext cx="8543925" cy="1325563"/>
+          </a:xfrm>
+        </p:spPr>
+        <p:txBody>
+          <a:bodyPr/>
+          <a:lstStyle/>
+          <a:p>
+            <a:r>
+              <a:rPr lang="en-US"/>
+              <a:t>Click to edit Master title style</a:t>
+            </a:r>
+          </a:p>
+        </p:txBody>
+      </p:sp>
+      <p:sp>
+        <p:nvSpPr>
+          <p:cNvPr id="3" name="Text Placeholder 2">
+            <a:extLst>
+              <a:ext uri="{FF2B5EF4-FFF2-40B4-BE49-F238E27FC236}">
+                <a16:creationId xmlns:a16="http://schemas.microsoft.com/office/drawing/2014/main" id="{6646B347-D4D6-CB98-1E64-CCAAE65E5D7A}"/>
+              </a:ext>
+            </a:extLst>
+          </p:cNvPr>
+          <p:cNvSpPr>
+            <a:spLocks noGrp="1"/>
+          </p:cNvSpPr>
+          <p:nvPr>
+            <p:ph type="body" idx="1"/>
+          </p:nvPr>
+        </p:nvSpPr>
+        <p:spPr>
+          <a:xfrm>
+            <a:off x="682328" y="1681163"/>
+            <a:ext cx="4190702" cy="823912"/>
+          </a:xfrm>
+        </p:spPr>
+        <p:txBody>
+          <a:bodyPr anchor="b"/>
+          <a:lstStyle>
+            <a:lvl1pPr marL="0" indent="0">
+              <a:buNone/>
+              <a:defRPr sz="1950" b="1"/>
+            </a:lvl1pPr>
+            <a:lvl2pPr marL="371475" indent="0">
+              <a:buNone/>
+              <a:defRPr sz="1625" b="1"/>
+            </a:lvl2pPr>
+            <a:lvl3pPr marL="742950" indent="0">
+              <a:buNone/>
+              <a:defRPr sz="1463" b="1"/>
+            </a:lvl3pPr>
+            <a:lvl4pPr marL="1114425" indent="0">
+              <a:buNone/>
+              <a:defRPr sz="1300" b="1"/>
+            </a:lvl4pPr>
+            <a:lvl5pPr marL="1485900" indent="0">
+              <a:buNone/>
+              <a:defRPr sz="1300" b="1"/>
+            </a:lvl5pPr>
+            <a:lvl6pPr marL="1857375" indent="0">
+              <a:buNone/>
+              <a:defRPr sz="1300" b="1"/>
+            </a:lvl6pPr>
+            <a:lvl7pPr marL="2228850" indent="0">
+              <a:buNone/>
+              <a:defRPr sz="1300" b="1"/>
+            </a:lvl7pPr>
+            <a:lvl8pPr marL="2600325" indent="0">
+              <a:buNone/>
+              <a:defRPr sz="1300" b="1"/>
+            </a:lvl8pPr>
+            <a:lvl9pPr marL="2971800" indent="0">
+              <a:buNone/>
+              <a:defRPr sz="1300" b="1"/>
+            </a:lvl9pPr>
+          </a:lstStyle>
+          <a:p>
+            <a:pPr lvl="0"/>
+            <a:r>
+              <a:rPr lang="en-US"/>
+              <a:t>Click to edit Master text styles</a:t>
+            </a:r>
+          </a:p>
+        </p:txBody>
+      </p:sp>
+      <p:sp>
+        <p:nvSpPr>
+          <p:cNvPr id="4" name="Content Placeholder 3">
+            <a:extLst>
+              <a:ext uri="{FF2B5EF4-FFF2-40B4-BE49-F238E27FC236}">
+                <a16:creationId xmlns:a16="http://schemas.microsoft.com/office/drawing/2014/main" id="{5C7B7206-5AE9-8437-3DCF-E86B48DD1D51}"/>
+              </a:ext>
+            </a:extLst>
+          </p:cNvPr>
+          <p:cNvSpPr>
+            <a:spLocks noGrp="1"/>
+          </p:cNvSpPr>
+          <p:nvPr>
+            <p:ph sz="half" idx="2"/>
+          </p:nvPr>
+        </p:nvSpPr>
+        <p:spPr>
+          <a:xfrm>
+            <a:off x="682328" y="2505075"/>
+            <a:ext cx="4190702" cy="3684588"/>
+          </a:xfrm>
+        </p:spPr>
+        <p:txBody>
+          <a:bodyPr/>
+          <a:lstStyle/>
+          <a:p>
+            <a:pPr lvl="0"/>
+            <a:r>
+              <a:rPr lang="en-US"/>
+              <a:t>Click to edit Master text styles</a:t>
+            </a:r>
+          </a:p>
+          <a:p>
+            <a:pPr lvl="1"/>
+            <a:r>
+              <a:rPr lang="en-US"/>
+              <a:t>Second level</a:t>
+            </a:r>
+          </a:p>
+          <a:p>
+            <a:pPr lvl="2"/>
+            <a:r>
+              <a:rPr lang="en-US"/>
+              <a:t>Third level</a:t>
+            </a:r>
+          </a:p>
+          <a:p>
+            <a:pPr lvl="3"/>
+            <a:r>
+              <a:rPr lang="en-US"/>
+              <a:t>Fourth level</a:t>
+            </a:r>
+          </a:p>
+          <a:p>
+            <a:pPr lvl="4"/>
+            <a:r>
+              <a:rPr lang="en-US"/>
+              <a:t>Fifth level</a:t>
+            </a:r>
+          </a:p>
+        </p:txBody>
+      </p:sp>
+      <p:sp>
+        <p:nvSpPr>
+          <p:cNvPr id="5" name="Text Placeholder 4">
+            <a:extLst>
+              <a:ext uri="{FF2B5EF4-FFF2-40B4-BE49-F238E27FC236}">
+                <a16:creationId xmlns:a16="http://schemas.microsoft.com/office/drawing/2014/main" id="{C3AD6CF7-7157-DA71-23AF-44C6E862B892}"/>
+              </a:ext>
+            </a:extLst>
+          </p:cNvPr>
+          <p:cNvSpPr>
+            <a:spLocks noGrp="1"/>
+          </p:cNvSpPr>
+          <p:nvPr>
+            <p:ph type="body" sz="quarter" idx="3"/>
+          </p:nvPr>
+        </p:nvSpPr>
+        <p:spPr>
+          <a:xfrm>
+            <a:off x="5014913" y="1681163"/>
+            <a:ext cx="4211340" cy="823912"/>
+          </a:xfrm>
+        </p:spPr>
+        <p:txBody>
+          <a:bodyPr anchor="b"/>
+          <a:lstStyle>
+            <a:lvl1pPr marL="0" indent="0">
+              <a:buNone/>
+              <a:defRPr sz="1950" b="1"/>
+            </a:lvl1pPr>
+            <a:lvl2pPr marL="371475" indent="0">
+              <a:buNone/>
+              <a:defRPr sz="1625" b="1"/>
+            </a:lvl2pPr>
+            <a:lvl3pPr marL="742950" indent="0">
+              <a:buNone/>
+              <a:defRPr sz="1463" b="1"/>
+            </a:lvl3pPr>
+            <a:lvl4pPr marL="1114425" indent="0">
+              <a:buNone/>
+              <a:defRPr sz="1300" b="1"/>
+            </a:lvl4pPr>
+            <a:lvl5pPr marL="1485900" indent="0">
+              <a:buNone/>
+              <a:defRPr sz="1300" b="1"/>
+            </a:lvl5pPr>
+            <a:lvl6pPr marL="1857375" indent="0">
+              <a:buNone/>
+              <a:defRPr sz="1300" b="1"/>
+            </a:lvl6pPr>
+            <a:lvl7pPr marL="2228850" indent="0">
+              <a:buNone/>
+              <a:defRPr sz="1300" b="1"/>
+            </a:lvl7pPr>
+            <a:lvl8pPr marL="2600325" indent="0">
+              <a:buNone/>
+              <a:defRPr sz="1300" b="1"/>
+            </a:lvl8pPr>
+            <a:lvl9pPr marL="2971800" indent="0">
+              <a:buNone/>
+              <a:defRPr sz="1300" b="1"/>
+            </a:lvl9pPr>
+          </a:lstStyle>
+          <a:p>
+            <a:pPr lvl="0"/>
+            <a:r>
+              <a:rPr lang="en-US"/>
+              <a:t>Click to edit Master text styles</a:t>
+            </a:r>
+          </a:p>
+        </p:txBody>
+      </p:sp>
+      <p:sp>
+        <p:nvSpPr>
+          <p:cNvPr id="6" name="Content Placeholder 5">
+            <a:extLst>
+              <a:ext uri="{FF2B5EF4-FFF2-40B4-BE49-F238E27FC236}">
+                <a16:creationId xmlns:a16="http://schemas.microsoft.com/office/drawing/2014/main" id="{0FF685C0-509A-B904-DA26-4520A0B8CA29}"/>
+              </a:ext>
+            </a:extLst>
+          </p:cNvPr>
+          <p:cNvSpPr>
+            <a:spLocks noGrp="1"/>
+          </p:cNvSpPr>
+          <p:nvPr>
+            <p:ph sz="quarter" idx="4"/>
+          </p:nvPr>
+        </p:nvSpPr>
+        <p:spPr>
+          <a:xfrm>
+            <a:off x="5014913" y="2505075"/>
+            <a:ext cx="4211340" cy="3684588"/>
+          </a:xfrm>
+        </p:spPr>
+        <p:txBody>
+          <a:bodyPr/>
+          <a:lstStyle/>
+          <a:p>
+            <a:pPr lvl="0"/>
+            <a:r>
+              <a:rPr lang="en-US"/>
+              <a:t>Click to edit Master text styles</a:t>
+            </a:r>
+          </a:p>
+          <a:p>
+            <a:pPr lvl="1"/>
+            <a:r>
+              <a:rPr lang="en-US"/>
+              <a:t>Second level</a:t>
+            </a:r>
+          </a:p>
+          <a:p>
+            <a:pPr lvl="2"/>
+            <a:r>
+              <a:rPr lang="en-US"/>
+              <a:t>Third level</a:t>
+            </a:r>
+          </a:p>
+          <a:p>
+            <a:pPr lvl="3"/>
+            <a:r>
+              <a:rPr lang="en-US"/>
+              <a:t>Fourth level</a:t>
+            </a:r>
+          </a:p>
+          <a:p>
+            <a:pPr lvl="4"/>
+            <a:r>
+              <a:rPr lang="en-US"/>
+              <a:t>Fifth level</a:t>
+            </a:r>
+          </a:p>
+        </p:txBody>
+      </p:sp>
+      <p:sp>
+        <p:nvSpPr>
+          <p:cNvPr id="7" name="Date Placeholder 6">
+            <a:extLst>
+              <a:ext uri="{FF2B5EF4-FFF2-40B4-BE49-F238E27FC236}">
+                <a16:creationId xmlns:a16="http://schemas.microsoft.com/office/drawing/2014/main" id="{699FFE35-A219-9C26-3E28-8C0B65690425}"/>
+              </a:ext>
+            </a:extLst>
+          </p:cNvPr>
+          <p:cNvSpPr>
+            <a:spLocks noGrp="1"/>
+          </p:cNvSpPr>
+          <p:nvPr>
+            <p:ph type="dt" sz="half" idx="10"/>
+          </p:nvPr>
+        </p:nvSpPr>
+        <p:spPr/>
+        <p:txBody>
+          <a:bodyPr/>
+          <a:lstStyle/>
+          <a:p>
+            <a:fld id="{6F80DDAC-FE11-49DC-9261-11C1E994665B}" type="datetimeFigureOut">
+              <a:rPr lang="en-GB" smtClean="0"/>
+              <a:pPr/>
+              <a:t>29/07/2026</a:t>
+            </a:fld>
+            <a:endParaRPr lang="en-GB"/>
+          </a:p>
+        </p:txBody>
+      </p:sp>
+      <p:sp>
+        <p:nvSpPr>
+          <p:cNvPr id="8" name="Footer Placeholder 7">
+            <a:extLst>
+              <a:ext uri="{FF2B5EF4-FFF2-40B4-BE49-F238E27FC236}">
+                <a16:creationId xmlns:a16="http://schemas.microsoft.com/office/drawing/2014/main" id="{189BDAF1-D1A8-865D-87DB-C8FADFFA2EC4}"/>
+              </a:ext>
+            </a:extLst>
+          </p:cNvPr>
+          <p:cNvSpPr>
+            <a:spLocks noGrp="1"/>
+          </p:cNvSpPr>
+          <p:nvPr>
+            <p:ph type="ftr" sz="quarter" idx="11"/>
+          </p:nvPr>
+        </p:nvSpPr>
+        <p:spPr/>
+        <p:txBody>
+          <a:bodyPr/>
+          <a:lstStyle/>
+          <a:p>
+            <a:endParaRPr lang="en-US"/>
+          </a:p>
+        </p:txBody>
+      </p:sp>
+      <p:sp>
+        <p:nvSpPr>
+          <p:cNvPr id="9" name="Slide Number Placeholder 8">
+            <a:extLst>
+              <a:ext uri="{FF2B5EF4-FFF2-40B4-BE49-F238E27FC236}">
+                <a16:creationId xmlns:a16="http://schemas.microsoft.com/office/drawing/2014/main" id="{FD12CC93-F984-AE23-A772-6DF65E0A139A}"/>
+              </a:ext>
+            </a:extLst>
+          </p:cNvPr>
+          <p:cNvSpPr>
+            <a:spLocks noGrp="1"/>
+          </p:cNvSpPr>
+          <p:nvPr>
+            <p:ph type="sldNum" sz="quarter" idx="12"/>
+          </p:nvPr>
+        </p:nvSpPr>
+        <p:spPr/>
+        <p:txBody>
+          <a:bodyPr/>
+          <a:lstStyle/>
+          <a:p>
+            <a:fld id="{3A73CC0E-67D5-43FD-BD59-BE5F44570CB2}" type="slidenum">
+              <a:rPr lang="en-GB" smtClean="0"/>
+              <a:pPr/>
+              <a:t>‹#›</a:t>
+            </a:fld>
+            <a:endParaRPr lang="en-GB"/>
+          </a:p>
+        </p:txBody>
+      </p:sp>
+    </p:spTree>
+    <p:extLst>
+      <p:ext uri="{BB962C8B-B14F-4D97-AF65-F5344CB8AC3E}">
+        <p14:creationId xmlns:p14="http://schemas.microsoft.com/office/powerpoint/2010/main" val="2821268332"/>
+      </p:ext>
+    </p:extLst>
+  </p:cSld>
+  <p:clrMapOvr>
+    <a:masterClrMapping/>
+  </p:clrMapOvr>
+</p:sldLayout>
+</file>
+
+<file path=ppt/slideLayouts/slideLayout18.xml><?xml version="1.0" encoding="utf-8"?>
+<p:sldLayout xmlns:a="http://schemas.openxmlformats.org/drawingml/2006/main" xmlns:r="http://schemas.openxmlformats.org/officeDocument/2006/relationships" xmlns:p="http://schemas.openxmlformats.org/presentationml/2006/main" type="titleOnly" preserve="1">
+  <p:cSld name="Title Only">
+    <p:spTree>
+      <p:nvGrpSpPr>
+        <p:cNvPr id="1" name=""/>
+        <p:cNvGrpSpPr/>
+        <p:nvPr/>
+      </p:nvGrpSpPr>
+      <p:grpSpPr>
+        <a:xfrm>
+          <a:off x="0" y="0"/>
+          <a:ext cx="0" cy="0"/>
+          <a:chOff x="0" y="0"/>
+          <a:chExt cx="0" cy="0"/>
+        </a:xfrm>
+      </p:grpSpPr>
+      <p:sp>
+        <p:nvSpPr>
+          <p:cNvPr id="2" name="Title 1">
+            <a:extLst>
+              <a:ext uri="{FF2B5EF4-FFF2-40B4-BE49-F238E27FC236}">
+                <a16:creationId xmlns:a16="http://schemas.microsoft.com/office/drawing/2014/main" id="{5B053813-8CBC-6EC2-6472-451315FB3E41}"/>
+              </a:ext>
+            </a:extLst>
+          </p:cNvPr>
+          <p:cNvSpPr>
+            <a:spLocks noGrp="1"/>
+          </p:cNvSpPr>
+          <p:nvPr>
+            <p:ph type="title"/>
+          </p:nvPr>
+        </p:nvSpPr>
+        <p:spPr/>
+        <p:txBody>
+          <a:bodyPr/>
+          <a:lstStyle/>
+          <a:p>
+            <a:r>
+              <a:rPr lang="en-US"/>
+              <a:t>Click to edit Master title style</a:t>
+            </a:r>
+          </a:p>
+        </p:txBody>
+      </p:sp>
+      <p:sp>
+        <p:nvSpPr>
+          <p:cNvPr id="3" name="Date Placeholder 2">
+            <a:extLst>
+              <a:ext uri="{FF2B5EF4-FFF2-40B4-BE49-F238E27FC236}">
+                <a16:creationId xmlns:a16="http://schemas.microsoft.com/office/drawing/2014/main" id="{72AF1B0D-A722-7B98-5246-E687C04851EB}"/>
+              </a:ext>
+            </a:extLst>
+          </p:cNvPr>
+          <p:cNvSpPr>
+            <a:spLocks noGrp="1"/>
+          </p:cNvSpPr>
+          <p:nvPr>
+            <p:ph type="dt" sz="half" idx="10"/>
+          </p:nvPr>
+        </p:nvSpPr>
+        <p:spPr/>
+        <p:txBody>
+          <a:bodyPr/>
+          <a:lstStyle/>
+          <a:p>
+            <a:fld id="{6F80DDAC-FE11-49DC-9261-11C1E994665B}" type="datetimeFigureOut">
+              <a:rPr lang="en-GB" smtClean="0"/>
+              <a:pPr/>
+              <a:t>29/07/2026</a:t>
+            </a:fld>
+            <a:endParaRPr lang="en-GB"/>
+          </a:p>
+        </p:txBody>
+      </p:sp>
+      <p:sp>
+        <p:nvSpPr>
+          <p:cNvPr id="4" name="Footer Placeholder 3">
+            <a:extLst>
+              <a:ext uri="{FF2B5EF4-FFF2-40B4-BE49-F238E27FC236}">
+                <a16:creationId xmlns:a16="http://schemas.microsoft.com/office/drawing/2014/main" id="{1369F1F6-743A-5F5A-56CE-5E37FF4D6D81}"/>
+              </a:ext>
+            </a:extLst>
+          </p:cNvPr>
+          <p:cNvSpPr>
+            <a:spLocks noGrp="1"/>
+          </p:cNvSpPr>
+          <p:nvPr>
+            <p:ph type="ftr" sz="quarter" idx="11"/>
+          </p:nvPr>
+        </p:nvSpPr>
+        <p:spPr/>
+        <p:txBody>
+          <a:bodyPr/>
+          <a:lstStyle/>
+          <a:p>
+            <a:endParaRPr lang="en-US"/>
+          </a:p>
+        </p:txBody>
+      </p:sp>
+      <p:sp>
+        <p:nvSpPr>
+          <p:cNvPr id="5" name="Slide Number Placeholder 4">
+            <a:extLst>
+              <a:ext uri="{FF2B5EF4-FFF2-40B4-BE49-F238E27FC236}">
+                <a16:creationId xmlns:a16="http://schemas.microsoft.com/office/drawing/2014/main" id="{2F33372C-6CE0-94BA-CEAA-6E70AC14E331}"/>
+              </a:ext>
+            </a:extLst>
+          </p:cNvPr>
+          <p:cNvSpPr>
+            <a:spLocks noGrp="1"/>
+          </p:cNvSpPr>
+          <p:nvPr>
+            <p:ph type="sldNum" sz="quarter" idx="12"/>
+          </p:nvPr>
+        </p:nvSpPr>
+        <p:spPr/>
+        <p:txBody>
+          <a:bodyPr/>
+          <a:lstStyle/>
+          <a:p>
+            <a:fld id="{3A73CC0E-67D5-43FD-BD59-BE5F44570CB2}" type="slidenum">
+              <a:rPr lang="en-GB" smtClean="0"/>
+              <a:pPr/>
+              <a:t>‹#›</a:t>
+            </a:fld>
+            <a:endParaRPr lang="en-GB"/>
+          </a:p>
+        </p:txBody>
+      </p:sp>
+    </p:spTree>
+    <p:extLst>
+      <p:ext uri="{BB962C8B-B14F-4D97-AF65-F5344CB8AC3E}">
+        <p14:creationId xmlns:p14="http://schemas.microsoft.com/office/powerpoint/2010/main" val="4154055688"/>
+      </p:ext>
+    </p:extLst>
+  </p:cSld>
+  <p:clrMapOvr>
+    <a:masterClrMapping/>
+  </p:clrMapOvr>
+</p:sldLayout>
+</file>
+
+<file path=ppt/slideLayouts/slideLayout19.xml><?xml version="1.0" encoding="utf-8"?>
+<p:sldLayout xmlns:a="http://schemas.openxmlformats.org/drawingml/2006/main" xmlns:r="http://schemas.openxmlformats.org/officeDocument/2006/relationships" xmlns:p="http://schemas.openxmlformats.org/presentationml/2006/main" type="blank" preserve="1">
+  <p:cSld name="Blank">
+    <p:spTree>
+      <p:nvGrpSpPr>
+        <p:cNvPr id="1" name=""/>
+        <p:cNvGrpSpPr/>
+        <p:nvPr/>
+      </p:nvGrpSpPr>
+      <p:grpSpPr>
+        <a:xfrm>
+          <a:off x="0" y="0"/>
+          <a:ext cx="0" cy="0"/>
+          <a:chOff x="0" y="0"/>
+          <a:chExt cx="0" cy="0"/>
+        </a:xfrm>
+      </p:grpSpPr>
+      <p:sp>
+        <p:nvSpPr>
+          <p:cNvPr id="2" name="Date Placeholder 1">
+            <a:extLst>
+              <a:ext uri="{FF2B5EF4-FFF2-40B4-BE49-F238E27FC236}">
+                <a16:creationId xmlns:a16="http://schemas.microsoft.com/office/drawing/2014/main" id="{19E1A100-3ECD-0F08-8FAB-72763E00D570}"/>
+              </a:ext>
+            </a:extLst>
+          </p:cNvPr>
+          <p:cNvSpPr>
+            <a:spLocks noGrp="1"/>
+          </p:cNvSpPr>
+          <p:nvPr>
+            <p:ph type="dt" sz="half" idx="10"/>
+          </p:nvPr>
+        </p:nvSpPr>
+        <p:spPr/>
+        <p:txBody>
+          <a:bodyPr/>
+          <a:lstStyle/>
+          <a:p>
+            <a:fld id="{6F80DDAC-FE11-49DC-9261-11C1E994665B}" type="datetimeFigureOut">
+              <a:rPr lang="en-GB" smtClean="0"/>
+              <a:pPr/>
+              <a:t>29/07/2026</a:t>
+            </a:fld>
+            <a:endParaRPr lang="en-GB"/>
+          </a:p>
+        </p:txBody>
+      </p:sp>
+      <p:sp>
+        <p:nvSpPr>
+          <p:cNvPr id="3" name="Footer Placeholder 2">
+            <a:extLst>
+              <a:ext uri="{FF2B5EF4-FFF2-40B4-BE49-F238E27FC236}">
+                <a16:creationId xmlns:a16="http://schemas.microsoft.com/office/drawing/2014/main" id="{A702BD16-0ED5-38A3-DB97-54E7D2D628E9}"/>
+              </a:ext>
+            </a:extLst>
+          </p:cNvPr>
+          <p:cNvSpPr>
+            <a:spLocks noGrp="1"/>
+          </p:cNvSpPr>
+          <p:nvPr>
+            <p:ph type="ftr" sz="quarter" idx="11"/>
+          </p:nvPr>
+        </p:nvSpPr>
+        <p:spPr/>
+        <p:txBody>
+          <a:bodyPr/>
+          <a:lstStyle/>
+          <a:p>
+            <a:endParaRPr lang="en-US"/>
+          </a:p>
+        </p:txBody>
+      </p:sp>
+      <p:sp>
+        <p:nvSpPr>
+          <p:cNvPr id="4" name="Slide Number Placeholder 3">
+            <a:extLst>
+              <a:ext uri="{FF2B5EF4-FFF2-40B4-BE49-F238E27FC236}">
+                <a16:creationId xmlns:a16="http://schemas.microsoft.com/office/drawing/2014/main" id="{4629CEB7-379E-AD7A-5F8F-72D05B8089FF}"/>
+              </a:ext>
+            </a:extLst>
+          </p:cNvPr>
+          <p:cNvSpPr>
+            <a:spLocks noGrp="1"/>
+          </p:cNvSpPr>
+          <p:nvPr>
+            <p:ph type="sldNum" sz="quarter" idx="12"/>
+          </p:nvPr>
+        </p:nvSpPr>
+        <p:spPr/>
+        <p:txBody>
+          <a:bodyPr/>
+          <a:lstStyle/>
+          <a:p>
+            <a:fld id="{3A73CC0E-67D5-43FD-BD59-BE5F44570CB2}" type="slidenum">
+              <a:rPr lang="en-GB" smtClean="0"/>
+              <a:pPr/>
+              <a:t>‹#›</a:t>
+            </a:fld>
+            <a:endParaRPr lang="en-GB"/>
+          </a:p>
+        </p:txBody>
+      </p:sp>
+    </p:spTree>
+    <p:extLst>
+      <p:ext uri="{BB962C8B-B14F-4D97-AF65-F5344CB8AC3E}">
+        <p14:creationId xmlns:p14="http://schemas.microsoft.com/office/powerpoint/2010/main" val="4056235112"/>
+      </p:ext>
+    </p:extLst>
+  </p:cSld>
+  <p:clrMapOvr>
+    <a:masterClrMapping/>
+  </p:clrMapOvr>
+</p:sldLayout>
+</file>
+
 <file path=ppt/slideLayouts/slideLayout2.xml><?xml version="1.0" encoding="utf-8"?>
 <p:sldLayout xmlns:a="http://schemas.openxmlformats.org/drawingml/2006/main" xmlns:r="http://schemas.openxmlformats.org/officeDocument/2006/relationships" xmlns:p="http://schemas.openxmlformats.org/presentationml/2006/main" preserve="1" userDrawn="1">
   <p:cSld name="Back Cover">
@@ -2071,6 +3704,1307 @@
     <a:masterClrMapping/>
   </p:clrMapOvr>
   <p:hf hdr="0" ftr="0" dt="0"/>
+</p:sldLayout>
+</file>
+
+<file path=ppt/slideLayouts/slideLayout20.xml><?xml version="1.0" encoding="utf-8"?>
+<p:sldLayout xmlns:a="http://schemas.openxmlformats.org/drawingml/2006/main" xmlns:r="http://schemas.openxmlformats.org/officeDocument/2006/relationships" xmlns:p="http://schemas.openxmlformats.org/presentationml/2006/main" type="objTx" preserve="1">
+  <p:cSld name="Content with Caption">
+    <p:spTree>
+      <p:nvGrpSpPr>
+        <p:cNvPr id="1" name=""/>
+        <p:cNvGrpSpPr/>
+        <p:nvPr/>
+      </p:nvGrpSpPr>
+      <p:grpSpPr>
+        <a:xfrm>
+          <a:off x="0" y="0"/>
+          <a:ext cx="0" cy="0"/>
+          <a:chOff x="0" y="0"/>
+          <a:chExt cx="0" cy="0"/>
+        </a:xfrm>
+      </p:grpSpPr>
+      <p:sp>
+        <p:nvSpPr>
+          <p:cNvPr id="2" name="Title 1">
+            <a:extLst>
+              <a:ext uri="{FF2B5EF4-FFF2-40B4-BE49-F238E27FC236}">
+                <a16:creationId xmlns:a16="http://schemas.microsoft.com/office/drawing/2014/main" id="{4A7F6907-CF1C-35E1-F97E-1C5D6F257E40}"/>
+              </a:ext>
+            </a:extLst>
+          </p:cNvPr>
+          <p:cNvSpPr>
+            <a:spLocks noGrp="1"/>
+          </p:cNvSpPr>
+          <p:nvPr>
+            <p:ph type="title"/>
+          </p:nvPr>
+        </p:nvSpPr>
+        <p:spPr>
+          <a:xfrm>
+            <a:off x="682328" y="457200"/>
+            <a:ext cx="3194943" cy="1600200"/>
+          </a:xfrm>
+        </p:spPr>
+        <p:txBody>
+          <a:bodyPr anchor="b"/>
+          <a:lstStyle>
+            <a:lvl1pPr>
+              <a:defRPr sz="2600"/>
+            </a:lvl1pPr>
+          </a:lstStyle>
+          <a:p>
+            <a:r>
+              <a:rPr lang="en-US"/>
+              <a:t>Click to edit Master title style</a:t>
+            </a:r>
+          </a:p>
+        </p:txBody>
+      </p:sp>
+      <p:sp>
+        <p:nvSpPr>
+          <p:cNvPr id="3" name="Content Placeholder 2">
+            <a:extLst>
+              <a:ext uri="{FF2B5EF4-FFF2-40B4-BE49-F238E27FC236}">
+                <a16:creationId xmlns:a16="http://schemas.microsoft.com/office/drawing/2014/main" id="{B556CC27-EBD3-4B45-2A3F-4B0A79F6479C}"/>
+              </a:ext>
+            </a:extLst>
+          </p:cNvPr>
+          <p:cNvSpPr>
+            <a:spLocks noGrp="1"/>
+          </p:cNvSpPr>
+          <p:nvPr>
+            <p:ph idx="1"/>
+          </p:nvPr>
+        </p:nvSpPr>
+        <p:spPr>
+          <a:xfrm>
+            <a:off x="4211340" y="987426"/>
+            <a:ext cx="5014913" cy="4873625"/>
+          </a:xfrm>
+        </p:spPr>
+        <p:txBody>
+          <a:bodyPr/>
+          <a:lstStyle>
+            <a:lvl1pPr>
+              <a:defRPr sz="2600"/>
+            </a:lvl1pPr>
+            <a:lvl2pPr>
+              <a:defRPr sz="2275"/>
+            </a:lvl2pPr>
+            <a:lvl3pPr>
+              <a:defRPr sz="1950"/>
+            </a:lvl3pPr>
+            <a:lvl4pPr>
+              <a:defRPr sz="1625"/>
+            </a:lvl4pPr>
+            <a:lvl5pPr>
+              <a:defRPr sz="1625"/>
+            </a:lvl5pPr>
+            <a:lvl6pPr>
+              <a:defRPr sz="1625"/>
+            </a:lvl6pPr>
+            <a:lvl7pPr>
+              <a:defRPr sz="1625"/>
+            </a:lvl7pPr>
+            <a:lvl8pPr>
+              <a:defRPr sz="1625"/>
+            </a:lvl8pPr>
+            <a:lvl9pPr>
+              <a:defRPr sz="1625"/>
+            </a:lvl9pPr>
+          </a:lstStyle>
+          <a:p>
+            <a:pPr lvl="0"/>
+            <a:r>
+              <a:rPr lang="en-US"/>
+              <a:t>Click to edit Master text styles</a:t>
+            </a:r>
+          </a:p>
+          <a:p>
+            <a:pPr lvl="1"/>
+            <a:r>
+              <a:rPr lang="en-US"/>
+              <a:t>Second level</a:t>
+            </a:r>
+          </a:p>
+          <a:p>
+            <a:pPr lvl="2"/>
+            <a:r>
+              <a:rPr lang="en-US"/>
+              <a:t>Third level</a:t>
+            </a:r>
+          </a:p>
+          <a:p>
+            <a:pPr lvl="3"/>
+            <a:r>
+              <a:rPr lang="en-US"/>
+              <a:t>Fourth level</a:t>
+            </a:r>
+          </a:p>
+          <a:p>
+            <a:pPr lvl="4"/>
+            <a:r>
+              <a:rPr lang="en-US"/>
+              <a:t>Fifth level</a:t>
+            </a:r>
+          </a:p>
+        </p:txBody>
+      </p:sp>
+      <p:sp>
+        <p:nvSpPr>
+          <p:cNvPr id="4" name="Text Placeholder 3">
+            <a:extLst>
+              <a:ext uri="{FF2B5EF4-FFF2-40B4-BE49-F238E27FC236}">
+                <a16:creationId xmlns:a16="http://schemas.microsoft.com/office/drawing/2014/main" id="{7E3E76F3-BCF6-D2FE-2681-301A92CFAB58}"/>
+              </a:ext>
+            </a:extLst>
+          </p:cNvPr>
+          <p:cNvSpPr>
+            <a:spLocks noGrp="1"/>
+          </p:cNvSpPr>
+          <p:nvPr>
+            <p:ph type="body" sz="half" idx="2"/>
+          </p:nvPr>
+        </p:nvSpPr>
+        <p:spPr>
+          <a:xfrm>
+            <a:off x="682328" y="2057400"/>
+            <a:ext cx="3194943" cy="3811588"/>
+          </a:xfrm>
+        </p:spPr>
+        <p:txBody>
+          <a:bodyPr/>
+          <a:lstStyle>
+            <a:lvl1pPr marL="0" indent="0">
+              <a:buNone/>
+              <a:defRPr sz="1300"/>
+            </a:lvl1pPr>
+            <a:lvl2pPr marL="371475" indent="0">
+              <a:buNone/>
+              <a:defRPr sz="1138"/>
+            </a:lvl2pPr>
+            <a:lvl3pPr marL="742950" indent="0">
+              <a:buNone/>
+              <a:defRPr sz="975"/>
+            </a:lvl3pPr>
+            <a:lvl4pPr marL="1114425" indent="0">
+              <a:buNone/>
+              <a:defRPr sz="813"/>
+            </a:lvl4pPr>
+            <a:lvl5pPr marL="1485900" indent="0">
+              <a:buNone/>
+              <a:defRPr sz="813"/>
+            </a:lvl5pPr>
+            <a:lvl6pPr marL="1857375" indent="0">
+              <a:buNone/>
+              <a:defRPr sz="813"/>
+            </a:lvl6pPr>
+            <a:lvl7pPr marL="2228850" indent="0">
+              <a:buNone/>
+              <a:defRPr sz="813"/>
+            </a:lvl7pPr>
+            <a:lvl8pPr marL="2600325" indent="0">
+              <a:buNone/>
+              <a:defRPr sz="813"/>
+            </a:lvl8pPr>
+            <a:lvl9pPr marL="2971800" indent="0">
+              <a:buNone/>
+              <a:defRPr sz="813"/>
+            </a:lvl9pPr>
+          </a:lstStyle>
+          <a:p>
+            <a:pPr lvl="0"/>
+            <a:r>
+              <a:rPr lang="en-US"/>
+              <a:t>Click to edit Master text styles</a:t>
+            </a:r>
+          </a:p>
+        </p:txBody>
+      </p:sp>
+      <p:sp>
+        <p:nvSpPr>
+          <p:cNvPr id="5" name="Date Placeholder 4">
+            <a:extLst>
+              <a:ext uri="{FF2B5EF4-FFF2-40B4-BE49-F238E27FC236}">
+                <a16:creationId xmlns:a16="http://schemas.microsoft.com/office/drawing/2014/main" id="{F9B94648-A232-E19E-7F27-DF25D939E498}"/>
+              </a:ext>
+            </a:extLst>
+          </p:cNvPr>
+          <p:cNvSpPr>
+            <a:spLocks noGrp="1"/>
+          </p:cNvSpPr>
+          <p:nvPr>
+            <p:ph type="dt" sz="half" idx="10"/>
+          </p:nvPr>
+        </p:nvSpPr>
+        <p:spPr/>
+        <p:txBody>
+          <a:bodyPr/>
+          <a:lstStyle/>
+          <a:p>
+            <a:fld id="{6F80DDAC-FE11-49DC-9261-11C1E994665B}" type="datetimeFigureOut">
+              <a:rPr lang="en-GB" smtClean="0"/>
+              <a:pPr/>
+              <a:t>29/07/2026</a:t>
+            </a:fld>
+            <a:endParaRPr lang="en-GB"/>
+          </a:p>
+        </p:txBody>
+      </p:sp>
+      <p:sp>
+        <p:nvSpPr>
+          <p:cNvPr id="6" name="Footer Placeholder 5">
+            <a:extLst>
+              <a:ext uri="{FF2B5EF4-FFF2-40B4-BE49-F238E27FC236}">
+                <a16:creationId xmlns:a16="http://schemas.microsoft.com/office/drawing/2014/main" id="{DC7139CB-4739-DC6B-B8D1-5EB4874B75FF}"/>
+              </a:ext>
+            </a:extLst>
+          </p:cNvPr>
+          <p:cNvSpPr>
+            <a:spLocks noGrp="1"/>
+          </p:cNvSpPr>
+          <p:nvPr>
+            <p:ph type="ftr" sz="quarter" idx="11"/>
+          </p:nvPr>
+        </p:nvSpPr>
+        <p:spPr/>
+        <p:txBody>
+          <a:bodyPr/>
+          <a:lstStyle/>
+          <a:p>
+            <a:endParaRPr lang="en-US"/>
+          </a:p>
+        </p:txBody>
+      </p:sp>
+      <p:sp>
+        <p:nvSpPr>
+          <p:cNvPr id="7" name="Slide Number Placeholder 6">
+            <a:extLst>
+              <a:ext uri="{FF2B5EF4-FFF2-40B4-BE49-F238E27FC236}">
+                <a16:creationId xmlns:a16="http://schemas.microsoft.com/office/drawing/2014/main" id="{7FDC1281-25F7-F770-6D28-94F37807E1F9}"/>
+              </a:ext>
+            </a:extLst>
+          </p:cNvPr>
+          <p:cNvSpPr>
+            <a:spLocks noGrp="1"/>
+          </p:cNvSpPr>
+          <p:nvPr>
+            <p:ph type="sldNum" sz="quarter" idx="12"/>
+          </p:nvPr>
+        </p:nvSpPr>
+        <p:spPr/>
+        <p:txBody>
+          <a:bodyPr/>
+          <a:lstStyle/>
+          <a:p>
+            <a:fld id="{3A73CC0E-67D5-43FD-BD59-BE5F44570CB2}" type="slidenum">
+              <a:rPr lang="en-GB" smtClean="0"/>
+              <a:pPr/>
+              <a:t>‹#›</a:t>
+            </a:fld>
+            <a:endParaRPr lang="en-GB"/>
+          </a:p>
+        </p:txBody>
+      </p:sp>
+    </p:spTree>
+    <p:extLst>
+      <p:ext uri="{BB962C8B-B14F-4D97-AF65-F5344CB8AC3E}">
+        <p14:creationId xmlns:p14="http://schemas.microsoft.com/office/powerpoint/2010/main" val="4135746447"/>
+      </p:ext>
+    </p:extLst>
+  </p:cSld>
+  <p:clrMapOvr>
+    <a:masterClrMapping/>
+  </p:clrMapOvr>
+</p:sldLayout>
+</file>
+
+<file path=ppt/slideLayouts/slideLayout21.xml><?xml version="1.0" encoding="utf-8"?>
+<p:sldLayout xmlns:a="http://schemas.openxmlformats.org/drawingml/2006/main" xmlns:r="http://schemas.openxmlformats.org/officeDocument/2006/relationships" xmlns:p="http://schemas.openxmlformats.org/presentationml/2006/main" type="picTx" preserve="1">
+  <p:cSld name="Picture with Caption">
+    <p:spTree>
+      <p:nvGrpSpPr>
+        <p:cNvPr id="1" name=""/>
+        <p:cNvGrpSpPr/>
+        <p:nvPr/>
+      </p:nvGrpSpPr>
+      <p:grpSpPr>
+        <a:xfrm>
+          <a:off x="0" y="0"/>
+          <a:ext cx="0" cy="0"/>
+          <a:chOff x="0" y="0"/>
+          <a:chExt cx="0" cy="0"/>
+        </a:xfrm>
+      </p:grpSpPr>
+      <p:sp>
+        <p:nvSpPr>
+          <p:cNvPr id="2" name="Title 1">
+            <a:extLst>
+              <a:ext uri="{FF2B5EF4-FFF2-40B4-BE49-F238E27FC236}">
+                <a16:creationId xmlns:a16="http://schemas.microsoft.com/office/drawing/2014/main" id="{68FCF7B5-78C0-68DA-D0CA-E721D6A1895D}"/>
+              </a:ext>
+            </a:extLst>
+          </p:cNvPr>
+          <p:cNvSpPr>
+            <a:spLocks noGrp="1"/>
+          </p:cNvSpPr>
+          <p:nvPr>
+            <p:ph type="title"/>
+          </p:nvPr>
+        </p:nvSpPr>
+        <p:spPr>
+          <a:xfrm>
+            <a:off x="682328" y="457200"/>
+            <a:ext cx="3194943" cy="1600200"/>
+          </a:xfrm>
+        </p:spPr>
+        <p:txBody>
+          <a:bodyPr anchor="b"/>
+          <a:lstStyle>
+            <a:lvl1pPr>
+              <a:defRPr sz="2600"/>
+            </a:lvl1pPr>
+          </a:lstStyle>
+          <a:p>
+            <a:r>
+              <a:rPr lang="en-US"/>
+              <a:t>Click to edit Master title style</a:t>
+            </a:r>
+          </a:p>
+        </p:txBody>
+      </p:sp>
+      <p:sp>
+        <p:nvSpPr>
+          <p:cNvPr id="3" name="Picture Placeholder 2">
+            <a:extLst>
+              <a:ext uri="{FF2B5EF4-FFF2-40B4-BE49-F238E27FC236}">
+                <a16:creationId xmlns:a16="http://schemas.microsoft.com/office/drawing/2014/main" id="{ED58C724-76CE-199C-2F48-12B35E1808C7}"/>
+              </a:ext>
+            </a:extLst>
+          </p:cNvPr>
+          <p:cNvSpPr>
+            <a:spLocks noGrp="1"/>
+          </p:cNvSpPr>
+          <p:nvPr>
+            <p:ph type="pic" idx="1"/>
+          </p:nvPr>
+        </p:nvSpPr>
+        <p:spPr>
+          <a:xfrm>
+            <a:off x="4211340" y="987426"/>
+            <a:ext cx="5014913" cy="4873625"/>
+          </a:xfrm>
+        </p:spPr>
+        <p:txBody>
+          <a:bodyPr/>
+          <a:lstStyle>
+            <a:lvl1pPr marL="0" indent="0">
+              <a:buNone/>
+              <a:defRPr sz="2600"/>
+            </a:lvl1pPr>
+            <a:lvl2pPr marL="371475" indent="0">
+              <a:buNone/>
+              <a:defRPr sz="2275"/>
+            </a:lvl2pPr>
+            <a:lvl3pPr marL="742950" indent="0">
+              <a:buNone/>
+              <a:defRPr sz="1950"/>
+            </a:lvl3pPr>
+            <a:lvl4pPr marL="1114425" indent="0">
+              <a:buNone/>
+              <a:defRPr sz="1625"/>
+            </a:lvl4pPr>
+            <a:lvl5pPr marL="1485900" indent="0">
+              <a:buNone/>
+              <a:defRPr sz="1625"/>
+            </a:lvl5pPr>
+            <a:lvl6pPr marL="1857375" indent="0">
+              <a:buNone/>
+              <a:defRPr sz="1625"/>
+            </a:lvl6pPr>
+            <a:lvl7pPr marL="2228850" indent="0">
+              <a:buNone/>
+              <a:defRPr sz="1625"/>
+            </a:lvl7pPr>
+            <a:lvl8pPr marL="2600325" indent="0">
+              <a:buNone/>
+              <a:defRPr sz="1625"/>
+            </a:lvl8pPr>
+            <a:lvl9pPr marL="2971800" indent="0">
+              <a:buNone/>
+              <a:defRPr sz="1625"/>
+            </a:lvl9pPr>
+          </a:lstStyle>
+          <a:p>
+            <a:endParaRPr lang="en-US"/>
+          </a:p>
+        </p:txBody>
+      </p:sp>
+      <p:sp>
+        <p:nvSpPr>
+          <p:cNvPr id="4" name="Text Placeholder 3">
+            <a:extLst>
+              <a:ext uri="{FF2B5EF4-FFF2-40B4-BE49-F238E27FC236}">
+                <a16:creationId xmlns:a16="http://schemas.microsoft.com/office/drawing/2014/main" id="{0EBC6708-4A56-2AD6-1973-17D4E4BBB660}"/>
+              </a:ext>
+            </a:extLst>
+          </p:cNvPr>
+          <p:cNvSpPr>
+            <a:spLocks noGrp="1"/>
+          </p:cNvSpPr>
+          <p:nvPr>
+            <p:ph type="body" sz="half" idx="2"/>
+          </p:nvPr>
+        </p:nvSpPr>
+        <p:spPr>
+          <a:xfrm>
+            <a:off x="682328" y="2057400"/>
+            <a:ext cx="3194943" cy="3811588"/>
+          </a:xfrm>
+        </p:spPr>
+        <p:txBody>
+          <a:bodyPr/>
+          <a:lstStyle>
+            <a:lvl1pPr marL="0" indent="0">
+              <a:buNone/>
+              <a:defRPr sz="1300"/>
+            </a:lvl1pPr>
+            <a:lvl2pPr marL="371475" indent="0">
+              <a:buNone/>
+              <a:defRPr sz="1138"/>
+            </a:lvl2pPr>
+            <a:lvl3pPr marL="742950" indent="0">
+              <a:buNone/>
+              <a:defRPr sz="975"/>
+            </a:lvl3pPr>
+            <a:lvl4pPr marL="1114425" indent="0">
+              <a:buNone/>
+              <a:defRPr sz="813"/>
+            </a:lvl4pPr>
+            <a:lvl5pPr marL="1485900" indent="0">
+              <a:buNone/>
+              <a:defRPr sz="813"/>
+            </a:lvl5pPr>
+            <a:lvl6pPr marL="1857375" indent="0">
+              <a:buNone/>
+              <a:defRPr sz="813"/>
+            </a:lvl6pPr>
+            <a:lvl7pPr marL="2228850" indent="0">
+              <a:buNone/>
+              <a:defRPr sz="813"/>
+            </a:lvl7pPr>
+            <a:lvl8pPr marL="2600325" indent="0">
+              <a:buNone/>
+              <a:defRPr sz="813"/>
+            </a:lvl8pPr>
+            <a:lvl9pPr marL="2971800" indent="0">
+              <a:buNone/>
+              <a:defRPr sz="813"/>
+            </a:lvl9pPr>
+          </a:lstStyle>
+          <a:p>
+            <a:pPr lvl="0"/>
+            <a:r>
+              <a:rPr lang="en-US"/>
+              <a:t>Click to edit Master text styles</a:t>
+            </a:r>
+          </a:p>
+        </p:txBody>
+      </p:sp>
+      <p:sp>
+        <p:nvSpPr>
+          <p:cNvPr id="5" name="Date Placeholder 4">
+            <a:extLst>
+              <a:ext uri="{FF2B5EF4-FFF2-40B4-BE49-F238E27FC236}">
+                <a16:creationId xmlns:a16="http://schemas.microsoft.com/office/drawing/2014/main" id="{E339DD7A-904D-9541-50D0-324097228DED}"/>
+              </a:ext>
+            </a:extLst>
+          </p:cNvPr>
+          <p:cNvSpPr>
+            <a:spLocks noGrp="1"/>
+          </p:cNvSpPr>
+          <p:nvPr>
+            <p:ph type="dt" sz="half" idx="10"/>
+          </p:nvPr>
+        </p:nvSpPr>
+        <p:spPr/>
+        <p:txBody>
+          <a:bodyPr/>
+          <a:lstStyle/>
+          <a:p>
+            <a:fld id="{6F80DDAC-FE11-49DC-9261-11C1E994665B}" type="datetimeFigureOut">
+              <a:rPr lang="en-GB" smtClean="0"/>
+              <a:pPr/>
+              <a:t>29/07/2026</a:t>
+            </a:fld>
+            <a:endParaRPr lang="en-GB"/>
+          </a:p>
+        </p:txBody>
+      </p:sp>
+      <p:sp>
+        <p:nvSpPr>
+          <p:cNvPr id="6" name="Footer Placeholder 5">
+            <a:extLst>
+              <a:ext uri="{FF2B5EF4-FFF2-40B4-BE49-F238E27FC236}">
+                <a16:creationId xmlns:a16="http://schemas.microsoft.com/office/drawing/2014/main" id="{AEC1D43E-D8EA-6631-57D2-27CC02B595F4}"/>
+              </a:ext>
+            </a:extLst>
+          </p:cNvPr>
+          <p:cNvSpPr>
+            <a:spLocks noGrp="1"/>
+          </p:cNvSpPr>
+          <p:nvPr>
+            <p:ph type="ftr" sz="quarter" idx="11"/>
+          </p:nvPr>
+        </p:nvSpPr>
+        <p:spPr/>
+        <p:txBody>
+          <a:bodyPr/>
+          <a:lstStyle/>
+          <a:p>
+            <a:endParaRPr lang="en-US"/>
+          </a:p>
+        </p:txBody>
+      </p:sp>
+      <p:sp>
+        <p:nvSpPr>
+          <p:cNvPr id="7" name="Slide Number Placeholder 6">
+            <a:extLst>
+              <a:ext uri="{FF2B5EF4-FFF2-40B4-BE49-F238E27FC236}">
+                <a16:creationId xmlns:a16="http://schemas.microsoft.com/office/drawing/2014/main" id="{EDDD0AAE-91E6-6A71-0994-F3398C7EE377}"/>
+              </a:ext>
+            </a:extLst>
+          </p:cNvPr>
+          <p:cNvSpPr>
+            <a:spLocks noGrp="1"/>
+          </p:cNvSpPr>
+          <p:nvPr>
+            <p:ph type="sldNum" sz="quarter" idx="12"/>
+          </p:nvPr>
+        </p:nvSpPr>
+        <p:spPr/>
+        <p:txBody>
+          <a:bodyPr/>
+          <a:lstStyle/>
+          <a:p>
+            <a:fld id="{3A73CC0E-67D5-43FD-BD59-BE5F44570CB2}" type="slidenum">
+              <a:rPr lang="en-GB" smtClean="0"/>
+              <a:pPr/>
+              <a:t>‹#›</a:t>
+            </a:fld>
+            <a:endParaRPr lang="en-GB"/>
+          </a:p>
+        </p:txBody>
+      </p:sp>
+    </p:spTree>
+    <p:extLst>
+      <p:ext uri="{BB962C8B-B14F-4D97-AF65-F5344CB8AC3E}">
+        <p14:creationId xmlns:p14="http://schemas.microsoft.com/office/powerpoint/2010/main" val="2863476953"/>
+      </p:ext>
+    </p:extLst>
+  </p:cSld>
+  <p:clrMapOvr>
+    <a:masterClrMapping/>
+  </p:clrMapOvr>
+</p:sldLayout>
+</file>
+
+<file path=ppt/slideLayouts/slideLayout22.xml><?xml version="1.0" encoding="utf-8"?>
+<p:sldLayout xmlns:a="http://schemas.openxmlformats.org/drawingml/2006/main" xmlns:r="http://schemas.openxmlformats.org/officeDocument/2006/relationships" xmlns:p="http://schemas.openxmlformats.org/presentationml/2006/main" type="vertTx" preserve="1">
+  <p:cSld name="Title and Vertical Text">
+    <p:spTree>
+      <p:nvGrpSpPr>
+        <p:cNvPr id="1" name=""/>
+        <p:cNvGrpSpPr/>
+        <p:nvPr/>
+      </p:nvGrpSpPr>
+      <p:grpSpPr>
+        <a:xfrm>
+          <a:off x="0" y="0"/>
+          <a:ext cx="0" cy="0"/>
+          <a:chOff x="0" y="0"/>
+          <a:chExt cx="0" cy="0"/>
+        </a:xfrm>
+      </p:grpSpPr>
+      <p:sp>
+        <p:nvSpPr>
+          <p:cNvPr id="2" name="Title 1">
+            <a:extLst>
+              <a:ext uri="{FF2B5EF4-FFF2-40B4-BE49-F238E27FC236}">
+                <a16:creationId xmlns:a16="http://schemas.microsoft.com/office/drawing/2014/main" id="{56F05169-F474-260D-B705-70A46DF4C53E}"/>
+              </a:ext>
+            </a:extLst>
+          </p:cNvPr>
+          <p:cNvSpPr>
+            <a:spLocks noGrp="1"/>
+          </p:cNvSpPr>
+          <p:nvPr>
+            <p:ph type="title"/>
+          </p:nvPr>
+        </p:nvSpPr>
+        <p:spPr/>
+        <p:txBody>
+          <a:bodyPr/>
+          <a:lstStyle/>
+          <a:p>
+            <a:r>
+              <a:rPr lang="en-US"/>
+              <a:t>Click to edit Master title style</a:t>
+            </a:r>
+          </a:p>
+        </p:txBody>
+      </p:sp>
+      <p:sp>
+        <p:nvSpPr>
+          <p:cNvPr id="3" name="Vertical Text Placeholder 2">
+            <a:extLst>
+              <a:ext uri="{FF2B5EF4-FFF2-40B4-BE49-F238E27FC236}">
+                <a16:creationId xmlns:a16="http://schemas.microsoft.com/office/drawing/2014/main" id="{1CDEF85A-B4ED-FA31-8264-4CE6C242B938}"/>
+              </a:ext>
+            </a:extLst>
+          </p:cNvPr>
+          <p:cNvSpPr>
+            <a:spLocks noGrp="1"/>
+          </p:cNvSpPr>
+          <p:nvPr>
+            <p:ph type="body" orient="vert" idx="1"/>
+          </p:nvPr>
+        </p:nvSpPr>
+        <p:spPr/>
+        <p:txBody>
+          <a:bodyPr vert="eaVert"/>
+          <a:lstStyle/>
+          <a:p>
+            <a:pPr lvl="0"/>
+            <a:r>
+              <a:rPr lang="en-US"/>
+              <a:t>Click to edit Master text styles</a:t>
+            </a:r>
+          </a:p>
+          <a:p>
+            <a:pPr lvl="1"/>
+            <a:r>
+              <a:rPr lang="en-US"/>
+              <a:t>Second level</a:t>
+            </a:r>
+          </a:p>
+          <a:p>
+            <a:pPr lvl="2"/>
+            <a:r>
+              <a:rPr lang="en-US"/>
+              <a:t>Third level</a:t>
+            </a:r>
+          </a:p>
+          <a:p>
+            <a:pPr lvl="3"/>
+            <a:r>
+              <a:rPr lang="en-US"/>
+              <a:t>Fourth level</a:t>
+            </a:r>
+          </a:p>
+          <a:p>
+            <a:pPr lvl="4"/>
+            <a:r>
+              <a:rPr lang="en-US"/>
+              <a:t>Fifth level</a:t>
+            </a:r>
+          </a:p>
+        </p:txBody>
+      </p:sp>
+      <p:sp>
+        <p:nvSpPr>
+          <p:cNvPr id="4" name="Date Placeholder 3">
+            <a:extLst>
+              <a:ext uri="{FF2B5EF4-FFF2-40B4-BE49-F238E27FC236}">
+                <a16:creationId xmlns:a16="http://schemas.microsoft.com/office/drawing/2014/main" id="{AAF0C1F1-B01A-7A14-5133-211694F27170}"/>
+              </a:ext>
+            </a:extLst>
+          </p:cNvPr>
+          <p:cNvSpPr>
+            <a:spLocks noGrp="1"/>
+          </p:cNvSpPr>
+          <p:nvPr>
+            <p:ph type="dt" sz="half" idx="10"/>
+          </p:nvPr>
+        </p:nvSpPr>
+        <p:spPr/>
+        <p:txBody>
+          <a:bodyPr/>
+          <a:lstStyle/>
+          <a:p>
+            <a:fld id="{6F80DDAC-FE11-49DC-9261-11C1E994665B}" type="datetimeFigureOut">
+              <a:rPr lang="en-GB" smtClean="0"/>
+              <a:pPr/>
+              <a:t>29/07/2026</a:t>
+            </a:fld>
+            <a:endParaRPr lang="en-GB"/>
+          </a:p>
+        </p:txBody>
+      </p:sp>
+      <p:sp>
+        <p:nvSpPr>
+          <p:cNvPr id="5" name="Footer Placeholder 4">
+            <a:extLst>
+              <a:ext uri="{FF2B5EF4-FFF2-40B4-BE49-F238E27FC236}">
+                <a16:creationId xmlns:a16="http://schemas.microsoft.com/office/drawing/2014/main" id="{C889AB10-2B24-46A7-518C-CD230CDCC37C}"/>
+              </a:ext>
+            </a:extLst>
+          </p:cNvPr>
+          <p:cNvSpPr>
+            <a:spLocks noGrp="1"/>
+          </p:cNvSpPr>
+          <p:nvPr>
+            <p:ph type="ftr" sz="quarter" idx="11"/>
+          </p:nvPr>
+        </p:nvSpPr>
+        <p:spPr/>
+        <p:txBody>
+          <a:bodyPr/>
+          <a:lstStyle/>
+          <a:p>
+            <a:endParaRPr lang="en-US"/>
+          </a:p>
+        </p:txBody>
+      </p:sp>
+      <p:sp>
+        <p:nvSpPr>
+          <p:cNvPr id="6" name="Slide Number Placeholder 5">
+            <a:extLst>
+              <a:ext uri="{FF2B5EF4-FFF2-40B4-BE49-F238E27FC236}">
+                <a16:creationId xmlns:a16="http://schemas.microsoft.com/office/drawing/2014/main" id="{050D1DBB-D9C9-9C89-2BC3-598094A06770}"/>
+              </a:ext>
+            </a:extLst>
+          </p:cNvPr>
+          <p:cNvSpPr>
+            <a:spLocks noGrp="1"/>
+          </p:cNvSpPr>
+          <p:nvPr>
+            <p:ph type="sldNum" sz="quarter" idx="12"/>
+          </p:nvPr>
+        </p:nvSpPr>
+        <p:spPr/>
+        <p:txBody>
+          <a:bodyPr/>
+          <a:lstStyle/>
+          <a:p>
+            <a:fld id="{3A73CC0E-67D5-43FD-BD59-BE5F44570CB2}" type="slidenum">
+              <a:rPr lang="en-GB" smtClean="0"/>
+              <a:pPr/>
+              <a:t>‹#›</a:t>
+            </a:fld>
+            <a:endParaRPr lang="en-GB"/>
+          </a:p>
+        </p:txBody>
+      </p:sp>
+    </p:spTree>
+    <p:extLst>
+      <p:ext uri="{BB962C8B-B14F-4D97-AF65-F5344CB8AC3E}">
+        <p14:creationId xmlns:p14="http://schemas.microsoft.com/office/powerpoint/2010/main" val="137758170"/>
+      </p:ext>
+    </p:extLst>
+  </p:cSld>
+  <p:clrMapOvr>
+    <a:masterClrMapping/>
+  </p:clrMapOvr>
+</p:sldLayout>
+</file>
+
+<file path=ppt/slideLayouts/slideLayout23.xml><?xml version="1.0" encoding="utf-8"?>
+<p:sldLayout xmlns:a="http://schemas.openxmlformats.org/drawingml/2006/main" xmlns:r="http://schemas.openxmlformats.org/officeDocument/2006/relationships" xmlns:p="http://schemas.openxmlformats.org/presentationml/2006/main" type="vertTitleAndTx" preserve="1">
+  <p:cSld name="Vertical Title and Text">
+    <p:spTree>
+      <p:nvGrpSpPr>
+        <p:cNvPr id="1" name=""/>
+        <p:cNvGrpSpPr/>
+        <p:nvPr/>
+      </p:nvGrpSpPr>
+      <p:grpSpPr>
+        <a:xfrm>
+          <a:off x="0" y="0"/>
+          <a:ext cx="0" cy="0"/>
+          <a:chOff x="0" y="0"/>
+          <a:chExt cx="0" cy="0"/>
+        </a:xfrm>
+      </p:grpSpPr>
+      <p:sp>
+        <p:nvSpPr>
+          <p:cNvPr id="2" name="Vertical Title 1">
+            <a:extLst>
+              <a:ext uri="{FF2B5EF4-FFF2-40B4-BE49-F238E27FC236}">
+                <a16:creationId xmlns:a16="http://schemas.microsoft.com/office/drawing/2014/main" id="{0379E52E-0060-6B07-F383-113847D2F715}"/>
+              </a:ext>
+            </a:extLst>
+          </p:cNvPr>
+          <p:cNvSpPr>
+            <a:spLocks noGrp="1"/>
+          </p:cNvSpPr>
+          <p:nvPr>
+            <p:ph type="title" orient="vert"/>
+          </p:nvPr>
+        </p:nvSpPr>
+        <p:spPr>
+          <a:xfrm>
+            <a:off x="7088981" y="365125"/>
+            <a:ext cx="2135981" cy="5811838"/>
+          </a:xfrm>
+        </p:spPr>
+        <p:txBody>
+          <a:bodyPr vert="eaVert"/>
+          <a:lstStyle/>
+          <a:p>
+            <a:r>
+              <a:rPr lang="en-US"/>
+              <a:t>Click to edit Master title style</a:t>
+            </a:r>
+          </a:p>
+        </p:txBody>
+      </p:sp>
+      <p:sp>
+        <p:nvSpPr>
+          <p:cNvPr id="3" name="Vertical Text Placeholder 2">
+            <a:extLst>
+              <a:ext uri="{FF2B5EF4-FFF2-40B4-BE49-F238E27FC236}">
+                <a16:creationId xmlns:a16="http://schemas.microsoft.com/office/drawing/2014/main" id="{6D929278-A0F1-64D3-5304-A0606E4AFA40}"/>
+              </a:ext>
+            </a:extLst>
+          </p:cNvPr>
+          <p:cNvSpPr>
+            <a:spLocks noGrp="1"/>
+          </p:cNvSpPr>
+          <p:nvPr>
+            <p:ph type="body" orient="vert" idx="1"/>
+          </p:nvPr>
+        </p:nvSpPr>
+        <p:spPr>
+          <a:xfrm>
+            <a:off x="681037" y="365125"/>
+            <a:ext cx="6284119" cy="5811838"/>
+          </a:xfrm>
+        </p:spPr>
+        <p:txBody>
+          <a:bodyPr vert="eaVert"/>
+          <a:lstStyle/>
+          <a:p>
+            <a:pPr lvl="0"/>
+            <a:r>
+              <a:rPr lang="en-US"/>
+              <a:t>Click to edit Master text styles</a:t>
+            </a:r>
+          </a:p>
+          <a:p>
+            <a:pPr lvl="1"/>
+            <a:r>
+              <a:rPr lang="en-US"/>
+              <a:t>Second level</a:t>
+            </a:r>
+          </a:p>
+          <a:p>
+            <a:pPr lvl="2"/>
+            <a:r>
+              <a:rPr lang="en-US"/>
+              <a:t>Third level</a:t>
+            </a:r>
+          </a:p>
+          <a:p>
+            <a:pPr lvl="3"/>
+            <a:r>
+              <a:rPr lang="en-US"/>
+              <a:t>Fourth level</a:t>
+            </a:r>
+          </a:p>
+          <a:p>
+            <a:pPr lvl="4"/>
+            <a:r>
+              <a:rPr lang="en-US"/>
+              <a:t>Fifth level</a:t>
+            </a:r>
+          </a:p>
+        </p:txBody>
+      </p:sp>
+      <p:sp>
+        <p:nvSpPr>
+          <p:cNvPr id="4" name="Date Placeholder 3">
+            <a:extLst>
+              <a:ext uri="{FF2B5EF4-FFF2-40B4-BE49-F238E27FC236}">
+                <a16:creationId xmlns:a16="http://schemas.microsoft.com/office/drawing/2014/main" id="{4BBCF91E-A3F1-0403-311B-0B302558CFD3}"/>
+              </a:ext>
+            </a:extLst>
+          </p:cNvPr>
+          <p:cNvSpPr>
+            <a:spLocks noGrp="1"/>
+          </p:cNvSpPr>
+          <p:nvPr>
+            <p:ph type="dt" sz="half" idx="10"/>
+          </p:nvPr>
+        </p:nvSpPr>
+        <p:spPr/>
+        <p:txBody>
+          <a:bodyPr/>
+          <a:lstStyle/>
+          <a:p>
+            <a:fld id="{6F80DDAC-FE11-49DC-9261-11C1E994665B}" type="datetimeFigureOut">
+              <a:rPr lang="en-GB" smtClean="0"/>
+              <a:pPr/>
+              <a:t>29/07/2026</a:t>
+            </a:fld>
+            <a:endParaRPr lang="en-GB"/>
+          </a:p>
+        </p:txBody>
+      </p:sp>
+      <p:sp>
+        <p:nvSpPr>
+          <p:cNvPr id="5" name="Footer Placeholder 4">
+            <a:extLst>
+              <a:ext uri="{FF2B5EF4-FFF2-40B4-BE49-F238E27FC236}">
+                <a16:creationId xmlns:a16="http://schemas.microsoft.com/office/drawing/2014/main" id="{8F7EDA70-C912-8325-0339-221ACF266C68}"/>
+              </a:ext>
+            </a:extLst>
+          </p:cNvPr>
+          <p:cNvSpPr>
+            <a:spLocks noGrp="1"/>
+          </p:cNvSpPr>
+          <p:nvPr>
+            <p:ph type="ftr" sz="quarter" idx="11"/>
+          </p:nvPr>
+        </p:nvSpPr>
+        <p:spPr/>
+        <p:txBody>
+          <a:bodyPr/>
+          <a:lstStyle/>
+          <a:p>
+            <a:endParaRPr lang="en-US"/>
+          </a:p>
+        </p:txBody>
+      </p:sp>
+      <p:sp>
+        <p:nvSpPr>
+          <p:cNvPr id="6" name="Slide Number Placeholder 5">
+            <a:extLst>
+              <a:ext uri="{FF2B5EF4-FFF2-40B4-BE49-F238E27FC236}">
+                <a16:creationId xmlns:a16="http://schemas.microsoft.com/office/drawing/2014/main" id="{09A3C9B7-156A-E408-499B-DB7FFED307D2}"/>
+              </a:ext>
+            </a:extLst>
+          </p:cNvPr>
+          <p:cNvSpPr>
+            <a:spLocks noGrp="1"/>
+          </p:cNvSpPr>
+          <p:nvPr>
+            <p:ph type="sldNum" sz="quarter" idx="12"/>
+          </p:nvPr>
+        </p:nvSpPr>
+        <p:spPr/>
+        <p:txBody>
+          <a:bodyPr/>
+          <a:lstStyle/>
+          <a:p>
+            <a:fld id="{3A73CC0E-67D5-43FD-BD59-BE5F44570CB2}" type="slidenum">
+              <a:rPr lang="en-GB" smtClean="0"/>
+              <a:pPr/>
+              <a:t>‹#›</a:t>
+            </a:fld>
+            <a:endParaRPr lang="en-GB"/>
+          </a:p>
+        </p:txBody>
+      </p:sp>
+    </p:spTree>
+    <p:extLst>
+      <p:ext uri="{BB962C8B-B14F-4D97-AF65-F5344CB8AC3E}">
+        <p14:creationId xmlns:p14="http://schemas.microsoft.com/office/powerpoint/2010/main" val="3530029153"/>
+      </p:ext>
+    </p:extLst>
+  </p:cSld>
+  <p:clrMapOvr>
+    <a:masterClrMapping/>
+  </p:clrMapOvr>
+</p:sldLayout>
+</file>
+
+<file path=ppt/slideLayouts/slideLayout24.xml><?xml version="1.0" encoding="utf-8"?>
+<p:sldLayout xmlns:a="http://schemas.openxmlformats.org/drawingml/2006/main" xmlns:r="http://schemas.openxmlformats.org/officeDocument/2006/relationships" xmlns:p="http://schemas.openxmlformats.org/presentationml/2006/main" userDrawn="1">
+  <p:cSld name="Contents &amp; Photo">
+    <p:spTree>
+      <p:nvGrpSpPr>
+        <p:cNvPr id="1" name=""/>
+        <p:cNvGrpSpPr/>
+        <p:nvPr/>
+      </p:nvGrpSpPr>
+      <p:grpSpPr>
+        <a:xfrm>
+          <a:off x="0" y="0"/>
+          <a:ext cx="0" cy="0"/>
+          <a:chOff x="0" y="0"/>
+          <a:chExt cx="0" cy="0"/>
+        </a:xfrm>
+      </p:grpSpPr>
+      <p:sp>
+        <p:nvSpPr>
+          <p:cNvPr id="13" name="Picture Placeholder 10"/>
+          <p:cNvSpPr>
+            <a:spLocks noGrp="1"/>
+          </p:cNvSpPr>
+          <p:nvPr>
+            <p:ph type="pic" sz="quarter" idx="14"/>
+          </p:nvPr>
+        </p:nvSpPr>
+        <p:spPr>
+          <a:xfrm>
+            <a:off x="4953004" y="1270000"/>
+            <a:ext cx="4952996" cy="5588000"/>
+          </a:xfrm>
+        </p:spPr>
+        <p:txBody>
+          <a:bodyPr/>
+          <a:lstStyle/>
+          <a:p>
+            <a:endParaRPr lang="en-GB"/>
+          </a:p>
+        </p:txBody>
+      </p:sp>
+      <p:sp>
+        <p:nvSpPr>
+          <p:cNvPr id="17" name="Date Placeholder 3"/>
+          <p:cNvSpPr>
+            <a:spLocks noGrp="1"/>
+          </p:cNvSpPr>
+          <p:nvPr>
+            <p:ph type="dt" sz="half" idx="2"/>
+          </p:nvPr>
+        </p:nvSpPr>
+        <p:spPr>
+          <a:xfrm>
+            <a:off x="624841" y="6310630"/>
+            <a:ext cx="2341244" cy="547370"/>
+          </a:xfrm>
+          <a:prstGeom prst="rect">
+            <a:avLst/>
+          </a:prstGeom>
+        </p:spPr>
+        <p:txBody>
+          <a:bodyPr vert="horz" lIns="91440" tIns="45720" rIns="91440" bIns="45720" rtlCol="0" anchor="ctr"/>
+          <a:lstStyle>
+            <a:lvl1pPr algn="l">
+              <a:defRPr sz="1200">
+                <a:solidFill>
+                  <a:schemeClr val="tx1"/>
+                </a:solidFill>
+              </a:defRPr>
+            </a:lvl1pPr>
+          </a:lstStyle>
+          <a:p>
+            <a:fld id="{6F80DDAC-FE11-49DC-9261-11C1E994665B}" type="datetimeFigureOut">
+              <a:rPr lang="en-GB" smtClean="0"/>
+              <a:pPr/>
+              <a:t>29/07/2026</a:t>
+            </a:fld>
+            <a:endParaRPr lang="en-GB"/>
+          </a:p>
+        </p:txBody>
+      </p:sp>
+      <p:sp>
+        <p:nvSpPr>
+          <p:cNvPr id="18" name="Slide Number Placeholder 5"/>
+          <p:cNvSpPr>
+            <a:spLocks noGrp="1"/>
+          </p:cNvSpPr>
+          <p:nvPr>
+            <p:ph type="sldNum" sz="quarter" idx="4"/>
+          </p:nvPr>
+        </p:nvSpPr>
+        <p:spPr>
+          <a:xfrm>
+            <a:off x="6939916" y="6310630"/>
+            <a:ext cx="2341244" cy="547370"/>
+          </a:xfrm>
+          <a:prstGeom prst="rect">
+            <a:avLst/>
+          </a:prstGeom>
+        </p:spPr>
+        <p:txBody>
+          <a:bodyPr vert="horz" lIns="91440" tIns="45720" rIns="91440" bIns="45720" rtlCol="0" anchor="ctr"/>
+          <a:lstStyle>
+            <a:lvl1pPr algn="r">
+              <a:defRPr sz="1200">
+                <a:solidFill>
+                  <a:schemeClr val="bg1"/>
+                </a:solidFill>
+              </a:defRPr>
+            </a:lvl1pPr>
+          </a:lstStyle>
+          <a:p>
+            <a:fld id="{3A73CC0E-67D5-43FD-BD59-BE5F44570CB2}" type="slidenum">
+              <a:rPr lang="en-GB" smtClean="0"/>
+              <a:pPr/>
+              <a:t>‹#›</a:t>
+            </a:fld>
+            <a:endParaRPr lang="en-GB"/>
+          </a:p>
+        </p:txBody>
+      </p:sp>
+      <p:sp>
+        <p:nvSpPr>
+          <p:cNvPr id="19" name="Text Placeholder 2"/>
+          <p:cNvSpPr>
+            <a:spLocks noGrp="1"/>
+          </p:cNvSpPr>
+          <p:nvPr>
+            <p:ph idx="1"/>
+          </p:nvPr>
+        </p:nvSpPr>
+        <p:spPr>
+          <a:xfrm>
+            <a:off x="624841" y="1270000"/>
+            <a:ext cx="3619499" cy="5040630"/>
+          </a:xfrm>
+          <a:prstGeom prst="rect">
+            <a:avLst/>
+          </a:prstGeom>
+        </p:spPr>
+        <p:txBody>
+          <a:bodyPr vert="horz" lIns="91440" tIns="180000" rIns="91440" bIns="180000" rtlCol="0" anchor="ctr">
+            <a:normAutofit/>
+          </a:bodyPr>
+          <a:lstStyle>
+            <a:lvl1pPr marL="0" indent="0">
+              <a:spcBef>
+                <a:spcPts val="1800"/>
+              </a:spcBef>
+              <a:buNone/>
+              <a:defRPr sz="1400" b="0">
+                <a:latin typeface="Roboto Medium" panose="02000000000000000000" pitchFamily="2" charset="0"/>
+                <a:ea typeface="Roboto Medium" panose="02000000000000000000" pitchFamily="2" charset="0"/>
+              </a:defRPr>
+            </a:lvl1pPr>
+            <a:lvl2pPr marL="800100" indent="-342900">
+              <a:spcBef>
+                <a:spcPts val="0"/>
+              </a:spcBef>
+              <a:buClr>
+                <a:schemeClr val="accent1"/>
+              </a:buClr>
+              <a:buFont typeface="Wingdings" panose="05000000000000000000" pitchFamily="2" charset="2"/>
+              <a:buChar char="§"/>
+              <a:defRPr sz="1200">
+                <a:latin typeface="+mn-lt"/>
+              </a:defRPr>
+            </a:lvl2pPr>
+            <a:lvl3pPr marL="1257300" indent="-342900">
+              <a:spcBef>
+                <a:spcPts val="0"/>
+              </a:spcBef>
+              <a:buFont typeface="Roboto Light" panose="02000000000000000000" pitchFamily="2" charset="0"/>
+              <a:buChar char="-"/>
+              <a:defRPr sz="1200">
+                <a:latin typeface="+mn-lt"/>
+              </a:defRPr>
+            </a:lvl3pPr>
+            <a:lvl4pPr marL="1657350" indent="-285750">
+              <a:spcBef>
+                <a:spcPts val="0"/>
+              </a:spcBef>
+              <a:buFont typeface="Roboto Light" panose="02000000000000000000" pitchFamily="2" charset="0"/>
+              <a:buChar char="-"/>
+              <a:defRPr sz="1200">
+                <a:latin typeface="+mn-lt"/>
+              </a:defRPr>
+            </a:lvl4pPr>
+            <a:lvl5pPr marL="2114550" indent="-285750">
+              <a:spcBef>
+                <a:spcPts val="0"/>
+              </a:spcBef>
+              <a:buFont typeface="Roboto Light" panose="02000000000000000000" pitchFamily="2" charset="0"/>
+              <a:buChar char="-"/>
+              <a:defRPr sz="1200">
+                <a:latin typeface="+mn-lt"/>
+              </a:defRPr>
+            </a:lvl5pPr>
+          </a:lstStyle>
+          <a:p>
+            <a:pPr lvl="0"/>
+            <a:r>
+              <a:rPr lang="en-US"/>
+              <a:t>Edit Master text styles</a:t>
+            </a:r>
+          </a:p>
+          <a:p>
+            <a:pPr lvl="1"/>
+            <a:r>
+              <a:rPr lang="en-US"/>
+              <a:t>Second level</a:t>
+            </a:r>
+          </a:p>
+          <a:p>
+            <a:pPr lvl="2"/>
+            <a:r>
+              <a:rPr lang="en-US"/>
+              <a:t>Third level</a:t>
+            </a:r>
+          </a:p>
+          <a:p>
+            <a:pPr lvl="3"/>
+            <a:r>
+              <a:rPr lang="en-US"/>
+              <a:t>Fourth level</a:t>
+            </a:r>
+          </a:p>
+          <a:p>
+            <a:pPr lvl="4"/>
+            <a:r>
+              <a:rPr lang="en-US"/>
+              <a:t>Fifth level</a:t>
+            </a:r>
+          </a:p>
+        </p:txBody>
+      </p:sp>
+      <p:sp>
+        <p:nvSpPr>
+          <p:cNvPr id="7" name="Title Placeholder 1">
+            <a:extLst>
+              <a:ext uri="{FF2B5EF4-FFF2-40B4-BE49-F238E27FC236}">
+                <a16:creationId xmlns:a16="http://schemas.microsoft.com/office/drawing/2014/main" id="{49863A12-A66A-429E-8F66-C5A5F81F1B27}"/>
+              </a:ext>
+            </a:extLst>
+          </p:cNvPr>
+          <p:cNvSpPr>
+            <a:spLocks noGrp="1"/>
+          </p:cNvSpPr>
+          <p:nvPr>
+            <p:ph type="title"/>
+          </p:nvPr>
+        </p:nvSpPr>
+        <p:spPr>
+          <a:xfrm>
+            <a:off x="596204" y="191149"/>
+            <a:ext cx="8656319" cy="654201"/>
+          </a:xfrm>
+          <a:prstGeom prst="rect">
+            <a:avLst/>
+          </a:prstGeom>
+        </p:spPr>
+        <p:txBody>
+          <a:bodyPr vert="horz" lIns="91440" tIns="45720" rIns="91440" bIns="45720" rtlCol="0" anchor="ctr">
+            <a:noAutofit/>
+          </a:bodyPr>
+          <a:lstStyle/>
+          <a:p>
+            <a:r>
+              <a:rPr lang="en-US"/>
+              <a:t>Click to edit Master title style</a:t>
+            </a:r>
+            <a:endParaRPr lang="en-GB"/>
+          </a:p>
+        </p:txBody>
+      </p:sp>
+    </p:spTree>
+    <p:extLst>
+      <p:ext uri="{BB962C8B-B14F-4D97-AF65-F5344CB8AC3E}">
+        <p14:creationId xmlns:p14="http://schemas.microsoft.com/office/powerpoint/2010/main" val="3988602008"/>
+      </p:ext>
+    </p:extLst>
+  </p:cSld>
+  <p:clrMapOvr>
+    <a:masterClrMapping/>
+  </p:clrMapOvr>
 </p:sldLayout>
 </file>
 
@@ -2529,7 +5463,7 @@
             <a:fld id="{6F80DDAC-FE11-49DC-9261-11C1E994665B}" type="datetimeFigureOut">
               <a:rPr lang="en-GB" smtClean="0"/>
               <a:pPr/>
-              <a:t>28/07/2026</a:t>
+              <a:t>29/07/2026</a:t>
             </a:fld>
             <a:endParaRPr lang="en-GB"/>
           </a:p>
@@ -2699,7 +5633,7 @@
             <a:fld id="{6F80DDAC-FE11-49DC-9261-11C1E994665B}" type="datetimeFigureOut">
               <a:rPr lang="en-GB" smtClean="0"/>
               <a:pPr/>
-              <a:t>28/07/2026</a:t>
+              <a:t>29/07/2026</a:t>
             </a:fld>
             <a:endParaRPr lang="en-GB"/>
           </a:p>
@@ -2925,7 +5859,7 @@
             <a:fld id="{6F80DDAC-FE11-49DC-9261-11C1E994665B}" type="datetimeFigureOut">
               <a:rPr lang="en-GB" smtClean="0"/>
               <a:pPr/>
-              <a:t>28/07/2026</a:t>
+              <a:t>29/07/2026</a:t>
             </a:fld>
             <a:endParaRPr lang="en-GB"/>
           </a:p>
@@ -3171,7 +6105,7 @@
             <a:fld id="{6F80DDAC-FE11-49DC-9261-11C1E994665B}" type="datetimeFigureOut">
               <a:rPr lang="en-GB" smtClean="0"/>
               <a:pPr/>
-              <a:t>28/07/2026</a:t>
+              <a:t>29/07/2026</a:t>
             </a:fld>
             <a:endParaRPr lang="en-GB"/>
           </a:p>
@@ -3508,7 +6442,7 @@
             <a:fld id="{6F80DDAC-FE11-49DC-9261-11C1E994665B}" type="datetimeFigureOut">
               <a:rPr lang="en-GB" smtClean="0"/>
               <a:pPr/>
-              <a:t>28/07/2026</a:t>
+              <a:t>29/07/2026</a:t>
             </a:fld>
             <a:endParaRPr lang="en-GB"/>
           </a:p>
@@ -3777,7 +6711,7 @@
             <a:fld id="{6F80DDAC-FE11-49DC-9261-11C1E994665B}" type="datetimeFigureOut">
               <a:rPr lang="en-GB" smtClean="0"/>
               <a:pPr/>
-              <a:t>28/07/2026</a:t>
+              <a:t>29/07/2026</a:t>
             </a:fld>
             <a:endParaRPr lang="en-GB"/>
           </a:p>
@@ -4140,7 +7074,7 @@
           <a:p>
             <a:fld id="{B3200F2B-F467-4C29-9963-7410829293A6}" type="datetime1">
               <a:rPr lang="en-GB" smtClean="0"/>
-              <a:t>28/07/2026</a:t>
+              <a:t>29/07/2026</a:t>
             </a:fld>
             <a:endParaRPr lang="en-GB"/>
           </a:p>
@@ -4749,7 +7683,7 @@
             <a:fld id="{6F80DDAC-FE11-49DC-9261-11C1E994665B}" type="datetimeFigureOut">
               <a:rPr lang="en-GB" smtClean="0"/>
               <a:pPr/>
-              <a:t>28/07/2026</a:t>
+              <a:t>29/07/2026</a:t>
             </a:fld>
             <a:endParaRPr lang="en-GB"/>
           </a:p>
@@ -5232,6 +8166,748 @@
 </p:sldMaster>
 </file>
 
+<file path=ppt/slideMasters/slideMaster3.xml><?xml version="1.0" encoding="utf-8"?>
+<p:sldMaster xmlns:a="http://schemas.openxmlformats.org/drawingml/2006/main" xmlns:r="http://schemas.openxmlformats.org/officeDocument/2006/relationships" xmlns:p="http://schemas.openxmlformats.org/presentationml/2006/main">
+  <p:cSld>
+    <p:bg>
+      <p:bgRef idx="1001">
+        <a:schemeClr val="bg1"/>
+      </p:bgRef>
+    </p:bg>
+    <p:spTree>
+      <p:nvGrpSpPr>
+        <p:cNvPr id="1" name=""/>
+        <p:cNvGrpSpPr/>
+        <p:nvPr/>
+      </p:nvGrpSpPr>
+      <p:grpSpPr>
+        <a:xfrm>
+          <a:off x="0" y="0"/>
+          <a:ext cx="0" cy="0"/>
+          <a:chOff x="0" y="0"/>
+          <a:chExt cx="0" cy="0"/>
+        </a:xfrm>
+      </p:grpSpPr>
+      <p:sp>
+        <p:nvSpPr>
+          <p:cNvPr id="2" name="Title Placeholder 1">
+            <a:extLst>
+              <a:ext uri="{FF2B5EF4-FFF2-40B4-BE49-F238E27FC236}">
+                <a16:creationId xmlns:a16="http://schemas.microsoft.com/office/drawing/2014/main" id="{A26706E2-5FAA-84FA-2BA5-FE79CAD3CBE7}"/>
+              </a:ext>
+            </a:extLst>
+          </p:cNvPr>
+          <p:cNvSpPr>
+            <a:spLocks noGrp="1"/>
+          </p:cNvSpPr>
+          <p:nvPr>
+            <p:ph type="title"/>
+          </p:nvPr>
+        </p:nvSpPr>
+        <p:spPr>
+          <a:xfrm>
+            <a:off x="681038" y="365126"/>
+            <a:ext cx="8543925" cy="1325563"/>
+          </a:xfrm>
+          <a:prstGeom prst="rect">
+            <a:avLst/>
+          </a:prstGeom>
+        </p:spPr>
+        <p:txBody>
+          <a:bodyPr vert="horz" lIns="91440" tIns="45720" rIns="91440" bIns="45720" rtlCol="0" anchor="ctr">
+            <a:normAutofit/>
+          </a:bodyPr>
+          <a:lstStyle/>
+          <a:p>
+            <a:r>
+              <a:rPr lang="en-US"/>
+              <a:t>Click to edit Master title style</a:t>
+            </a:r>
+          </a:p>
+        </p:txBody>
+      </p:sp>
+      <p:sp>
+        <p:nvSpPr>
+          <p:cNvPr id="3" name="Text Placeholder 2">
+            <a:extLst>
+              <a:ext uri="{FF2B5EF4-FFF2-40B4-BE49-F238E27FC236}">
+                <a16:creationId xmlns:a16="http://schemas.microsoft.com/office/drawing/2014/main" id="{874C0190-CDC1-B11F-77F2-806F5CA2BFE7}"/>
+              </a:ext>
+            </a:extLst>
+          </p:cNvPr>
+          <p:cNvSpPr>
+            <a:spLocks noGrp="1"/>
+          </p:cNvSpPr>
+          <p:nvPr>
+            <p:ph type="body" idx="1"/>
+          </p:nvPr>
+        </p:nvSpPr>
+        <p:spPr>
+          <a:xfrm>
+            <a:off x="681038" y="1825625"/>
+            <a:ext cx="8543925" cy="4351338"/>
+          </a:xfrm>
+          <a:prstGeom prst="rect">
+            <a:avLst/>
+          </a:prstGeom>
+        </p:spPr>
+        <p:txBody>
+          <a:bodyPr vert="horz" lIns="91440" tIns="45720" rIns="91440" bIns="45720" rtlCol="0">
+            <a:normAutofit/>
+          </a:bodyPr>
+          <a:lstStyle/>
+          <a:p>
+            <a:pPr lvl="0"/>
+            <a:r>
+              <a:rPr lang="en-US"/>
+              <a:t>Click to edit Master text styles</a:t>
+            </a:r>
+          </a:p>
+          <a:p>
+            <a:pPr lvl="1"/>
+            <a:r>
+              <a:rPr lang="en-US"/>
+              <a:t>Second level</a:t>
+            </a:r>
+          </a:p>
+          <a:p>
+            <a:pPr lvl="2"/>
+            <a:r>
+              <a:rPr lang="en-US"/>
+              <a:t>Third level</a:t>
+            </a:r>
+          </a:p>
+          <a:p>
+            <a:pPr lvl="3"/>
+            <a:r>
+              <a:rPr lang="en-US"/>
+              <a:t>Fourth level</a:t>
+            </a:r>
+          </a:p>
+          <a:p>
+            <a:pPr lvl="4"/>
+            <a:r>
+              <a:rPr lang="en-US"/>
+              <a:t>Fifth level</a:t>
+            </a:r>
+          </a:p>
+        </p:txBody>
+      </p:sp>
+      <p:sp>
+        <p:nvSpPr>
+          <p:cNvPr id="4" name="Date Placeholder 3">
+            <a:extLst>
+              <a:ext uri="{FF2B5EF4-FFF2-40B4-BE49-F238E27FC236}">
+                <a16:creationId xmlns:a16="http://schemas.microsoft.com/office/drawing/2014/main" id="{4EDD5702-9985-065D-0AB2-8A50FAB462B3}"/>
+              </a:ext>
+            </a:extLst>
+          </p:cNvPr>
+          <p:cNvSpPr>
+            <a:spLocks noGrp="1"/>
+          </p:cNvSpPr>
+          <p:nvPr>
+            <p:ph type="dt" sz="half" idx="2"/>
+          </p:nvPr>
+        </p:nvSpPr>
+        <p:spPr>
+          <a:xfrm>
+            <a:off x="681038" y="6356351"/>
+            <a:ext cx="2228850" cy="365125"/>
+          </a:xfrm>
+          <a:prstGeom prst="rect">
+            <a:avLst/>
+          </a:prstGeom>
+        </p:spPr>
+        <p:txBody>
+          <a:bodyPr vert="horz" lIns="91440" tIns="45720" rIns="91440" bIns="45720" rtlCol="0" anchor="ctr"/>
+          <a:lstStyle>
+            <a:lvl1pPr algn="l">
+              <a:defRPr sz="975">
+                <a:solidFill>
+                  <a:schemeClr val="tx1">
+                    <a:tint val="82000"/>
+                  </a:schemeClr>
+                </a:solidFill>
+              </a:defRPr>
+            </a:lvl1pPr>
+          </a:lstStyle>
+          <a:p>
+            <a:fld id="{B3200F2B-F467-4C29-9963-7410829293A6}" type="datetime1">
+              <a:rPr lang="en-GB" smtClean="0"/>
+              <a:t>29/07/2026</a:t>
+            </a:fld>
+            <a:endParaRPr lang="en-GB"/>
+          </a:p>
+        </p:txBody>
+      </p:sp>
+      <p:sp>
+        <p:nvSpPr>
+          <p:cNvPr id="5" name="Footer Placeholder 4">
+            <a:extLst>
+              <a:ext uri="{FF2B5EF4-FFF2-40B4-BE49-F238E27FC236}">
+                <a16:creationId xmlns:a16="http://schemas.microsoft.com/office/drawing/2014/main" id="{F757D5C0-8D58-1C1F-A78A-228B0436F7C8}"/>
+              </a:ext>
+            </a:extLst>
+          </p:cNvPr>
+          <p:cNvSpPr>
+            <a:spLocks noGrp="1"/>
+          </p:cNvSpPr>
+          <p:nvPr>
+            <p:ph type="ftr" sz="quarter" idx="3"/>
+          </p:nvPr>
+        </p:nvSpPr>
+        <p:spPr>
+          <a:xfrm>
+            <a:off x="3281363" y="6356351"/>
+            <a:ext cx="3343275" cy="365125"/>
+          </a:xfrm>
+          <a:prstGeom prst="rect">
+            <a:avLst/>
+          </a:prstGeom>
+        </p:spPr>
+        <p:txBody>
+          <a:bodyPr vert="horz" lIns="91440" tIns="45720" rIns="91440" bIns="45720" rtlCol="0" anchor="ctr"/>
+          <a:lstStyle>
+            <a:lvl1pPr algn="ctr">
+              <a:defRPr sz="975">
+                <a:solidFill>
+                  <a:schemeClr val="tx1">
+                    <a:tint val="82000"/>
+                  </a:schemeClr>
+                </a:solidFill>
+              </a:defRPr>
+            </a:lvl1pPr>
+          </a:lstStyle>
+          <a:p>
+            <a:endParaRPr lang="en-GB"/>
+          </a:p>
+        </p:txBody>
+      </p:sp>
+      <p:sp>
+        <p:nvSpPr>
+          <p:cNvPr id="6" name="Slide Number Placeholder 5">
+            <a:extLst>
+              <a:ext uri="{FF2B5EF4-FFF2-40B4-BE49-F238E27FC236}">
+                <a16:creationId xmlns:a16="http://schemas.microsoft.com/office/drawing/2014/main" id="{90DE8CF6-4336-9D2A-79F2-C80B07BBF415}"/>
+              </a:ext>
+            </a:extLst>
+          </p:cNvPr>
+          <p:cNvSpPr>
+            <a:spLocks noGrp="1"/>
+          </p:cNvSpPr>
+          <p:nvPr>
+            <p:ph type="sldNum" sz="quarter" idx="4"/>
+          </p:nvPr>
+        </p:nvSpPr>
+        <p:spPr>
+          <a:xfrm>
+            <a:off x="6996113" y="6356351"/>
+            <a:ext cx="2228850" cy="365125"/>
+          </a:xfrm>
+          <a:prstGeom prst="rect">
+            <a:avLst/>
+          </a:prstGeom>
+        </p:spPr>
+        <p:txBody>
+          <a:bodyPr vert="horz" lIns="91440" tIns="45720" rIns="91440" bIns="45720" rtlCol="0" anchor="ctr"/>
+          <a:lstStyle>
+            <a:lvl1pPr algn="r">
+              <a:defRPr sz="975">
+                <a:solidFill>
+                  <a:schemeClr val="tx1">
+                    <a:tint val="82000"/>
+                  </a:schemeClr>
+                </a:solidFill>
+              </a:defRPr>
+            </a:lvl1pPr>
+          </a:lstStyle>
+          <a:p>
+            <a:fld id="{6854B3B4-4093-4FBB-A391-3009E9C94F95}" type="slidenum">
+              <a:rPr lang="en-GB" smtClean="0"/>
+              <a:t>‹#›</a:t>
+            </a:fld>
+            <a:endParaRPr lang="en-GB"/>
+          </a:p>
+        </p:txBody>
+      </p:sp>
+      <p:sp>
+        <p:nvSpPr>
+          <p:cNvPr id="7" name="Rectangle 6">
+            <a:extLst>
+              <a:ext uri="{FF2B5EF4-FFF2-40B4-BE49-F238E27FC236}">
+                <a16:creationId xmlns:a16="http://schemas.microsoft.com/office/drawing/2014/main" id="{ACF4DD7E-A58E-ABD5-09A2-5FB5700DB8C3}"/>
+              </a:ext>
+            </a:extLst>
+          </p:cNvPr>
+          <p:cNvSpPr/>
+          <p:nvPr userDrawn="1"/>
+        </p:nvSpPr>
+        <p:spPr>
+          <a:xfrm>
+            <a:off x="0" y="0"/>
+            <a:ext cx="9906000" cy="937697"/>
+          </a:xfrm>
+          <a:prstGeom prst="rect">
+            <a:avLst/>
+          </a:prstGeom>
+          <a:solidFill>
+            <a:srgbClr val="1767D2"/>
+          </a:solidFill>
+          <a:ln>
+            <a:noFill/>
+          </a:ln>
+        </p:spPr>
+        <p:style>
+          <a:lnRef idx="2">
+            <a:schemeClr val="accent1">
+              <a:shade val="50000"/>
+            </a:schemeClr>
+          </a:lnRef>
+          <a:fillRef idx="1">
+            <a:schemeClr val="accent1"/>
+          </a:fillRef>
+          <a:effectRef idx="0">
+            <a:schemeClr val="accent1"/>
+          </a:effectRef>
+          <a:fontRef idx="minor">
+            <a:schemeClr val="lt1"/>
+          </a:fontRef>
+        </p:style>
+        <p:txBody>
+          <a:bodyPr rtlCol="0" anchor="ctr"/>
+          <a:lstStyle/>
+          <a:p>
+            <a:pPr algn="ctr"/>
+            <a:endParaRPr lang="en-GB"/>
+          </a:p>
+        </p:txBody>
+      </p:sp>
+      <p:sp>
+        <p:nvSpPr>
+          <p:cNvPr id="8" name="Rectangle 7">
+            <a:extLst>
+              <a:ext uri="{FF2B5EF4-FFF2-40B4-BE49-F238E27FC236}">
+                <a16:creationId xmlns:a16="http://schemas.microsoft.com/office/drawing/2014/main" id="{CF83EFDE-40D5-5DED-EC2D-04C76685548C}"/>
+              </a:ext>
+            </a:extLst>
+          </p:cNvPr>
+          <p:cNvSpPr/>
+          <p:nvPr userDrawn="1"/>
+        </p:nvSpPr>
+        <p:spPr>
+          <a:xfrm>
+            <a:off x="82510" y="376501"/>
+            <a:ext cx="9906000" cy="937697"/>
+          </a:xfrm>
+          <a:prstGeom prst="rect">
+            <a:avLst/>
+          </a:prstGeom>
+          <a:noFill/>
+          <a:ln>
+            <a:noFill/>
+          </a:ln>
+        </p:spPr>
+        <p:style>
+          <a:lnRef idx="2">
+            <a:schemeClr val="accent1">
+              <a:shade val="50000"/>
+            </a:schemeClr>
+          </a:lnRef>
+          <a:fillRef idx="1">
+            <a:schemeClr val="accent1"/>
+          </a:fillRef>
+          <a:effectRef idx="0">
+            <a:schemeClr val="accent1"/>
+          </a:effectRef>
+          <a:fontRef idx="minor">
+            <a:schemeClr val="lt1"/>
+          </a:fontRef>
+        </p:style>
+        <p:txBody>
+          <a:bodyPr rtlCol="0" anchor="ctr"/>
+          <a:lstStyle/>
+          <a:p>
+            <a:pPr algn="ctr"/>
+            <a:endParaRPr lang="en-GB"/>
+          </a:p>
+        </p:txBody>
+      </p:sp>
+      <p:pic>
+        <p:nvPicPr>
+          <p:cNvPr id="9" name="Graphic 8">
+            <a:extLst>
+              <a:ext uri="{FF2B5EF4-FFF2-40B4-BE49-F238E27FC236}">
+                <a16:creationId xmlns:a16="http://schemas.microsoft.com/office/drawing/2014/main" id="{1857AE01-FD5E-3922-26A9-AC9765042781}"/>
+              </a:ext>
+            </a:extLst>
+          </p:cNvPr>
+          <p:cNvPicPr>
+            <a:picLocks noChangeAspect="1"/>
+          </p:cNvPicPr>
+          <p:nvPr userDrawn="1"/>
+        </p:nvPicPr>
+        <p:blipFill>
+          <a:blip>
+            <a:extLst>
+              <a:ext uri="{28A0092B-C50C-407E-A947-70E740481C1C}">
+                <a14:useLocalDpi xmlns:a14="http://schemas.microsoft.com/office/drawing/2010/main" val="0"/>
+              </a:ext>
+              <a:ext uri="{96DAC541-7B7A-43D3-8B79-37D633B846F1}">
+                <asvg:svgBlip xmlns:asvg="http://schemas.microsoft.com/office/drawing/2016/SVG/main" r:embed="rId14"/>
+              </a:ext>
+            </a:extLst>
+          </a:blip>
+          <a:stretch>
+            <a:fillRect/>
+          </a:stretch>
+        </p:blipFill>
+        <p:spPr>
+          <a:xfrm>
+            <a:off x="7029258" y="-559124"/>
+            <a:ext cx="2688790" cy="2993641"/>
+          </a:xfrm>
+          <a:prstGeom prst="rect">
+            <a:avLst/>
+          </a:prstGeom>
+        </p:spPr>
+      </p:pic>
+    </p:spTree>
+    <p:extLst>
+      <p:ext uri="{BB962C8B-B14F-4D97-AF65-F5344CB8AC3E}">
+        <p14:creationId xmlns:p14="http://schemas.microsoft.com/office/powerpoint/2010/main" val="1674215266"/>
+      </p:ext>
+    </p:extLst>
+  </p:cSld>
+  <p:clrMap bg1="lt1" tx1="dk1" bg2="lt2" tx2="dk2" accent1="accent1" accent2="accent2" accent3="accent3" accent4="accent4" accent5="accent5" accent6="accent6" hlink="hlink" folHlink="folHlink"/>
+  <p:sldLayoutIdLst>
+    <p:sldLayoutId id="2147483746" r:id="rId1"/>
+    <p:sldLayoutId id="2147483747" r:id="rId2"/>
+    <p:sldLayoutId id="2147483748" r:id="rId3"/>
+    <p:sldLayoutId id="2147483749" r:id="rId4"/>
+    <p:sldLayoutId id="2147483750" r:id="rId5"/>
+    <p:sldLayoutId id="2147483751" r:id="rId6"/>
+    <p:sldLayoutId id="2147483752" r:id="rId7"/>
+    <p:sldLayoutId id="2147483753" r:id="rId8"/>
+    <p:sldLayoutId id="2147483754" r:id="rId9"/>
+    <p:sldLayoutId id="2147483755" r:id="rId10"/>
+    <p:sldLayoutId id="2147483756" r:id="rId11"/>
+    <p:sldLayoutId id="2147483757" r:id="rId12"/>
+  </p:sldLayoutIdLst>
+  <p:hf hdr="0" ftr="0" dt="0"/>
+  <p:txStyles>
+    <p:titleStyle>
+      <a:lvl1pPr algn="l" defTabSz="742950" rtl="0" eaLnBrk="1" latinLnBrk="0" hangingPunct="1">
+        <a:lnSpc>
+          <a:spcPct val="90000"/>
+        </a:lnSpc>
+        <a:spcBef>
+          <a:spcPct val="0"/>
+        </a:spcBef>
+        <a:buNone/>
+        <a:defRPr sz="3575" kern="1200">
+          <a:solidFill>
+            <a:schemeClr val="tx1"/>
+          </a:solidFill>
+          <a:latin typeface="+mj-lt"/>
+          <a:ea typeface="+mj-ea"/>
+          <a:cs typeface="+mj-cs"/>
+        </a:defRPr>
+      </a:lvl1pPr>
+    </p:titleStyle>
+    <p:bodyStyle>
+      <a:lvl1pPr marL="185738" indent="-185738" algn="l" defTabSz="742950" rtl="0" eaLnBrk="1" latinLnBrk="0" hangingPunct="1">
+        <a:lnSpc>
+          <a:spcPct val="90000"/>
+        </a:lnSpc>
+        <a:spcBef>
+          <a:spcPts val="813"/>
+        </a:spcBef>
+        <a:buFont typeface="Arial" panose="020B0604020202020204" pitchFamily="34" charset="0"/>
+        <a:buChar char="•"/>
+        <a:defRPr sz="2275" kern="1200">
+          <a:solidFill>
+            <a:schemeClr val="tx1"/>
+          </a:solidFill>
+          <a:latin typeface="+mn-lt"/>
+          <a:ea typeface="+mn-ea"/>
+          <a:cs typeface="+mn-cs"/>
+        </a:defRPr>
+      </a:lvl1pPr>
+      <a:lvl2pPr marL="557213" indent="-185738" algn="l" defTabSz="742950" rtl="0" eaLnBrk="1" latinLnBrk="0" hangingPunct="1">
+        <a:lnSpc>
+          <a:spcPct val="90000"/>
+        </a:lnSpc>
+        <a:spcBef>
+          <a:spcPts val="406"/>
+        </a:spcBef>
+        <a:buFont typeface="Arial" panose="020B0604020202020204" pitchFamily="34" charset="0"/>
+        <a:buChar char="•"/>
+        <a:defRPr sz="1950" kern="1200">
+          <a:solidFill>
+            <a:schemeClr val="tx1"/>
+          </a:solidFill>
+          <a:latin typeface="+mn-lt"/>
+          <a:ea typeface="+mn-ea"/>
+          <a:cs typeface="+mn-cs"/>
+        </a:defRPr>
+      </a:lvl2pPr>
+      <a:lvl3pPr marL="928688" indent="-185738" algn="l" defTabSz="742950" rtl="0" eaLnBrk="1" latinLnBrk="0" hangingPunct="1">
+        <a:lnSpc>
+          <a:spcPct val="90000"/>
+        </a:lnSpc>
+        <a:spcBef>
+          <a:spcPts val="406"/>
+        </a:spcBef>
+        <a:buFont typeface="Arial" panose="020B0604020202020204" pitchFamily="34" charset="0"/>
+        <a:buChar char="•"/>
+        <a:defRPr sz="1625" kern="1200">
+          <a:solidFill>
+            <a:schemeClr val="tx1"/>
+          </a:solidFill>
+          <a:latin typeface="+mn-lt"/>
+          <a:ea typeface="+mn-ea"/>
+          <a:cs typeface="+mn-cs"/>
+        </a:defRPr>
+      </a:lvl3pPr>
+      <a:lvl4pPr marL="1300163" indent="-185738" algn="l" defTabSz="742950" rtl="0" eaLnBrk="1" latinLnBrk="0" hangingPunct="1">
+        <a:lnSpc>
+          <a:spcPct val="90000"/>
+        </a:lnSpc>
+        <a:spcBef>
+          <a:spcPts val="406"/>
+        </a:spcBef>
+        <a:buFont typeface="Arial" panose="020B0604020202020204" pitchFamily="34" charset="0"/>
+        <a:buChar char="•"/>
+        <a:defRPr sz="1463" kern="1200">
+          <a:solidFill>
+            <a:schemeClr val="tx1"/>
+          </a:solidFill>
+          <a:latin typeface="+mn-lt"/>
+          <a:ea typeface="+mn-ea"/>
+          <a:cs typeface="+mn-cs"/>
+        </a:defRPr>
+      </a:lvl4pPr>
+      <a:lvl5pPr marL="1671638" indent="-185738" algn="l" defTabSz="742950" rtl="0" eaLnBrk="1" latinLnBrk="0" hangingPunct="1">
+        <a:lnSpc>
+          <a:spcPct val="90000"/>
+        </a:lnSpc>
+        <a:spcBef>
+          <a:spcPts val="406"/>
+        </a:spcBef>
+        <a:buFont typeface="Arial" panose="020B0604020202020204" pitchFamily="34" charset="0"/>
+        <a:buChar char="•"/>
+        <a:defRPr sz="1463" kern="1200">
+          <a:solidFill>
+            <a:schemeClr val="tx1"/>
+          </a:solidFill>
+          <a:latin typeface="+mn-lt"/>
+          <a:ea typeface="+mn-ea"/>
+          <a:cs typeface="+mn-cs"/>
+        </a:defRPr>
+      </a:lvl5pPr>
+      <a:lvl6pPr marL="2043113" indent="-185738" algn="l" defTabSz="742950" rtl="0" eaLnBrk="1" latinLnBrk="0" hangingPunct="1">
+        <a:lnSpc>
+          <a:spcPct val="90000"/>
+        </a:lnSpc>
+        <a:spcBef>
+          <a:spcPts val="406"/>
+        </a:spcBef>
+        <a:buFont typeface="Arial" panose="020B0604020202020204" pitchFamily="34" charset="0"/>
+        <a:buChar char="•"/>
+        <a:defRPr sz="1463" kern="1200">
+          <a:solidFill>
+            <a:schemeClr val="tx1"/>
+          </a:solidFill>
+          <a:latin typeface="+mn-lt"/>
+          <a:ea typeface="+mn-ea"/>
+          <a:cs typeface="+mn-cs"/>
+        </a:defRPr>
+      </a:lvl6pPr>
+      <a:lvl7pPr marL="2414588" indent="-185738" algn="l" defTabSz="742950" rtl="0" eaLnBrk="1" latinLnBrk="0" hangingPunct="1">
+        <a:lnSpc>
+          <a:spcPct val="90000"/>
+        </a:lnSpc>
+        <a:spcBef>
+          <a:spcPts val="406"/>
+        </a:spcBef>
+        <a:buFont typeface="Arial" panose="020B0604020202020204" pitchFamily="34" charset="0"/>
+        <a:buChar char="•"/>
+        <a:defRPr sz="1463" kern="1200">
+          <a:solidFill>
+            <a:schemeClr val="tx1"/>
+          </a:solidFill>
+          <a:latin typeface="+mn-lt"/>
+          <a:ea typeface="+mn-ea"/>
+          <a:cs typeface="+mn-cs"/>
+        </a:defRPr>
+      </a:lvl7pPr>
+      <a:lvl8pPr marL="2786063" indent="-185738" algn="l" defTabSz="742950" rtl="0" eaLnBrk="1" latinLnBrk="0" hangingPunct="1">
+        <a:lnSpc>
+          <a:spcPct val="90000"/>
+        </a:lnSpc>
+        <a:spcBef>
+          <a:spcPts val="406"/>
+        </a:spcBef>
+        <a:buFont typeface="Arial" panose="020B0604020202020204" pitchFamily="34" charset="0"/>
+        <a:buChar char="•"/>
+        <a:defRPr sz="1463" kern="1200">
+          <a:solidFill>
+            <a:schemeClr val="tx1"/>
+          </a:solidFill>
+          <a:latin typeface="+mn-lt"/>
+          <a:ea typeface="+mn-ea"/>
+          <a:cs typeface="+mn-cs"/>
+        </a:defRPr>
+      </a:lvl8pPr>
+      <a:lvl9pPr marL="3157538" indent="-185738" algn="l" defTabSz="742950" rtl="0" eaLnBrk="1" latinLnBrk="0" hangingPunct="1">
+        <a:lnSpc>
+          <a:spcPct val="90000"/>
+        </a:lnSpc>
+        <a:spcBef>
+          <a:spcPts val="406"/>
+        </a:spcBef>
+        <a:buFont typeface="Arial" panose="020B0604020202020204" pitchFamily="34" charset="0"/>
+        <a:buChar char="•"/>
+        <a:defRPr sz="1463" kern="1200">
+          <a:solidFill>
+            <a:schemeClr val="tx1"/>
+          </a:solidFill>
+          <a:latin typeface="+mn-lt"/>
+          <a:ea typeface="+mn-ea"/>
+          <a:cs typeface="+mn-cs"/>
+        </a:defRPr>
+      </a:lvl9pPr>
+    </p:bodyStyle>
+    <p:otherStyle>
+      <a:defPPr>
+        <a:defRPr lang="en-US"/>
+      </a:defPPr>
+      <a:lvl1pPr marL="0" algn="l" defTabSz="742950" rtl="0" eaLnBrk="1" latinLnBrk="0" hangingPunct="1">
+        <a:defRPr sz="1463" kern="1200">
+          <a:solidFill>
+            <a:schemeClr val="tx1"/>
+          </a:solidFill>
+          <a:latin typeface="+mn-lt"/>
+          <a:ea typeface="+mn-ea"/>
+          <a:cs typeface="+mn-cs"/>
+        </a:defRPr>
+      </a:lvl1pPr>
+      <a:lvl2pPr marL="371475" algn="l" defTabSz="742950" rtl="0" eaLnBrk="1" latinLnBrk="0" hangingPunct="1">
+        <a:defRPr sz="1463" kern="1200">
+          <a:solidFill>
+            <a:schemeClr val="tx1"/>
+          </a:solidFill>
+          <a:latin typeface="+mn-lt"/>
+          <a:ea typeface="+mn-ea"/>
+          <a:cs typeface="+mn-cs"/>
+        </a:defRPr>
+      </a:lvl2pPr>
+      <a:lvl3pPr marL="742950" algn="l" defTabSz="742950" rtl="0" eaLnBrk="1" latinLnBrk="0" hangingPunct="1">
+        <a:defRPr sz="1463" kern="1200">
+          <a:solidFill>
+            <a:schemeClr val="tx1"/>
+          </a:solidFill>
+          <a:latin typeface="+mn-lt"/>
+          <a:ea typeface="+mn-ea"/>
+          <a:cs typeface="+mn-cs"/>
+        </a:defRPr>
+      </a:lvl3pPr>
+      <a:lvl4pPr marL="1114425" algn="l" defTabSz="742950" rtl="0" eaLnBrk="1" latinLnBrk="0" hangingPunct="1">
+        <a:defRPr sz="1463" kern="1200">
+          <a:solidFill>
+            <a:schemeClr val="tx1"/>
+          </a:solidFill>
+          <a:latin typeface="+mn-lt"/>
+          <a:ea typeface="+mn-ea"/>
+          <a:cs typeface="+mn-cs"/>
+        </a:defRPr>
+      </a:lvl4pPr>
+      <a:lvl5pPr marL="1485900" algn="l" defTabSz="742950" rtl="0" eaLnBrk="1" latinLnBrk="0" hangingPunct="1">
+        <a:defRPr sz="1463" kern="1200">
+          <a:solidFill>
+            <a:schemeClr val="tx1"/>
+          </a:solidFill>
+          <a:latin typeface="+mn-lt"/>
+          <a:ea typeface="+mn-ea"/>
+          <a:cs typeface="+mn-cs"/>
+        </a:defRPr>
+      </a:lvl5pPr>
+      <a:lvl6pPr marL="1857375" algn="l" defTabSz="742950" rtl="0" eaLnBrk="1" latinLnBrk="0" hangingPunct="1">
+        <a:defRPr sz="1463" kern="1200">
+          <a:solidFill>
+            <a:schemeClr val="tx1"/>
+          </a:solidFill>
+          <a:latin typeface="+mn-lt"/>
+          <a:ea typeface="+mn-ea"/>
+          <a:cs typeface="+mn-cs"/>
+        </a:defRPr>
+      </a:lvl6pPr>
+      <a:lvl7pPr marL="2228850" algn="l" defTabSz="742950" rtl="0" eaLnBrk="1" latinLnBrk="0" hangingPunct="1">
+        <a:defRPr sz="1463" kern="1200">
+          <a:solidFill>
+            <a:schemeClr val="tx1"/>
+          </a:solidFill>
+          <a:latin typeface="+mn-lt"/>
+          <a:ea typeface="+mn-ea"/>
+          <a:cs typeface="+mn-cs"/>
+        </a:defRPr>
+      </a:lvl7pPr>
+      <a:lvl8pPr marL="2600325" algn="l" defTabSz="742950" rtl="0" eaLnBrk="1" latinLnBrk="0" hangingPunct="1">
+        <a:defRPr sz="1463" kern="1200">
+          <a:solidFill>
+            <a:schemeClr val="tx1"/>
+          </a:solidFill>
+          <a:latin typeface="+mn-lt"/>
+          <a:ea typeface="+mn-ea"/>
+          <a:cs typeface="+mn-cs"/>
+        </a:defRPr>
+      </a:lvl8pPr>
+      <a:lvl9pPr marL="2971800" algn="l" defTabSz="742950" rtl="0" eaLnBrk="1" latinLnBrk="0" hangingPunct="1">
+        <a:defRPr sz="1463" kern="1200">
+          <a:solidFill>
+            <a:schemeClr val="tx1"/>
+          </a:solidFill>
+          <a:latin typeface="+mn-lt"/>
+          <a:ea typeface="+mn-ea"/>
+          <a:cs typeface="+mn-cs"/>
+        </a:defRPr>
+      </a:lvl9pPr>
+    </p:otherStyle>
+  </p:txStyles>
+  <p:extLst>
+    <p:ext uri="{27BBF7A9-308A-43DC-89C8-2F10F3537804}">
+      <p15:sldGuideLst xmlns:p15="http://schemas.microsoft.com/office/powerpoint/2012/main">
+        <p15:guide id="1" orient="horz" pos="1026" userDrawn="1">
+          <p15:clr>
+            <a:srgbClr val="F26B43"/>
+          </p15:clr>
+        </p15:guide>
+        <p15:guide id="2" orient="horz" pos="3748" userDrawn="1">
+          <p15:clr>
+            <a:srgbClr val="F26B43"/>
+          </p15:clr>
+        </p15:guide>
+        <p15:guide id="3" pos="3120" userDrawn="1">
+          <p15:clr>
+            <a:srgbClr val="F26B43"/>
+          </p15:clr>
+        </p15:guide>
+        <p15:guide id="4" pos="466" userDrawn="1">
+          <p15:clr>
+            <a:srgbClr val="F26B43"/>
+          </p15:clr>
+        </p15:guide>
+        <p15:guide id="5" pos="5774" userDrawn="1">
+          <p15:clr>
+            <a:srgbClr val="F26B43"/>
+          </p15:clr>
+        </p15:guide>
+      </p15:sldGuideLst>
+    </p:ext>
+  </p:extLst>
+</p:sldMaster>
+</file>
+
 <file path=ppt/slides/slide1.xml><?xml version="1.0" encoding="utf-8"?>
 <p:sld xmlns:a="http://schemas.openxmlformats.org/drawingml/2006/main" xmlns:r="http://schemas.openxmlformats.org/officeDocument/2006/relationships" xmlns:p="http://schemas.openxmlformats.org/presentationml/2006/main">
   <p:cSld>
@@ -5340,7 +9016,1034 @@
 </p:sld>
 </file>
 
-<file path=ppt/slides/slide10.xml><?xml version="1.0" encoding="utf-8"?>
+<file path=ppt/slides/slide2.xml><?xml version="1.0" encoding="utf-8"?>
+<p:sld xmlns:a="http://schemas.openxmlformats.org/drawingml/2006/main" xmlns:r="http://schemas.openxmlformats.org/officeDocument/2006/relationships" xmlns:p="http://schemas.openxmlformats.org/presentationml/2006/main">
+  <p:cSld>
+    <p:spTree>
+      <p:nvGrpSpPr>
+        <p:cNvPr id="1" name=""/>
+        <p:cNvGrpSpPr/>
+        <p:nvPr/>
+      </p:nvGrpSpPr>
+      <p:grpSpPr>
+        <a:xfrm>
+          <a:off x="0" y="0"/>
+          <a:ext cx="0" cy="0"/>
+          <a:chOff x="0" y="0"/>
+          <a:chExt cx="0" cy="0"/>
+        </a:xfrm>
+      </p:grpSpPr>
+      <p:sp>
+        <p:nvSpPr>
+          <p:cNvPr id="10" name="TextBox 9">
+            <a:extLst>
+              <a:ext uri="{FF2B5EF4-FFF2-40B4-BE49-F238E27FC236}">
+                <a16:creationId xmlns:a16="http://schemas.microsoft.com/office/drawing/2014/main" id="{0D81F1DA-39EA-A422-4FB7-F151AE75E95B}"/>
+              </a:ext>
+            </a:extLst>
+          </p:cNvPr>
+          <p:cNvSpPr txBox="1"/>
+          <p:nvPr/>
+        </p:nvSpPr>
+        <p:spPr>
+          <a:xfrm>
+            <a:off x="4642375" y="4100053"/>
+            <a:ext cx="4973574" cy="2308324"/>
+          </a:xfrm>
+          <a:prstGeom prst="rect">
+            <a:avLst/>
+          </a:prstGeom>
+          <a:noFill/>
+        </p:spPr>
+        <p:txBody>
+          <a:bodyPr wrap="square">
+            <a:spAutoFit/>
+          </a:bodyPr>
+          <a:lstStyle/>
+          <a:p>
+            <a:pPr>
+              <a:buNone/>
+            </a:pPr>
+            <a:r>
+              <a:rPr lang="en-US" sz="1600" dirty="0"/>
+              <a:t>Across the 10 Americas buildings, vacancy rates are consistently low — ranging from 4.1% to 5.7% for nine of the buildings. Building F stands as a significant outlier at 24% vacancy, nearly 5x the portfolio average.</a:t>
+            </a:r>
+          </a:p>
+          <a:p>
+            <a:pPr>
+              <a:buNone/>
+            </a:pPr>
+            <a:endParaRPr lang="en-US" sz="1600" dirty="0"/>
+          </a:p>
+          <a:p>
+            <a:pPr>
+              <a:buNone/>
+            </a:pPr>
+            <a:r>
+              <a:rPr lang="en-US" sz="1600" dirty="0"/>
+              <a:t>Building E has the next highest vacancy at 5.7%, followed by Building H at 5.6%. Buildings G and A are the most efficiently utilized at 4.1% and 4.4% respectively.</a:t>
+            </a:r>
+          </a:p>
+        </p:txBody>
+      </p:sp>
+      <p:sp>
+        <p:nvSpPr>
+          <p:cNvPr id="13" name="Rectangle 12">
+            <a:extLst>
+              <a:ext uri="{FF2B5EF4-FFF2-40B4-BE49-F238E27FC236}">
+                <a16:creationId xmlns:a16="http://schemas.microsoft.com/office/drawing/2014/main" id="{7C0FE98C-A16B-B331-9711-B23546B52257}"/>
+              </a:ext>
+            </a:extLst>
+          </p:cNvPr>
+          <p:cNvSpPr/>
+          <p:nvPr/>
+        </p:nvSpPr>
+        <p:spPr>
+          <a:xfrm>
+            <a:off x="0" y="0"/>
+            <a:ext cx="9906000" cy="953729"/>
+          </a:xfrm>
+          <a:prstGeom prst="rect">
+            <a:avLst/>
+          </a:prstGeom>
+          <a:solidFill>
+            <a:schemeClr val="bg1"/>
+          </a:solidFill>
+          <a:ln>
+            <a:solidFill>
+              <a:schemeClr val="bg1"/>
+            </a:solidFill>
+          </a:ln>
+        </p:spPr>
+        <p:style>
+          <a:lnRef idx="2">
+            <a:schemeClr val="accent1">
+              <a:shade val="15000"/>
+            </a:schemeClr>
+          </a:lnRef>
+          <a:fillRef idx="1">
+            <a:schemeClr val="accent1"/>
+          </a:fillRef>
+          <a:effectRef idx="0">
+            <a:schemeClr val="accent1"/>
+          </a:effectRef>
+          <a:fontRef idx="minor">
+            <a:schemeClr val="lt1"/>
+          </a:fontRef>
+        </p:style>
+        <p:txBody>
+          <a:bodyPr rtlCol="0" anchor="ctr"/>
+          <a:lstStyle/>
+          <a:p>
+            <a:pPr algn="ctr"/>
+            <a:endParaRPr lang="en-US"/>
+          </a:p>
+        </p:txBody>
+      </p:sp>
+      <p:sp>
+        <p:nvSpPr>
+          <p:cNvPr id="12" name="TextBox 11">
+            <a:extLst>
+              <a:ext uri="{FF2B5EF4-FFF2-40B4-BE49-F238E27FC236}">
+                <a16:creationId xmlns:a16="http://schemas.microsoft.com/office/drawing/2014/main" id="{D1D04286-3226-6A86-B428-27A06188B343}"/>
+              </a:ext>
+            </a:extLst>
+          </p:cNvPr>
+          <p:cNvSpPr txBox="1"/>
+          <p:nvPr/>
+        </p:nvSpPr>
+        <p:spPr>
+          <a:xfrm>
+            <a:off x="290051" y="4208208"/>
+            <a:ext cx="4026309" cy="954107"/>
+          </a:xfrm>
+          <a:prstGeom prst="rect">
+            <a:avLst/>
+          </a:prstGeom>
+          <a:noFill/>
+        </p:spPr>
+        <p:txBody>
+          <a:bodyPr wrap="square">
+            <a:spAutoFit/>
+          </a:bodyPr>
+          <a:lstStyle/>
+          <a:p>
+            <a:pPr>
+              <a:buNone/>
+            </a:pPr>
+            <a:r>
+              <a:rPr lang="en-US" sz="2800" b="1" dirty="0"/>
+              <a:t>Building Level Metrics – </a:t>
+            </a:r>
+          </a:p>
+          <a:p>
+            <a:pPr>
+              <a:buNone/>
+            </a:pPr>
+            <a:r>
+              <a:rPr lang="en-US" sz="2800" b="1" dirty="0"/>
+              <a:t>Vacant % by Building</a:t>
+            </a:r>
+          </a:p>
+        </p:txBody>
+      </p:sp>
+      <p:pic>
+        <p:nvPicPr>
+          <p:cNvPr id="6" name="Picture 5">
+            <a:extLst>
+              <a:ext uri="{FF2B5EF4-FFF2-40B4-BE49-F238E27FC236}">
+                <a16:creationId xmlns:a16="http://schemas.microsoft.com/office/drawing/2014/main" id="{6313C5A4-A268-7C6A-1F86-CD3588472186}"/>
+              </a:ext>
+            </a:extLst>
+          </p:cNvPr>
+          <p:cNvPicPr>
+            <a:picLocks noChangeAspect="1"/>
+          </p:cNvPicPr>
+          <p:nvPr/>
+        </p:nvPicPr>
+        <p:blipFill>
+          <a:blip r:embed="rId2"/>
+          <a:stretch>
+            <a:fillRect/>
+          </a:stretch>
+        </p:blipFill>
+        <p:spPr>
+          <a:xfrm>
+            <a:off x="144115" y="202654"/>
+            <a:ext cx="9617769" cy="3422991"/>
+          </a:xfrm>
+          <a:prstGeom prst="rect">
+            <a:avLst/>
+          </a:prstGeom>
+        </p:spPr>
+      </p:pic>
+    </p:spTree>
+    <p:extLst>
+      <p:ext uri="{BB962C8B-B14F-4D97-AF65-F5344CB8AC3E}">
+        <p14:creationId xmlns:p14="http://schemas.microsoft.com/office/powerpoint/2010/main" val="1578780350"/>
+      </p:ext>
+    </p:extLst>
+  </p:cSld>
+  <p:clrMapOvr>
+    <a:masterClrMapping/>
+  </p:clrMapOvr>
+</p:sld>
+</file>
+
+<file path=ppt/slides/slide3.xml><?xml version="1.0" encoding="utf-8"?>
+<p:sld xmlns:a="http://schemas.openxmlformats.org/drawingml/2006/main" xmlns:r="http://schemas.openxmlformats.org/officeDocument/2006/relationships" xmlns:p="http://schemas.openxmlformats.org/presentationml/2006/main">
+  <p:cSld>
+    <p:spTree>
+      <p:nvGrpSpPr>
+        <p:cNvPr id="1" name="">
+          <a:extLst>
+            <a:ext uri="{FF2B5EF4-FFF2-40B4-BE49-F238E27FC236}">
+              <a16:creationId xmlns:a16="http://schemas.microsoft.com/office/drawing/2014/main" id="{410F1259-5130-AB37-9F08-E6382A556327}"/>
+            </a:ext>
+          </a:extLst>
+        </p:cNvPr>
+        <p:cNvGrpSpPr/>
+        <p:nvPr/>
+      </p:nvGrpSpPr>
+      <p:grpSpPr>
+        <a:xfrm>
+          <a:off x="0" y="0"/>
+          <a:ext cx="0" cy="0"/>
+          <a:chOff x="0" y="0"/>
+          <a:chExt cx="0" cy="0"/>
+        </a:xfrm>
+      </p:grpSpPr>
+      <p:sp>
+        <p:nvSpPr>
+          <p:cNvPr id="3" name="Content Placeholder 2">
+            <a:extLst>
+              <a:ext uri="{FF2B5EF4-FFF2-40B4-BE49-F238E27FC236}">
+                <a16:creationId xmlns:a16="http://schemas.microsoft.com/office/drawing/2014/main" id="{EBC2478C-BEF6-73CC-C164-5B6E7ED9D37D}"/>
+              </a:ext>
+            </a:extLst>
+          </p:cNvPr>
+          <p:cNvSpPr>
+            <a:spLocks noGrp="1"/>
+          </p:cNvSpPr>
+          <p:nvPr>
+            <p:ph idx="1"/>
+          </p:nvPr>
+        </p:nvSpPr>
+        <p:spPr>
+          <a:xfrm>
+            <a:off x="438398" y="1440082"/>
+            <a:ext cx="4261421" cy="2706329"/>
+          </a:xfrm>
+        </p:spPr>
+        <p:txBody>
+          <a:bodyPr>
+            <a:normAutofit/>
+          </a:bodyPr>
+          <a:lstStyle/>
+          <a:p>
+            <a:pPr marL="285750" indent="-285750">
+              <a:buFont typeface="Arial" panose="020B0604020202020204" pitchFamily="34" charset="0"/>
+              <a:buChar char="•"/>
+            </a:pPr>
+            <a:r>
+              <a:rPr lang="en-US" sz="1600" dirty="0">
+                <a:latin typeface="Roboto" panose="02000000000000000000" pitchFamily="2" charset="0"/>
+                <a:ea typeface="Roboto" panose="02000000000000000000" pitchFamily="2" charset="0"/>
+                <a:cs typeface="Roboto" panose="02000000000000000000" pitchFamily="2" charset="0"/>
+              </a:rPr>
+              <a:t>Human Resources leads with 98% alignment — best in building</a:t>
+            </a:r>
+          </a:p>
+          <a:p>
+            <a:pPr marL="285750" indent="-285750">
+              <a:buFont typeface="Arial" panose="020B0604020202020204" pitchFamily="34" charset="0"/>
+              <a:buChar char="•"/>
+            </a:pPr>
+            <a:r>
+              <a:rPr lang="en-US" sz="1600" dirty="0">
+                <a:latin typeface="Roboto" panose="02000000000000000000" pitchFamily="2" charset="0"/>
+                <a:ea typeface="Roboto" panose="02000000000000000000" pitchFamily="2" charset="0"/>
+                <a:cs typeface="Roboto" panose="02000000000000000000" pitchFamily="2" charset="0"/>
+              </a:rPr>
+              <a:t>Engineering, Finance, Staff Groups, Operations all Healthy/Excellent (89–96%)</a:t>
+            </a:r>
+          </a:p>
+          <a:p>
+            <a:pPr marL="285750" indent="-285750">
+              <a:buFont typeface="Arial" panose="020B0604020202020204" pitchFamily="34" charset="0"/>
+              <a:buChar char="•"/>
+            </a:pPr>
+            <a:r>
+              <a:rPr lang="en-US" sz="1600" dirty="0">
+                <a:latin typeface="Roboto" panose="02000000000000000000" pitchFamily="2" charset="0"/>
+                <a:ea typeface="Roboto" panose="02000000000000000000" pitchFamily="2" charset="0"/>
+                <a:cs typeface="Roboto" panose="02000000000000000000" pitchFamily="2" charset="0"/>
+              </a:rPr>
+              <a:t>Retail is a clear outlier at 68% alignment (32% misallocated) — nearly 3x the building average</a:t>
+            </a:r>
+          </a:p>
+        </p:txBody>
+      </p:sp>
+      <p:sp>
+        <p:nvSpPr>
+          <p:cNvPr id="4" name="Title 3">
+            <a:extLst>
+              <a:ext uri="{FF2B5EF4-FFF2-40B4-BE49-F238E27FC236}">
+                <a16:creationId xmlns:a16="http://schemas.microsoft.com/office/drawing/2014/main" id="{5C55D89B-124F-4845-E705-F44BC7BFFCFE}"/>
+              </a:ext>
+            </a:extLst>
+          </p:cNvPr>
+          <p:cNvSpPr>
+            <a:spLocks noGrp="1"/>
+          </p:cNvSpPr>
+          <p:nvPr>
+            <p:ph type="title"/>
+          </p:nvPr>
+        </p:nvSpPr>
+        <p:spPr/>
+        <p:txBody>
+          <a:bodyPr/>
+          <a:lstStyle/>
+          <a:p>
+            <a:r>
+              <a:rPr lang="en-US" b="1" kern="1400" spc="200" dirty="0"/>
+              <a:t>Actual vs. Allocated Space Alignment – Building F</a:t>
+            </a:r>
+            <a:endParaRPr lang="en-US" kern="1400" spc="200" dirty="0"/>
+          </a:p>
+        </p:txBody>
+      </p:sp>
+      <p:pic>
+        <p:nvPicPr>
+          <p:cNvPr id="5" name="Picture 4">
+            <a:extLst>
+              <a:ext uri="{FF2B5EF4-FFF2-40B4-BE49-F238E27FC236}">
+                <a16:creationId xmlns:a16="http://schemas.microsoft.com/office/drawing/2014/main" id="{81EF81EE-0C21-21CA-48AA-B9ADA59BE318}"/>
+              </a:ext>
+            </a:extLst>
+          </p:cNvPr>
+          <p:cNvPicPr>
+            <a:picLocks noChangeAspect="1"/>
+          </p:cNvPicPr>
+          <p:nvPr/>
+        </p:nvPicPr>
+        <p:blipFill>
+          <a:blip r:embed="rId2"/>
+          <a:stretch>
+            <a:fillRect/>
+          </a:stretch>
+        </p:blipFill>
+        <p:spPr>
+          <a:xfrm>
+            <a:off x="4939950" y="1422876"/>
+            <a:ext cx="4484494" cy="4220840"/>
+          </a:xfrm>
+          <a:prstGeom prst="rect">
+            <a:avLst/>
+          </a:prstGeom>
+          <a:ln>
+            <a:solidFill>
+              <a:schemeClr val="tx1"/>
+            </a:solidFill>
+          </a:ln>
+        </p:spPr>
+      </p:pic>
+      <p:sp>
+        <p:nvSpPr>
+          <p:cNvPr id="2" name="Content Placeholder 2">
+            <a:extLst>
+              <a:ext uri="{FF2B5EF4-FFF2-40B4-BE49-F238E27FC236}">
+                <a16:creationId xmlns:a16="http://schemas.microsoft.com/office/drawing/2014/main" id="{B1FF8A76-5998-AB9D-227B-A0C933D2DED5}"/>
+              </a:ext>
+            </a:extLst>
+          </p:cNvPr>
+          <p:cNvSpPr txBox="1">
+            <a:spLocks/>
+          </p:cNvSpPr>
+          <p:nvPr/>
+        </p:nvSpPr>
+        <p:spPr>
+          <a:xfrm>
+            <a:off x="662942" y="4146411"/>
+            <a:ext cx="4261421" cy="1596102"/>
+          </a:xfrm>
+          <a:prstGeom prst="rect">
+            <a:avLst/>
+          </a:prstGeom>
+        </p:spPr>
+        <p:txBody>
+          <a:bodyPr vert="horz" lIns="91440" tIns="180000" rIns="91440" bIns="180000" rtlCol="0" anchor="ctr">
+            <a:normAutofit/>
+          </a:bodyPr>
+          <a:lstStyle>
+            <a:lvl1pPr marL="0" indent="0" algn="l" defTabSz="914400" rtl="0" eaLnBrk="1" latinLnBrk="0" hangingPunct="1">
+              <a:lnSpc>
+                <a:spcPct val="90000"/>
+              </a:lnSpc>
+              <a:spcBef>
+                <a:spcPts val="1800"/>
+              </a:spcBef>
+              <a:buClr>
+                <a:schemeClr val="accent1"/>
+              </a:buClr>
+              <a:buFont typeface="Wingdings" panose="05000000000000000000" pitchFamily="2" charset="2"/>
+              <a:buNone/>
+              <a:defRPr sz="1400" b="0" kern="1200">
+                <a:solidFill>
+                  <a:schemeClr val="tx1"/>
+                </a:solidFill>
+                <a:latin typeface="Roboto Medium" panose="02000000000000000000" pitchFamily="2" charset="0"/>
+                <a:ea typeface="Roboto Medium" panose="02000000000000000000" pitchFamily="2" charset="0"/>
+                <a:cs typeface="Roboto Medium" panose="02000000000000000000" pitchFamily="2" charset="0"/>
+              </a:defRPr>
+            </a:lvl1pPr>
+            <a:lvl2pPr marL="800100" indent="-342900" algn="l" defTabSz="914400" rtl="0" eaLnBrk="1" latinLnBrk="0" hangingPunct="1">
+              <a:lnSpc>
+                <a:spcPct val="90000"/>
+              </a:lnSpc>
+              <a:spcBef>
+                <a:spcPts val="0"/>
+              </a:spcBef>
+              <a:buClr>
+                <a:schemeClr val="accent1"/>
+              </a:buClr>
+              <a:buFont typeface="Wingdings" panose="05000000000000000000" pitchFamily="2" charset="2"/>
+              <a:buChar char="§"/>
+              <a:defRPr sz="1200" kern="1200">
+                <a:solidFill>
+                  <a:schemeClr val="tx1"/>
+                </a:solidFill>
+                <a:latin typeface="+mn-lt"/>
+                <a:ea typeface="Roboto Light" panose="02000000000000000000" pitchFamily="2" charset="0"/>
+                <a:cs typeface="Roboto Light" panose="02000000000000000000" pitchFamily="2" charset="0"/>
+              </a:defRPr>
+            </a:lvl2pPr>
+            <a:lvl3pPr marL="1257300" indent="-342900" algn="l" defTabSz="914400" rtl="0" eaLnBrk="1" latinLnBrk="0" hangingPunct="1">
+              <a:lnSpc>
+                <a:spcPct val="90000"/>
+              </a:lnSpc>
+              <a:spcBef>
+                <a:spcPts val="0"/>
+              </a:spcBef>
+              <a:buClr>
+                <a:schemeClr val="tx1"/>
+              </a:buClr>
+              <a:buFont typeface="Roboto Light" panose="02000000000000000000" pitchFamily="2" charset="0"/>
+              <a:buChar char="-"/>
+              <a:defRPr sz="1200" kern="1200">
+                <a:solidFill>
+                  <a:schemeClr val="tx1"/>
+                </a:solidFill>
+                <a:latin typeface="+mn-lt"/>
+                <a:ea typeface="Roboto Light" panose="02000000000000000000" pitchFamily="2" charset="0"/>
+                <a:cs typeface="Roboto Light" panose="02000000000000000000" pitchFamily="2" charset="0"/>
+              </a:defRPr>
+            </a:lvl3pPr>
+            <a:lvl4pPr marL="1657350" indent="-285750" algn="l" defTabSz="914400" rtl="0" eaLnBrk="1" latinLnBrk="0" hangingPunct="1">
+              <a:lnSpc>
+                <a:spcPct val="90000"/>
+              </a:lnSpc>
+              <a:spcBef>
+                <a:spcPts val="0"/>
+              </a:spcBef>
+              <a:buClr>
+                <a:schemeClr val="tx1"/>
+              </a:buClr>
+              <a:buFont typeface="Roboto Light" panose="02000000000000000000" pitchFamily="2" charset="0"/>
+              <a:buChar char="-"/>
+              <a:defRPr sz="1200" kern="1200">
+                <a:solidFill>
+                  <a:schemeClr val="tx1"/>
+                </a:solidFill>
+                <a:latin typeface="+mn-lt"/>
+                <a:ea typeface="Roboto Light" panose="02000000000000000000" pitchFamily="2" charset="0"/>
+                <a:cs typeface="Roboto Light" panose="02000000000000000000" pitchFamily="2" charset="0"/>
+              </a:defRPr>
+            </a:lvl4pPr>
+            <a:lvl5pPr marL="2114550" indent="-285750" algn="l" defTabSz="914400" rtl="0" eaLnBrk="1" latinLnBrk="0" hangingPunct="1">
+              <a:lnSpc>
+                <a:spcPct val="90000"/>
+              </a:lnSpc>
+              <a:spcBef>
+                <a:spcPts val="0"/>
+              </a:spcBef>
+              <a:buClr>
+                <a:schemeClr val="tx1"/>
+              </a:buClr>
+              <a:buFont typeface="Roboto Light" panose="02000000000000000000" pitchFamily="2" charset="0"/>
+              <a:buChar char="-"/>
+              <a:defRPr sz="1200" kern="1200">
+                <a:solidFill>
+                  <a:schemeClr val="tx1"/>
+                </a:solidFill>
+                <a:latin typeface="+mn-lt"/>
+                <a:ea typeface="Roboto Light" panose="02000000000000000000" pitchFamily="2" charset="0"/>
+                <a:cs typeface="Roboto Light" panose="02000000000000000000" pitchFamily="2" charset="0"/>
+              </a:defRPr>
+            </a:lvl5pPr>
+            <a:lvl6pPr marL="2514600" indent="-228600" algn="l" defTabSz="914400" rtl="0" eaLnBrk="1" latinLnBrk="0" hangingPunct="1">
+              <a:lnSpc>
+                <a:spcPct val="90000"/>
+              </a:lnSpc>
+              <a:spcBef>
+                <a:spcPts val="500"/>
+              </a:spcBef>
+              <a:buFont typeface="Arial" panose="020B0604020202020204" pitchFamily="34" charset="0"/>
+              <a:buChar char="•"/>
+              <a:defRPr sz="1800" kern="1200">
+                <a:solidFill>
+                  <a:schemeClr val="tx1"/>
+                </a:solidFill>
+                <a:latin typeface="+mn-lt"/>
+                <a:ea typeface="+mn-ea"/>
+                <a:cs typeface="+mn-cs"/>
+              </a:defRPr>
+            </a:lvl6pPr>
+            <a:lvl7pPr marL="2971800" indent="-228600" algn="l" defTabSz="914400" rtl="0" eaLnBrk="1" latinLnBrk="0" hangingPunct="1">
+              <a:lnSpc>
+                <a:spcPct val="90000"/>
+              </a:lnSpc>
+              <a:spcBef>
+                <a:spcPts val="500"/>
+              </a:spcBef>
+              <a:buFont typeface="Arial" panose="020B0604020202020204" pitchFamily="34" charset="0"/>
+              <a:buChar char="•"/>
+              <a:defRPr sz="1800" kern="1200">
+                <a:solidFill>
+                  <a:schemeClr val="tx1"/>
+                </a:solidFill>
+                <a:latin typeface="+mn-lt"/>
+                <a:ea typeface="+mn-ea"/>
+                <a:cs typeface="+mn-cs"/>
+              </a:defRPr>
+            </a:lvl7pPr>
+            <a:lvl8pPr marL="3429000" indent="-228600" algn="l" defTabSz="914400" rtl="0" eaLnBrk="1" latinLnBrk="0" hangingPunct="1">
+              <a:lnSpc>
+                <a:spcPct val="90000"/>
+              </a:lnSpc>
+              <a:spcBef>
+                <a:spcPts val="500"/>
+              </a:spcBef>
+              <a:buFont typeface="Arial" panose="020B0604020202020204" pitchFamily="34" charset="0"/>
+              <a:buChar char="•"/>
+              <a:defRPr sz="1800" kern="1200">
+                <a:solidFill>
+                  <a:schemeClr val="tx1"/>
+                </a:solidFill>
+                <a:latin typeface="+mn-lt"/>
+                <a:ea typeface="+mn-ea"/>
+                <a:cs typeface="+mn-cs"/>
+              </a:defRPr>
+            </a:lvl8pPr>
+            <a:lvl9pPr marL="3886200" indent="-228600" algn="l" defTabSz="914400" rtl="0" eaLnBrk="1" latinLnBrk="0" hangingPunct="1">
+              <a:lnSpc>
+                <a:spcPct val="90000"/>
+              </a:lnSpc>
+              <a:spcBef>
+                <a:spcPts val="500"/>
+              </a:spcBef>
+              <a:buFont typeface="Arial" panose="020B0604020202020204" pitchFamily="34" charset="0"/>
+              <a:buChar char="•"/>
+              <a:defRPr sz="1800" kern="1200">
+                <a:solidFill>
+                  <a:schemeClr val="tx1"/>
+                </a:solidFill>
+                <a:latin typeface="+mn-lt"/>
+                <a:ea typeface="+mn-ea"/>
+                <a:cs typeface="+mn-cs"/>
+              </a:defRPr>
+            </a:lvl9pPr>
+          </a:lstStyle>
+          <a:p>
+            <a:r>
+              <a:rPr lang="en-US" sz="1600" b="1" dirty="0">
+                <a:latin typeface="Roboto" panose="02000000000000000000" pitchFamily="2" charset="0"/>
+                <a:ea typeface="Roboto" panose="02000000000000000000" pitchFamily="2" charset="0"/>
+                <a:cs typeface="Roboto" panose="02000000000000000000" pitchFamily="2" charset="0"/>
+              </a:rPr>
+              <a:t>Recommendation</a:t>
+            </a:r>
+            <a:r>
+              <a:rPr lang="en-US" sz="1600" dirty="0">
+                <a:latin typeface="Roboto" panose="02000000000000000000" pitchFamily="2" charset="0"/>
+                <a:ea typeface="Roboto" panose="02000000000000000000" pitchFamily="2" charset="0"/>
+                <a:cs typeface="Roboto" panose="02000000000000000000" pitchFamily="2" charset="0"/>
+              </a:rPr>
+              <a:t>: </a:t>
+            </a:r>
+          </a:p>
+          <a:p>
+            <a:r>
+              <a:rPr lang="en-US" sz="1600" dirty="0">
+                <a:latin typeface="Roboto" panose="02000000000000000000" pitchFamily="2" charset="0"/>
+                <a:ea typeface="Roboto" panose="02000000000000000000" pitchFamily="2" charset="0"/>
+                <a:cs typeface="Roboto" panose="02000000000000000000" pitchFamily="2" charset="0"/>
+              </a:rPr>
+              <a:t>Investigate Retail's space misalignment — confirm if intentional (project seating, temp moves) or needs reallocation</a:t>
+            </a:r>
+          </a:p>
+        </p:txBody>
+      </p:sp>
+    </p:spTree>
+    <p:extLst>
+      <p:ext uri="{BB962C8B-B14F-4D97-AF65-F5344CB8AC3E}">
+        <p14:creationId xmlns:p14="http://schemas.microsoft.com/office/powerpoint/2010/main" val="662444546"/>
+      </p:ext>
+    </p:extLst>
+  </p:cSld>
+  <p:clrMapOvr>
+    <a:masterClrMapping/>
+  </p:clrMapOvr>
+</p:sld>
+</file>
+
+<file path=ppt/slides/slide4.xml><?xml version="1.0" encoding="utf-8"?>
+<p:sld xmlns:a="http://schemas.openxmlformats.org/drawingml/2006/main" xmlns:r="http://schemas.openxmlformats.org/officeDocument/2006/relationships" xmlns:p="http://schemas.openxmlformats.org/presentationml/2006/main">
+  <p:cSld>
+    <p:spTree>
+      <p:nvGrpSpPr>
+        <p:cNvPr id="1" name="">
+          <a:extLst>
+            <a:ext uri="{FF2B5EF4-FFF2-40B4-BE49-F238E27FC236}">
+              <a16:creationId xmlns:a16="http://schemas.microsoft.com/office/drawing/2014/main" id="{02BB24FD-295C-0F8B-BEB2-F72A2BECE26B}"/>
+            </a:ext>
+          </a:extLst>
+        </p:cNvPr>
+        <p:cNvGrpSpPr/>
+        <p:nvPr/>
+      </p:nvGrpSpPr>
+      <p:grpSpPr>
+        <a:xfrm>
+          <a:off x="0" y="0"/>
+          <a:ext cx="0" cy="0"/>
+          <a:chOff x="0" y="0"/>
+          <a:chExt cx="0" cy="0"/>
+        </a:xfrm>
+      </p:grpSpPr>
+      <p:sp>
+        <p:nvSpPr>
+          <p:cNvPr id="7" name="Content Placeholder 2">
+            <a:extLst>
+              <a:ext uri="{FF2B5EF4-FFF2-40B4-BE49-F238E27FC236}">
+                <a16:creationId xmlns:a16="http://schemas.microsoft.com/office/drawing/2014/main" id="{307F34A8-1176-3F01-4E4F-F3D3C293A21D}"/>
+              </a:ext>
+            </a:extLst>
+          </p:cNvPr>
+          <p:cNvSpPr>
+            <a:spLocks noGrp="1"/>
+          </p:cNvSpPr>
+          <p:nvPr>
+            <p:ph idx="1"/>
+          </p:nvPr>
+        </p:nvSpPr>
+        <p:spPr>
+          <a:xfrm>
+            <a:off x="438398" y="1440082"/>
+            <a:ext cx="4261421" cy="2706329"/>
+          </a:xfrm>
+        </p:spPr>
+        <p:txBody>
+          <a:bodyPr>
+            <a:normAutofit/>
+          </a:bodyPr>
+          <a:lstStyle/>
+          <a:p>
+            <a:pPr marL="285750" indent="-285750">
+              <a:buFont typeface="Arial" panose="020B0604020202020204" pitchFamily="34" charset="0"/>
+              <a:buChar char="•"/>
+            </a:pPr>
+            <a:r>
+              <a:rPr lang="en-US" sz="1600" dirty="0">
+                <a:latin typeface="Roboto" panose="02000000000000000000" pitchFamily="2" charset="0"/>
+                <a:ea typeface="Roboto" panose="02000000000000000000" pitchFamily="2" charset="0"/>
+                <a:cs typeface="Roboto" panose="02000000000000000000" pitchFamily="2" charset="0"/>
+              </a:rPr>
+              <a:t>Floor 1: 72% aligned — office-heavy, low flex capacity</a:t>
+            </a:r>
+          </a:p>
+          <a:p>
+            <a:pPr marL="285750" indent="-285750">
+              <a:buFont typeface="Arial" panose="020B0604020202020204" pitchFamily="34" charset="0"/>
+              <a:buChar char="•"/>
+            </a:pPr>
+            <a:r>
+              <a:rPr lang="en-US" sz="1600" dirty="0">
+                <a:latin typeface="Roboto" panose="02000000000000000000" pitchFamily="2" charset="0"/>
+                <a:ea typeface="Roboto" panose="02000000000000000000" pitchFamily="2" charset="0"/>
+                <a:cs typeface="Roboto" panose="02000000000000000000" pitchFamily="2" charset="0"/>
+              </a:rPr>
+              <a:t>Floor 2: 65% aligned — more flex seats, but overflow spills into other orgs' space</a:t>
+            </a:r>
+          </a:p>
+          <a:p>
+            <a:pPr marL="285750" indent="-285750">
+              <a:buFont typeface="Arial" panose="020B0604020202020204" pitchFamily="34" charset="0"/>
+              <a:buChar char="•"/>
+            </a:pPr>
+            <a:r>
+              <a:rPr lang="en-US" sz="1600" dirty="0">
+                <a:latin typeface="Roboto" panose="02000000000000000000" pitchFamily="2" charset="0"/>
+                <a:ea typeface="Roboto" panose="02000000000000000000" pitchFamily="2" charset="0"/>
+                <a:cs typeface="Roboto" panose="02000000000000000000" pitchFamily="2" charset="0"/>
+              </a:rPr>
+              <a:t>Root cause: insufficient Retail-allocated seats on either floor</a:t>
+            </a:r>
+          </a:p>
+        </p:txBody>
+      </p:sp>
+      <p:sp>
+        <p:nvSpPr>
+          <p:cNvPr id="4" name="Title 3">
+            <a:extLst>
+              <a:ext uri="{FF2B5EF4-FFF2-40B4-BE49-F238E27FC236}">
+                <a16:creationId xmlns:a16="http://schemas.microsoft.com/office/drawing/2014/main" id="{CE5AD8F9-1CEE-B7CE-5E31-62D4617B8CFE}"/>
+              </a:ext>
+            </a:extLst>
+          </p:cNvPr>
+          <p:cNvSpPr>
+            <a:spLocks noGrp="1"/>
+          </p:cNvSpPr>
+          <p:nvPr>
+            <p:ph type="title"/>
+          </p:nvPr>
+        </p:nvSpPr>
+        <p:spPr/>
+        <p:txBody>
+          <a:bodyPr/>
+          <a:lstStyle/>
+          <a:p>
+            <a:r>
+              <a:rPr lang="en-US" b="1" spc="200" dirty="0"/>
+              <a:t>Retail Workspace Allocation by Floor</a:t>
+            </a:r>
+          </a:p>
+        </p:txBody>
+      </p:sp>
+      <p:pic>
+        <p:nvPicPr>
+          <p:cNvPr id="5" name="Picture 4">
+            <a:extLst>
+              <a:ext uri="{FF2B5EF4-FFF2-40B4-BE49-F238E27FC236}">
+                <a16:creationId xmlns:a16="http://schemas.microsoft.com/office/drawing/2014/main" id="{744F7744-708D-3292-6FB7-85EDA3FC642A}"/>
+              </a:ext>
+            </a:extLst>
+          </p:cNvPr>
+          <p:cNvPicPr>
+            <a:picLocks noChangeAspect="1"/>
+          </p:cNvPicPr>
+          <p:nvPr/>
+        </p:nvPicPr>
+        <p:blipFill>
+          <a:blip r:embed="rId2"/>
+          <a:stretch>
+            <a:fillRect/>
+          </a:stretch>
+        </p:blipFill>
+        <p:spPr>
+          <a:xfrm>
+            <a:off x="4981639" y="1478322"/>
+            <a:ext cx="4426968" cy="4678801"/>
+          </a:xfrm>
+          <a:prstGeom prst="rect">
+            <a:avLst/>
+          </a:prstGeom>
+          <a:ln>
+            <a:solidFill>
+              <a:schemeClr val="tx1"/>
+            </a:solidFill>
+          </a:ln>
+        </p:spPr>
+      </p:pic>
+      <p:sp>
+        <p:nvSpPr>
+          <p:cNvPr id="8" name="Content Placeholder 2">
+            <a:extLst>
+              <a:ext uri="{FF2B5EF4-FFF2-40B4-BE49-F238E27FC236}">
+                <a16:creationId xmlns:a16="http://schemas.microsoft.com/office/drawing/2014/main" id="{9AE0BB90-C764-FED9-4E5F-2F2D0F95D033}"/>
+              </a:ext>
+            </a:extLst>
+          </p:cNvPr>
+          <p:cNvSpPr txBox="1">
+            <a:spLocks/>
+          </p:cNvSpPr>
+          <p:nvPr/>
+        </p:nvSpPr>
+        <p:spPr>
+          <a:xfrm>
+            <a:off x="662942" y="4146411"/>
+            <a:ext cx="4261421" cy="1596102"/>
+          </a:xfrm>
+          <a:prstGeom prst="rect">
+            <a:avLst/>
+          </a:prstGeom>
+        </p:spPr>
+        <p:txBody>
+          <a:bodyPr vert="horz" lIns="91440" tIns="180000" rIns="91440" bIns="180000" rtlCol="0" anchor="ctr">
+            <a:normAutofit/>
+          </a:bodyPr>
+          <a:lstStyle>
+            <a:lvl1pPr marL="0" indent="0" algn="l" defTabSz="914400" rtl="0" eaLnBrk="1" latinLnBrk="0" hangingPunct="1">
+              <a:lnSpc>
+                <a:spcPct val="90000"/>
+              </a:lnSpc>
+              <a:spcBef>
+                <a:spcPts val="1800"/>
+              </a:spcBef>
+              <a:buClr>
+                <a:schemeClr val="accent1"/>
+              </a:buClr>
+              <a:buFont typeface="Wingdings" panose="05000000000000000000" pitchFamily="2" charset="2"/>
+              <a:buNone/>
+              <a:defRPr sz="1400" b="0" kern="1200">
+                <a:solidFill>
+                  <a:schemeClr val="tx1"/>
+                </a:solidFill>
+                <a:latin typeface="Roboto Medium" panose="02000000000000000000" pitchFamily="2" charset="0"/>
+                <a:ea typeface="Roboto Medium" panose="02000000000000000000" pitchFamily="2" charset="0"/>
+                <a:cs typeface="Roboto Medium" panose="02000000000000000000" pitchFamily="2" charset="0"/>
+              </a:defRPr>
+            </a:lvl1pPr>
+            <a:lvl2pPr marL="800100" indent="-342900" algn="l" defTabSz="914400" rtl="0" eaLnBrk="1" latinLnBrk="0" hangingPunct="1">
+              <a:lnSpc>
+                <a:spcPct val="90000"/>
+              </a:lnSpc>
+              <a:spcBef>
+                <a:spcPts val="0"/>
+              </a:spcBef>
+              <a:buClr>
+                <a:schemeClr val="accent1"/>
+              </a:buClr>
+              <a:buFont typeface="Wingdings" panose="05000000000000000000" pitchFamily="2" charset="2"/>
+              <a:buChar char="§"/>
+              <a:defRPr sz="1200" kern="1200">
+                <a:solidFill>
+                  <a:schemeClr val="tx1"/>
+                </a:solidFill>
+                <a:latin typeface="+mn-lt"/>
+                <a:ea typeface="Roboto Light" panose="02000000000000000000" pitchFamily="2" charset="0"/>
+                <a:cs typeface="Roboto Light" panose="02000000000000000000" pitchFamily="2" charset="0"/>
+              </a:defRPr>
+            </a:lvl2pPr>
+            <a:lvl3pPr marL="1257300" indent="-342900" algn="l" defTabSz="914400" rtl="0" eaLnBrk="1" latinLnBrk="0" hangingPunct="1">
+              <a:lnSpc>
+                <a:spcPct val="90000"/>
+              </a:lnSpc>
+              <a:spcBef>
+                <a:spcPts val="0"/>
+              </a:spcBef>
+              <a:buClr>
+                <a:schemeClr val="tx1"/>
+              </a:buClr>
+              <a:buFont typeface="Roboto Light" panose="02000000000000000000" pitchFamily="2" charset="0"/>
+              <a:buChar char="-"/>
+              <a:defRPr sz="1200" kern="1200">
+                <a:solidFill>
+                  <a:schemeClr val="tx1"/>
+                </a:solidFill>
+                <a:latin typeface="+mn-lt"/>
+                <a:ea typeface="Roboto Light" panose="02000000000000000000" pitchFamily="2" charset="0"/>
+                <a:cs typeface="Roboto Light" panose="02000000000000000000" pitchFamily="2" charset="0"/>
+              </a:defRPr>
+            </a:lvl3pPr>
+            <a:lvl4pPr marL="1657350" indent="-285750" algn="l" defTabSz="914400" rtl="0" eaLnBrk="1" latinLnBrk="0" hangingPunct="1">
+              <a:lnSpc>
+                <a:spcPct val="90000"/>
+              </a:lnSpc>
+              <a:spcBef>
+                <a:spcPts val="0"/>
+              </a:spcBef>
+              <a:buClr>
+                <a:schemeClr val="tx1"/>
+              </a:buClr>
+              <a:buFont typeface="Roboto Light" panose="02000000000000000000" pitchFamily="2" charset="0"/>
+              <a:buChar char="-"/>
+              <a:defRPr sz="1200" kern="1200">
+                <a:solidFill>
+                  <a:schemeClr val="tx1"/>
+                </a:solidFill>
+                <a:latin typeface="+mn-lt"/>
+                <a:ea typeface="Roboto Light" panose="02000000000000000000" pitchFamily="2" charset="0"/>
+                <a:cs typeface="Roboto Light" panose="02000000000000000000" pitchFamily="2" charset="0"/>
+              </a:defRPr>
+            </a:lvl4pPr>
+            <a:lvl5pPr marL="2114550" indent="-285750" algn="l" defTabSz="914400" rtl="0" eaLnBrk="1" latinLnBrk="0" hangingPunct="1">
+              <a:lnSpc>
+                <a:spcPct val="90000"/>
+              </a:lnSpc>
+              <a:spcBef>
+                <a:spcPts val="0"/>
+              </a:spcBef>
+              <a:buClr>
+                <a:schemeClr val="tx1"/>
+              </a:buClr>
+              <a:buFont typeface="Roboto Light" panose="02000000000000000000" pitchFamily="2" charset="0"/>
+              <a:buChar char="-"/>
+              <a:defRPr sz="1200" kern="1200">
+                <a:solidFill>
+                  <a:schemeClr val="tx1"/>
+                </a:solidFill>
+                <a:latin typeface="+mn-lt"/>
+                <a:ea typeface="Roboto Light" panose="02000000000000000000" pitchFamily="2" charset="0"/>
+                <a:cs typeface="Roboto Light" panose="02000000000000000000" pitchFamily="2" charset="0"/>
+              </a:defRPr>
+            </a:lvl5pPr>
+            <a:lvl6pPr marL="2514600" indent="-228600" algn="l" defTabSz="914400" rtl="0" eaLnBrk="1" latinLnBrk="0" hangingPunct="1">
+              <a:lnSpc>
+                <a:spcPct val="90000"/>
+              </a:lnSpc>
+              <a:spcBef>
+                <a:spcPts val="500"/>
+              </a:spcBef>
+              <a:buFont typeface="Arial" panose="020B0604020202020204" pitchFamily="34" charset="0"/>
+              <a:buChar char="•"/>
+              <a:defRPr sz="1800" kern="1200">
+                <a:solidFill>
+                  <a:schemeClr val="tx1"/>
+                </a:solidFill>
+                <a:latin typeface="+mn-lt"/>
+                <a:ea typeface="+mn-ea"/>
+                <a:cs typeface="+mn-cs"/>
+              </a:defRPr>
+            </a:lvl6pPr>
+            <a:lvl7pPr marL="2971800" indent="-228600" algn="l" defTabSz="914400" rtl="0" eaLnBrk="1" latinLnBrk="0" hangingPunct="1">
+              <a:lnSpc>
+                <a:spcPct val="90000"/>
+              </a:lnSpc>
+              <a:spcBef>
+                <a:spcPts val="500"/>
+              </a:spcBef>
+              <a:buFont typeface="Arial" panose="020B0604020202020204" pitchFamily="34" charset="0"/>
+              <a:buChar char="•"/>
+              <a:defRPr sz="1800" kern="1200">
+                <a:solidFill>
+                  <a:schemeClr val="tx1"/>
+                </a:solidFill>
+                <a:latin typeface="+mn-lt"/>
+                <a:ea typeface="+mn-ea"/>
+                <a:cs typeface="+mn-cs"/>
+              </a:defRPr>
+            </a:lvl7pPr>
+            <a:lvl8pPr marL="3429000" indent="-228600" algn="l" defTabSz="914400" rtl="0" eaLnBrk="1" latinLnBrk="0" hangingPunct="1">
+              <a:lnSpc>
+                <a:spcPct val="90000"/>
+              </a:lnSpc>
+              <a:spcBef>
+                <a:spcPts val="500"/>
+              </a:spcBef>
+              <a:buFont typeface="Arial" panose="020B0604020202020204" pitchFamily="34" charset="0"/>
+              <a:buChar char="•"/>
+              <a:defRPr sz="1800" kern="1200">
+                <a:solidFill>
+                  <a:schemeClr val="tx1"/>
+                </a:solidFill>
+                <a:latin typeface="+mn-lt"/>
+                <a:ea typeface="+mn-ea"/>
+                <a:cs typeface="+mn-cs"/>
+              </a:defRPr>
+            </a:lvl8pPr>
+            <a:lvl9pPr marL="3886200" indent="-228600" algn="l" defTabSz="914400" rtl="0" eaLnBrk="1" latinLnBrk="0" hangingPunct="1">
+              <a:lnSpc>
+                <a:spcPct val="90000"/>
+              </a:lnSpc>
+              <a:spcBef>
+                <a:spcPts val="500"/>
+              </a:spcBef>
+              <a:buFont typeface="Arial" panose="020B0604020202020204" pitchFamily="34" charset="0"/>
+              <a:buChar char="•"/>
+              <a:defRPr sz="1800" kern="1200">
+                <a:solidFill>
+                  <a:schemeClr val="tx1"/>
+                </a:solidFill>
+                <a:latin typeface="+mn-lt"/>
+                <a:ea typeface="+mn-ea"/>
+                <a:cs typeface="+mn-cs"/>
+              </a:defRPr>
+            </a:lvl9pPr>
+          </a:lstStyle>
+          <a:p>
+            <a:r>
+              <a:rPr lang="en-US" sz="1600" b="1" dirty="0">
+                <a:latin typeface="Roboto" panose="02000000000000000000" pitchFamily="2" charset="0"/>
+                <a:ea typeface="Roboto" panose="02000000000000000000" pitchFamily="2" charset="0"/>
+                <a:cs typeface="Roboto" panose="02000000000000000000" pitchFamily="2" charset="0"/>
+              </a:rPr>
+              <a:t>Recommendation</a:t>
+            </a:r>
+            <a:r>
+              <a:rPr lang="en-US" sz="1600" dirty="0">
+                <a:latin typeface="Roboto" panose="02000000000000000000" pitchFamily="2" charset="0"/>
+                <a:ea typeface="Roboto" panose="02000000000000000000" pitchFamily="2" charset="0"/>
+                <a:cs typeface="Roboto" panose="02000000000000000000" pitchFamily="2" charset="0"/>
+              </a:rPr>
+              <a:t>: </a:t>
+            </a:r>
+          </a:p>
+          <a:p>
+            <a:r>
+              <a:rPr lang="en-US" sz="1600" dirty="0">
+                <a:latin typeface="Roboto" panose="02000000000000000000" pitchFamily="2" charset="0"/>
+                <a:ea typeface="Roboto" panose="02000000000000000000" pitchFamily="2" charset="0"/>
+                <a:cs typeface="Roboto" panose="02000000000000000000" pitchFamily="2" charset="0"/>
+              </a:rPr>
+              <a:t>Consolidate Retail, reallocate surplus from under-used orgs (e.g., Engineering), and add flex seating on Floor 1 — then monitor</a:t>
+            </a:r>
+          </a:p>
+        </p:txBody>
+      </p:sp>
+    </p:spTree>
+    <p:extLst>
+      <p:ext uri="{BB962C8B-B14F-4D97-AF65-F5344CB8AC3E}">
+        <p14:creationId xmlns:p14="http://schemas.microsoft.com/office/powerpoint/2010/main" val="819619271"/>
+      </p:ext>
+    </p:extLst>
+  </p:cSld>
+  <p:clrMapOvr>
+    <a:masterClrMapping/>
+  </p:clrMapOvr>
+</p:sld>
+</file>
+
+<file path=ppt/slides/slide5.xml><?xml version="1.0" encoding="utf-8"?>
 <p:sld xmlns:a="http://schemas.openxmlformats.org/drawingml/2006/main" xmlns:r="http://schemas.openxmlformats.org/officeDocument/2006/relationships" xmlns:p="http://schemas.openxmlformats.org/presentationml/2006/main">
   <p:cSld>
     <p:spTree>
@@ -5382,7 +10085,7 @@
         <p:spPr>
           <a:xfrm>
             <a:off x="459292" y="1358041"/>
-            <a:ext cx="3941257" cy="5040630"/>
+            <a:ext cx="4493708" cy="5040630"/>
           </a:xfrm>
         </p:spPr>
         <p:txBody>
@@ -5391,37 +10094,39 @@
           </a:bodyPr>
           <a:lstStyle/>
           <a:p>
+            <a:pPr marL="285750" indent="-285750">
+              <a:buFont typeface="Arial" panose="020B0604020202020204" pitchFamily="34" charset="0"/>
+              <a:buChar char="•"/>
+            </a:pPr>
             <a:r>
               <a:rPr lang="en-US" sz="1600" dirty="0">
                 <a:latin typeface="Roboto" panose="02000000000000000000" pitchFamily="2" charset="0"/>
                 <a:ea typeface="Roboto" panose="02000000000000000000" pitchFamily="2" charset="0"/>
                 <a:cs typeface="Roboto" panose="02000000000000000000" pitchFamily="2" charset="0"/>
               </a:rPr>
-              <a:t>Floor 1 shows </a:t>
-            </a:r>
-            <a:r>
-              <a:rPr lang="en-US" sz="1600" b="1" dirty="0">
-                <a:latin typeface="Roboto" panose="02000000000000000000" pitchFamily="2" charset="0"/>
-                <a:ea typeface="Roboto" panose="02000000000000000000" pitchFamily="2" charset="0"/>
-                <a:cs typeface="Roboto" panose="02000000000000000000" pitchFamily="2" charset="0"/>
-              </a:rPr>
-              <a:t>38</a:t>
-            </a:r>
+              <a:t>Overall occupancy: 38 of 53 workstations (~72%) — 15 vacant desks remain</a:t>
+            </a:r>
+          </a:p>
+          <a:p>
+            <a:pPr marL="285750" indent="-285750">
+              <a:buFont typeface="Arial" panose="020B0604020202020204" pitchFamily="34" charset="0"/>
+              <a:buChar char="•"/>
+            </a:pPr>
             <a:r>
               <a:rPr lang="en-US" sz="1600" dirty="0">
                 <a:latin typeface="Roboto" panose="02000000000000000000" pitchFamily="2" charset="0"/>
                 <a:ea typeface="Roboto" panose="02000000000000000000" pitchFamily="2" charset="0"/>
                 <a:cs typeface="Roboto" panose="02000000000000000000" pitchFamily="2" charset="0"/>
               </a:rPr>
-              <a:t> occupied out of </a:t>
-            </a:r>
-            <a:r>
-              <a:rPr lang="en-US" sz="1600" b="1" dirty="0">
+              <a:t>Engineering is the biggest </a:t>
+            </a:r>
+            <a:r>
+              <a:rPr lang="en-US" sz="1600" dirty="0" err="1">
                 <a:latin typeface="Roboto" panose="02000000000000000000" pitchFamily="2" charset="0"/>
                 <a:ea typeface="Roboto" panose="02000000000000000000" pitchFamily="2" charset="0"/>
                 <a:cs typeface="Roboto" panose="02000000000000000000" pitchFamily="2" charset="0"/>
               </a:rPr>
-              <a:t>53</a:t>
+              <a:t>underutilizer</a:t>
             </a:r>
             <a:r>
               <a:rPr lang="en-US" sz="1600" dirty="0">
@@ -5429,67 +10134,36 @@
                 <a:ea typeface="Roboto" panose="02000000000000000000" pitchFamily="2" charset="0"/>
                 <a:cs typeface="Roboto" panose="02000000000000000000" pitchFamily="2" charset="0"/>
               </a:rPr>
-              <a:t> total workstations (~</a:t>
-            </a:r>
-            <a:r>
-              <a:rPr lang="en-US" sz="1600" b="1" dirty="0">
-                <a:latin typeface="Roboto" panose="02000000000000000000" pitchFamily="2" charset="0"/>
-                <a:ea typeface="Roboto" panose="02000000000000000000" pitchFamily="2" charset="0"/>
-                <a:cs typeface="Roboto" panose="02000000000000000000" pitchFamily="2" charset="0"/>
-              </a:rPr>
-              <a:t>72%</a:t>
-            </a:r>
+              <a:t>: only 1 occupied vs. 13 vacant — largest reallocation opportunity</a:t>
+            </a:r>
+          </a:p>
+          <a:p>
+            <a:pPr marL="285750" indent="-285750">
+              <a:buFont typeface="Arial" panose="020B0604020202020204" pitchFamily="34" charset="0"/>
+              <a:buChar char="•"/>
+            </a:pPr>
             <a:r>
               <a:rPr lang="en-US" sz="1600" dirty="0">
                 <a:latin typeface="Roboto" panose="02000000000000000000" pitchFamily="2" charset="0"/>
                 <a:ea typeface="Roboto" panose="02000000000000000000" pitchFamily="2" charset="0"/>
                 <a:cs typeface="Roboto" panose="02000000000000000000" pitchFamily="2" charset="0"/>
               </a:rPr>
-              <a:t> occupancy), leaving 15 vacant desks available for reallocation. </a:t>
-            </a:r>
-          </a:p>
-          <a:p>
+              <a:t>Travel, Technologies, and Staff Groups are fully utilized (14, 9, 8 occupied, 0 vacant) — no spare capacity</a:t>
+            </a:r>
+          </a:p>
+          <a:p>
+            <a:pPr marL="285750" indent="-285750">
+              <a:buFont typeface="Arial" panose="020B0604020202020204" pitchFamily="34" charset="0"/>
+              <a:buChar char="•"/>
+            </a:pPr>
             <a:r>
               <a:rPr lang="en-US" sz="1600" dirty="0">
                 <a:latin typeface="Roboto" panose="02000000000000000000" pitchFamily="2" charset="0"/>
                 <a:ea typeface="Roboto" panose="02000000000000000000" pitchFamily="2" charset="0"/>
                 <a:cs typeface="Roboto" panose="02000000000000000000" pitchFamily="2" charset="0"/>
               </a:rPr>
-              <a:t>Engineering is the largest underutilize with only 1 occupied desk against </a:t>
-            </a:r>
-            <a:r>
-              <a:rPr lang="en-US" sz="1600" b="1" dirty="0">
-                <a:latin typeface="Roboto" panose="02000000000000000000" pitchFamily="2" charset="0"/>
-                <a:ea typeface="Roboto" panose="02000000000000000000" pitchFamily="2" charset="0"/>
-                <a:cs typeface="Roboto" panose="02000000000000000000" pitchFamily="2" charset="0"/>
-              </a:rPr>
-              <a:t>13</a:t>
-            </a:r>
-            <a:r>
-              <a:rPr lang="en-US" sz="1600" dirty="0">
-                <a:latin typeface="Roboto" panose="02000000000000000000" pitchFamily="2" charset="0"/>
-                <a:ea typeface="Roboto" panose="02000000000000000000" pitchFamily="2" charset="0"/>
-                <a:cs typeface="Roboto" panose="02000000000000000000" pitchFamily="2" charset="0"/>
-              </a:rPr>
-              <a:t> vacant — presenting the single biggest reallocation opportunity on this floor.</a:t>
-            </a:r>
-          </a:p>
-          <a:p>
-            <a:r>
-              <a:rPr lang="en-US" sz="1600" dirty="0">
-                <a:latin typeface="Roboto" panose="02000000000000000000" pitchFamily="2" charset="0"/>
-                <a:ea typeface="Roboto" panose="02000000000000000000" pitchFamily="2" charset="0"/>
-                <a:cs typeface="Roboto" panose="02000000000000000000" pitchFamily="2" charset="0"/>
-              </a:rPr>
-              <a:t>Travel, Technologies, and Staff Groups are fully utilized with zero vacant capacity, indicating no room for absorption without structural change.</a:t>
-            </a:r>
-          </a:p>
-          <a:p>
-            <a:endParaRPr lang="en-US" sz="1600" dirty="0">
-              <a:latin typeface="Roboto" panose="02000000000000000000" pitchFamily="2" charset="0"/>
-              <a:ea typeface="Roboto" panose="02000000000000000000" pitchFamily="2" charset="0"/>
-              <a:cs typeface="Roboto" panose="02000000000000000000" pitchFamily="2" charset="0"/>
-            </a:endParaRPr>
+              <a:t>Retail and Utilities show minimal presence (0 occupied, 1 vacant each) — negligible footprint on this floor</a:t>
+            </a:r>
           </a:p>
         </p:txBody>
       </p:sp>
@@ -5516,7 +10190,7 @@
           <a:p>
             <a:r>
               <a:rPr lang="en-US" b="1" kern="1400" spc="200" dirty="0"/>
-              <a:t>Floor 1 — Highlighted Floorplan with Leaders Legend</a:t>
+              <a:t>Floor 1 Seating Map — Occupancy by Business Unit</a:t>
             </a:r>
           </a:p>
         </p:txBody>
@@ -5571,85 +10245,7 @@
 </p:sld>
 </file>
 
-<file path=ppt/slides/slide11.xml><?xml version="1.0" encoding="utf-8"?>
-<p:sld xmlns:a="http://schemas.openxmlformats.org/drawingml/2006/main" xmlns:r="http://schemas.openxmlformats.org/officeDocument/2006/relationships" xmlns:p="http://schemas.openxmlformats.org/presentationml/2006/main">
-  <p:cSld>
-    <p:spTree>
-      <p:nvGrpSpPr>
-        <p:cNvPr id="1" name="">
-          <a:extLst>
-            <a:ext uri="{FF2B5EF4-FFF2-40B4-BE49-F238E27FC236}">
-              <a16:creationId xmlns:a16="http://schemas.microsoft.com/office/drawing/2014/main" id="{20E992D7-8775-AB72-E185-5EA4B0ACF7EF}"/>
-            </a:ext>
-          </a:extLst>
-        </p:cNvPr>
-        <p:cNvGrpSpPr/>
-        <p:nvPr/>
-      </p:nvGrpSpPr>
-      <p:grpSpPr>
-        <a:xfrm>
-          <a:off x="0" y="0"/>
-          <a:ext cx="0" cy="0"/>
-          <a:chOff x="0" y="0"/>
-          <a:chExt cx="0" cy="0"/>
-        </a:xfrm>
-      </p:grpSpPr>
-      <p:sp>
-        <p:nvSpPr>
-          <p:cNvPr id="2" name="Title 1">
-            <a:extLst>
-              <a:ext uri="{FF2B5EF4-FFF2-40B4-BE49-F238E27FC236}">
-                <a16:creationId xmlns:a16="http://schemas.microsoft.com/office/drawing/2014/main" id="{FD3C1459-9D42-D825-6216-10FDAE300E94}"/>
-              </a:ext>
-            </a:extLst>
-          </p:cNvPr>
-          <p:cNvSpPr>
-            <a:spLocks noGrp="1"/>
-          </p:cNvSpPr>
-          <p:nvPr>
-            <p:ph type="title"/>
-          </p:nvPr>
-        </p:nvSpPr>
-        <p:spPr>
-          <a:xfrm>
-            <a:off x="543634" y="2636765"/>
-            <a:ext cx="7503085" cy="1973335"/>
-          </a:xfrm>
-        </p:spPr>
-        <p:txBody>
-          <a:bodyPr>
-            <a:normAutofit fontScale="90000"/>
-          </a:bodyPr>
-          <a:lstStyle/>
-          <a:p>
-            <a:r>
-              <a:rPr lang="en-US" spc="150" dirty="0"/>
-              <a:t>Floor 1 — Leaders Legend &amp; Workstation Occupancy</a:t>
-            </a:r>
-            <a:br>
-              <a:rPr lang="en-US" spc="150" dirty="0"/>
-            </a:br>
-            <a:r>
-              <a:rPr lang="en-US" spc="150" dirty="0"/>
-              <a:t>38 occupied of 53 total workstations — 15 vacant desks remain</a:t>
-            </a:r>
-          </a:p>
-        </p:txBody>
-      </p:sp>
-    </p:spTree>
-    <p:extLst>
-      <p:ext uri="{BB962C8B-B14F-4D97-AF65-F5344CB8AC3E}">
-        <p14:creationId xmlns:p14="http://schemas.microsoft.com/office/powerpoint/2010/main" val="2196883187"/>
-      </p:ext>
-    </p:extLst>
-  </p:cSld>
-  <p:clrMapOvr>
-    <a:masterClrMapping/>
-  </p:clrMapOvr>
-</p:sld>
-</file>
-
-<file path=ppt/slides/slide12.xml><?xml version="1.0" encoding="utf-8"?>
+<file path=ppt/slides/slide6.xml><?xml version="1.0" encoding="utf-8"?>
 <p:sld xmlns:a="http://schemas.openxmlformats.org/drawingml/2006/main" xmlns:r="http://schemas.openxmlformats.org/officeDocument/2006/relationships" xmlns:p="http://schemas.openxmlformats.org/presentationml/2006/main">
   <p:cSld>
     <p:spTree>
@@ -5812,1550 +10408,6 @@
     <p:extLst>
       <p:ext uri="{BB962C8B-B14F-4D97-AF65-F5344CB8AC3E}">
         <p14:creationId xmlns:p14="http://schemas.microsoft.com/office/powerpoint/2010/main" val="2415998879"/>
-      </p:ext>
-    </p:extLst>
-  </p:cSld>
-  <p:clrMapOvr>
-    <a:masterClrMapping/>
-  </p:clrMapOvr>
-</p:sld>
-</file>
-
-<file path=ppt/slides/slide2.xml><?xml version="1.0" encoding="utf-8"?>
-<p:sld xmlns:a="http://schemas.openxmlformats.org/drawingml/2006/main" xmlns:r="http://schemas.openxmlformats.org/officeDocument/2006/relationships" xmlns:p="http://schemas.openxmlformats.org/presentationml/2006/main">
-  <p:cSld>
-    <p:spTree>
-      <p:nvGrpSpPr>
-        <p:cNvPr id="1" name=""/>
-        <p:cNvGrpSpPr/>
-        <p:nvPr/>
-      </p:nvGrpSpPr>
-      <p:grpSpPr>
-        <a:xfrm>
-          <a:off x="0" y="0"/>
-          <a:ext cx="0" cy="0"/>
-          <a:chOff x="0" y="0"/>
-          <a:chExt cx="0" cy="0"/>
-        </a:xfrm>
-      </p:grpSpPr>
-      <p:pic>
-        <p:nvPicPr>
-          <p:cNvPr id="11" name="Picture Placeholder 10"/>
-          <p:cNvPicPr>
-            <a:picLocks noGrp="1" noChangeAspect="1"/>
-          </p:cNvPicPr>
-          <p:nvPr>
-            <p:ph type="pic" sz="quarter" idx="14"/>
-          </p:nvPr>
-        </p:nvPicPr>
-        <p:blipFill>
-          <a:blip r:embed="rId2"/>
-          <a:srcRect l="1966" r="1966"/>
-          <a:stretch>
-            <a:fillRect/>
-          </a:stretch>
-        </p:blipFill>
-        <p:spPr>
-          <a:xfrm>
-            <a:off x="4627985" y="939283"/>
-            <a:ext cx="5278016" cy="5923465"/>
-          </a:xfrm>
-        </p:spPr>
-      </p:pic>
-      <p:sp>
-        <p:nvSpPr>
-          <p:cNvPr id="6" name="Slide Number Placeholder 5"/>
-          <p:cNvSpPr>
-            <a:spLocks noGrp="1"/>
-          </p:cNvSpPr>
-          <p:nvPr>
-            <p:ph type="sldNum" sz="quarter" idx="4"/>
-          </p:nvPr>
-        </p:nvSpPr>
-        <p:spPr/>
-        <p:txBody>
-          <a:bodyPr/>
-          <a:lstStyle/>
-          <a:p>
-            <a:fld id="{6854B3B4-4093-4FBB-A391-3009E9C94F95}" type="slidenum">
-              <a:rPr lang="en-GB" smtClean="0"/>
-              <a:pPr/>
-              <a:t>2</a:t>
-            </a:fld>
-            <a:endParaRPr lang="en-GB"/>
-          </a:p>
-        </p:txBody>
-      </p:sp>
-      <p:sp>
-        <p:nvSpPr>
-          <p:cNvPr id="9" name="Content Placeholder 8"/>
-          <p:cNvSpPr>
-            <a:spLocks noGrp="1"/>
-          </p:cNvSpPr>
-          <p:nvPr>
-            <p:ph idx="1"/>
-          </p:nvPr>
-        </p:nvSpPr>
-        <p:spPr>
-          <a:xfrm>
-            <a:off x="162725" y="2903860"/>
-            <a:ext cx="4337440" cy="1994309"/>
-          </a:xfrm>
-        </p:spPr>
-        <p:txBody>
-          <a:bodyPr anchor="t">
-            <a:normAutofit fontScale="92500" lnSpcReduction="10000"/>
-          </a:bodyPr>
-          <a:lstStyle/>
-          <a:p>
-            <a:r>
-              <a:rPr lang="en-US" sz="2800" dirty="0"/>
-              <a:t>10 buildings analyzed across the Americas.</a:t>
-            </a:r>
-          </a:p>
-          <a:p>
-            <a:r>
-              <a:rPr lang="en-US" sz="2800" dirty="0"/>
-              <a:t>One critical outlier demands immediate attention.</a:t>
-            </a:r>
-          </a:p>
-        </p:txBody>
-      </p:sp>
-    </p:spTree>
-    <p:extLst>
-      <p:ext uri="{BB962C8B-B14F-4D97-AF65-F5344CB8AC3E}">
-        <p14:creationId xmlns:p14="http://schemas.microsoft.com/office/powerpoint/2010/main" val="1797128695"/>
-      </p:ext>
-    </p:extLst>
-  </p:cSld>
-  <p:clrMapOvr>
-    <a:masterClrMapping/>
-  </p:clrMapOvr>
-</p:sld>
-</file>
-
-<file path=ppt/slides/slide3.xml><?xml version="1.0" encoding="utf-8"?>
-<p:sld xmlns:a="http://schemas.openxmlformats.org/drawingml/2006/main" xmlns:r="http://schemas.openxmlformats.org/officeDocument/2006/relationships" xmlns:p="http://schemas.openxmlformats.org/presentationml/2006/main">
-  <p:cSld>
-    <p:spTree>
-      <p:nvGrpSpPr>
-        <p:cNvPr id="1" name=""/>
-        <p:cNvGrpSpPr/>
-        <p:nvPr/>
-      </p:nvGrpSpPr>
-      <p:grpSpPr>
-        <a:xfrm>
-          <a:off x="0" y="0"/>
-          <a:ext cx="0" cy="0"/>
-          <a:chOff x="0" y="0"/>
-          <a:chExt cx="0" cy="0"/>
-        </a:xfrm>
-      </p:grpSpPr>
-      <p:sp>
-        <p:nvSpPr>
-          <p:cNvPr id="3" name="Content Placeholder 2">
-            <a:extLst>
-              <a:ext uri="{FF2B5EF4-FFF2-40B4-BE49-F238E27FC236}">
-                <a16:creationId xmlns:a16="http://schemas.microsoft.com/office/drawing/2014/main" id="{11FB3DFF-F363-798A-E6FA-6D522062A47C}"/>
-              </a:ext>
-            </a:extLst>
-          </p:cNvPr>
-          <p:cNvSpPr>
-            <a:spLocks noGrp="1"/>
-          </p:cNvSpPr>
-          <p:nvPr>
-            <p:ph idx="1"/>
-          </p:nvPr>
-        </p:nvSpPr>
-        <p:spPr>
-          <a:xfrm>
-            <a:off x="497393" y="1230672"/>
-            <a:ext cx="3786276" cy="5040630"/>
-          </a:xfrm>
-        </p:spPr>
-        <p:txBody>
-          <a:bodyPr>
-            <a:normAutofit/>
-          </a:bodyPr>
-          <a:lstStyle/>
-          <a:p>
-            <a:pPr>
-              <a:lnSpc>
-                <a:spcPct val="100000"/>
-              </a:lnSpc>
-            </a:pPr>
-            <a:r>
-              <a:rPr lang="en-US" sz="1600" dirty="0">
-                <a:latin typeface="Roboto" panose="02000000000000000000" pitchFamily="2" charset="0"/>
-                <a:ea typeface="Roboto" panose="02000000000000000000" pitchFamily="2" charset="0"/>
-                <a:cs typeface="Roboto" panose="02000000000000000000" pitchFamily="2" charset="0"/>
-              </a:rPr>
-              <a:t>Across the 10 Americas buildings, vacancy rates are broadly healthy — most fall between </a:t>
-            </a:r>
-            <a:r>
-              <a:rPr lang="en-US" sz="1600" b="1" dirty="0">
-                <a:latin typeface="Roboto" panose="02000000000000000000" pitchFamily="2" charset="0"/>
-                <a:ea typeface="Roboto" panose="02000000000000000000" pitchFamily="2" charset="0"/>
-                <a:cs typeface="Roboto" panose="02000000000000000000" pitchFamily="2" charset="0"/>
-              </a:rPr>
-              <a:t>4%</a:t>
-            </a:r>
-            <a:r>
-              <a:rPr lang="en-US" sz="1600" dirty="0">
-                <a:latin typeface="Roboto" panose="02000000000000000000" pitchFamily="2" charset="0"/>
-                <a:ea typeface="Roboto" panose="02000000000000000000" pitchFamily="2" charset="0"/>
-                <a:cs typeface="Roboto" panose="02000000000000000000" pitchFamily="2" charset="0"/>
-              </a:rPr>
-              <a:t> and </a:t>
-            </a:r>
-            <a:r>
-              <a:rPr lang="en-US" sz="1600" b="1" dirty="0">
-                <a:latin typeface="Roboto" panose="02000000000000000000" pitchFamily="2" charset="0"/>
-                <a:ea typeface="Roboto" panose="02000000000000000000" pitchFamily="2" charset="0"/>
-                <a:cs typeface="Roboto" panose="02000000000000000000" pitchFamily="2" charset="0"/>
-              </a:rPr>
-              <a:t>6%</a:t>
-            </a:r>
-            <a:r>
-              <a:rPr lang="en-US" sz="1600" dirty="0">
-                <a:latin typeface="Roboto" panose="02000000000000000000" pitchFamily="2" charset="0"/>
-                <a:ea typeface="Roboto" panose="02000000000000000000" pitchFamily="2" charset="0"/>
-                <a:cs typeface="Roboto" panose="02000000000000000000" pitchFamily="2" charset="0"/>
-              </a:rPr>
-              <a:t>, reflecting strong space utilization. </a:t>
-            </a:r>
-          </a:p>
-          <a:p>
-            <a:pPr>
-              <a:lnSpc>
-                <a:spcPct val="100000"/>
-              </a:lnSpc>
-            </a:pPr>
-            <a:r>
-              <a:rPr lang="en-US" sz="1600" dirty="0">
-                <a:latin typeface="Roboto" panose="02000000000000000000" pitchFamily="2" charset="0"/>
-                <a:ea typeface="Roboto" panose="02000000000000000000" pitchFamily="2" charset="0"/>
-                <a:cs typeface="Roboto" panose="02000000000000000000" pitchFamily="2" charset="0"/>
-              </a:rPr>
-              <a:t>Building F is the clear exception at </a:t>
-            </a:r>
-            <a:r>
-              <a:rPr lang="en-US" sz="1600" u="sng" dirty="0">
-                <a:latin typeface="Roboto" panose="02000000000000000000" pitchFamily="2" charset="0"/>
-                <a:ea typeface="Roboto" panose="02000000000000000000" pitchFamily="2" charset="0"/>
-                <a:cs typeface="Roboto" panose="02000000000000000000" pitchFamily="2" charset="0"/>
-              </a:rPr>
-              <a:t>24% vacancy</a:t>
-            </a:r>
-            <a:r>
-              <a:rPr lang="en-US" sz="1600" dirty="0">
-                <a:latin typeface="Roboto" panose="02000000000000000000" pitchFamily="2" charset="0"/>
-                <a:ea typeface="Roboto" panose="02000000000000000000" pitchFamily="2" charset="0"/>
-                <a:cs typeface="Roboto" panose="02000000000000000000" pitchFamily="2" charset="0"/>
-              </a:rPr>
-              <a:t>, a rate nearly </a:t>
-            </a:r>
-            <a:r>
-              <a:rPr lang="en-US" sz="1600" b="1" dirty="0">
-                <a:latin typeface="Roboto" panose="02000000000000000000" pitchFamily="2" charset="0"/>
-                <a:ea typeface="Roboto" panose="02000000000000000000" pitchFamily="2" charset="0"/>
-                <a:cs typeface="Roboto" panose="02000000000000000000" pitchFamily="2" charset="0"/>
-              </a:rPr>
-              <a:t>4x</a:t>
-            </a:r>
-            <a:r>
-              <a:rPr lang="en-US" sz="1600" dirty="0">
-                <a:latin typeface="Roboto" panose="02000000000000000000" pitchFamily="2" charset="0"/>
-                <a:ea typeface="Roboto" panose="02000000000000000000" pitchFamily="2" charset="0"/>
-                <a:cs typeface="Roboto" panose="02000000000000000000" pitchFamily="2" charset="0"/>
-              </a:rPr>
-              <a:t> the portfolio average and a signal that warrants deeper investigation.</a:t>
-            </a:r>
-          </a:p>
-          <a:p>
-            <a:pPr>
-              <a:lnSpc>
-                <a:spcPct val="100000"/>
-              </a:lnSpc>
-            </a:pPr>
-            <a:r>
-              <a:rPr lang="en-US" sz="1600" dirty="0">
-                <a:latin typeface="Roboto" panose="02000000000000000000" pitchFamily="2" charset="0"/>
-                <a:ea typeface="Roboto" panose="02000000000000000000" pitchFamily="2" charset="0"/>
-                <a:cs typeface="Roboto" panose="02000000000000000000" pitchFamily="2" charset="0"/>
-              </a:rPr>
-              <a:t>All other buildings are operating efficiently with assigned seats closely tracking program headcount.</a:t>
-            </a:r>
-          </a:p>
-          <a:p>
-            <a:pPr>
-              <a:lnSpc>
-                <a:spcPct val="100000"/>
-              </a:lnSpc>
-            </a:pPr>
-            <a:endParaRPr lang="en-US" sz="1600" dirty="0">
-              <a:latin typeface="Roboto" panose="02000000000000000000" pitchFamily="2" charset="0"/>
-              <a:ea typeface="Roboto" panose="02000000000000000000" pitchFamily="2" charset="0"/>
-              <a:cs typeface="Roboto" panose="02000000000000000000" pitchFamily="2" charset="0"/>
-            </a:endParaRPr>
-          </a:p>
-        </p:txBody>
-      </p:sp>
-      <p:sp>
-        <p:nvSpPr>
-          <p:cNvPr id="4" name="Title 3">
-            <a:extLst>
-              <a:ext uri="{FF2B5EF4-FFF2-40B4-BE49-F238E27FC236}">
-                <a16:creationId xmlns:a16="http://schemas.microsoft.com/office/drawing/2014/main" id="{E77FB41C-C19D-1AAB-E6F7-39A65C3E5098}"/>
-              </a:ext>
-            </a:extLst>
-          </p:cNvPr>
-          <p:cNvSpPr>
-            <a:spLocks noGrp="1"/>
-          </p:cNvSpPr>
-          <p:nvPr>
-            <p:ph type="title"/>
-          </p:nvPr>
-        </p:nvSpPr>
-        <p:spPr/>
-        <p:txBody>
-          <a:bodyPr/>
-          <a:lstStyle/>
-          <a:p>
-            <a:r>
-              <a:rPr lang="en-US" b="1" spc="200" dirty="0"/>
-              <a:t>Americas Portfolio — Building-Level Occupancy</a:t>
-            </a:r>
-            <a:endParaRPr lang="en-US" spc="200" dirty="0"/>
-          </a:p>
-        </p:txBody>
-      </p:sp>
-      <p:pic>
-        <p:nvPicPr>
-          <p:cNvPr id="6" name="Picture 5">
-            <a:extLst>
-              <a:ext uri="{FF2B5EF4-FFF2-40B4-BE49-F238E27FC236}">
-                <a16:creationId xmlns:a16="http://schemas.microsoft.com/office/drawing/2014/main" id="{FD0B32CF-9704-7512-908D-082698FDAF76}"/>
-              </a:ext>
-            </a:extLst>
-          </p:cNvPr>
-          <p:cNvPicPr>
-            <a:picLocks noChangeAspect="1"/>
-          </p:cNvPicPr>
-          <p:nvPr/>
-        </p:nvPicPr>
-        <p:blipFill>
-          <a:blip r:embed="rId2"/>
-          <a:stretch>
-            <a:fillRect/>
-          </a:stretch>
-        </p:blipFill>
-        <p:spPr>
-          <a:xfrm>
-            <a:off x="4524699" y="1272167"/>
-            <a:ext cx="4923237" cy="4951653"/>
-          </a:xfrm>
-          <a:prstGeom prst="rect">
-            <a:avLst/>
-          </a:prstGeom>
-          <a:ln>
-            <a:solidFill>
-              <a:schemeClr val="tx1"/>
-            </a:solidFill>
-          </a:ln>
-        </p:spPr>
-      </p:pic>
-    </p:spTree>
-    <p:extLst>
-      <p:ext uri="{BB962C8B-B14F-4D97-AF65-F5344CB8AC3E}">
-        <p14:creationId xmlns:p14="http://schemas.microsoft.com/office/powerpoint/2010/main" val="2784006949"/>
-      </p:ext>
-    </p:extLst>
-  </p:cSld>
-  <p:clrMapOvr>
-    <a:masterClrMapping/>
-  </p:clrMapOvr>
-</p:sld>
-</file>
-
-<file path=ppt/slides/slide4.xml><?xml version="1.0" encoding="utf-8"?>
-<p:sld xmlns:a="http://schemas.openxmlformats.org/drawingml/2006/main" xmlns:r="http://schemas.openxmlformats.org/officeDocument/2006/relationships" xmlns:p="http://schemas.openxmlformats.org/presentationml/2006/main">
-  <p:cSld>
-    <p:bg>
-      <p:bgPr>
-        <a:solidFill>
-          <a:schemeClr val="accent3"/>
-        </a:solidFill>
-        <a:effectLst/>
-      </p:bgPr>
-    </p:bg>
-    <p:spTree>
-      <p:nvGrpSpPr>
-        <p:cNvPr id="1" name=""/>
-        <p:cNvGrpSpPr/>
-        <p:nvPr/>
-      </p:nvGrpSpPr>
-      <p:grpSpPr>
-        <a:xfrm>
-          <a:off x="0" y="0"/>
-          <a:ext cx="0" cy="0"/>
-          <a:chOff x="0" y="0"/>
-          <a:chExt cx="0" cy="0"/>
-        </a:xfrm>
-      </p:grpSpPr>
-      <p:sp>
-        <p:nvSpPr>
-          <p:cNvPr id="2" name="Title 1"/>
-          <p:cNvSpPr>
-            <a:spLocks noGrp="1"/>
-          </p:cNvSpPr>
-          <p:nvPr>
-            <p:ph type="title"/>
-          </p:nvPr>
-        </p:nvSpPr>
-        <p:spPr>
-          <a:xfrm>
-            <a:off x="490295" y="3429000"/>
-            <a:ext cx="7140766" cy="1134137"/>
-          </a:xfrm>
-        </p:spPr>
-        <p:txBody>
-          <a:bodyPr>
-            <a:normAutofit fontScale="90000"/>
-          </a:bodyPr>
-          <a:lstStyle/>
-          <a:p>
-            <a:br>
-              <a:rPr lang="en-US" spc="200" dirty="0"/>
-            </a:br>
-            <a:r>
-              <a:rPr lang="en-US" spc="200" dirty="0"/>
-              <a:t>Building F vacancy rate — nearly 4x </a:t>
-            </a:r>
-            <a:br>
-              <a:rPr lang="en-US" spc="200" dirty="0"/>
-            </a:br>
-            <a:r>
-              <a:rPr lang="en-US" spc="200" dirty="0"/>
-              <a:t>the Americas portfolio average of ~5%</a:t>
-            </a:r>
-          </a:p>
-        </p:txBody>
-      </p:sp>
-      <p:sp>
-        <p:nvSpPr>
-          <p:cNvPr id="5" name="TextBox 4">
-            <a:extLst>
-              <a:ext uri="{FF2B5EF4-FFF2-40B4-BE49-F238E27FC236}">
-                <a16:creationId xmlns:a16="http://schemas.microsoft.com/office/drawing/2014/main" id="{E3619D63-AEBA-3ECA-59BB-12E5D8985D56}"/>
-              </a:ext>
-            </a:extLst>
-          </p:cNvPr>
-          <p:cNvSpPr txBox="1"/>
-          <p:nvPr/>
-        </p:nvSpPr>
-        <p:spPr>
-          <a:xfrm>
-            <a:off x="2342368" y="2552635"/>
-            <a:ext cx="2872739" cy="769441"/>
-          </a:xfrm>
-          <a:prstGeom prst="rect">
-            <a:avLst/>
-          </a:prstGeom>
-          <a:noFill/>
-        </p:spPr>
-        <p:txBody>
-          <a:bodyPr wrap="square">
-            <a:spAutoFit/>
-          </a:bodyPr>
-          <a:lstStyle/>
-          <a:p>
-            <a:pPr algn="ctr"/>
-            <a:r>
-              <a:rPr lang="en-US" sz="4400" b="1" spc="200" dirty="0">
-                <a:solidFill>
-                  <a:schemeClr val="bg1"/>
-                </a:solidFill>
-              </a:rPr>
-              <a:t>24%</a:t>
-            </a:r>
-          </a:p>
-        </p:txBody>
-      </p:sp>
-    </p:spTree>
-    <p:extLst>
-      <p:ext uri="{BB962C8B-B14F-4D97-AF65-F5344CB8AC3E}">
-        <p14:creationId xmlns:p14="http://schemas.microsoft.com/office/powerpoint/2010/main" val="1839754538"/>
-      </p:ext>
-    </p:extLst>
-  </p:cSld>
-  <p:clrMapOvr>
-    <a:masterClrMapping/>
-  </p:clrMapOvr>
-</p:sld>
-</file>
-
-<file path=ppt/slides/slide5.xml><?xml version="1.0" encoding="utf-8"?>
-<p:sld xmlns:a="http://schemas.openxmlformats.org/drawingml/2006/main" xmlns:r="http://schemas.openxmlformats.org/officeDocument/2006/relationships" xmlns:p="http://schemas.openxmlformats.org/presentationml/2006/main">
-  <p:cSld>
-    <p:spTree>
-      <p:nvGrpSpPr>
-        <p:cNvPr id="1" name="">
-          <a:extLst>
-            <a:ext uri="{FF2B5EF4-FFF2-40B4-BE49-F238E27FC236}">
-              <a16:creationId xmlns:a16="http://schemas.microsoft.com/office/drawing/2014/main" id="{410F1259-5130-AB37-9F08-E6382A556327}"/>
-            </a:ext>
-          </a:extLst>
-        </p:cNvPr>
-        <p:cNvGrpSpPr/>
-        <p:nvPr/>
-      </p:nvGrpSpPr>
-      <p:grpSpPr>
-        <a:xfrm>
-          <a:off x="0" y="0"/>
-          <a:ext cx="0" cy="0"/>
-          <a:chOff x="0" y="0"/>
-          <a:chExt cx="0" cy="0"/>
-        </a:xfrm>
-      </p:grpSpPr>
-      <p:sp>
-        <p:nvSpPr>
-          <p:cNvPr id="3" name="Content Placeholder 2">
-            <a:extLst>
-              <a:ext uri="{FF2B5EF4-FFF2-40B4-BE49-F238E27FC236}">
-                <a16:creationId xmlns:a16="http://schemas.microsoft.com/office/drawing/2014/main" id="{EBC2478C-BEF6-73CC-C164-5B6E7ED9D37D}"/>
-              </a:ext>
-            </a:extLst>
-          </p:cNvPr>
-          <p:cNvSpPr>
-            <a:spLocks noGrp="1"/>
-          </p:cNvSpPr>
-          <p:nvPr>
-            <p:ph idx="1"/>
-          </p:nvPr>
-        </p:nvSpPr>
-        <p:spPr>
-          <a:xfrm>
-            <a:off x="497392" y="1230672"/>
-            <a:ext cx="3941257" cy="5040630"/>
-          </a:xfrm>
-        </p:spPr>
-        <p:txBody>
-          <a:bodyPr>
-            <a:normAutofit/>
-          </a:bodyPr>
-          <a:lstStyle/>
-          <a:p>
-            <a:r>
-              <a:rPr lang="en-US" sz="1600" dirty="0">
-                <a:latin typeface="Roboto" panose="02000000000000000000" pitchFamily="2" charset="0"/>
-                <a:ea typeface="Roboto" panose="02000000000000000000" pitchFamily="2" charset="0"/>
-                <a:cs typeface="Roboto" panose="02000000000000000000" pitchFamily="2" charset="0"/>
-              </a:rPr>
-              <a:t>Building F's overall alignment sits at </a:t>
-            </a:r>
-            <a:r>
-              <a:rPr lang="en-US" sz="1600" b="1" dirty="0">
-                <a:latin typeface="Roboto" panose="02000000000000000000" pitchFamily="2" charset="0"/>
-                <a:ea typeface="Roboto" panose="02000000000000000000" pitchFamily="2" charset="0"/>
-                <a:cs typeface="Roboto" panose="02000000000000000000" pitchFamily="2" charset="0"/>
-              </a:rPr>
-              <a:t>89%</a:t>
-            </a:r>
-            <a:r>
-              <a:rPr lang="en-US" sz="1600" dirty="0">
-                <a:latin typeface="Roboto" panose="02000000000000000000" pitchFamily="2" charset="0"/>
-                <a:ea typeface="Roboto" panose="02000000000000000000" pitchFamily="2" charset="0"/>
-                <a:cs typeface="Roboto" panose="02000000000000000000" pitchFamily="2" charset="0"/>
-              </a:rPr>
-              <a:t>, which is healthy. Five of six business units — Engineering, Finance, HR, Staff Groups, and Operations — align between </a:t>
-            </a:r>
-            <a:r>
-              <a:rPr lang="en-US" sz="1600" b="1" dirty="0">
-                <a:latin typeface="Roboto" panose="02000000000000000000" pitchFamily="2" charset="0"/>
-                <a:ea typeface="Roboto" panose="02000000000000000000" pitchFamily="2" charset="0"/>
-                <a:cs typeface="Roboto" panose="02000000000000000000" pitchFamily="2" charset="0"/>
-              </a:rPr>
-              <a:t>89%</a:t>
-            </a:r>
-            <a:r>
-              <a:rPr lang="en-US" sz="1600" dirty="0">
-                <a:latin typeface="Roboto" panose="02000000000000000000" pitchFamily="2" charset="0"/>
-                <a:ea typeface="Roboto" panose="02000000000000000000" pitchFamily="2" charset="0"/>
-                <a:cs typeface="Roboto" panose="02000000000000000000" pitchFamily="2" charset="0"/>
-              </a:rPr>
-              <a:t> and </a:t>
-            </a:r>
-            <a:r>
-              <a:rPr lang="en-US" sz="1600" b="1" dirty="0">
-                <a:latin typeface="Roboto" panose="02000000000000000000" pitchFamily="2" charset="0"/>
-                <a:ea typeface="Roboto" panose="02000000000000000000" pitchFamily="2" charset="0"/>
-                <a:cs typeface="Roboto" panose="02000000000000000000" pitchFamily="2" charset="0"/>
-              </a:rPr>
-              <a:t>98%</a:t>
-            </a:r>
-            <a:r>
-              <a:rPr lang="en-US" sz="1600" dirty="0">
-                <a:latin typeface="Roboto" panose="02000000000000000000" pitchFamily="2" charset="0"/>
-                <a:ea typeface="Roboto" panose="02000000000000000000" pitchFamily="2" charset="0"/>
-                <a:cs typeface="Roboto" panose="02000000000000000000" pitchFamily="2" charset="0"/>
-              </a:rPr>
-              <a:t>, all rated Healthy or Excellent.</a:t>
-            </a:r>
-          </a:p>
-          <a:p>
-            <a:endParaRPr lang="en-US" sz="1600" dirty="0">
-              <a:latin typeface="Roboto" panose="02000000000000000000" pitchFamily="2" charset="0"/>
-              <a:ea typeface="Roboto" panose="02000000000000000000" pitchFamily="2" charset="0"/>
-              <a:cs typeface="Roboto" panose="02000000000000000000" pitchFamily="2" charset="0"/>
-            </a:endParaRPr>
-          </a:p>
-          <a:p>
-            <a:r>
-              <a:rPr lang="en-US" sz="1600" dirty="0">
-                <a:latin typeface="Roboto" panose="02000000000000000000" pitchFamily="2" charset="0"/>
-                <a:ea typeface="Roboto" panose="02000000000000000000" pitchFamily="2" charset="0"/>
-                <a:cs typeface="Roboto" panose="02000000000000000000" pitchFamily="2" charset="0"/>
-              </a:rPr>
-              <a:t>Retail is the critical outlier at just </a:t>
-            </a:r>
-            <a:r>
-              <a:rPr lang="en-US" sz="1600" b="1" dirty="0">
-                <a:latin typeface="Roboto" panose="02000000000000000000" pitchFamily="2" charset="0"/>
-                <a:ea typeface="Roboto" panose="02000000000000000000" pitchFamily="2" charset="0"/>
-                <a:cs typeface="Roboto" panose="02000000000000000000" pitchFamily="2" charset="0"/>
-              </a:rPr>
-              <a:t>68% </a:t>
-            </a:r>
-            <a:r>
-              <a:rPr lang="en-US" sz="1600" dirty="0">
-                <a:latin typeface="Roboto" panose="02000000000000000000" pitchFamily="2" charset="0"/>
-                <a:ea typeface="Roboto" panose="02000000000000000000" pitchFamily="2" charset="0"/>
-                <a:cs typeface="Roboto" panose="02000000000000000000" pitchFamily="2" charset="0"/>
-              </a:rPr>
-              <a:t>alignment with </a:t>
-            </a:r>
-            <a:r>
-              <a:rPr lang="en-US" sz="1600" b="1" dirty="0">
-                <a:latin typeface="Roboto" panose="02000000000000000000" pitchFamily="2" charset="0"/>
-                <a:ea typeface="Roboto" panose="02000000000000000000" pitchFamily="2" charset="0"/>
-                <a:cs typeface="Roboto" panose="02000000000000000000" pitchFamily="2" charset="0"/>
-              </a:rPr>
-              <a:t>32%</a:t>
-            </a:r>
-            <a:r>
-              <a:rPr lang="en-US" sz="1600" dirty="0">
-                <a:latin typeface="Roboto" panose="02000000000000000000" pitchFamily="2" charset="0"/>
-                <a:ea typeface="Roboto" panose="02000000000000000000" pitchFamily="2" charset="0"/>
-                <a:cs typeface="Roboto" panose="02000000000000000000" pitchFamily="2" charset="0"/>
-              </a:rPr>
-              <a:t> of seats misallocated — nearly three times the building average misalignment rate. This single BU is the primary driver of Building F's vacancy anomaly.</a:t>
-            </a:r>
-            <a:br>
-              <a:rPr lang="en-US" sz="1600" dirty="0">
-                <a:latin typeface="Roboto" panose="02000000000000000000" pitchFamily="2" charset="0"/>
-                <a:ea typeface="Roboto" panose="02000000000000000000" pitchFamily="2" charset="0"/>
-                <a:cs typeface="Roboto" panose="02000000000000000000" pitchFamily="2" charset="0"/>
-              </a:rPr>
-            </a:br>
-            <a:endParaRPr lang="en-US" sz="1600" dirty="0">
-              <a:latin typeface="Roboto" panose="02000000000000000000" pitchFamily="2" charset="0"/>
-              <a:ea typeface="Roboto" panose="02000000000000000000" pitchFamily="2" charset="0"/>
-              <a:cs typeface="Roboto" panose="02000000000000000000" pitchFamily="2" charset="0"/>
-            </a:endParaRPr>
-          </a:p>
-        </p:txBody>
-      </p:sp>
-      <p:sp>
-        <p:nvSpPr>
-          <p:cNvPr id="4" name="Title 3">
-            <a:extLst>
-              <a:ext uri="{FF2B5EF4-FFF2-40B4-BE49-F238E27FC236}">
-                <a16:creationId xmlns:a16="http://schemas.microsoft.com/office/drawing/2014/main" id="{5C55D89B-124F-4845-E705-F44BC7BFFCFE}"/>
-              </a:ext>
-            </a:extLst>
-          </p:cNvPr>
-          <p:cNvSpPr>
-            <a:spLocks noGrp="1"/>
-          </p:cNvSpPr>
-          <p:nvPr>
-            <p:ph type="title"/>
-          </p:nvPr>
-        </p:nvSpPr>
-        <p:spPr/>
-        <p:txBody>
-          <a:bodyPr/>
-          <a:lstStyle/>
-          <a:p>
-            <a:r>
-              <a:rPr lang="en-US" b="1" kern="1400" spc="200" dirty="0"/>
-              <a:t>Actual = Allocated % by Business Unit – Building F</a:t>
-            </a:r>
-            <a:endParaRPr lang="en-US" kern="1400" spc="200" dirty="0"/>
-          </a:p>
-        </p:txBody>
-      </p:sp>
-      <p:pic>
-        <p:nvPicPr>
-          <p:cNvPr id="5" name="Picture 4">
-            <a:extLst>
-              <a:ext uri="{FF2B5EF4-FFF2-40B4-BE49-F238E27FC236}">
-                <a16:creationId xmlns:a16="http://schemas.microsoft.com/office/drawing/2014/main" id="{81EF81EE-0C21-21CA-48AA-B9ADA59BE318}"/>
-              </a:ext>
-            </a:extLst>
-          </p:cNvPr>
-          <p:cNvPicPr>
-            <a:picLocks noChangeAspect="1"/>
-          </p:cNvPicPr>
-          <p:nvPr/>
-        </p:nvPicPr>
-        <p:blipFill>
-          <a:blip r:embed="rId2"/>
-          <a:stretch>
-            <a:fillRect/>
-          </a:stretch>
-        </p:blipFill>
-        <p:spPr>
-          <a:xfrm>
-            <a:off x="4686299" y="1422875"/>
-            <a:ext cx="4947073" cy="4656223"/>
-          </a:xfrm>
-          <a:prstGeom prst="rect">
-            <a:avLst/>
-          </a:prstGeom>
-          <a:ln>
-            <a:solidFill>
-              <a:schemeClr val="tx1"/>
-            </a:solidFill>
-          </a:ln>
-        </p:spPr>
-      </p:pic>
-    </p:spTree>
-    <p:extLst>
-      <p:ext uri="{BB962C8B-B14F-4D97-AF65-F5344CB8AC3E}">
-        <p14:creationId xmlns:p14="http://schemas.microsoft.com/office/powerpoint/2010/main" val="662444546"/>
-      </p:ext>
-    </p:extLst>
-  </p:cSld>
-  <p:clrMapOvr>
-    <a:masterClrMapping/>
-  </p:clrMapOvr>
-</p:sld>
-</file>
-
-<file path=ppt/slides/slide6.xml><?xml version="1.0" encoding="utf-8"?>
-<p:sld xmlns:a="http://schemas.openxmlformats.org/drawingml/2006/main" xmlns:r="http://schemas.openxmlformats.org/officeDocument/2006/relationships" xmlns:p="http://schemas.openxmlformats.org/presentationml/2006/main">
-  <p:cSld>
-    <p:spTree>
-      <p:nvGrpSpPr>
-        <p:cNvPr id="1" name="">
-          <a:extLst>
-            <a:ext uri="{FF2B5EF4-FFF2-40B4-BE49-F238E27FC236}">
-              <a16:creationId xmlns:a16="http://schemas.microsoft.com/office/drawing/2014/main" id="{B32A5B62-FA21-106C-E30C-AFC485DB1653}"/>
-            </a:ext>
-          </a:extLst>
-        </p:cNvPr>
-        <p:cNvGrpSpPr/>
-        <p:nvPr/>
-      </p:nvGrpSpPr>
-      <p:grpSpPr>
-        <a:xfrm>
-          <a:off x="0" y="0"/>
-          <a:ext cx="0" cy="0"/>
-          <a:chOff x="0" y="0"/>
-          <a:chExt cx="0" cy="0"/>
-        </a:xfrm>
-      </p:grpSpPr>
-      <p:sp>
-        <p:nvSpPr>
-          <p:cNvPr id="3" name="Content Placeholder 2">
-            <a:extLst>
-              <a:ext uri="{FF2B5EF4-FFF2-40B4-BE49-F238E27FC236}">
-                <a16:creationId xmlns:a16="http://schemas.microsoft.com/office/drawing/2014/main" id="{DC61BCE9-3AA8-3ECA-F8BD-2F67ADCFA3E3}"/>
-              </a:ext>
-            </a:extLst>
-          </p:cNvPr>
-          <p:cNvSpPr>
-            <a:spLocks noGrp="1"/>
-          </p:cNvSpPr>
-          <p:nvPr>
-            <p:ph idx="1"/>
-          </p:nvPr>
-        </p:nvSpPr>
-        <p:spPr>
-          <a:xfrm>
-            <a:off x="596204" y="1162050"/>
-            <a:ext cx="8156836" cy="5429249"/>
-          </a:xfrm>
-        </p:spPr>
-        <p:txBody>
-          <a:bodyPr>
-            <a:normAutofit/>
-          </a:bodyPr>
-          <a:lstStyle/>
-          <a:p>
-            <a:r>
-              <a:rPr lang="en-US" sz="1800" b="1" dirty="0">
-                <a:latin typeface="Roboto" panose="02000000000000000000" pitchFamily="2" charset="0"/>
-                <a:ea typeface="Roboto" panose="02000000000000000000" pitchFamily="2" charset="0"/>
-                <a:cs typeface="Roboto" panose="02000000000000000000" pitchFamily="2" charset="0"/>
-              </a:rPr>
-              <a:t>Findings:</a:t>
-            </a:r>
-            <a:endParaRPr lang="en-US" sz="1800" dirty="0">
-              <a:latin typeface="Roboto" panose="02000000000000000000" pitchFamily="2" charset="0"/>
-              <a:ea typeface="Roboto" panose="02000000000000000000" pitchFamily="2" charset="0"/>
-              <a:cs typeface="Roboto" panose="02000000000000000000" pitchFamily="2" charset="0"/>
-            </a:endParaRPr>
-          </a:p>
-          <a:p>
-            <a:pPr marL="285750" indent="-285750">
-              <a:lnSpc>
-                <a:spcPct val="170000"/>
-              </a:lnSpc>
-              <a:buFont typeface="Arial" panose="020B0604020202020204" pitchFamily="34" charset="0"/>
-              <a:buChar char="•"/>
-            </a:pPr>
-            <a:r>
-              <a:rPr lang="en-US" sz="1600" dirty="0">
-                <a:latin typeface="Roboto" panose="02000000000000000000" pitchFamily="2" charset="0"/>
-                <a:ea typeface="Roboto" panose="02000000000000000000" pitchFamily="2" charset="0"/>
-                <a:cs typeface="Roboto" panose="02000000000000000000" pitchFamily="2" charset="0"/>
-              </a:rPr>
-              <a:t>HR leads the building at 98% alignment; Staff Groups and Engineering also perform strongly at </a:t>
-            </a:r>
-            <a:r>
-              <a:rPr lang="en-US" sz="1600" b="1" dirty="0">
-                <a:latin typeface="Roboto" panose="02000000000000000000" pitchFamily="2" charset="0"/>
-                <a:ea typeface="Roboto" panose="02000000000000000000" pitchFamily="2" charset="0"/>
-                <a:cs typeface="Roboto" panose="02000000000000000000" pitchFamily="2" charset="0"/>
-              </a:rPr>
-              <a:t>96%</a:t>
-            </a:r>
-            <a:r>
-              <a:rPr lang="en-US" sz="1600" dirty="0">
-                <a:latin typeface="Roboto" panose="02000000000000000000" pitchFamily="2" charset="0"/>
-                <a:ea typeface="Roboto" panose="02000000000000000000" pitchFamily="2" charset="0"/>
-                <a:cs typeface="Roboto" panose="02000000000000000000" pitchFamily="2" charset="0"/>
-              </a:rPr>
-              <a:t> and </a:t>
-            </a:r>
-            <a:r>
-              <a:rPr lang="en-US" sz="1600" b="1" dirty="0">
-                <a:latin typeface="Roboto" panose="02000000000000000000" pitchFamily="2" charset="0"/>
-                <a:ea typeface="Roboto" panose="02000000000000000000" pitchFamily="2" charset="0"/>
-                <a:cs typeface="Roboto" panose="02000000000000000000" pitchFamily="2" charset="0"/>
-              </a:rPr>
-              <a:t>92%,</a:t>
-            </a:r>
-            <a:r>
-              <a:rPr lang="en-US" sz="1600" dirty="0">
-                <a:latin typeface="Roboto" panose="02000000000000000000" pitchFamily="2" charset="0"/>
-                <a:ea typeface="Roboto" panose="02000000000000000000" pitchFamily="2" charset="0"/>
-                <a:cs typeface="Roboto" panose="02000000000000000000" pitchFamily="2" charset="0"/>
-              </a:rPr>
-              <a:t> respectively.</a:t>
-            </a:r>
-          </a:p>
-          <a:p>
-            <a:pPr marL="285750" indent="-285750">
-              <a:lnSpc>
-                <a:spcPct val="170000"/>
-              </a:lnSpc>
-              <a:buFont typeface="Arial" panose="020B0604020202020204" pitchFamily="34" charset="0"/>
-              <a:buChar char="•"/>
-            </a:pPr>
-            <a:r>
-              <a:rPr lang="en-US" sz="1600" dirty="0">
-                <a:latin typeface="Roboto" panose="02000000000000000000" pitchFamily="2" charset="0"/>
-                <a:ea typeface="Roboto" panose="02000000000000000000" pitchFamily="2" charset="0"/>
-                <a:cs typeface="Roboto" panose="02000000000000000000" pitchFamily="2" charset="0"/>
-              </a:rPr>
-              <a:t>Retail's </a:t>
-            </a:r>
-            <a:r>
-              <a:rPr lang="en-US" sz="1600" b="1" dirty="0">
-                <a:latin typeface="Roboto" panose="02000000000000000000" pitchFamily="2" charset="0"/>
-                <a:ea typeface="Roboto" panose="02000000000000000000" pitchFamily="2" charset="0"/>
-                <a:cs typeface="Roboto" panose="02000000000000000000" pitchFamily="2" charset="0"/>
-              </a:rPr>
-              <a:t>32%</a:t>
-            </a:r>
-            <a:r>
-              <a:rPr lang="en-US" sz="1600" dirty="0">
-                <a:latin typeface="Roboto" panose="02000000000000000000" pitchFamily="2" charset="0"/>
-                <a:ea typeface="Roboto" panose="02000000000000000000" pitchFamily="2" charset="0"/>
-                <a:cs typeface="Roboto" panose="02000000000000000000" pitchFamily="2" charset="0"/>
-              </a:rPr>
-              <a:t> misalignment is the single largest contributor to Building F's vacancy anomaly.</a:t>
-            </a:r>
-          </a:p>
-          <a:p>
-            <a:endParaRPr lang="en-US" sz="1600" dirty="0">
-              <a:latin typeface="Roboto" panose="02000000000000000000" pitchFamily="2" charset="0"/>
-              <a:ea typeface="Roboto" panose="02000000000000000000" pitchFamily="2" charset="0"/>
-              <a:cs typeface="Roboto" panose="02000000000000000000" pitchFamily="2" charset="0"/>
-            </a:endParaRPr>
-          </a:p>
-          <a:p>
-            <a:r>
-              <a:rPr lang="en-US" sz="1800" b="1" dirty="0">
-                <a:latin typeface="Roboto" panose="02000000000000000000" pitchFamily="2" charset="0"/>
-                <a:ea typeface="Roboto" panose="02000000000000000000" pitchFamily="2" charset="0"/>
-                <a:cs typeface="Roboto" panose="02000000000000000000" pitchFamily="2" charset="0"/>
-              </a:rPr>
-              <a:t>Recommended Action:</a:t>
-            </a:r>
-            <a:endParaRPr lang="en-US" sz="1800" dirty="0">
-              <a:latin typeface="Roboto" panose="02000000000000000000" pitchFamily="2" charset="0"/>
-              <a:ea typeface="Roboto" panose="02000000000000000000" pitchFamily="2" charset="0"/>
-              <a:cs typeface="Roboto" panose="02000000000000000000" pitchFamily="2" charset="0"/>
-            </a:endParaRPr>
-          </a:p>
-          <a:p>
-            <a:pPr>
-              <a:lnSpc>
-                <a:spcPct val="170000"/>
-              </a:lnSpc>
-            </a:pPr>
-            <a:r>
-              <a:rPr lang="en-US" sz="1600" dirty="0">
-                <a:latin typeface="Roboto" panose="02000000000000000000" pitchFamily="2" charset="0"/>
-                <a:ea typeface="Roboto" panose="02000000000000000000" pitchFamily="2" charset="0"/>
-                <a:cs typeface="Roboto" panose="02000000000000000000" pitchFamily="2" charset="0"/>
-              </a:rPr>
-              <a:t>Investigate Retail immediately — confirm whether misalignment reflects intentional project seating or temporary moves, or whether formal reallocation is required. </a:t>
-            </a:r>
-          </a:p>
-        </p:txBody>
-      </p:sp>
-      <p:sp>
-        <p:nvSpPr>
-          <p:cNvPr id="4" name="Title 3">
-            <a:extLst>
-              <a:ext uri="{FF2B5EF4-FFF2-40B4-BE49-F238E27FC236}">
-                <a16:creationId xmlns:a16="http://schemas.microsoft.com/office/drawing/2014/main" id="{1713A36C-115E-812C-E765-03108986E64E}"/>
-              </a:ext>
-            </a:extLst>
-          </p:cNvPr>
-          <p:cNvSpPr>
-            <a:spLocks noGrp="1"/>
-          </p:cNvSpPr>
-          <p:nvPr>
-            <p:ph type="title"/>
-          </p:nvPr>
-        </p:nvSpPr>
-        <p:spPr/>
-        <p:txBody>
-          <a:bodyPr/>
-          <a:lstStyle/>
-          <a:p>
-            <a:r>
-              <a:rPr lang="en-US" b="1" kern="1400" spc="200" dirty="0"/>
-              <a:t>Building F — Key Findings &amp; Next Steps</a:t>
-            </a:r>
-          </a:p>
-        </p:txBody>
-      </p:sp>
-    </p:spTree>
-    <p:extLst>
-      <p:ext uri="{BB962C8B-B14F-4D97-AF65-F5344CB8AC3E}">
-        <p14:creationId xmlns:p14="http://schemas.microsoft.com/office/powerpoint/2010/main" val="3330248001"/>
-      </p:ext>
-    </p:extLst>
-  </p:cSld>
-  <p:clrMapOvr>
-    <a:masterClrMapping/>
-  </p:clrMapOvr>
-</p:sld>
-</file>
-
-<file path=ppt/slides/slide7.xml><?xml version="1.0" encoding="utf-8"?>
-<p:sld xmlns:a="http://schemas.openxmlformats.org/drawingml/2006/main" xmlns:r="http://schemas.openxmlformats.org/officeDocument/2006/relationships" xmlns:p="http://schemas.openxmlformats.org/presentationml/2006/main">
-  <p:cSld>
-    <p:spTree>
-      <p:nvGrpSpPr>
-        <p:cNvPr id="1" name="">
-          <a:extLst>
-            <a:ext uri="{FF2B5EF4-FFF2-40B4-BE49-F238E27FC236}">
-              <a16:creationId xmlns:a16="http://schemas.microsoft.com/office/drawing/2014/main" id="{92C9F3ED-6D41-56B1-B819-B3A247F81AAF}"/>
-            </a:ext>
-          </a:extLst>
-        </p:cNvPr>
-        <p:cNvGrpSpPr/>
-        <p:nvPr/>
-      </p:nvGrpSpPr>
-      <p:grpSpPr>
-        <a:xfrm>
-          <a:off x="0" y="0"/>
-          <a:ext cx="0" cy="0"/>
-          <a:chOff x="0" y="0"/>
-          <a:chExt cx="0" cy="0"/>
-        </a:xfrm>
-      </p:grpSpPr>
-      <p:sp>
-        <p:nvSpPr>
-          <p:cNvPr id="2" name="Title 1">
-            <a:extLst>
-              <a:ext uri="{FF2B5EF4-FFF2-40B4-BE49-F238E27FC236}">
-                <a16:creationId xmlns:a16="http://schemas.microsoft.com/office/drawing/2014/main" id="{FA619B63-FB71-CCAA-BFEB-33722D06EF84}"/>
-              </a:ext>
-            </a:extLst>
-          </p:cNvPr>
-          <p:cNvSpPr>
-            <a:spLocks noGrp="1"/>
-          </p:cNvSpPr>
-          <p:nvPr>
-            <p:ph type="title"/>
-          </p:nvPr>
-        </p:nvSpPr>
-        <p:spPr>
-          <a:xfrm>
-            <a:off x="543634" y="2636765"/>
-            <a:ext cx="7503085" cy="1973335"/>
-          </a:xfrm>
-        </p:spPr>
-        <p:txBody>
-          <a:bodyPr>
-            <a:normAutofit/>
-          </a:bodyPr>
-          <a:lstStyle/>
-          <a:p>
-            <a:r>
-              <a:rPr lang="en-US" sz="2900" spc="150" dirty="0"/>
-              <a:t>Retail has 260 employees but only 175 allocated seats — an 85-seat shortfall driving systemic overflow into adjacent org space.</a:t>
-            </a:r>
-          </a:p>
-        </p:txBody>
-      </p:sp>
-    </p:spTree>
-    <p:extLst>
-      <p:ext uri="{BB962C8B-B14F-4D97-AF65-F5344CB8AC3E}">
-        <p14:creationId xmlns:p14="http://schemas.microsoft.com/office/powerpoint/2010/main" val="1581676872"/>
-      </p:ext>
-    </p:extLst>
-  </p:cSld>
-  <p:clrMapOvr>
-    <a:masterClrMapping/>
-  </p:clrMapOvr>
-</p:sld>
-</file>
-
-<file path=ppt/slides/slide8.xml><?xml version="1.0" encoding="utf-8"?>
-<p:sld xmlns:a="http://schemas.openxmlformats.org/drawingml/2006/main" xmlns:r="http://schemas.openxmlformats.org/officeDocument/2006/relationships" xmlns:p="http://schemas.openxmlformats.org/presentationml/2006/main">
-  <p:cSld>
-    <p:spTree>
-      <p:nvGrpSpPr>
-        <p:cNvPr id="1" name="">
-          <a:extLst>
-            <a:ext uri="{FF2B5EF4-FFF2-40B4-BE49-F238E27FC236}">
-              <a16:creationId xmlns:a16="http://schemas.microsoft.com/office/drawing/2014/main" id="{02BB24FD-295C-0F8B-BEB2-F72A2BECE26B}"/>
-            </a:ext>
-          </a:extLst>
-        </p:cNvPr>
-        <p:cNvGrpSpPr/>
-        <p:nvPr/>
-      </p:nvGrpSpPr>
-      <p:grpSpPr>
-        <a:xfrm>
-          <a:off x="0" y="0"/>
-          <a:ext cx="0" cy="0"/>
-          <a:chOff x="0" y="0"/>
-          <a:chExt cx="0" cy="0"/>
-        </a:xfrm>
-      </p:grpSpPr>
-      <p:sp>
-        <p:nvSpPr>
-          <p:cNvPr id="3" name="Content Placeholder 2">
-            <a:extLst>
-              <a:ext uri="{FF2B5EF4-FFF2-40B4-BE49-F238E27FC236}">
-                <a16:creationId xmlns:a16="http://schemas.microsoft.com/office/drawing/2014/main" id="{647F3FEA-7366-82B0-A51F-494E0B144495}"/>
-              </a:ext>
-            </a:extLst>
-          </p:cNvPr>
-          <p:cNvSpPr>
-            <a:spLocks noGrp="1"/>
-          </p:cNvSpPr>
-          <p:nvPr>
-            <p:ph idx="1"/>
-          </p:nvPr>
-        </p:nvSpPr>
-        <p:spPr>
-          <a:xfrm>
-            <a:off x="497393" y="1230672"/>
-            <a:ext cx="3786276" cy="5040630"/>
-          </a:xfrm>
-        </p:spPr>
-        <p:txBody>
-          <a:bodyPr>
-            <a:normAutofit/>
-          </a:bodyPr>
-          <a:lstStyle/>
-          <a:p>
-            <a:pPr>
-              <a:lnSpc>
-                <a:spcPct val="100000"/>
-              </a:lnSpc>
-            </a:pPr>
-            <a:r>
-              <a:rPr lang="en-US" sz="1600" dirty="0">
-                <a:latin typeface="Roboto" panose="02000000000000000000" pitchFamily="2" charset="0"/>
-                <a:ea typeface="Roboto" panose="02000000000000000000" pitchFamily="2" charset="0"/>
-                <a:cs typeface="Roboto" panose="02000000000000000000" pitchFamily="2" charset="0"/>
-              </a:rPr>
-              <a:t>Both floors reveal a consistent pattern: actual employee counts significantly outpace allocated spaces. </a:t>
-            </a:r>
-          </a:p>
-          <a:p>
-            <a:pPr marL="285750" indent="-285750">
-              <a:lnSpc>
-                <a:spcPct val="100000"/>
-              </a:lnSpc>
-              <a:buFont typeface="Arial" panose="020B0604020202020204" pitchFamily="34" charset="0"/>
-              <a:buChar char="•"/>
-            </a:pPr>
-            <a:r>
-              <a:rPr lang="en-US" sz="1600" dirty="0">
-                <a:latin typeface="Roboto" panose="02000000000000000000" pitchFamily="2" charset="0"/>
-                <a:ea typeface="Roboto" panose="02000000000000000000" pitchFamily="2" charset="0"/>
-                <a:cs typeface="Roboto" panose="02000000000000000000" pitchFamily="2" charset="0"/>
-              </a:rPr>
-              <a:t>Floor 1 is </a:t>
-            </a:r>
-            <a:r>
-              <a:rPr lang="en-US" sz="1600" b="1" dirty="0">
-                <a:latin typeface="Roboto" panose="02000000000000000000" pitchFamily="2" charset="0"/>
-                <a:ea typeface="Roboto" panose="02000000000000000000" pitchFamily="2" charset="0"/>
-                <a:cs typeface="Roboto" panose="02000000000000000000" pitchFamily="2" charset="0"/>
-              </a:rPr>
-              <a:t>72%</a:t>
-            </a:r>
-            <a:r>
-              <a:rPr lang="en-US" sz="1600" dirty="0">
-                <a:latin typeface="Roboto" panose="02000000000000000000" pitchFamily="2" charset="0"/>
-                <a:ea typeface="Roboto" panose="02000000000000000000" pitchFamily="2" charset="0"/>
-                <a:cs typeface="Roboto" panose="02000000000000000000" pitchFamily="2" charset="0"/>
-              </a:rPr>
-              <a:t> aligned with an office-heavy mix and limited flex capacity. </a:t>
-            </a:r>
-          </a:p>
-          <a:p>
-            <a:pPr marL="285750" indent="-285750">
-              <a:lnSpc>
-                <a:spcPct val="100000"/>
-              </a:lnSpc>
-              <a:buFont typeface="Arial" panose="020B0604020202020204" pitchFamily="34" charset="0"/>
-              <a:buChar char="•"/>
-            </a:pPr>
-            <a:r>
-              <a:rPr lang="en-US" sz="1600" dirty="0">
-                <a:latin typeface="Roboto" panose="02000000000000000000" pitchFamily="2" charset="0"/>
-                <a:ea typeface="Roboto" panose="02000000000000000000" pitchFamily="2" charset="0"/>
-                <a:cs typeface="Roboto" panose="02000000000000000000" pitchFamily="2" charset="0"/>
-              </a:rPr>
-              <a:t>Floor 2 fares worse at </a:t>
-            </a:r>
-            <a:r>
-              <a:rPr lang="en-US" sz="1600" b="1" dirty="0">
-                <a:latin typeface="Roboto" panose="02000000000000000000" pitchFamily="2" charset="0"/>
-                <a:ea typeface="Roboto" panose="02000000000000000000" pitchFamily="2" charset="0"/>
-                <a:cs typeface="Roboto" panose="02000000000000000000" pitchFamily="2" charset="0"/>
-              </a:rPr>
-              <a:t>65%</a:t>
-            </a:r>
-            <a:r>
-              <a:rPr lang="en-US" sz="1600" dirty="0">
-                <a:latin typeface="Roboto" panose="02000000000000000000" pitchFamily="2" charset="0"/>
-                <a:ea typeface="Roboto" panose="02000000000000000000" pitchFamily="2" charset="0"/>
-                <a:cs typeface="Roboto" panose="02000000000000000000" pitchFamily="2" charset="0"/>
-              </a:rPr>
-              <a:t> alignment, with more flex seats but the majority of overflow spilling into other organizations' space.</a:t>
-            </a:r>
-          </a:p>
-          <a:p>
-            <a:pPr>
-              <a:lnSpc>
-                <a:spcPct val="100000"/>
-              </a:lnSpc>
-            </a:pPr>
-            <a:r>
-              <a:rPr lang="en-US" sz="1600" dirty="0">
-                <a:latin typeface="Roboto" panose="02000000000000000000" pitchFamily="2" charset="0"/>
-                <a:ea typeface="Roboto" panose="02000000000000000000" pitchFamily="2" charset="0"/>
-                <a:cs typeface="Roboto" panose="02000000000000000000" pitchFamily="2" charset="0"/>
-              </a:rPr>
-              <a:t>The root cause is structural — Retail simply does not have enough allocated seats on either floor to accommodate its current headcount.</a:t>
-            </a:r>
-          </a:p>
-        </p:txBody>
-      </p:sp>
-      <p:sp>
-        <p:nvSpPr>
-          <p:cNvPr id="4" name="Title 3">
-            <a:extLst>
-              <a:ext uri="{FF2B5EF4-FFF2-40B4-BE49-F238E27FC236}">
-                <a16:creationId xmlns:a16="http://schemas.microsoft.com/office/drawing/2014/main" id="{CE5AD8F9-1CEE-B7CE-5E31-62D4617B8CFE}"/>
-              </a:ext>
-            </a:extLst>
-          </p:cNvPr>
-          <p:cNvSpPr>
-            <a:spLocks noGrp="1"/>
-          </p:cNvSpPr>
-          <p:nvPr>
-            <p:ph type="title"/>
-          </p:nvPr>
-        </p:nvSpPr>
-        <p:spPr/>
-        <p:txBody>
-          <a:bodyPr/>
-          <a:lstStyle/>
-          <a:p>
-            <a:r>
-              <a:rPr lang="en-US" b="1" spc="200" dirty="0"/>
-              <a:t>Retail — Actual Employees vs. Allocated Spaces by Floor</a:t>
-            </a:r>
-          </a:p>
-        </p:txBody>
-      </p:sp>
-      <p:pic>
-        <p:nvPicPr>
-          <p:cNvPr id="5" name="Picture 4">
-            <a:extLst>
-              <a:ext uri="{FF2B5EF4-FFF2-40B4-BE49-F238E27FC236}">
-                <a16:creationId xmlns:a16="http://schemas.microsoft.com/office/drawing/2014/main" id="{744F7744-708D-3292-6FB7-85EDA3FC642A}"/>
-              </a:ext>
-            </a:extLst>
-          </p:cNvPr>
-          <p:cNvPicPr>
-            <a:picLocks noChangeAspect="1"/>
-          </p:cNvPicPr>
-          <p:nvPr/>
-        </p:nvPicPr>
-        <p:blipFill>
-          <a:blip r:embed="rId2"/>
-          <a:stretch>
-            <a:fillRect/>
-          </a:stretch>
-        </p:blipFill>
-        <p:spPr>
-          <a:xfrm>
-            <a:off x="4752567" y="1478322"/>
-            <a:ext cx="4656040" cy="4920904"/>
-          </a:xfrm>
-          <a:prstGeom prst="rect">
-            <a:avLst/>
-          </a:prstGeom>
-          <a:ln>
-            <a:solidFill>
-              <a:schemeClr val="tx1"/>
-            </a:solidFill>
-          </a:ln>
-        </p:spPr>
-      </p:pic>
-    </p:spTree>
-    <p:extLst>
-      <p:ext uri="{BB962C8B-B14F-4D97-AF65-F5344CB8AC3E}">
-        <p14:creationId xmlns:p14="http://schemas.microsoft.com/office/powerpoint/2010/main" val="819619271"/>
-      </p:ext>
-    </p:extLst>
-  </p:cSld>
-  <p:clrMapOvr>
-    <a:masterClrMapping/>
-  </p:clrMapOvr>
-</p:sld>
-</file>
-
-<file path=ppt/slides/slide9.xml><?xml version="1.0" encoding="utf-8"?>
-<p:sld xmlns:a="http://schemas.openxmlformats.org/drawingml/2006/main" xmlns:r="http://schemas.openxmlformats.org/officeDocument/2006/relationships" xmlns:p="http://schemas.openxmlformats.org/presentationml/2006/main">
-  <p:cSld>
-    <p:spTree>
-      <p:nvGrpSpPr>
-        <p:cNvPr id="1" name="">
-          <a:extLst>
-            <a:ext uri="{FF2B5EF4-FFF2-40B4-BE49-F238E27FC236}">
-              <a16:creationId xmlns:a16="http://schemas.microsoft.com/office/drawing/2014/main" id="{320C33CB-91FB-66C1-5825-5C0BF5945B83}"/>
-            </a:ext>
-          </a:extLst>
-        </p:cNvPr>
-        <p:cNvGrpSpPr/>
-        <p:nvPr/>
-      </p:nvGrpSpPr>
-      <p:grpSpPr>
-        <a:xfrm>
-          <a:off x="0" y="0"/>
-          <a:ext cx="0" cy="0"/>
-          <a:chOff x="0" y="0"/>
-          <a:chExt cx="0" cy="0"/>
-        </a:xfrm>
-      </p:grpSpPr>
-      <p:sp>
-        <p:nvSpPr>
-          <p:cNvPr id="3" name="Content Placeholder 2">
-            <a:extLst>
-              <a:ext uri="{FF2B5EF4-FFF2-40B4-BE49-F238E27FC236}">
-                <a16:creationId xmlns:a16="http://schemas.microsoft.com/office/drawing/2014/main" id="{6A56B1E9-80D9-09FC-616B-BE87F8A32E0D}"/>
-              </a:ext>
-            </a:extLst>
-          </p:cNvPr>
-          <p:cNvSpPr>
-            <a:spLocks noGrp="1"/>
-          </p:cNvSpPr>
-          <p:nvPr>
-            <p:ph idx="1"/>
-          </p:nvPr>
-        </p:nvSpPr>
-        <p:spPr>
-          <a:xfrm>
-            <a:off x="596204" y="1000126"/>
-            <a:ext cx="8156836" cy="5591174"/>
-          </a:xfrm>
-        </p:spPr>
-        <p:txBody>
-          <a:bodyPr>
-            <a:normAutofit fontScale="92500" lnSpcReduction="10000"/>
-          </a:bodyPr>
-          <a:lstStyle/>
-          <a:p>
-            <a:pPr>
-              <a:lnSpc>
-                <a:spcPct val="110000"/>
-              </a:lnSpc>
-            </a:pPr>
-            <a:r>
-              <a:rPr lang="en-US" sz="2000" b="1" dirty="0">
-                <a:latin typeface="Roboto" panose="02000000000000000000" pitchFamily="2" charset="0"/>
-                <a:ea typeface="Roboto" panose="02000000000000000000" pitchFamily="2" charset="0"/>
-                <a:cs typeface="Roboto" panose="02000000000000000000" pitchFamily="2" charset="0"/>
-              </a:rPr>
-              <a:t>Findings:</a:t>
-            </a:r>
-            <a:endParaRPr lang="en-US" sz="2000" dirty="0">
-              <a:latin typeface="Roboto" panose="02000000000000000000" pitchFamily="2" charset="0"/>
-              <a:ea typeface="Roboto" panose="02000000000000000000" pitchFamily="2" charset="0"/>
-              <a:cs typeface="Roboto" panose="02000000000000000000" pitchFamily="2" charset="0"/>
-            </a:endParaRPr>
-          </a:p>
-          <a:p>
-            <a:pPr marL="285750" indent="-285750">
-              <a:lnSpc>
-                <a:spcPct val="110000"/>
-              </a:lnSpc>
-              <a:buFont typeface="Arial" panose="020B0604020202020204" pitchFamily="34" charset="0"/>
-              <a:buChar char="•"/>
-            </a:pPr>
-            <a:r>
-              <a:rPr lang="en-US" sz="1800" b="1" dirty="0">
-                <a:latin typeface="Roboto" panose="02000000000000000000" pitchFamily="2" charset="0"/>
-                <a:ea typeface="Roboto" panose="02000000000000000000" pitchFamily="2" charset="0"/>
-                <a:cs typeface="Roboto" panose="02000000000000000000" pitchFamily="2" charset="0"/>
-              </a:rPr>
-              <a:t>Retail overall</a:t>
-            </a:r>
-            <a:r>
-              <a:rPr lang="en-US" sz="1800" dirty="0">
-                <a:latin typeface="Roboto" panose="02000000000000000000" pitchFamily="2" charset="0"/>
-                <a:ea typeface="Roboto" panose="02000000000000000000" pitchFamily="2" charset="0"/>
-                <a:cs typeface="Roboto" panose="02000000000000000000" pitchFamily="2" charset="0"/>
-              </a:rPr>
-              <a:t>:  </a:t>
-            </a:r>
-            <a:r>
-              <a:rPr lang="en-US" sz="1800" b="1" dirty="0">
-                <a:latin typeface="Roboto" panose="02000000000000000000" pitchFamily="2" charset="0"/>
-                <a:ea typeface="Roboto" panose="02000000000000000000" pitchFamily="2" charset="0"/>
-                <a:cs typeface="Roboto" panose="02000000000000000000" pitchFamily="2" charset="0"/>
-              </a:rPr>
-              <a:t>67%</a:t>
-            </a:r>
-            <a:r>
-              <a:rPr lang="en-US" sz="1800" dirty="0">
-                <a:latin typeface="Roboto" panose="02000000000000000000" pitchFamily="2" charset="0"/>
-                <a:ea typeface="Roboto" panose="02000000000000000000" pitchFamily="2" charset="0"/>
-                <a:cs typeface="Roboto" panose="02000000000000000000" pitchFamily="2" charset="0"/>
-              </a:rPr>
-              <a:t> aligned — 85-seat shortfall with 260 employees and only 175 seats.</a:t>
-            </a:r>
-          </a:p>
-          <a:p>
-            <a:pPr marL="285750" indent="-285750">
-              <a:lnSpc>
-                <a:spcPct val="110000"/>
-              </a:lnSpc>
-              <a:buFont typeface="Arial" panose="020B0604020202020204" pitchFamily="34" charset="0"/>
-              <a:buChar char="•"/>
-            </a:pPr>
-            <a:r>
-              <a:rPr lang="en-US" sz="1800" b="1" dirty="0">
-                <a:latin typeface="Roboto" panose="02000000000000000000" pitchFamily="2" charset="0"/>
-                <a:ea typeface="Roboto" panose="02000000000000000000" pitchFamily="2" charset="0"/>
-                <a:cs typeface="Roboto" panose="02000000000000000000" pitchFamily="2" charset="0"/>
-              </a:rPr>
-              <a:t>Floor 1</a:t>
-            </a:r>
-            <a:r>
-              <a:rPr lang="en-US" sz="1800" dirty="0">
-                <a:latin typeface="Roboto" panose="02000000000000000000" pitchFamily="2" charset="0"/>
-                <a:ea typeface="Roboto" panose="02000000000000000000" pitchFamily="2" charset="0"/>
-                <a:cs typeface="Roboto" panose="02000000000000000000" pitchFamily="2" charset="0"/>
-              </a:rPr>
-              <a:t>:  </a:t>
-            </a:r>
-            <a:r>
-              <a:rPr lang="en-US" sz="1800" u="sng" dirty="0">
-                <a:latin typeface="Roboto" panose="02000000000000000000" pitchFamily="2" charset="0"/>
-                <a:ea typeface="Roboto" panose="02000000000000000000" pitchFamily="2" charset="0"/>
-                <a:cs typeface="Roboto" panose="02000000000000000000" pitchFamily="2" charset="0"/>
-              </a:rPr>
-              <a:t>72%</a:t>
-            </a:r>
-            <a:r>
-              <a:rPr lang="en-US" sz="1800" dirty="0">
-                <a:latin typeface="Roboto" panose="02000000000000000000" pitchFamily="2" charset="0"/>
-                <a:ea typeface="Roboto" panose="02000000000000000000" pitchFamily="2" charset="0"/>
-                <a:cs typeface="Roboto" panose="02000000000000000000" pitchFamily="2" charset="0"/>
-              </a:rPr>
-              <a:t> aligned, office-heavy layout with limited flex capacity for overflow.</a:t>
-            </a:r>
-          </a:p>
-          <a:p>
-            <a:pPr marL="285750" indent="-285750">
-              <a:lnSpc>
-                <a:spcPct val="110000"/>
-              </a:lnSpc>
-              <a:buFont typeface="Arial" panose="020B0604020202020204" pitchFamily="34" charset="0"/>
-              <a:buChar char="•"/>
-            </a:pPr>
-            <a:r>
-              <a:rPr lang="en-US" sz="1800" b="1" dirty="0">
-                <a:latin typeface="Roboto" panose="02000000000000000000" pitchFamily="2" charset="0"/>
-                <a:ea typeface="Roboto" panose="02000000000000000000" pitchFamily="2" charset="0"/>
-                <a:cs typeface="Roboto" panose="02000000000000000000" pitchFamily="2" charset="0"/>
-              </a:rPr>
-              <a:t>Floor 2</a:t>
-            </a:r>
-            <a:r>
-              <a:rPr lang="en-US" sz="1800" dirty="0">
-                <a:latin typeface="Roboto" panose="02000000000000000000" pitchFamily="2" charset="0"/>
-                <a:ea typeface="Roboto" panose="02000000000000000000" pitchFamily="2" charset="0"/>
-                <a:cs typeface="Roboto" panose="02000000000000000000" pitchFamily="2" charset="0"/>
-              </a:rPr>
-              <a:t>:  </a:t>
-            </a:r>
-            <a:r>
-              <a:rPr lang="en-US" sz="1800" u="sng" dirty="0">
-                <a:latin typeface="Roboto" panose="02000000000000000000" pitchFamily="2" charset="0"/>
-                <a:ea typeface="Roboto" panose="02000000000000000000" pitchFamily="2" charset="0"/>
-                <a:cs typeface="Roboto" panose="02000000000000000000" pitchFamily="2" charset="0"/>
-              </a:rPr>
-              <a:t>65%</a:t>
-            </a:r>
-            <a:r>
-              <a:rPr lang="en-US" sz="1800" dirty="0">
-                <a:latin typeface="Roboto" panose="02000000000000000000" pitchFamily="2" charset="0"/>
-                <a:ea typeface="Roboto" panose="02000000000000000000" pitchFamily="2" charset="0"/>
-                <a:cs typeface="Roboto" panose="02000000000000000000" pitchFamily="2" charset="0"/>
-              </a:rPr>
-              <a:t> aligned — more flex seats, but most overflow bleeds into other orgs' allocated space.</a:t>
-            </a:r>
-          </a:p>
-          <a:p>
-            <a:pPr marL="285750" indent="-285750">
-              <a:lnSpc>
-                <a:spcPct val="110000"/>
-              </a:lnSpc>
-              <a:buFont typeface="Arial" panose="020B0604020202020204" pitchFamily="34" charset="0"/>
-              <a:buChar char="•"/>
-            </a:pPr>
-            <a:r>
-              <a:rPr lang="en-US" sz="1800" dirty="0">
-                <a:latin typeface="Roboto" panose="02000000000000000000" pitchFamily="2" charset="0"/>
-                <a:ea typeface="Roboto" panose="02000000000000000000" pitchFamily="2" charset="0"/>
-                <a:cs typeface="Roboto" panose="02000000000000000000" pitchFamily="2" charset="0"/>
-              </a:rPr>
-              <a:t>Root cause: neither floor has sufficient Retail-dedicated allocations to cover actual headcount.</a:t>
-            </a:r>
-          </a:p>
-          <a:p>
-            <a:pPr>
-              <a:lnSpc>
-                <a:spcPct val="110000"/>
-              </a:lnSpc>
-            </a:pPr>
-            <a:endParaRPr lang="en-US" sz="1800" dirty="0">
-              <a:latin typeface="Roboto" panose="02000000000000000000" pitchFamily="2" charset="0"/>
-              <a:ea typeface="Roboto" panose="02000000000000000000" pitchFamily="2" charset="0"/>
-              <a:cs typeface="Roboto" panose="02000000000000000000" pitchFamily="2" charset="0"/>
-            </a:endParaRPr>
-          </a:p>
-          <a:p>
-            <a:pPr>
-              <a:lnSpc>
-                <a:spcPct val="110000"/>
-              </a:lnSpc>
-            </a:pPr>
-            <a:r>
-              <a:rPr lang="en-US" sz="2000" b="1" dirty="0">
-                <a:latin typeface="Roboto" panose="02000000000000000000" pitchFamily="2" charset="0"/>
-                <a:ea typeface="Roboto" panose="02000000000000000000" pitchFamily="2" charset="0"/>
-                <a:cs typeface="Roboto" panose="02000000000000000000" pitchFamily="2" charset="0"/>
-              </a:rPr>
-              <a:t>Recommended Action:</a:t>
-            </a:r>
-            <a:endParaRPr lang="en-US" sz="2000" dirty="0">
-              <a:latin typeface="Roboto" panose="02000000000000000000" pitchFamily="2" charset="0"/>
-              <a:ea typeface="Roboto" panose="02000000000000000000" pitchFamily="2" charset="0"/>
-              <a:cs typeface="Roboto" panose="02000000000000000000" pitchFamily="2" charset="0"/>
-            </a:endParaRPr>
-          </a:p>
-          <a:p>
-            <a:pPr>
-              <a:lnSpc>
-                <a:spcPct val="110000"/>
-              </a:lnSpc>
-            </a:pPr>
-            <a:r>
-              <a:rPr lang="en-US" sz="1800" dirty="0">
-                <a:latin typeface="Roboto" panose="02000000000000000000" pitchFamily="2" charset="0"/>
-                <a:ea typeface="Roboto" panose="02000000000000000000" pitchFamily="2" charset="0"/>
-                <a:cs typeface="Roboto" panose="02000000000000000000" pitchFamily="2" charset="0"/>
-              </a:rPr>
-              <a:t>Consolidate Retail footprint, reallocate surplus seats from under-utilized units such as Engineering, and add flexible seating on Floor 1. Monitor weekly alignment post-change.</a:t>
-            </a:r>
-          </a:p>
-        </p:txBody>
-      </p:sp>
-      <p:sp>
-        <p:nvSpPr>
-          <p:cNvPr id="4" name="Title 3">
-            <a:extLst>
-              <a:ext uri="{FF2B5EF4-FFF2-40B4-BE49-F238E27FC236}">
-                <a16:creationId xmlns:a16="http://schemas.microsoft.com/office/drawing/2014/main" id="{6318BE7D-BB43-6416-AD1D-C1989663B2BC}"/>
-              </a:ext>
-            </a:extLst>
-          </p:cNvPr>
-          <p:cNvSpPr>
-            <a:spLocks noGrp="1"/>
-          </p:cNvSpPr>
-          <p:nvPr>
-            <p:ph type="title"/>
-          </p:nvPr>
-        </p:nvSpPr>
-        <p:spPr/>
-        <p:txBody>
-          <a:bodyPr/>
-          <a:lstStyle/>
-          <a:p>
-            <a:r>
-              <a:rPr lang="en-US" b="1" kern="1400" spc="200" dirty="0"/>
-              <a:t>Retail — Insights &amp; Consolidation Plan</a:t>
-            </a:r>
-          </a:p>
-        </p:txBody>
-      </p:sp>
-    </p:spTree>
-    <p:extLst>
-      <p:ext uri="{BB962C8B-B14F-4D97-AF65-F5344CB8AC3E}">
-        <p14:creationId xmlns:p14="http://schemas.microsoft.com/office/powerpoint/2010/main" val="2334850765"/>
       </p:ext>
     </p:extLst>
   </p:cSld>
@@ -7778,39 +10830,39 @@
         <a:sysClr val="window" lastClr="FFFFFF"/>
       </a:lt1>
       <a:dk2>
-        <a:srgbClr val="44546A"/>
+        <a:srgbClr val="0E2841"/>
       </a:dk2>
       <a:lt2>
-        <a:srgbClr val="E7E6E6"/>
+        <a:srgbClr val="E8E8E8"/>
       </a:lt2>
       <a:accent1>
-        <a:srgbClr val="5B9BD5"/>
+        <a:srgbClr val="156082"/>
       </a:accent1>
       <a:accent2>
-        <a:srgbClr val="ED7D31"/>
+        <a:srgbClr val="E97132"/>
       </a:accent2>
       <a:accent3>
-        <a:srgbClr val="A5A5A5"/>
+        <a:srgbClr val="196B24"/>
       </a:accent3>
       <a:accent4>
-        <a:srgbClr val="FFC000"/>
+        <a:srgbClr val="0F9ED5"/>
       </a:accent4>
       <a:accent5>
-        <a:srgbClr val="4472C4"/>
+        <a:srgbClr val="A02B93"/>
       </a:accent5>
       <a:accent6>
-        <a:srgbClr val="70AD47"/>
+        <a:srgbClr val="4EA72E"/>
       </a:accent6>
       <a:hlink>
-        <a:srgbClr val="0563C1"/>
+        <a:srgbClr val="467886"/>
       </a:hlink>
       <a:folHlink>
-        <a:srgbClr val="954F72"/>
+        <a:srgbClr val="96607D"/>
       </a:folHlink>
     </a:clrScheme>
     <a:fontScheme name="Office">
       <a:majorFont>
-        <a:latin typeface="Calibri Light" panose="020F0302020204030204"/>
+        <a:latin typeface="Aptos Display" panose="02110004020202020204"/>
         <a:ea typeface=""/>
         <a:cs typeface=""/>
         <a:font script="Jpan" typeface="游ゴシック Light"/>
@@ -7843,9 +10895,26 @@
         <a:font script="Viet" typeface="Times New Roman"/>
         <a:font script="Uigh" typeface="Microsoft Uighur"/>
         <a:font script="Geor" typeface="Sylfaen"/>
+        <a:font script="Armn" typeface="Arial"/>
+        <a:font script="Bugi" typeface="Leelawadee UI"/>
+        <a:font script="Bopo" typeface="Microsoft JhengHei"/>
+        <a:font script="Java" typeface="Javanese Text"/>
+        <a:font script="Lisu" typeface="Segoe UI"/>
+        <a:font script="Mymr" typeface="Myanmar Text"/>
+        <a:font script="Nkoo" typeface="Ebrima"/>
+        <a:font script="Olck" typeface="Nirmala UI"/>
+        <a:font script="Osma" typeface="Ebrima"/>
+        <a:font script="Phag" typeface="Phagspa"/>
+        <a:font script="Syrn" typeface="Estrangelo Edessa"/>
+        <a:font script="Syrj" typeface="Estrangelo Edessa"/>
+        <a:font script="Syre" typeface="Estrangelo Edessa"/>
+        <a:font script="Sora" typeface="Nirmala UI"/>
+        <a:font script="Tale" typeface="Microsoft Tai Le"/>
+        <a:font script="Talu" typeface="Microsoft New Tai Lue"/>
+        <a:font script="Tfng" typeface="Ebrima"/>
       </a:majorFont>
       <a:minorFont>
-        <a:latin typeface="Calibri" panose="020F0502020204030204"/>
+        <a:latin typeface="Aptos" panose="02110004020202020204"/>
         <a:ea typeface=""/>
         <a:cs typeface=""/>
         <a:font script="Jpan" typeface="游ゴシック"/>
@@ -7878,6 +10947,23 @@
         <a:font script="Viet" typeface="Arial"/>
         <a:font script="Uigh" typeface="Microsoft Uighur"/>
         <a:font script="Geor" typeface="Sylfaen"/>
+        <a:font script="Armn" typeface="Arial"/>
+        <a:font script="Bugi" typeface="Leelawadee UI"/>
+        <a:font script="Bopo" typeface="Microsoft JhengHei"/>
+        <a:font script="Java" typeface="Javanese Text"/>
+        <a:font script="Lisu" typeface="Segoe UI"/>
+        <a:font script="Mymr" typeface="Myanmar Text"/>
+        <a:font script="Nkoo" typeface="Ebrima"/>
+        <a:font script="Olck" typeface="Nirmala UI"/>
+        <a:font script="Osma" typeface="Ebrima"/>
+        <a:font script="Phag" typeface="Phagspa"/>
+        <a:font script="Syrn" typeface="Estrangelo Edessa"/>
+        <a:font script="Syrj" typeface="Estrangelo Edessa"/>
+        <a:font script="Syre" typeface="Estrangelo Edessa"/>
+        <a:font script="Sora" typeface="Nirmala UI"/>
+        <a:font script="Tale" typeface="Microsoft Tai Le"/>
+        <a:font script="Talu" typeface="Microsoft New Tai Lue"/>
+        <a:font script="Tfng" typeface="Ebrima"/>
       </a:minorFont>
     </a:fontScheme>
     <a:fmtScheme name="Office">
@@ -7939,13 +11025,6 @@
         </a:gradFill>
       </a:fillStyleLst>
       <a:lnStyleLst>
-        <a:ln w="6350" cap="flat" cmpd="sng" algn="ctr">
-          <a:solidFill>
-            <a:schemeClr val="phClr"/>
-          </a:solidFill>
-          <a:prstDash val="solid"/>
-          <a:miter lim="800000"/>
-        </a:ln>
         <a:ln w="12700" cap="flat" cmpd="sng" algn="ctr">
           <a:solidFill>
             <a:schemeClr val="phClr"/>
@@ -7954,6 +11033,13 @@
           <a:miter lim="800000"/>
         </a:ln>
         <a:ln w="19050" cap="flat" cmpd="sng" algn="ctr">
+          <a:solidFill>
+            <a:schemeClr val="phClr"/>
+          </a:solidFill>
+          <a:prstDash val="solid"/>
+          <a:miter lim="800000"/>
+        </a:ln>
+        <a:ln w="25400" cap="flat" cmpd="sng" algn="ctr">
           <a:solidFill>
             <a:schemeClr val="phClr"/>
           </a:solidFill>
@@ -8018,11 +11104,31 @@
       </a:bgFillStyleLst>
     </a:fmtScheme>
   </a:themeElements>
-  <a:objectDefaults/>
+  <a:objectDefaults>
+    <a:lnDef>
+      <a:spPr/>
+      <a:bodyPr/>
+      <a:lstStyle/>
+      <a:style>
+        <a:lnRef idx="2">
+          <a:schemeClr val="accent1"/>
+        </a:lnRef>
+        <a:fillRef idx="0">
+          <a:schemeClr val="accent1"/>
+        </a:fillRef>
+        <a:effectRef idx="1">
+          <a:schemeClr val="accent1"/>
+        </a:effectRef>
+        <a:fontRef idx="minor">
+          <a:schemeClr val="tx1"/>
+        </a:fontRef>
+      </a:style>
+    </a:lnDef>
+  </a:objectDefaults>
   <a:extraClrSchemeLst/>
   <a:extLst>
     <a:ext uri="{05A4C25C-085E-4340-85A3-A5531E510DB2}">
-      <thm15:themeFamily xmlns:thm15="http://schemas.microsoft.com/office/thememl/2012/main" name="Office Theme" id="{62F939B6-93AF-4DB8-9C6B-D6C7DFDC589F}" vid="{4A3C46E8-61CC-4603-A589-7422A47A8E4A}"/>
+      <thm15:themeFamily xmlns:thm15="http://schemas.microsoft.com/office/thememl/2012/main" name="Office Theme" id="{2E142A2C-CD16-42D6-873A-C26D2A0506FA}" vid="{1BDDFF52-6CD6-40A5-AB3C-68EB2F1E4D0A}"/>
     </a:ext>
   </a:extLst>
 </a:theme>
@@ -8289,7 +11395,283 @@
 </a:theme>
 </file>
 
+<file path=ppt/theme/theme5.xml><?xml version="1.0" encoding="utf-8"?>
+<a:theme xmlns:a="http://schemas.openxmlformats.org/drawingml/2006/main" name="Office Theme">
+  <a:themeElements>
+    <a:clrScheme name="Office">
+      <a:dk1>
+        <a:sysClr val="windowText" lastClr="000000"/>
+      </a:dk1>
+      <a:lt1>
+        <a:sysClr val="window" lastClr="FFFFFF"/>
+      </a:lt1>
+      <a:dk2>
+        <a:srgbClr val="44546A"/>
+      </a:dk2>
+      <a:lt2>
+        <a:srgbClr val="E7E6E6"/>
+      </a:lt2>
+      <a:accent1>
+        <a:srgbClr val="5B9BD5"/>
+      </a:accent1>
+      <a:accent2>
+        <a:srgbClr val="ED7D31"/>
+      </a:accent2>
+      <a:accent3>
+        <a:srgbClr val="A5A5A5"/>
+      </a:accent3>
+      <a:accent4>
+        <a:srgbClr val="FFC000"/>
+      </a:accent4>
+      <a:accent5>
+        <a:srgbClr val="4472C4"/>
+      </a:accent5>
+      <a:accent6>
+        <a:srgbClr val="70AD47"/>
+      </a:accent6>
+      <a:hlink>
+        <a:srgbClr val="0563C1"/>
+      </a:hlink>
+      <a:folHlink>
+        <a:srgbClr val="954F72"/>
+      </a:folHlink>
+    </a:clrScheme>
+    <a:fontScheme name="Office">
+      <a:majorFont>
+        <a:latin typeface="Calibri Light" panose="020F0302020204030204"/>
+        <a:ea typeface=""/>
+        <a:cs typeface=""/>
+        <a:font script="Jpan" typeface="游ゴシック Light"/>
+        <a:font script="Hang" typeface="맑은 고딕"/>
+        <a:font script="Hans" typeface="等线 Light"/>
+        <a:font script="Hant" typeface="新細明體"/>
+        <a:font script="Arab" typeface="Times New Roman"/>
+        <a:font script="Hebr" typeface="Times New Roman"/>
+        <a:font script="Thai" typeface="Angsana New"/>
+        <a:font script="Ethi" typeface="Nyala"/>
+        <a:font script="Beng" typeface="Vrinda"/>
+        <a:font script="Gujr" typeface="Shruti"/>
+        <a:font script="Khmr" typeface="MoolBoran"/>
+        <a:font script="Knda" typeface="Tunga"/>
+        <a:font script="Guru" typeface="Raavi"/>
+        <a:font script="Cans" typeface="Euphemia"/>
+        <a:font script="Cher" typeface="Plantagenet Cherokee"/>
+        <a:font script="Yiii" typeface="Microsoft Yi Baiti"/>
+        <a:font script="Tibt" typeface="Microsoft Himalaya"/>
+        <a:font script="Thaa" typeface="MV Boli"/>
+        <a:font script="Deva" typeface="Mangal"/>
+        <a:font script="Telu" typeface="Gautami"/>
+        <a:font script="Taml" typeface="Latha"/>
+        <a:font script="Syrc" typeface="Estrangelo Edessa"/>
+        <a:font script="Orya" typeface="Kalinga"/>
+        <a:font script="Mlym" typeface="Kartika"/>
+        <a:font script="Laoo" typeface="DokChampa"/>
+        <a:font script="Sinh" typeface="Iskoola Pota"/>
+        <a:font script="Mong" typeface="Mongolian Baiti"/>
+        <a:font script="Viet" typeface="Times New Roman"/>
+        <a:font script="Uigh" typeface="Microsoft Uighur"/>
+        <a:font script="Geor" typeface="Sylfaen"/>
+      </a:majorFont>
+      <a:minorFont>
+        <a:latin typeface="Calibri" panose="020F0502020204030204"/>
+        <a:ea typeface=""/>
+        <a:cs typeface=""/>
+        <a:font script="Jpan" typeface="游ゴシック"/>
+        <a:font script="Hang" typeface="맑은 고딕"/>
+        <a:font script="Hans" typeface="等线"/>
+        <a:font script="Hant" typeface="新細明體"/>
+        <a:font script="Arab" typeface="Arial"/>
+        <a:font script="Hebr" typeface="Arial"/>
+        <a:font script="Thai" typeface="Cordia New"/>
+        <a:font script="Ethi" typeface="Nyala"/>
+        <a:font script="Beng" typeface="Vrinda"/>
+        <a:font script="Gujr" typeface="Shruti"/>
+        <a:font script="Khmr" typeface="DaunPenh"/>
+        <a:font script="Knda" typeface="Tunga"/>
+        <a:font script="Guru" typeface="Raavi"/>
+        <a:font script="Cans" typeface="Euphemia"/>
+        <a:font script="Cher" typeface="Plantagenet Cherokee"/>
+        <a:font script="Yiii" typeface="Microsoft Yi Baiti"/>
+        <a:font script="Tibt" typeface="Microsoft Himalaya"/>
+        <a:font script="Thaa" typeface="MV Boli"/>
+        <a:font script="Deva" typeface="Mangal"/>
+        <a:font script="Telu" typeface="Gautami"/>
+        <a:font script="Taml" typeface="Latha"/>
+        <a:font script="Syrc" typeface="Estrangelo Edessa"/>
+        <a:font script="Orya" typeface="Kalinga"/>
+        <a:font script="Mlym" typeface="Kartika"/>
+        <a:font script="Laoo" typeface="DokChampa"/>
+        <a:font script="Sinh" typeface="Iskoola Pota"/>
+        <a:font script="Mong" typeface="Mongolian Baiti"/>
+        <a:font script="Viet" typeface="Arial"/>
+        <a:font script="Uigh" typeface="Microsoft Uighur"/>
+        <a:font script="Geor" typeface="Sylfaen"/>
+      </a:minorFont>
+    </a:fontScheme>
+    <a:fmtScheme name="Office">
+      <a:fillStyleLst>
+        <a:solidFill>
+          <a:schemeClr val="phClr"/>
+        </a:solidFill>
+        <a:gradFill rotWithShape="1">
+          <a:gsLst>
+            <a:gs pos="0">
+              <a:schemeClr val="phClr">
+                <a:lumMod val="110000"/>
+                <a:satMod val="105000"/>
+                <a:tint val="67000"/>
+              </a:schemeClr>
+            </a:gs>
+            <a:gs pos="50000">
+              <a:schemeClr val="phClr">
+                <a:lumMod val="105000"/>
+                <a:satMod val="103000"/>
+                <a:tint val="73000"/>
+              </a:schemeClr>
+            </a:gs>
+            <a:gs pos="100000">
+              <a:schemeClr val="phClr">
+                <a:lumMod val="105000"/>
+                <a:satMod val="109000"/>
+                <a:tint val="81000"/>
+              </a:schemeClr>
+            </a:gs>
+          </a:gsLst>
+          <a:lin ang="5400000" scaled="0"/>
+        </a:gradFill>
+        <a:gradFill rotWithShape="1">
+          <a:gsLst>
+            <a:gs pos="0">
+              <a:schemeClr val="phClr">
+                <a:satMod val="103000"/>
+                <a:lumMod val="102000"/>
+                <a:tint val="94000"/>
+              </a:schemeClr>
+            </a:gs>
+            <a:gs pos="50000">
+              <a:schemeClr val="phClr">
+                <a:satMod val="110000"/>
+                <a:lumMod val="100000"/>
+                <a:shade val="100000"/>
+              </a:schemeClr>
+            </a:gs>
+            <a:gs pos="100000">
+              <a:schemeClr val="phClr">
+                <a:lumMod val="99000"/>
+                <a:satMod val="120000"/>
+                <a:shade val="78000"/>
+              </a:schemeClr>
+            </a:gs>
+          </a:gsLst>
+          <a:lin ang="5400000" scaled="0"/>
+        </a:gradFill>
+      </a:fillStyleLst>
+      <a:lnStyleLst>
+        <a:ln w="6350" cap="flat" cmpd="sng" algn="ctr">
+          <a:solidFill>
+            <a:schemeClr val="phClr"/>
+          </a:solidFill>
+          <a:prstDash val="solid"/>
+          <a:miter lim="800000"/>
+        </a:ln>
+        <a:ln w="12700" cap="flat" cmpd="sng" algn="ctr">
+          <a:solidFill>
+            <a:schemeClr val="phClr"/>
+          </a:solidFill>
+          <a:prstDash val="solid"/>
+          <a:miter lim="800000"/>
+        </a:ln>
+        <a:ln w="19050" cap="flat" cmpd="sng" algn="ctr">
+          <a:solidFill>
+            <a:schemeClr val="phClr"/>
+          </a:solidFill>
+          <a:prstDash val="solid"/>
+          <a:miter lim="800000"/>
+        </a:ln>
+      </a:lnStyleLst>
+      <a:effectStyleLst>
+        <a:effectStyle>
+          <a:effectLst/>
+        </a:effectStyle>
+        <a:effectStyle>
+          <a:effectLst/>
+        </a:effectStyle>
+        <a:effectStyle>
+          <a:effectLst>
+            <a:outerShdw blurRad="57150" dist="19050" dir="5400000" algn="ctr" rotWithShape="0">
+              <a:srgbClr val="000000">
+                <a:alpha val="63000"/>
+              </a:srgbClr>
+            </a:outerShdw>
+          </a:effectLst>
+        </a:effectStyle>
+      </a:effectStyleLst>
+      <a:bgFillStyleLst>
+        <a:solidFill>
+          <a:schemeClr val="phClr"/>
+        </a:solidFill>
+        <a:solidFill>
+          <a:schemeClr val="phClr">
+            <a:tint val="95000"/>
+            <a:satMod val="170000"/>
+          </a:schemeClr>
+        </a:solidFill>
+        <a:gradFill rotWithShape="1">
+          <a:gsLst>
+            <a:gs pos="0">
+              <a:schemeClr val="phClr">
+                <a:tint val="93000"/>
+                <a:satMod val="150000"/>
+                <a:shade val="98000"/>
+                <a:lumMod val="102000"/>
+              </a:schemeClr>
+            </a:gs>
+            <a:gs pos="50000">
+              <a:schemeClr val="phClr">
+                <a:tint val="98000"/>
+                <a:satMod val="130000"/>
+                <a:shade val="90000"/>
+                <a:lumMod val="103000"/>
+              </a:schemeClr>
+            </a:gs>
+            <a:gs pos="100000">
+              <a:schemeClr val="phClr">
+                <a:shade val="63000"/>
+                <a:satMod val="120000"/>
+              </a:schemeClr>
+            </a:gs>
+          </a:gsLst>
+          <a:lin ang="5400000" scaled="0"/>
+        </a:gradFill>
+      </a:bgFillStyleLst>
+    </a:fmtScheme>
+  </a:themeElements>
+  <a:objectDefaults/>
+  <a:extraClrSchemeLst/>
+  <a:extLst>
+    <a:ext uri="{05A4C25C-085E-4340-85A3-A5531E510DB2}">
+      <thm15:themeFamily xmlns:thm15="http://schemas.microsoft.com/office/thememl/2012/main" name="Office Theme" id="{62F939B6-93AF-4DB8-9C6B-D6C7DFDC589F}" vid="{4A3C46E8-61CC-4603-A589-7422A47A8E4A}"/>
+    </a:ext>
+  </a:extLst>
+</a:theme>
+</file>
+
 <file path=customXml/item1.xml><?xml version="1.0" encoding="utf-8"?>
+<p:properties xmlns:p="http://schemas.microsoft.com/office/2006/metadata/properties" xmlns:xsi="http://www.w3.org/2001/XMLSchema-instance" xmlns:pc="http://schemas.microsoft.com/office/infopath/2007/PartnerControls">
+  <documentManagement/>
+</p:properties>
+</file>
+
+<file path=customXml/item2.xml><?xml version="1.0" encoding="utf-8"?>
+<?mso-contentType ?>
+<FormTemplates xmlns="http://schemas.microsoft.com/sharepoint/v3/contenttype/forms">
+  <Display>DocumentLibraryForm</Display>
+  <Edit>DocumentLibraryForm</Edit>
+  <New>DocumentLibraryForm</New>
+</FormTemplates>
+</file>
+
+<file path=customXml/item3.xml><?xml version="1.0" encoding="utf-8"?>
 <ct:contentTypeSchema xmlns:ct="http://schemas.microsoft.com/office/2006/metadata/contentType" xmlns:ma="http://schemas.microsoft.com/office/2006/metadata/properties/metaAttributes" ct:_="" ma:_="" ma:contentTypeName="Document" ma:contentTypeID="0x01010028474C0DDFCB744F82F415B088B01E4B" ma:contentTypeVersion="14" ma:contentTypeDescription="Create a new document." ma:contentTypeScope="" ma:versionID="e5e9462897096f16b0008292cbb975dd">
   <xsd:schema xmlns:xsd="http://www.w3.org/2001/XMLSchema" xmlns:xs="http://www.w3.org/2001/XMLSchema" xmlns:p="http://schemas.microsoft.com/office/2006/metadata/properties" xmlns:ns3="1c75bd5f-743b-40f2-bae2-8e86a640c5ff" xmlns:ns4="153ae615-e700-431c-905c-1e4cee6d6937" targetNamespace="http://schemas.microsoft.com/office/2006/metadata/properties" ma:root="true" ma:fieldsID="590d4ed62c67927dcdef9f8de5167c65" ns3:_="" ns4:_="">
     <xsd:import namespace="1c75bd5f-743b-40f2-bae2-8e86a640c5ff"/>
@@ -8518,22 +11900,32 @@
 </ct:contentTypeSchema>
 </file>
 
-<file path=customXml/item2.xml><?xml version="1.0" encoding="utf-8"?>
-<?mso-contentType ?>
-<FormTemplates xmlns="http://schemas.microsoft.com/sharepoint/v3/contenttype/forms">
-  <Display>DocumentLibraryForm</Display>
-  <Edit>DocumentLibraryForm</Edit>
-  <New>DocumentLibraryForm</New>
-</FormTemplates>
+<file path=customXml/itemProps1.xml><?xml version="1.0" encoding="utf-8"?>
+<ds:datastoreItem xmlns:ds="http://schemas.openxmlformats.org/officeDocument/2006/customXml" ds:itemID="{B45D76EC-F2F5-48B8-95DA-EF0FB4B2183F}">
+  <ds:schemaRefs>
+    <ds:schemaRef ds:uri="http://purl.org/dc/elements/1.1/"/>
+    <ds:schemaRef ds:uri="http://schemas.microsoft.com/office/2006/metadata/properties"/>
+    <ds:schemaRef ds:uri="1c75bd5f-743b-40f2-bae2-8e86a640c5ff"/>
+    <ds:schemaRef ds:uri="http://purl.org/dc/terms/"/>
+    <ds:schemaRef ds:uri="153ae615-e700-431c-905c-1e4cee6d6937"/>
+    <ds:schemaRef ds:uri="http://schemas.microsoft.com/office/2006/documentManagement/types"/>
+    <ds:schemaRef ds:uri="http://schemas.microsoft.com/office/infopath/2007/PartnerControls"/>
+    <ds:schemaRef ds:uri="http://schemas.openxmlformats.org/package/2006/metadata/core-properties"/>
+    <ds:schemaRef ds:uri="http://www.w3.org/XML/1998/namespace"/>
+    <ds:schemaRef ds:uri="http://purl.org/dc/dcmitype/"/>
+  </ds:schemaRefs>
+</ds:datastoreItem>
 </file>
 
-<file path=customXml/item3.xml><?xml version="1.0" encoding="utf-8"?>
-<p:properties xmlns:p="http://schemas.microsoft.com/office/2006/metadata/properties" xmlns:xsi="http://www.w3.org/2001/XMLSchema-instance" xmlns:pc="http://schemas.microsoft.com/office/infopath/2007/PartnerControls">
-  <documentManagement/>
-</p:properties>
+<file path=customXml/itemProps2.xml><?xml version="1.0" encoding="utf-8"?>
+<ds:datastoreItem xmlns:ds="http://schemas.openxmlformats.org/officeDocument/2006/customXml" ds:itemID="{1D4F0347-749B-4FE7-BD83-FBDC671D74F1}">
+  <ds:schemaRefs>
+    <ds:schemaRef ds:uri="http://schemas.microsoft.com/sharepoint/v3/contenttype/forms"/>
+  </ds:schemaRefs>
+</ds:datastoreItem>
 </file>
 
-<file path=customXml/itemProps1.xml><?xml version="1.0" encoding="utf-8"?>
+<file path=customXml/itemProps3.xml><?xml version="1.0" encoding="utf-8"?>
 <ds:datastoreItem xmlns:ds="http://schemas.openxmlformats.org/officeDocument/2006/customXml" ds:itemID="{D98D8A7F-A9E3-46B6-AF87-01F7F1B98009}">
   <ds:schemaRefs>
     <ds:schemaRef ds:uri="http://schemas.microsoft.com/office/2006/metadata/contentType"/>
@@ -8552,31 +11944,6 @@
 </ds:datastoreItem>
 </file>
 
-<file path=customXml/itemProps2.xml><?xml version="1.0" encoding="utf-8"?>
-<ds:datastoreItem xmlns:ds="http://schemas.openxmlformats.org/officeDocument/2006/customXml" ds:itemID="{1D4F0347-749B-4FE7-BD83-FBDC671D74F1}">
-  <ds:schemaRefs>
-    <ds:schemaRef ds:uri="http://schemas.microsoft.com/sharepoint/v3/contenttype/forms"/>
-  </ds:schemaRefs>
-</ds:datastoreItem>
-</file>
-
-<file path=customXml/itemProps3.xml><?xml version="1.0" encoding="utf-8"?>
-<ds:datastoreItem xmlns:ds="http://schemas.openxmlformats.org/officeDocument/2006/customXml" ds:itemID="{B45D76EC-F2F5-48B8-95DA-EF0FB4B2183F}">
-  <ds:schemaRefs>
-    <ds:schemaRef ds:uri="http://purl.org/dc/elements/1.1/"/>
-    <ds:schemaRef ds:uri="http://schemas.microsoft.com/office/2006/metadata/properties"/>
-    <ds:schemaRef ds:uri="1c75bd5f-743b-40f2-bae2-8e86a640c5ff"/>
-    <ds:schemaRef ds:uri="http://purl.org/dc/terms/"/>
-    <ds:schemaRef ds:uri="153ae615-e700-431c-905c-1e4cee6d6937"/>
-    <ds:schemaRef ds:uri="http://schemas.microsoft.com/office/2006/documentManagement/types"/>
-    <ds:schemaRef ds:uri="http://schemas.microsoft.com/office/infopath/2007/PartnerControls"/>
-    <ds:schemaRef ds:uri="http://schemas.openxmlformats.org/package/2006/metadata/core-properties"/>
-    <ds:schemaRef ds:uri="http://www.w3.org/XML/1998/namespace"/>
-    <ds:schemaRef ds:uri="http://purl.org/dc/dcmitype/"/>
-  </ds:schemaRefs>
-</ds:datastoreItem>
-</file>
-
 <file path=docMetadata/LabelInfo.xml><?xml version="1.0" encoding="utf-8"?>
 <clbl:labelList xmlns:clbl="http://schemas.microsoft.com/office/2020/mipLabelMetadata">
   <clbl:label id="{f42aa342-8706-4288-bd11-ebb85995028c}" enabled="1" method="Standard" siteId="{72f988bf-86f1-41af-91ab-2d7cd011db47}" contentBits="0" removed="0"/>

--- a/src/demo/presentation/assets/CWP_Template.pptx
+++ b/src/demo/presentation/assets/CWP_Template.pptx
@@ -4,41 +4,40 @@
   <p:sldMasterIdLst>
     <p:sldMasterId id="2147483678" r:id="rId4"/>
     <p:sldMasterId id="2147483703" r:id="rId5"/>
-    <p:sldMasterId id="2147483745" r:id="rId6"/>
   </p:sldMasterIdLst>
   <p:notesMasterIdLst>
-    <p:notesMasterId r:id="rId13"/>
+    <p:notesMasterId r:id="rId12"/>
   </p:notesMasterIdLst>
   <p:handoutMasterIdLst>
-    <p:handoutMasterId r:id="rId14"/>
+    <p:handoutMasterId r:id="rId13"/>
   </p:handoutMasterIdLst>
   <p:sldIdLst>
-    <p:sldId id="361" r:id="rId7"/>
-    <p:sldId id="444" r:id="rId8"/>
-    <p:sldId id="434" r:id="rId9"/>
-    <p:sldId id="438" r:id="rId10"/>
-    <p:sldId id="441" r:id="rId11"/>
-    <p:sldId id="443" r:id="rId12"/>
+    <p:sldId id="361" r:id="rId6"/>
+    <p:sldId id="444" r:id="rId7"/>
+    <p:sldId id="445" r:id="rId8"/>
+    <p:sldId id="446" r:id="rId9"/>
+    <p:sldId id="447" r:id="rId10"/>
+    <p:sldId id="443" r:id="rId11"/>
   </p:sldIdLst>
-  <p:sldSz cx="9906000" cy="6858000" type="A4"/>
+  <p:sldSz cx="12192000" cy="6858000"/>
   <p:notesSz cx="6797675" cy="9926638"/>
   <p:embeddedFontLst>
     <p:embeddedFont>
       <p:font typeface="Roboto" panose="02000000000000000000" pitchFamily="2" charset="0"/>
-      <p:regular r:id="rId15"/>
-      <p:bold r:id="rId16"/>
-      <p:italic r:id="rId17"/>
-      <p:boldItalic r:id="rId18"/>
+      <p:regular r:id="rId14"/>
+      <p:bold r:id="rId15"/>
+      <p:italic r:id="rId16"/>
+      <p:boldItalic r:id="rId17"/>
     </p:embeddedFont>
     <p:embeddedFont>
       <p:font typeface="Roboto Light" panose="02000000000000000000" pitchFamily="2" charset="0"/>
-      <p:regular r:id="rId19"/>
-      <p:italic r:id="rId20"/>
+      <p:regular r:id="rId18"/>
+      <p:italic r:id="rId19"/>
     </p:embeddedFont>
     <p:embeddedFont>
       <p:font typeface="Roboto Medium" panose="02000000000000000000" pitchFamily="2" charset="0"/>
-      <p:regular r:id="rId21"/>
-      <p:italic r:id="rId22"/>
+      <p:regular r:id="rId20"/>
+      <p:italic r:id="rId21"/>
     </p:embeddedFont>
   </p:embeddedFontLst>
   <p:defaultTextStyle>
@@ -431,8 +430,8 @@
         </p:nvSpPr>
         <p:spPr>
           <a:xfrm>
-            <a:off x="979488" y="1241425"/>
-            <a:ext cx="4838700" cy="3349625"/>
+            <a:off x="422275" y="1241425"/>
+            <a:ext cx="5953125" cy="3349625"/>
           </a:xfrm>
           <a:prstGeom prst="rect">
             <a:avLst/>
@@ -733,7 +732,7 @@
         <p:spPr>
           <a:xfrm>
             <a:off x="0" y="0"/>
-            <a:ext cx="9906000" cy="6858000"/>
+            <a:ext cx="12192000" cy="6858000"/>
           </a:xfrm>
           <a:prstGeom prst="rect">
             <a:avLst/>
@@ -763,7 +762,7 @@
           <a:lstStyle/>
           <a:p>
             <a:pPr algn="ctr"/>
-            <a:endParaRPr lang="en-GB"/>
+            <a:endParaRPr lang="en-GB" sz="2215"/>
           </a:p>
         </p:txBody>
       </p:sp>
@@ -798,8 +797,8 @@
         </p:blipFill>
         <p:spPr>
           <a:xfrm>
-            <a:off x="1226662" y="-2407407"/>
-            <a:ext cx="9050813" cy="10076983"/>
+            <a:off x="1509740" y="-2407407"/>
+            <a:ext cx="11139462" cy="10076983"/>
           </a:xfrm>
           <a:prstGeom prst="rect">
             <a:avLst/>
@@ -818,8 +817,8 @@
         </p:nvSpPr>
         <p:spPr>
           <a:xfrm>
-            <a:off x="742950" y="4038089"/>
-            <a:ext cx="8420100" cy="1328455"/>
+            <a:off x="914400" y="4038092"/>
+            <a:ext cx="10363200" cy="1328455"/>
           </a:xfrm>
         </p:spPr>
         <p:txBody>
@@ -828,7 +827,7 @@
           </a:bodyPr>
           <a:lstStyle>
             <a:lvl1pPr algn="ctr">
-              <a:defRPr sz="4200" b="1">
+              <a:defRPr sz="5169" b="1">
                 <a:latin typeface="Roboto" panose="02000000000000000000" pitchFamily="2" charset="0"/>
                 <a:ea typeface="Roboto" panose="02000000000000000000" pitchFamily="2" charset="0"/>
               </a:defRPr>
@@ -854,8 +853,8 @@
         </p:nvSpPr>
         <p:spPr>
           <a:xfrm>
-            <a:off x="1238250" y="5458620"/>
-            <a:ext cx="7429500" cy="366712"/>
+            <a:off x="1524000" y="5458620"/>
+            <a:ext cx="9144000" cy="366712"/>
           </a:xfrm>
         </p:spPr>
         <p:txBody>
@@ -865,7 +864,7 @@
           <a:lstStyle>
             <a:lvl1pPr marL="0" indent="0" algn="ctr">
               <a:buNone/>
-              <a:defRPr sz="2200">
+              <a:defRPr sz="2708">
                 <a:solidFill>
                   <a:schemeClr val="bg1"/>
                 </a:solidFill>
@@ -874,37 +873,37 @@
                 <a:cs typeface="Roboto Medium" panose="02000000000000000000" pitchFamily="2" charset="0"/>
               </a:defRPr>
             </a:lvl1pPr>
-            <a:lvl2pPr marL="457200" indent="0" algn="ctr">
+            <a:lvl2pPr marL="562722" indent="0" algn="ctr">
               <a:buNone/>
-              <a:defRPr sz="2000"/>
+              <a:defRPr sz="2462"/>
             </a:lvl2pPr>
-            <a:lvl3pPr marL="914400" indent="0" algn="ctr">
+            <a:lvl3pPr marL="1125444" indent="0" algn="ctr">
               <a:buNone/>
-              <a:defRPr sz="1800"/>
+              <a:defRPr sz="2215"/>
             </a:lvl3pPr>
-            <a:lvl4pPr marL="1371600" indent="0" algn="ctr">
+            <a:lvl4pPr marL="1688165" indent="0" algn="ctr">
               <a:buNone/>
-              <a:defRPr sz="1600"/>
+              <a:defRPr sz="1969"/>
             </a:lvl4pPr>
-            <a:lvl5pPr marL="1828800" indent="0" algn="ctr">
+            <a:lvl5pPr marL="2250887" indent="0" algn="ctr">
               <a:buNone/>
-              <a:defRPr sz="1600"/>
+              <a:defRPr sz="1969"/>
             </a:lvl5pPr>
-            <a:lvl6pPr marL="2286000" indent="0" algn="ctr">
+            <a:lvl6pPr marL="2813609" indent="0" algn="ctr">
               <a:buNone/>
-              <a:defRPr sz="1600"/>
+              <a:defRPr sz="1969"/>
             </a:lvl6pPr>
-            <a:lvl7pPr marL="2743200" indent="0" algn="ctr">
+            <a:lvl7pPr marL="3376331" indent="0" algn="ctr">
               <a:buNone/>
-              <a:defRPr sz="1600"/>
+              <a:defRPr sz="1969"/>
             </a:lvl7pPr>
-            <a:lvl8pPr marL="3200400" indent="0" algn="ctr">
+            <a:lvl8pPr marL="3939052" indent="0" algn="ctr">
               <a:buNone/>
-              <a:defRPr sz="1600"/>
+              <a:defRPr sz="1969"/>
             </a:lvl8pPr>
-            <a:lvl9pPr marL="3657600" indent="0" algn="ctr">
+            <a:lvl9pPr marL="4501774" indent="0" algn="ctr">
               <a:buNone/>
-              <a:defRPr sz="1600"/>
+              <a:defRPr sz="1969"/>
             </a:lvl9pPr>
           </a:lstStyle>
           <a:p>
@@ -946,8 +945,8 @@
         </p:blipFill>
         <p:spPr>
           <a:xfrm>
-            <a:off x="3551795" y="1563289"/>
-            <a:ext cx="2802412" cy="1212472"/>
+            <a:off x="4371440" y="1563289"/>
+            <a:ext cx="3449122" cy="1212472"/>
           </a:xfrm>
           <a:prstGeom prst="rect">
             <a:avLst/>
@@ -997,8 +996,8 @@
         </p:nvSpPr>
         <p:spPr>
           <a:xfrm>
-            <a:off x="5664200" y="1989668"/>
-            <a:ext cx="3616960" cy="3615266"/>
+            <a:off x="6971323" y="1989668"/>
+            <a:ext cx="4451643" cy="3615266"/>
           </a:xfrm>
         </p:spPr>
         <p:txBody>
@@ -1021,8 +1020,8 @@
         </p:nvSpPr>
         <p:spPr>
           <a:xfrm>
-            <a:off x="624841" y="6310630"/>
-            <a:ext cx="2341244" cy="547370"/>
+            <a:off x="769035" y="6310630"/>
+            <a:ext cx="2881531" cy="547370"/>
           </a:xfrm>
           <a:prstGeom prst="rect">
             <a:avLst/>
@@ -1032,7 +1031,7 @@
           <a:bodyPr vert="horz" lIns="91440" tIns="45720" rIns="91440" bIns="45720" rtlCol="0" anchor="ctr"/>
           <a:lstStyle>
             <a:lvl1pPr algn="l">
-              <a:defRPr sz="1200">
+              <a:defRPr sz="1477">
                 <a:solidFill>
                   <a:schemeClr val="tx1"/>
                 </a:solidFill>
@@ -1061,8 +1060,8 @@
         </p:nvSpPr>
         <p:spPr>
           <a:xfrm>
-            <a:off x="6939916" y="6310630"/>
-            <a:ext cx="2341244" cy="547370"/>
+            <a:off x="8541435" y="6310630"/>
+            <a:ext cx="2881531" cy="547370"/>
           </a:xfrm>
           <a:prstGeom prst="rect">
             <a:avLst/>
@@ -1072,7 +1071,7 @@
           <a:bodyPr vert="horz" lIns="91440" tIns="45720" rIns="91440" bIns="45720" rtlCol="0" anchor="ctr"/>
           <a:lstStyle>
             <a:lvl1pPr algn="r">
-              <a:defRPr sz="1200">
+              <a:defRPr sz="1477">
                 <a:solidFill>
                   <a:schemeClr val="tx1"/>
                 </a:solidFill>
@@ -1101,8 +1100,8 @@
         </p:nvSpPr>
         <p:spPr>
           <a:xfrm>
-            <a:off x="624841" y="1270000"/>
-            <a:ext cx="4328159" cy="5040630"/>
+            <a:off x="769037" y="1270000"/>
+            <a:ext cx="5326965" cy="5040630"/>
           </a:xfrm>
           <a:prstGeom prst="rect">
             <a:avLst/>
@@ -1113,25 +1112,25 @@
             <a:normAutofit/>
           </a:bodyPr>
           <a:lstStyle>
-            <a:lvl1pPr marL="342900" indent="-342900">
+            <a:lvl1pPr marL="422041" indent="-422041">
               <a:buFont typeface="Wingdings" panose="05000000000000000000" pitchFamily="2" charset="2"/>
               <a:buChar char="§"/>
-              <a:defRPr sz="1400">
+              <a:defRPr sz="1723">
                 <a:latin typeface="Roboto Medium" panose="02000000000000000000" pitchFamily="2" charset="0"/>
                 <a:ea typeface="Roboto Medium" panose="02000000000000000000" pitchFamily="2" charset="0"/>
               </a:defRPr>
             </a:lvl1pPr>
             <a:lvl2pPr>
-              <a:defRPr sz="1200"/>
+              <a:defRPr sz="1477"/>
             </a:lvl2pPr>
             <a:lvl3pPr>
-              <a:defRPr sz="1200"/>
+              <a:defRPr sz="1477"/>
             </a:lvl3pPr>
             <a:lvl4pPr>
-              <a:defRPr sz="1100"/>
+              <a:defRPr sz="1354"/>
             </a:lvl4pPr>
             <a:lvl5pPr>
-              <a:defRPr sz="1100"/>
+              <a:defRPr sz="1354"/>
             </a:lvl5pPr>
           </a:lstStyle>
           <a:p>
@@ -1189,8 +1188,8 @@
         </p:nvSpPr>
         <p:spPr>
           <a:xfrm>
-            <a:off x="596204" y="191149"/>
-            <a:ext cx="8656319" cy="654201"/>
+            <a:off x="733791" y="191152"/>
+            <a:ext cx="10653931" cy="654201"/>
           </a:xfrm>
           <a:prstGeom prst="rect">
             <a:avLst/>
@@ -1223,17 +1222,17 @@
   <p:extLst>
     <p:ext uri="{DCECCB84-F9BA-43D5-87BE-67443E8EF086}">
       <p15:sldGuideLst xmlns:p15="http://schemas.microsoft.com/office/powerpoint/2012/main">
-        <p15:guide id="4" orient="horz" pos="2500">
+        <p15:guide id="4" orient="horz" pos="2500" userDrawn="1">
           <p15:clr>
             <a:srgbClr val="FBAE40"/>
           </p15:clr>
         </p15:guide>
-        <p15:guide id="5" pos="3120">
+        <p15:guide id="5" pos="3840" userDrawn="1">
           <p15:clr>
             <a:srgbClr val="FBAE40"/>
           </p15:clr>
         </p15:guide>
-        <p15:guide id="8" pos="1775">
+        <p15:guide id="8" pos="2185" userDrawn="1">
           <p15:clr>
             <a:srgbClr val="FBAE40"/>
           </p15:clr>
@@ -1273,8 +1272,8 @@
         </p:nvSpPr>
         <p:spPr>
           <a:xfrm>
-            <a:off x="624841" y="6310630"/>
-            <a:ext cx="2341244" cy="547370"/>
+            <a:off x="769035" y="6310630"/>
+            <a:ext cx="2881531" cy="547370"/>
           </a:xfrm>
           <a:prstGeom prst="rect">
             <a:avLst/>
@@ -1284,7 +1283,7 @@
           <a:bodyPr vert="horz" lIns="91440" tIns="45720" rIns="91440" bIns="45720" rtlCol="0" anchor="ctr"/>
           <a:lstStyle>
             <a:lvl1pPr algn="l">
-              <a:defRPr sz="1200">
+              <a:defRPr sz="1477">
                 <a:solidFill>
                   <a:schemeClr val="tx1"/>
                 </a:solidFill>
@@ -1313,8 +1312,8 @@
         </p:nvSpPr>
         <p:spPr>
           <a:xfrm>
-            <a:off x="6939916" y="6310630"/>
-            <a:ext cx="2341244" cy="547370"/>
+            <a:off x="8541435" y="6310630"/>
+            <a:ext cx="2881531" cy="547370"/>
           </a:xfrm>
           <a:prstGeom prst="rect">
             <a:avLst/>
@@ -1324,7 +1323,7 @@
           <a:bodyPr vert="horz" lIns="91440" tIns="45720" rIns="91440" bIns="45720" rtlCol="0" anchor="ctr"/>
           <a:lstStyle>
             <a:lvl1pPr algn="r">
-              <a:defRPr sz="1200">
+              <a:defRPr sz="1477">
                 <a:solidFill>
                   <a:schemeClr val="tx1"/>
                 </a:solidFill>
@@ -1359,8 +1358,8 @@
         </p:nvSpPr>
         <p:spPr>
           <a:xfrm>
-            <a:off x="596204" y="191149"/>
-            <a:ext cx="8656319" cy="654201"/>
+            <a:off x="733791" y="191152"/>
+            <a:ext cx="10653931" cy="654201"/>
           </a:xfrm>
           <a:prstGeom prst="rect">
             <a:avLst/>
@@ -1398,8 +1397,8 @@
         </p:nvSpPr>
         <p:spPr>
           <a:xfrm>
-            <a:off x="596203" y="1152605"/>
-            <a:ext cx="8656319" cy="5063778"/>
+            <a:off x="733790" y="1152605"/>
+            <a:ext cx="10653931" cy="5063778"/>
           </a:xfrm>
         </p:spPr>
         <p:txBody>
@@ -1407,7 +1406,7 @@
             <a:noAutofit/>
           </a:bodyPr>
           <a:lstStyle>
-            <a:lvl1pPr marL="0" marR="0" indent="0" algn="l" defTabSz="914400" rtl="0" eaLnBrk="1" fontAlgn="auto" latinLnBrk="0" hangingPunct="1">
+            <a:lvl1pPr marL="0" marR="0" indent="0" algn="l" defTabSz="1125444" rtl="0" eaLnBrk="1" fontAlgn="auto" latinLnBrk="0" hangingPunct="1">
               <a:lnSpc>
                 <a:spcPct val="100000"/>
               </a:lnSpc>
@@ -1424,29 +1423,29 @@
               <a:buFont typeface="Wingdings" panose="05000000000000000000" pitchFamily="2" charset="2"/>
               <a:buNone/>
               <a:tabLst/>
-              <a:defRPr sz="1600" b="0">
+              <a:defRPr sz="1969" b="0">
                 <a:latin typeface="+mj-lt"/>
               </a:defRPr>
             </a:lvl1pPr>
-            <a:lvl2pPr marL="457200" indent="0">
+            <a:lvl2pPr marL="562722" indent="0">
               <a:buNone/>
               <a:defRPr/>
             </a:lvl2pPr>
-            <a:lvl3pPr marL="914400" indent="0">
+            <a:lvl3pPr marL="1125444" indent="0">
               <a:buNone/>
               <a:defRPr/>
             </a:lvl3pPr>
-            <a:lvl4pPr marL="1371600" indent="0">
+            <a:lvl4pPr marL="1688165" indent="0">
               <a:buNone/>
               <a:defRPr/>
             </a:lvl4pPr>
-            <a:lvl5pPr marL="1828800" indent="0">
+            <a:lvl5pPr marL="2250887" indent="0">
               <a:buNone/>
               <a:defRPr/>
             </a:lvl5pPr>
           </a:lstStyle>
           <a:p>
-            <a:pPr marL="0" marR="0" lvl="0" indent="0" algn="l" defTabSz="914400" rtl="0" eaLnBrk="1" fontAlgn="auto" latinLnBrk="0" hangingPunct="1">
+            <a:pPr marL="0" marR="0" lvl="0" indent="0" algn="l" defTabSz="1125444" rtl="0" eaLnBrk="1" fontAlgn="auto" latinLnBrk="0" hangingPunct="1">
               <a:lnSpc>
                 <a:spcPct val="90000"/>
               </a:lnSpc>
@@ -1509,17 +1508,17 @@
   <p:extLst>
     <p:ext uri="{DCECCB84-F9BA-43D5-87BE-67443E8EF086}">
       <p15:sldGuideLst xmlns:p15="http://schemas.microsoft.com/office/powerpoint/2012/main">
-        <p15:guide id="4" orient="horz" pos="2500">
+        <p15:guide id="4" orient="horz" pos="2500" userDrawn="1">
           <p15:clr>
             <a:srgbClr val="FBAE40"/>
           </p15:clr>
         </p15:guide>
-        <p15:guide id="5" pos="3120">
+        <p15:guide id="5" pos="3840" userDrawn="1">
           <p15:clr>
             <a:srgbClr val="FBAE40"/>
           </p15:clr>
         </p15:guide>
-        <p15:guide id="8" pos="1775">
+        <p15:guide id="8" pos="2185" userDrawn="1">
           <p15:clr>
             <a:srgbClr val="FBAE40"/>
           </p15:clr>
@@ -1559,8 +1558,8 @@
         </p:nvSpPr>
         <p:spPr>
           <a:xfrm>
-            <a:off x="624841" y="6310630"/>
-            <a:ext cx="2341244" cy="547370"/>
+            <a:off x="769035" y="6310630"/>
+            <a:ext cx="2881531" cy="547370"/>
           </a:xfrm>
           <a:prstGeom prst="rect">
             <a:avLst/>
@@ -1570,7 +1569,7 @@
           <a:bodyPr vert="horz" lIns="91440" tIns="45720" rIns="91440" bIns="45720" rtlCol="0" anchor="ctr"/>
           <a:lstStyle>
             <a:lvl1pPr algn="l">
-              <a:defRPr sz="1200">
+              <a:defRPr sz="1477">
                 <a:solidFill>
                   <a:schemeClr val="tx1"/>
                 </a:solidFill>
@@ -1599,8 +1598,8 @@
         </p:nvSpPr>
         <p:spPr>
           <a:xfrm>
-            <a:off x="6939916" y="6310630"/>
-            <a:ext cx="2341244" cy="547370"/>
+            <a:off x="8541435" y="6310630"/>
+            <a:ext cx="2881531" cy="547370"/>
           </a:xfrm>
           <a:prstGeom prst="rect">
             <a:avLst/>
@@ -1610,7 +1609,7 @@
           <a:bodyPr vert="horz" lIns="91440" tIns="45720" rIns="91440" bIns="45720" rtlCol="0" anchor="ctr"/>
           <a:lstStyle>
             <a:lvl1pPr algn="r">
-              <a:defRPr sz="1200">
+              <a:defRPr sz="1477">
                 <a:solidFill>
                   <a:schemeClr val="tx1"/>
                 </a:solidFill>
@@ -1645,8 +1644,8 @@
         </p:nvSpPr>
         <p:spPr>
           <a:xfrm>
-            <a:off x="596204" y="191149"/>
-            <a:ext cx="8656319" cy="654201"/>
+            <a:off x="733791" y="191152"/>
+            <a:ext cx="10653931" cy="654201"/>
           </a:xfrm>
           <a:prstGeom prst="rect">
             <a:avLst/>
@@ -1679,17 +1678,17 @@
   <p:extLst>
     <p:ext uri="{DCECCB84-F9BA-43D5-87BE-67443E8EF086}">
       <p15:sldGuideLst xmlns:p15="http://schemas.microsoft.com/office/powerpoint/2012/main">
-        <p15:guide id="4" orient="horz" pos="2500">
+        <p15:guide id="4" orient="horz" pos="2500" userDrawn="1">
           <p15:clr>
             <a:srgbClr val="FBAE40"/>
           </p15:clr>
         </p15:guide>
-        <p15:guide id="5" pos="3120">
+        <p15:guide id="5" pos="3840" userDrawn="1">
           <p15:clr>
             <a:srgbClr val="FBAE40"/>
           </p15:clr>
         </p15:guide>
-        <p15:guide id="8" pos="1775">
+        <p15:guide id="8" pos="2185" userDrawn="1">
           <p15:clr>
             <a:srgbClr val="FBAE40"/>
           </p15:clr>
@@ -1697,1644 +1696,6 @@
       </p15:sldGuideLst>
     </p:ext>
   </p:extLst>
-</p:sldLayout>
-</file>
-
-<file path=ppt/slideLayouts/slideLayout13.xml><?xml version="1.0" encoding="utf-8"?>
-<p:sldLayout xmlns:a="http://schemas.openxmlformats.org/drawingml/2006/main" xmlns:r="http://schemas.openxmlformats.org/officeDocument/2006/relationships" xmlns:p="http://schemas.openxmlformats.org/presentationml/2006/main" type="title" preserve="1">
-  <p:cSld name="Title Slide">
-    <p:spTree>
-      <p:nvGrpSpPr>
-        <p:cNvPr id="1" name=""/>
-        <p:cNvGrpSpPr/>
-        <p:nvPr/>
-      </p:nvGrpSpPr>
-      <p:grpSpPr>
-        <a:xfrm>
-          <a:off x="0" y="0"/>
-          <a:ext cx="0" cy="0"/>
-          <a:chOff x="0" y="0"/>
-          <a:chExt cx="0" cy="0"/>
-        </a:xfrm>
-      </p:grpSpPr>
-      <p:sp>
-        <p:nvSpPr>
-          <p:cNvPr id="2" name="Title 1">
-            <a:extLst>
-              <a:ext uri="{FF2B5EF4-FFF2-40B4-BE49-F238E27FC236}">
-                <a16:creationId xmlns:a16="http://schemas.microsoft.com/office/drawing/2014/main" id="{D3595819-2C5B-0763-2E8B-04E6752BC387}"/>
-              </a:ext>
-            </a:extLst>
-          </p:cNvPr>
-          <p:cNvSpPr>
-            <a:spLocks noGrp="1"/>
-          </p:cNvSpPr>
-          <p:nvPr>
-            <p:ph type="ctrTitle"/>
-          </p:nvPr>
-        </p:nvSpPr>
-        <p:spPr>
-          <a:xfrm>
-            <a:off x="1238250" y="1122363"/>
-            <a:ext cx="7429500" cy="2387600"/>
-          </a:xfrm>
-        </p:spPr>
-        <p:txBody>
-          <a:bodyPr anchor="b"/>
-          <a:lstStyle>
-            <a:lvl1pPr algn="ctr">
-              <a:defRPr sz="4875"/>
-            </a:lvl1pPr>
-          </a:lstStyle>
-          <a:p>
-            <a:r>
-              <a:rPr lang="en-US"/>
-              <a:t>Click to edit Master title style</a:t>
-            </a:r>
-          </a:p>
-        </p:txBody>
-      </p:sp>
-      <p:sp>
-        <p:nvSpPr>
-          <p:cNvPr id="3" name="Subtitle 2">
-            <a:extLst>
-              <a:ext uri="{FF2B5EF4-FFF2-40B4-BE49-F238E27FC236}">
-                <a16:creationId xmlns:a16="http://schemas.microsoft.com/office/drawing/2014/main" id="{D8ADDE25-AF64-C532-16FC-93EB1FB2957E}"/>
-              </a:ext>
-            </a:extLst>
-          </p:cNvPr>
-          <p:cNvSpPr>
-            <a:spLocks noGrp="1"/>
-          </p:cNvSpPr>
-          <p:nvPr>
-            <p:ph type="subTitle" idx="1"/>
-          </p:nvPr>
-        </p:nvSpPr>
-        <p:spPr>
-          <a:xfrm>
-            <a:off x="1238250" y="3602038"/>
-            <a:ext cx="7429500" cy="1655762"/>
-          </a:xfrm>
-        </p:spPr>
-        <p:txBody>
-          <a:bodyPr/>
-          <a:lstStyle>
-            <a:lvl1pPr marL="0" indent="0" algn="ctr">
-              <a:buNone/>
-              <a:defRPr sz="1950"/>
-            </a:lvl1pPr>
-            <a:lvl2pPr marL="371475" indent="0" algn="ctr">
-              <a:buNone/>
-              <a:defRPr sz="1625"/>
-            </a:lvl2pPr>
-            <a:lvl3pPr marL="742950" indent="0" algn="ctr">
-              <a:buNone/>
-              <a:defRPr sz="1463"/>
-            </a:lvl3pPr>
-            <a:lvl4pPr marL="1114425" indent="0" algn="ctr">
-              <a:buNone/>
-              <a:defRPr sz="1300"/>
-            </a:lvl4pPr>
-            <a:lvl5pPr marL="1485900" indent="0" algn="ctr">
-              <a:buNone/>
-              <a:defRPr sz="1300"/>
-            </a:lvl5pPr>
-            <a:lvl6pPr marL="1857375" indent="0" algn="ctr">
-              <a:buNone/>
-              <a:defRPr sz="1300"/>
-            </a:lvl6pPr>
-            <a:lvl7pPr marL="2228850" indent="0" algn="ctr">
-              <a:buNone/>
-              <a:defRPr sz="1300"/>
-            </a:lvl7pPr>
-            <a:lvl8pPr marL="2600325" indent="0" algn="ctr">
-              <a:buNone/>
-              <a:defRPr sz="1300"/>
-            </a:lvl8pPr>
-            <a:lvl9pPr marL="2971800" indent="0" algn="ctr">
-              <a:buNone/>
-              <a:defRPr sz="1300"/>
-            </a:lvl9pPr>
-          </a:lstStyle>
-          <a:p>
-            <a:r>
-              <a:rPr lang="en-US"/>
-              <a:t>Click to edit Master subtitle style</a:t>
-            </a:r>
-          </a:p>
-        </p:txBody>
-      </p:sp>
-      <p:sp>
-        <p:nvSpPr>
-          <p:cNvPr id="4" name="Date Placeholder 3">
-            <a:extLst>
-              <a:ext uri="{FF2B5EF4-FFF2-40B4-BE49-F238E27FC236}">
-                <a16:creationId xmlns:a16="http://schemas.microsoft.com/office/drawing/2014/main" id="{396A1A39-B8CA-2182-EFF7-2572C798DDB5}"/>
-              </a:ext>
-            </a:extLst>
-          </p:cNvPr>
-          <p:cNvSpPr>
-            <a:spLocks noGrp="1"/>
-          </p:cNvSpPr>
-          <p:nvPr>
-            <p:ph type="dt" sz="half" idx="10"/>
-          </p:nvPr>
-        </p:nvSpPr>
-        <p:spPr/>
-        <p:txBody>
-          <a:bodyPr/>
-          <a:lstStyle/>
-          <a:p>
-            <a:fld id="{6F80DDAC-FE11-49DC-9261-11C1E994665B}" type="datetimeFigureOut">
-              <a:rPr lang="en-GB" smtClean="0"/>
-              <a:pPr/>
-              <a:t>29/07/2026</a:t>
-            </a:fld>
-            <a:endParaRPr lang="en-GB"/>
-          </a:p>
-        </p:txBody>
-      </p:sp>
-      <p:sp>
-        <p:nvSpPr>
-          <p:cNvPr id="5" name="Footer Placeholder 4">
-            <a:extLst>
-              <a:ext uri="{FF2B5EF4-FFF2-40B4-BE49-F238E27FC236}">
-                <a16:creationId xmlns:a16="http://schemas.microsoft.com/office/drawing/2014/main" id="{FD9A4148-14A8-74BB-71CD-7980CAA2AF98}"/>
-              </a:ext>
-            </a:extLst>
-          </p:cNvPr>
-          <p:cNvSpPr>
-            <a:spLocks noGrp="1"/>
-          </p:cNvSpPr>
-          <p:nvPr>
-            <p:ph type="ftr" sz="quarter" idx="11"/>
-          </p:nvPr>
-        </p:nvSpPr>
-        <p:spPr/>
-        <p:txBody>
-          <a:bodyPr/>
-          <a:lstStyle/>
-          <a:p>
-            <a:endParaRPr lang="en-US"/>
-          </a:p>
-        </p:txBody>
-      </p:sp>
-      <p:sp>
-        <p:nvSpPr>
-          <p:cNvPr id="6" name="Slide Number Placeholder 5">
-            <a:extLst>
-              <a:ext uri="{FF2B5EF4-FFF2-40B4-BE49-F238E27FC236}">
-                <a16:creationId xmlns:a16="http://schemas.microsoft.com/office/drawing/2014/main" id="{6374429A-D693-D0D3-F675-C561B12C3E59}"/>
-              </a:ext>
-            </a:extLst>
-          </p:cNvPr>
-          <p:cNvSpPr>
-            <a:spLocks noGrp="1"/>
-          </p:cNvSpPr>
-          <p:nvPr>
-            <p:ph type="sldNum" sz="quarter" idx="12"/>
-          </p:nvPr>
-        </p:nvSpPr>
-        <p:spPr/>
-        <p:txBody>
-          <a:bodyPr/>
-          <a:lstStyle/>
-          <a:p>
-            <a:fld id="{3A73CC0E-67D5-43FD-BD59-BE5F44570CB2}" type="slidenum">
-              <a:rPr lang="en-GB" smtClean="0"/>
-              <a:pPr/>
-              <a:t>‹#›</a:t>
-            </a:fld>
-            <a:endParaRPr lang="en-GB"/>
-          </a:p>
-        </p:txBody>
-      </p:sp>
-    </p:spTree>
-    <p:extLst>
-      <p:ext uri="{BB962C8B-B14F-4D97-AF65-F5344CB8AC3E}">
-        <p14:creationId xmlns:p14="http://schemas.microsoft.com/office/powerpoint/2010/main" val="2596838762"/>
-      </p:ext>
-    </p:extLst>
-  </p:cSld>
-  <p:clrMapOvr>
-    <a:masterClrMapping/>
-  </p:clrMapOvr>
-</p:sldLayout>
-</file>
-
-<file path=ppt/slideLayouts/slideLayout14.xml><?xml version="1.0" encoding="utf-8"?>
-<p:sldLayout xmlns:a="http://schemas.openxmlformats.org/drawingml/2006/main" xmlns:r="http://schemas.openxmlformats.org/officeDocument/2006/relationships" xmlns:p="http://schemas.openxmlformats.org/presentationml/2006/main" type="obj" preserve="1">
-  <p:cSld name="Title and Content">
-    <p:spTree>
-      <p:nvGrpSpPr>
-        <p:cNvPr id="1" name=""/>
-        <p:cNvGrpSpPr/>
-        <p:nvPr/>
-      </p:nvGrpSpPr>
-      <p:grpSpPr>
-        <a:xfrm>
-          <a:off x="0" y="0"/>
-          <a:ext cx="0" cy="0"/>
-          <a:chOff x="0" y="0"/>
-          <a:chExt cx="0" cy="0"/>
-        </a:xfrm>
-      </p:grpSpPr>
-      <p:sp>
-        <p:nvSpPr>
-          <p:cNvPr id="2" name="Title 1">
-            <a:extLst>
-              <a:ext uri="{FF2B5EF4-FFF2-40B4-BE49-F238E27FC236}">
-                <a16:creationId xmlns:a16="http://schemas.microsoft.com/office/drawing/2014/main" id="{34C1C74A-299C-3777-518C-993A0A36FB75}"/>
-              </a:ext>
-            </a:extLst>
-          </p:cNvPr>
-          <p:cNvSpPr>
-            <a:spLocks noGrp="1"/>
-          </p:cNvSpPr>
-          <p:nvPr>
-            <p:ph type="title"/>
-          </p:nvPr>
-        </p:nvSpPr>
-        <p:spPr/>
-        <p:txBody>
-          <a:bodyPr/>
-          <a:lstStyle/>
-          <a:p>
-            <a:r>
-              <a:rPr lang="en-US"/>
-              <a:t>Click to edit Master title style</a:t>
-            </a:r>
-          </a:p>
-        </p:txBody>
-      </p:sp>
-      <p:sp>
-        <p:nvSpPr>
-          <p:cNvPr id="3" name="Content Placeholder 2">
-            <a:extLst>
-              <a:ext uri="{FF2B5EF4-FFF2-40B4-BE49-F238E27FC236}">
-                <a16:creationId xmlns:a16="http://schemas.microsoft.com/office/drawing/2014/main" id="{F9C741E0-D46F-9748-1389-DEA9DF288130}"/>
-              </a:ext>
-            </a:extLst>
-          </p:cNvPr>
-          <p:cNvSpPr>
-            <a:spLocks noGrp="1"/>
-          </p:cNvSpPr>
-          <p:nvPr>
-            <p:ph idx="1"/>
-          </p:nvPr>
-        </p:nvSpPr>
-        <p:spPr/>
-        <p:txBody>
-          <a:bodyPr/>
-          <a:lstStyle/>
-          <a:p>
-            <a:pPr lvl="0"/>
-            <a:r>
-              <a:rPr lang="en-US"/>
-              <a:t>Click to edit Master text styles</a:t>
-            </a:r>
-          </a:p>
-          <a:p>
-            <a:pPr lvl="1"/>
-            <a:r>
-              <a:rPr lang="en-US"/>
-              <a:t>Second level</a:t>
-            </a:r>
-          </a:p>
-          <a:p>
-            <a:pPr lvl="2"/>
-            <a:r>
-              <a:rPr lang="en-US"/>
-              <a:t>Third level</a:t>
-            </a:r>
-          </a:p>
-          <a:p>
-            <a:pPr lvl="3"/>
-            <a:r>
-              <a:rPr lang="en-US"/>
-              <a:t>Fourth level</a:t>
-            </a:r>
-          </a:p>
-          <a:p>
-            <a:pPr lvl="4"/>
-            <a:r>
-              <a:rPr lang="en-US"/>
-              <a:t>Fifth level</a:t>
-            </a:r>
-          </a:p>
-        </p:txBody>
-      </p:sp>
-      <p:sp>
-        <p:nvSpPr>
-          <p:cNvPr id="4" name="Date Placeholder 3">
-            <a:extLst>
-              <a:ext uri="{FF2B5EF4-FFF2-40B4-BE49-F238E27FC236}">
-                <a16:creationId xmlns:a16="http://schemas.microsoft.com/office/drawing/2014/main" id="{8212E565-61C3-7C0F-BCA1-579B433BBC67}"/>
-              </a:ext>
-            </a:extLst>
-          </p:cNvPr>
-          <p:cNvSpPr>
-            <a:spLocks noGrp="1"/>
-          </p:cNvSpPr>
-          <p:nvPr>
-            <p:ph type="dt" sz="half" idx="10"/>
-          </p:nvPr>
-        </p:nvSpPr>
-        <p:spPr/>
-        <p:txBody>
-          <a:bodyPr/>
-          <a:lstStyle/>
-          <a:p>
-            <a:fld id="{6F80DDAC-FE11-49DC-9261-11C1E994665B}" type="datetimeFigureOut">
-              <a:rPr lang="en-GB" smtClean="0"/>
-              <a:pPr/>
-              <a:t>29/07/2026</a:t>
-            </a:fld>
-            <a:endParaRPr lang="en-GB"/>
-          </a:p>
-        </p:txBody>
-      </p:sp>
-      <p:sp>
-        <p:nvSpPr>
-          <p:cNvPr id="5" name="Footer Placeholder 4">
-            <a:extLst>
-              <a:ext uri="{FF2B5EF4-FFF2-40B4-BE49-F238E27FC236}">
-                <a16:creationId xmlns:a16="http://schemas.microsoft.com/office/drawing/2014/main" id="{825A3C1F-1A9B-AC26-34A2-FE3C12AC26EB}"/>
-              </a:ext>
-            </a:extLst>
-          </p:cNvPr>
-          <p:cNvSpPr>
-            <a:spLocks noGrp="1"/>
-          </p:cNvSpPr>
-          <p:nvPr>
-            <p:ph type="ftr" sz="quarter" idx="11"/>
-          </p:nvPr>
-        </p:nvSpPr>
-        <p:spPr/>
-        <p:txBody>
-          <a:bodyPr/>
-          <a:lstStyle/>
-          <a:p>
-            <a:endParaRPr lang="en-US"/>
-          </a:p>
-        </p:txBody>
-      </p:sp>
-      <p:sp>
-        <p:nvSpPr>
-          <p:cNvPr id="6" name="Slide Number Placeholder 5">
-            <a:extLst>
-              <a:ext uri="{FF2B5EF4-FFF2-40B4-BE49-F238E27FC236}">
-                <a16:creationId xmlns:a16="http://schemas.microsoft.com/office/drawing/2014/main" id="{85AD75B3-0B51-C3FC-BD52-AD7739A5BC9A}"/>
-              </a:ext>
-            </a:extLst>
-          </p:cNvPr>
-          <p:cNvSpPr>
-            <a:spLocks noGrp="1"/>
-          </p:cNvSpPr>
-          <p:nvPr>
-            <p:ph type="sldNum" sz="quarter" idx="12"/>
-          </p:nvPr>
-        </p:nvSpPr>
-        <p:spPr/>
-        <p:txBody>
-          <a:bodyPr/>
-          <a:lstStyle/>
-          <a:p>
-            <a:fld id="{3A73CC0E-67D5-43FD-BD59-BE5F44570CB2}" type="slidenum">
-              <a:rPr lang="en-GB" smtClean="0"/>
-              <a:pPr/>
-              <a:t>‹#›</a:t>
-            </a:fld>
-            <a:endParaRPr lang="en-GB"/>
-          </a:p>
-        </p:txBody>
-      </p:sp>
-    </p:spTree>
-    <p:extLst>
-      <p:ext uri="{BB962C8B-B14F-4D97-AF65-F5344CB8AC3E}">
-        <p14:creationId xmlns:p14="http://schemas.microsoft.com/office/powerpoint/2010/main" val="2443293081"/>
-      </p:ext>
-    </p:extLst>
-  </p:cSld>
-  <p:clrMapOvr>
-    <a:masterClrMapping/>
-  </p:clrMapOvr>
-</p:sldLayout>
-</file>
-
-<file path=ppt/slideLayouts/slideLayout15.xml><?xml version="1.0" encoding="utf-8"?>
-<p:sldLayout xmlns:a="http://schemas.openxmlformats.org/drawingml/2006/main" xmlns:r="http://schemas.openxmlformats.org/officeDocument/2006/relationships" xmlns:p="http://schemas.openxmlformats.org/presentationml/2006/main" type="secHead" preserve="1">
-  <p:cSld name="Section Header">
-    <p:spTree>
-      <p:nvGrpSpPr>
-        <p:cNvPr id="1" name=""/>
-        <p:cNvGrpSpPr/>
-        <p:nvPr/>
-      </p:nvGrpSpPr>
-      <p:grpSpPr>
-        <a:xfrm>
-          <a:off x="0" y="0"/>
-          <a:ext cx="0" cy="0"/>
-          <a:chOff x="0" y="0"/>
-          <a:chExt cx="0" cy="0"/>
-        </a:xfrm>
-      </p:grpSpPr>
-      <p:sp>
-        <p:nvSpPr>
-          <p:cNvPr id="2" name="Title 1">
-            <a:extLst>
-              <a:ext uri="{FF2B5EF4-FFF2-40B4-BE49-F238E27FC236}">
-                <a16:creationId xmlns:a16="http://schemas.microsoft.com/office/drawing/2014/main" id="{F7CCCF8F-FC41-BA54-195B-AB0FDD213AD7}"/>
-              </a:ext>
-            </a:extLst>
-          </p:cNvPr>
-          <p:cNvSpPr>
-            <a:spLocks noGrp="1"/>
-          </p:cNvSpPr>
-          <p:nvPr>
-            <p:ph type="title"/>
-          </p:nvPr>
-        </p:nvSpPr>
-        <p:spPr>
-          <a:xfrm>
-            <a:off x="675878" y="1709739"/>
-            <a:ext cx="8543925" cy="2852737"/>
-          </a:xfrm>
-        </p:spPr>
-        <p:txBody>
-          <a:bodyPr anchor="b"/>
-          <a:lstStyle>
-            <a:lvl1pPr>
-              <a:defRPr sz="4875"/>
-            </a:lvl1pPr>
-          </a:lstStyle>
-          <a:p>
-            <a:r>
-              <a:rPr lang="en-US"/>
-              <a:t>Click to edit Master title style</a:t>
-            </a:r>
-          </a:p>
-        </p:txBody>
-      </p:sp>
-      <p:sp>
-        <p:nvSpPr>
-          <p:cNvPr id="3" name="Text Placeholder 2">
-            <a:extLst>
-              <a:ext uri="{FF2B5EF4-FFF2-40B4-BE49-F238E27FC236}">
-                <a16:creationId xmlns:a16="http://schemas.microsoft.com/office/drawing/2014/main" id="{8CED3621-6A4C-891A-4A9F-8CFAB67210F7}"/>
-              </a:ext>
-            </a:extLst>
-          </p:cNvPr>
-          <p:cNvSpPr>
-            <a:spLocks noGrp="1"/>
-          </p:cNvSpPr>
-          <p:nvPr>
-            <p:ph type="body" idx="1"/>
-          </p:nvPr>
-        </p:nvSpPr>
-        <p:spPr>
-          <a:xfrm>
-            <a:off x="675878" y="4589464"/>
-            <a:ext cx="8543925" cy="1500187"/>
-          </a:xfrm>
-        </p:spPr>
-        <p:txBody>
-          <a:bodyPr/>
-          <a:lstStyle>
-            <a:lvl1pPr marL="0" indent="0">
-              <a:buNone/>
-              <a:defRPr sz="1950">
-                <a:solidFill>
-                  <a:schemeClr val="tx1">
-                    <a:tint val="82000"/>
-                  </a:schemeClr>
-                </a:solidFill>
-              </a:defRPr>
-            </a:lvl1pPr>
-            <a:lvl2pPr marL="371475" indent="0">
-              <a:buNone/>
-              <a:defRPr sz="1625">
-                <a:solidFill>
-                  <a:schemeClr val="tx1">
-                    <a:tint val="82000"/>
-                  </a:schemeClr>
-                </a:solidFill>
-              </a:defRPr>
-            </a:lvl2pPr>
-            <a:lvl3pPr marL="742950" indent="0">
-              <a:buNone/>
-              <a:defRPr sz="1463">
-                <a:solidFill>
-                  <a:schemeClr val="tx1">
-                    <a:tint val="82000"/>
-                  </a:schemeClr>
-                </a:solidFill>
-              </a:defRPr>
-            </a:lvl3pPr>
-            <a:lvl4pPr marL="1114425" indent="0">
-              <a:buNone/>
-              <a:defRPr sz="1300">
-                <a:solidFill>
-                  <a:schemeClr val="tx1">
-                    <a:tint val="82000"/>
-                  </a:schemeClr>
-                </a:solidFill>
-              </a:defRPr>
-            </a:lvl4pPr>
-            <a:lvl5pPr marL="1485900" indent="0">
-              <a:buNone/>
-              <a:defRPr sz="1300">
-                <a:solidFill>
-                  <a:schemeClr val="tx1">
-                    <a:tint val="82000"/>
-                  </a:schemeClr>
-                </a:solidFill>
-              </a:defRPr>
-            </a:lvl5pPr>
-            <a:lvl6pPr marL="1857375" indent="0">
-              <a:buNone/>
-              <a:defRPr sz="1300">
-                <a:solidFill>
-                  <a:schemeClr val="tx1">
-                    <a:tint val="82000"/>
-                  </a:schemeClr>
-                </a:solidFill>
-              </a:defRPr>
-            </a:lvl6pPr>
-            <a:lvl7pPr marL="2228850" indent="0">
-              <a:buNone/>
-              <a:defRPr sz="1300">
-                <a:solidFill>
-                  <a:schemeClr val="tx1">
-                    <a:tint val="82000"/>
-                  </a:schemeClr>
-                </a:solidFill>
-              </a:defRPr>
-            </a:lvl7pPr>
-            <a:lvl8pPr marL="2600325" indent="0">
-              <a:buNone/>
-              <a:defRPr sz="1300">
-                <a:solidFill>
-                  <a:schemeClr val="tx1">
-                    <a:tint val="82000"/>
-                  </a:schemeClr>
-                </a:solidFill>
-              </a:defRPr>
-            </a:lvl8pPr>
-            <a:lvl9pPr marL="2971800" indent="0">
-              <a:buNone/>
-              <a:defRPr sz="1300">
-                <a:solidFill>
-                  <a:schemeClr val="tx1">
-                    <a:tint val="82000"/>
-                  </a:schemeClr>
-                </a:solidFill>
-              </a:defRPr>
-            </a:lvl9pPr>
-          </a:lstStyle>
-          <a:p>
-            <a:pPr lvl="0"/>
-            <a:r>
-              <a:rPr lang="en-US"/>
-              <a:t>Click to edit Master text styles</a:t>
-            </a:r>
-          </a:p>
-        </p:txBody>
-      </p:sp>
-      <p:sp>
-        <p:nvSpPr>
-          <p:cNvPr id="4" name="Date Placeholder 3">
-            <a:extLst>
-              <a:ext uri="{FF2B5EF4-FFF2-40B4-BE49-F238E27FC236}">
-                <a16:creationId xmlns:a16="http://schemas.microsoft.com/office/drawing/2014/main" id="{D79F9C5B-09A7-AACE-5899-6C43CC7D6957}"/>
-              </a:ext>
-            </a:extLst>
-          </p:cNvPr>
-          <p:cNvSpPr>
-            <a:spLocks noGrp="1"/>
-          </p:cNvSpPr>
-          <p:nvPr>
-            <p:ph type="dt" sz="half" idx="10"/>
-          </p:nvPr>
-        </p:nvSpPr>
-        <p:spPr/>
-        <p:txBody>
-          <a:bodyPr/>
-          <a:lstStyle/>
-          <a:p>
-            <a:fld id="{6F80DDAC-FE11-49DC-9261-11C1E994665B}" type="datetimeFigureOut">
-              <a:rPr lang="en-GB" smtClean="0"/>
-              <a:pPr/>
-              <a:t>29/07/2026</a:t>
-            </a:fld>
-            <a:endParaRPr lang="en-GB"/>
-          </a:p>
-        </p:txBody>
-      </p:sp>
-      <p:sp>
-        <p:nvSpPr>
-          <p:cNvPr id="5" name="Footer Placeholder 4">
-            <a:extLst>
-              <a:ext uri="{FF2B5EF4-FFF2-40B4-BE49-F238E27FC236}">
-                <a16:creationId xmlns:a16="http://schemas.microsoft.com/office/drawing/2014/main" id="{2418391A-998C-6522-EB07-BBADB269BF14}"/>
-              </a:ext>
-            </a:extLst>
-          </p:cNvPr>
-          <p:cNvSpPr>
-            <a:spLocks noGrp="1"/>
-          </p:cNvSpPr>
-          <p:nvPr>
-            <p:ph type="ftr" sz="quarter" idx="11"/>
-          </p:nvPr>
-        </p:nvSpPr>
-        <p:spPr/>
-        <p:txBody>
-          <a:bodyPr/>
-          <a:lstStyle/>
-          <a:p>
-            <a:endParaRPr lang="en-US"/>
-          </a:p>
-        </p:txBody>
-      </p:sp>
-      <p:sp>
-        <p:nvSpPr>
-          <p:cNvPr id="6" name="Slide Number Placeholder 5">
-            <a:extLst>
-              <a:ext uri="{FF2B5EF4-FFF2-40B4-BE49-F238E27FC236}">
-                <a16:creationId xmlns:a16="http://schemas.microsoft.com/office/drawing/2014/main" id="{B059B3E3-80F3-C318-AE69-CC2389B551D5}"/>
-              </a:ext>
-            </a:extLst>
-          </p:cNvPr>
-          <p:cNvSpPr>
-            <a:spLocks noGrp="1"/>
-          </p:cNvSpPr>
-          <p:nvPr>
-            <p:ph type="sldNum" sz="quarter" idx="12"/>
-          </p:nvPr>
-        </p:nvSpPr>
-        <p:spPr/>
-        <p:txBody>
-          <a:bodyPr/>
-          <a:lstStyle/>
-          <a:p>
-            <a:fld id="{3A73CC0E-67D5-43FD-BD59-BE5F44570CB2}" type="slidenum">
-              <a:rPr lang="en-GB" smtClean="0"/>
-              <a:pPr/>
-              <a:t>‹#›</a:t>
-            </a:fld>
-            <a:endParaRPr lang="en-GB"/>
-          </a:p>
-        </p:txBody>
-      </p:sp>
-    </p:spTree>
-    <p:extLst>
-      <p:ext uri="{BB962C8B-B14F-4D97-AF65-F5344CB8AC3E}">
-        <p14:creationId xmlns:p14="http://schemas.microsoft.com/office/powerpoint/2010/main" val="2828134974"/>
-      </p:ext>
-    </p:extLst>
-  </p:cSld>
-  <p:clrMapOvr>
-    <a:masterClrMapping/>
-  </p:clrMapOvr>
-</p:sldLayout>
-</file>
-
-<file path=ppt/slideLayouts/slideLayout16.xml><?xml version="1.0" encoding="utf-8"?>
-<p:sldLayout xmlns:a="http://schemas.openxmlformats.org/drawingml/2006/main" xmlns:r="http://schemas.openxmlformats.org/officeDocument/2006/relationships" xmlns:p="http://schemas.openxmlformats.org/presentationml/2006/main" type="twoObj" preserve="1">
-  <p:cSld name="Two Content">
-    <p:spTree>
-      <p:nvGrpSpPr>
-        <p:cNvPr id="1" name=""/>
-        <p:cNvGrpSpPr/>
-        <p:nvPr/>
-      </p:nvGrpSpPr>
-      <p:grpSpPr>
-        <a:xfrm>
-          <a:off x="0" y="0"/>
-          <a:ext cx="0" cy="0"/>
-          <a:chOff x="0" y="0"/>
-          <a:chExt cx="0" cy="0"/>
-        </a:xfrm>
-      </p:grpSpPr>
-      <p:sp>
-        <p:nvSpPr>
-          <p:cNvPr id="2" name="Title 1">
-            <a:extLst>
-              <a:ext uri="{FF2B5EF4-FFF2-40B4-BE49-F238E27FC236}">
-                <a16:creationId xmlns:a16="http://schemas.microsoft.com/office/drawing/2014/main" id="{9EE593B0-5543-FD72-265C-601978B645A7}"/>
-              </a:ext>
-            </a:extLst>
-          </p:cNvPr>
-          <p:cNvSpPr>
-            <a:spLocks noGrp="1"/>
-          </p:cNvSpPr>
-          <p:nvPr>
-            <p:ph type="title"/>
-          </p:nvPr>
-        </p:nvSpPr>
-        <p:spPr/>
-        <p:txBody>
-          <a:bodyPr/>
-          <a:lstStyle/>
-          <a:p>
-            <a:r>
-              <a:rPr lang="en-US"/>
-              <a:t>Click to edit Master title style</a:t>
-            </a:r>
-          </a:p>
-        </p:txBody>
-      </p:sp>
-      <p:sp>
-        <p:nvSpPr>
-          <p:cNvPr id="3" name="Content Placeholder 2">
-            <a:extLst>
-              <a:ext uri="{FF2B5EF4-FFF2-40B4-BE49-F238E27FC236}">
-                <a16:creationId xmlns:a16="http://schemas.microsoft.com/office/drawing/2014/main" id="{B7717A1B-1A5C-C49C-1DCB-A4D85232FE22}"/>
-              </a:ext>
-            </a:extLst>
-          </p:cNvPr>
-          <p:cNvSpPr>
-            <a:spLocks noGrp="1"/>
-          </p:cNvSpPr>
-          <p:nvPr>
-            <p:ph sz="half" idx="1"/>
-          </p:nvPr>
-        </p:nvSpPr>
-        <p:spPr>
-          <a:xfrm>
-            <a:off x="681038" y="1825625"/>
-            <a:ext cx="4210050" cy="4351338"/>
-          </a:xfrm>
-        </p:spPr>
-        <p:txBody>
-          <a:bodyPr/>
-          <a:lstStyle/>
-          <a:p>
-            <a:pPr lvl="0"/>
-            <a:r>
-              <a:rPr lang="en-US"/>
-              <a:t>Click to edit Master text styles</a:t>
-            </a:r>
-          </a:p>
-          <a:p>
-            <a:pPr lvl="1"/>
-            <a:r>
-              <a:rPr lang="en-US"/>
-              <a:t>Second level</a:t>
-            </a:r>
-          </a:p>
-          <a:p>
-            <a:pPr lvl="2"/>
-            <a:r>
-              <a:rPr lang="en-US"/>
-              <a:t>Third level</a:t>
-            </a:r>
-          </a:p>
-          <a:p>
-            <a:pPr lvl="3"/>
-            <a:r>
-              <a:rPr lang="en-US"/>
-              <a:t>Fourth level</a:t>
-            </a:r>
-          </a:p>
-          <a:p>
-            <a:pPr lvl="4"/>
-            <a:r>
-              <a:rPr lang="en-US"/>
-              <a:t>Fifth level</a:t>
-            </a:r>
-          </a:p>
-        </p:txBody>
-      </p:sp>
-      <p:sp>
-        <p:nvSpPr>
-          <p:cNvPr id="4" name="Content Placeholder 3">
-            <a:extLst>
-              <a:ext uri="{FF2B5EF4-FFF2-40B4-BE49-F238E27FC236}">
-                <a16:creationId xmlns:a16="http://schemas.microsoft.com/office/drawing/2014/main" id="{48866F6E-92F7-4DE2-94AA-93F66ECA0EB9}"/>
-              </a:ext>
-            </a:extLst>
-          </p:cNvPr>
-          <p:cNvSpPr>
-            <a:spLocks noGrp="1"/>
-          </p:cNvSpPr>
-          <p:nvPr>
-            <p:ph sz="half" idx="2"/>
-          </p:nvPr>
-        </p:nvSpPr>
-        <p:spPr>
-          <a:xfrm>
-            <a:off x="5014913" y="1825625"/>
-            <a:ext cx="4210050" cy="4351338"/>
-          </a:xfrm>
-        </p:spPr>
-        <p:txBody>
-          <a:bodyPr/>
-          <a:lstStyle/>
-          <a:p>
-            <a:pPr lvl="0"/>
-            <a:r>
-              <a:rPr lang="en-US"/>
-              <a:t>Click to edit Master text styles</a:t>
-            </a:r>
-          </a:p>
-          <a:p>
-            <a:pPr lvl="1"/>
-            <a:r>
-              <a:rPr lang="en-US"/>
-              <a:t>Second level</a:t>
-            </a:r>
-          </a:p>
-          <a:p>
-            <a:pPr lvl="2"/>
-            <a:r>
-              <a:rPr lang="en-US"/>
-              <a:t>Third level</a:t>
-            </a:r>
-          </a:p>
-          <a:p>
-            <a:pPr lvl="3"/>
-            <a:r>
-              <a:rPr lang="en-US"/>
-              <a:t>Fourth level</a:t>
-            </a:r>
-          </a:p>
-          <a:p>
-            <a:pPr lvl="4"/>
-            <a:r>
-              <a:rPr lang="en-US"/>
-              <a:t>Fifth level</a:t>
-            </a:r>
-          </a:p>
-        </p:txBody>
-      </p:sp>
-      <p:sp>
-        <p:nvSpPr>
-          <p:cNvPr id="5" name="Date Placeholder 4">
-            <a:extLst>
-              <a:ext uri="{FF2B5EF4-FFF2-40B4-BE49-F238E27FC236}">
-                <a16:creationId xmlns:a16="http://schemas.microsoft.com/office/drawing/2014/main" id="{B139B6FA-F1AE-16C1-0F53-BED48027C798}"/>
-              </a:ext>
-            </a:extLst>
-          </p:cNvPr>
-          <p:cNvSpPr>
-            <a:spLocks noGrp="1"/>
-          </p:cNvSpPr>
-          <p:nvPr>
-            <p:ph type="dt" sz="half" idx="10"/>
-          </p:nvPr>
-        </p:nvSpPr>
-        <p:spPr/>
-        <p:txBody>
-          <a:bodyPr/>
-          <a:lstStyle/>
-          <a:p>
-            <a:fld id="{6F80DDAC-FE11-49DC-9261-11C1E994665B}" type="datetimeFigureOut">
-              <a:rPr lang="en-GB" smtClean="0"/>
-              <a:pPr/>
-              <a:t>29/07/2026</a:t>
-            </a:fld>
-            <a:endParaRPr lang="en-GB"/>
-          </a:p>
-        </p:txBody>
-      </p:sp>
-      <p:sp>
-        <p:nvSpPr>
-          <p:cNvPr id="6" name="Footer Placeholder 5">
-            <a:extLst>
-              <a:ext uri="{FF2B5EF4-FFF2-40B4-BE49-F238E27FC236}">
-                <a16:creationId xmlns:a16="http://schemas.microsoft.com/office/drawing/2014/main" id="{3303BDA8-F3F8-F242-735E-85C7C2C32E6E}"/>
-              </a:ext>
-            </a:extLst>
-          </p:cNvPr>
-          <p:cNvSpPr>
-            <a:spLocks noGrp="1"/>
-          </p:cNvSpPr>
-          <p:nvPr>
-            <p:ph type="ftr" sz="quarter" idx="11"/>
-          </p:nvPr>
-        </p:nvSpPr>
-        <p:spPr/>
-        <p:txBody>
-          <a:bodyPr/>
-          <a:lstStyle/>
-          <a:p>
-            <a:endParaRPr lang="en-US"/>
-          </a:p>
-        </p:txBody>
-      </p:sp>
-      <p:sp>
-        <p:nvSpPr>
-          <p:cNvPr id="7" name="Slide Number Placeholder 6">
-            <a:extLst>
-              <a:ext uri="{FF2B5EF4-FFF2-40B4-BE49-F238E27FC236}">
-                <a16:creationId xmlns:a16="http://schemas.microsoft.com/office/drawing/2014/main" id="{F915B592-7087-A77B-3B2B-1D78D9EBEC80}"/>
-              </a:ext>
-            </a:extLst>
-          </p:cNvPr>
-          <p:cNvSpPr>
-            <a:spLocks noGrp="1"/>
-          </p:cNvSpPr>
-          <p:nvPr>
-            <p:ph type="sldNum" sz="quarter" idx="12"/>
-          </p:nvPr>
-        </p:nvSpPr>
-        <p:spPr/>
-        <p:txBody>
-          <a:bodyPr/>
-          <a:lstStyle/>
-          <a:p>
-            <a:fld id="{3A73CC0E-67D5-43FD-BD59-BE5F44570CB2}" type="slidenum">
-              <a:rPr lang="en-GB" smtClean="0"/>
-              <a:pPr/>
-              <a:t>‹#›</a:t>
-            </a:fld>
-            <a:endParaRPr lang="en-GB"/>
-          </a:p>
-        </p:txBody>
-      </p:sp>
-    </p:spTree>
-    <p:extLst>
-      <p:ext uri="{BB962C8B-B14F-4D97-AF65-F5344CB8AC3E}">
-        <p14:creationId xmlns:p14="http://schemas.microsoft.com/office/powerpoint/2010/main" val="2617435831"/>
-      </p:ext>
-    </p:extLst>
-  </p:cSld>
-  <p:clrMapOvr>
-    <a:masterClrMapping/>
-  </p:clrMapOvr>
-</p:sldLayout>
-</file>
-
-<file path=ppt/slideLayouts/slideLayout17.xml><?xml version="1.0" encoding="utf-8"?>
-<p:sldLayout xmlns:a="http://schemas.openxmlformats.org/drawingml/2006/main" xmlns:r="http://schemas.openxmlformats.org/officeDocument/2006/relationships" xmlns:p="http://schemas.openxmlformats.org/presentationml/2006/main" type="twoTxTwoObj" preserve="1">
-  <p:cSld name="Comparison">
-    <p:spTree>
-      <p:nvGrpSpPr>
-        <p:cNvPr id="1" name=""/>
-        <p:cNvGrpSpPr/>
-        <p:nvPr/>
-      </p:nvGrpSpPr>
-      <p:grpSpPr>
-        <a:xfrm>
-          <a:off x="0" y="0"/>
-          <a:ext cx="0" cy="0"/>
-          <a:chOff x="0" y="0"/>
-          <a:chExt cx="0" cy="0"/>
-        </a:xfrm>
-      </p:grpSpPr>
-      <p:sp>
-        <p:nvSpPr>
-          <p:cNvPr id="2" name="Title 1">
-            <a:extLst>
-              <a:ext uri="{FF2B5EF4-FFF2-40B4-BE49-F238E27FC236}">
-                <a16:creationId xmlns:a16="http://schemas.microsoft.com/office/drawing/2014/main" id="{CB6784EC-9816-8C42-4A2D-296F1A38341E}"/>
-              </a:ext>
-            </a:extLst>
-          </p:cNvPr>
-          <p:cNvSpPr>
-            <a:spLocks noGrp="1"/>
-          </p:cNvSpPr>
-          <p:nvPr>
-            <p:ph type="title"/>
-          </p:nvPr>
-        </p:nvSpPr>
-        <p:spPr>
-          <a:xfrm>
-            <a:off x="682328" y="365126"/>
-            <a:ext cx="8543925" cy="1325563"/>
-          </a:xfrm>
-        </p:spPr>
-        <p:txBody>
-          <a:bodyPr/>
-          <a:lstStyle/>
-          <a:p>
-            <a:r>
-              <a:rPr lang="en-US"/>
-              <a:t>Click to edit Master title style</a:t>
-            </a:r>
-          </a:p>
-        </p:txBody>
-      </p:sp>
-      <p:sp>
-        <p:nvSpPr>
-          <p:cNvPr id="3" name="Text Placeholder 2">
-            <a:extLst>
-              <a:ext uri="{FF2B5EF4-FFF2-40B4-BE49-F238E27FC236}">
-                <a16:creationId xmlns:a16="http://schemas.microsoft.com/office/drawing/2014/main" id="{6646B347-D4D6-CB98-1E64-CCAAE65E5D7A}"/>
-              </a:ext>
-            </a:extLst>
-          </p:cNvPr>
-          <p:cNvSpPr>
-            <a:spLocks noGrp="1"/>
-          </p:cNvSpPr>
-          <p:nvPr>
-            <p:ph type="body" idx="1"/>
-          </p:nvPr>
-        </p:nvSpPr>
-        <p:spPr>
-          <a:xfrm>
-            <a:off x="682328" y="1681163"/>
-            <a:ext cx="4190702" cy="823912"/>
-          </a:xfrm>
-        </p:spPr>
-        <p:txBody>
-          <a:bodyPr anchor="b"/>
-          <a:lstStyle>
-            <a:lvl1pPr marL="0" indent="0">
-              <a:buNone/>
-              <a:defRPr sz="1950" b="1"/>
-            </a:lvl1pPr>
-            <a:lvl2pPr marL="371475" indent="0">
-              <a:buNone/>
-              <a:defRPr sz="1625" b="1"/>
-            </a:lvl2pPr>
-            <a:lvl3pPr marL="742950" indent="0">
-              <a:buNone/>
-              <a:defRPr sz="1463" b="1"/>
-            </a:lvl3pPr>
-            <a:lvl4pPr marL="1114425" indent="0">
-              <a:buNone/>
-              <a:defRPr sz="1300" b="1"/>
-            </a:lvl4pPr>
-            <a:lvl5pPr marL="1485900" indent="0">
-              <a:buNone/>
-              <a:defRPr sz="1300" b="1"/>
-            </a:lvl5pPr>
-            <a:lvl6pPr marL="1857375" indent="0">
-              <a:buNone/>
-              <a:defRPr sz="1300" b="1"/>
-            </a:lvl6pPr>
-            <a:lvl7pPr marL="2228850" indent="0">
-              <a:buNone/>
-              <a:defRPr sz="1300" b="1"/>
-            </a:lvl7pPr>
-            <a:lvl8pPr marL="2600325" indent="0">
-              <a:buNone/>
-              <a:defRPr sz="1300" b="1"/>
-            </a:lvl8pPr>
-            <a:lvl9pPr marL="2971800" indent="0">
-              <a:buNone/>
-              <a:defRPr sz="1300" b="1"/>
-            </a:lvl9pPr>
-          </a:lstStyle>
-          <a:p>
-            <a:pPr lvl="0"/>
-            <a:r>
-              <a:rPr lang="en-US"/>
-              <a:t>Click to edit Master text styles</a:t>
-            </a:r>
-          </a:p>
-        </p:txBody>
-      </p:sp>
-      <p:sp>
-        <p:nvSpPr>
-          <p:cNvPr id="4" name="Content Placeholder 3">
-            <a:extLst>
-              <a:ext uri="{FF2B5EF4-FFF2-40B4-BE49-F238E27FC236}">
-                <a16:creationId xmlns:a16="http://schemas.microsoft.com/office/drawing/2014/main" id="{5C7B7206-5AE9-8437-3DCF-E86B48DD1D51}"/>
-              </a:ext>
-            </a:extLst>
-          </p:cNvPr>
-          <p:cNvSpPr>
-            <a:spLocks noGrp="1"/>
-          </p:cNvSpPr>
-          <p:nvPr>
-            <p:ph sz="half" idx="2"/>
-          </p:nvPr>
-        </p:nvSpPr>
-        <p:spPr>
-          <a:xfrm>
-            <a:off x="682328" y="2505075"/>
-            <a:ext cx="4190702" cy="3684588"/>
-          </a:xfrm>
-        </p:spPr>
-        <p:txBody>
-          <a:bodyPr/>
-          <a:lstStyle/>
-          <a:p>
-            <a:pPr lvl="0"/>
-            <a:r>
-              <a:rPr lang="en-US"/>
-              <a:t>Click to edit Master text styles</a:t>
-            </a:r>
-          </a:p>
-          <a:p>
-            <a:pPr lvl="1"/>
-            <a:r>
-              <a:rPr lang="en-US"/>
-              <a:t>Second level</a:t>
-            </a:r>
-          </a:p>
-          <a:p>
-            <a:pPr lvl="2"/>
-            <a:r>
-              <a:rPr lang="en-US"/>
-              <a:t>Third level</a:t>
-            </a:r>
-          </a:p>
-          <a:p>
-            <a:pPr lvl="3"/>
-            <a:r>
-              <a:rPr lang="en-US"/>
-              <a:t>Fourth level</a:t>
-            </a:r>
-          </a:p>
-          <a:p>
-            <a:pPr lvl="4"/>
-            <a:r>
-              <a:rPr lang="en-US"/>
-              <a:t>Fifth level</a:t>
-            </a:r>
-          </a:p>
-        </p:txBody>
-      </p:sp>
-      <p:sp>
-        <p:nvSpPr>
-          <p:cNvPr id="5" name="Text Placeholder 4">
-            <a:extLst>
-              <a:ext uri="{FF2B5EF4-FFF2-40B4-BE49-F238E27FC236}">
-                <a16:creationId xmlns:a16="http://schemas.microsoft.com/office/drawing/2014/main" id="{C3AD6CF7-7157-DA71-23AF-44C6E862B892}"/>
-              </a:ext>
-            </a:extLst>
-          </p:cNvPr>
-          <p:cNvSpPr>
-            <a:spLocks noGrp="1"/>
-          </p:cNvSpPr>
-          <p:nvPr>
-            <p:ph type="body" sz="quarter" idx="3"/>
-          </p:nvPr>
-        </p:nvSpPr>
-        <p:spPr>
-          <a:xfrm>
-            <a:off x="5014913" y="1681163"/>
-            <a:ext cx="4211340" cy="823912"/>
-          </a:xfrm>
-        </p:spPr>
-        <p:txBody>
-          <a:bodyPr anchor="b"/>
-          <a:lstStyle>
-            <a:lvl1pPr marL="0" indent="0">
-              <a:buNone/>
-              <a:defRPr sz="1950" b="1"/>
-            </a:lvl1pPr>
-            <a:lvl2pPr marL="371475" indent="0">
-              <a:buNone/>
-              <a:defRPr sz="1625" b="1"/>
-            </a:lvl2pPr>
-            <a:lvl3pPr marL="742950" indent="0">
-              <a:buNone/>
-              <a:defRPr sz="1463" b="1"/>
-            </a:lvl3pPr>
-            <a:lvl4pPr marL="1114425" indent="0">
-              <a:buNone/>
-              <a:defRPr sz="1300" b="1"/>
-            </a:lvl4pPr>
-            <a:lvl5pPr marL="1485900" indent="0">
-              <a:buNone/>
-              <a:defRPr sz="1300" b="1"/>
-            </a:lvl5pPr>
-            <a:lvl6pPr marL="1857375" indent="0">
-              <a:buNone/>
-              <a:defRPr sz="1300" b="1"/>
-            </a:lvl6pPr>
-            <a:lvl7pPr marL="2228850" indent="0">
-              <a:buNone/>
-              <a:defRPr sz="1300" b="1"/>
-            </a:lvl7pPr>
-            <a:lvl8pPr marL="2600325" indent="0">
-              <a:buNone/>
-              <a:defRPr sz="1300" b="1"/>
-            </a:lvl8pPr>
-            <a:lvl9pPr marL="2971800" indent="0">
-              <a:buNone/>
-              <a:defRPr sz="1300" b="1"/>
-            </a:lvl9pPr>
-          </a:lstStyle>
-          <a:p>
-            <a:pPr lvl="0"/>
-            <a:r>
-              <a:rPr lang="en-US"/>
-              <a:t>Click to edit Master text styles</a:t>
-            </a:r>
-          </a:p>
-        </p:txBody>
-      </p:sp>
-      <p:sp>
-        <p:nvSpPr>
-          <p:cNvPr id="6" name="Content Placeholder 5">
-            <a:extLst>
-              <a:ext uri="{FF2B5EF4-FFF2-40B4-BE49-F238E27FC236}">
-                <a16:creationId xmlns:a16="http://schemas.microsoft.com/office/drawing/2014/main" id="{0FF685C0-509A-B904-DA26-4520A0B8CA29}"/>
-              </a:ext>
-            </a:extLst>
-          </p:cNvPr>
-          <p:cNvSpPr>
-            <a:spLocks noGrp="1"/>
-          </p:cNvSpPr>
-          <p:nvPr>
-            <p:ph sz="quarter" idx="4"/>
-          </p:nvPr>
-        </p:nvSpPr>
-        <p:spPr>
-          <a:xfrm>
-            <a:off x="5014913" y="2505075"/>
-            <a:ext cx="4211340" cy="3684588"/>
-          </a:xfrm>
-        </p:spPr>
-        <p:txBody>
-          <a:bodyPr/>
-          <a:lstStyle/>
-          <a:p>
-            <a:pPr lvl="0"/>
-            <a:r>
-              <a:rPr lang="en-US"/>
-              <a:t>Click to edit Master text styles</a:t>
-            </a:r>
-          </a:p>
-          <a:p>
-            <a:pPr lvl="1"/>
-            <a:r>
-              <a:rPr lang="en-US"/>
-              <a:t>Second level</a:t>
-            </a:r>
-          </a:p>
-          <a:p>
-            <a:pPr lvl="2"/>
-            <a:r>
-              <a:rPr lang="en-US"/>
-              <a:t>Third level</a:t>
-            </a:r>
-          </a:p>
-          <a:p>
-            <a:pPr lvl="3"/>
-            <a:r>
-              <a:rPr lang="en-US"/>
-              <a:t>Fourth level</a:t>
-            </a:r>
-          </a:p>
-          <a:p>
-            <a:pPr lvl="4"/>
-            <a:r>
-              <a:rPr lang="en-US"/>
-              <a:t>Fifth level</a:t>
-            </a:r>
-          </a:p>
-        </p:txBody>
-      </p:sp>
-      <p:sp>
-        <p:nvSpPr>
-          <p:cNvPr id="7" name="Date Placeholder 6">
-            <a:extLst>
-              <a:ext uri="{FF2B5EF4-FFF2-40B4-BE49-F238E27FC236}">
-                <a16:creationId xmlns:a16="http://schemas.microsoft.com/office/drawing/2014/main" id="{699FFE35-A219-9C26-3E28-8C0B65690425}"/>
-              </a:ext>
-            </a:extLst>
-          </p:cNvPr>
-          <p:cNvSpPr>
-            <a:spLocks noGrp="1"/>
-          </p:cNvSpPr>
-          <p:nvPr>
-            <p:ph type="dt" sz="half" idx="10"/>
-          </p:nvPr>
-        </p:nvSpPr>
-        <p:spPr/>
-        <p:txBody>
-          <a:bodyPr/>
-          <a:lstStyle/>
-          <a:p>
-            <a:fld id="{6F80DDAC-FE11-49DC-9261-11C1E994665B}" type="datetimeFigureOut">
-              <a:rPr lang="en-GB" smtClean="0"/>
-              <a:pPr/>
-              <a:t>29/07/2026</a:t>
-            </a:fld>
-            <a:endParaRPr lang="en-GB"/>
-          </a:p>
-        </p:txBody>
-      </p:sp>
-      <p:sp>
-        <p:nvSpPr>
-          <p:cNvPr id="8" name="Footer Placeholder 7">
-            <a:extLst>
-              <a:ext uri="{FF2B5EF4-FFF2-40B4-BE49-F238E27FC236}">
-                <a16:creationId xmlns:a16="http://schemas.microsoft.com/office/drawing/2014/main" id="{189BDAF1-D1A8-865D-87DB-C8FADFFA2EC4}"/>
-              </a:ext>
-            </a:extLst>
-          </p:cNvPr>
-          <p:cNvSpPr>
-            <a:spLocks noGrp="1"/>
-          </p:cNvSpPr>
-          <p:nvPr>
-            <p:ph type="ftr" sz="quarter" idx="11"/>
-          </p:nvPr>
-        </p:nvSpPr>
-        <p:spPr/>
-        <p:txBody>
-          <a:bodyPr/>
-          <a:lstStyle/>
-          <a:p>
-            <a:endParaRPr lang="en-US"/>
-          </a:p>
-        </p:txBody>
-      </p:sp>
-      <p:sp>
-        <p:nvSpPr>
-          <p:cNvPr id="9" name="Slide Number Placeholder 8">
-            <a:extLst>
-              <a:ext uri="{FF2B5EF4-FFF2-40B4-BE49-F238E27FC236}">
-                <a16:creationId xmlns:a16="http://schemas.microsoft.com/office/drawing/2014/main" id="{FD12CC93-F984-AE23-A772-6DF65E0A139A}"/>
-              </a:ext>
-            </a:extLst>
-          </p:cNvPr>
-          <p:cNvSpPr>
-            <a:spLocks noGrp="1"/>
-          </p:cNvSpPr>
-          <p:nvPr>
-            <p:ph type="sldNum" sz="quarter" idx="12"/>
-          </p:nvPr>
-        </p:nvSpPr>
-        <p:spPr/>
-        <p:txBody>
-          <a:bodyPr/>
-          <a:lstStyle/>
-          <a:p>
-            <a:fld id="{3A73CC0E-67D5-43FD-BD59-BE5F44570CB2}" type="slidenum">
-              <a:rPr lang="en-GB" smtClean="0"/>
-              <a:pPr/>
-              <a:t>‹#›</a:t>
-            </a:fld>
-            <a:endParaRPr lang="en-GB"/>
-          </a:p>
-        </p:txBody>
-      </p:sp>
-    </p:spTree>
-    <p:extLst>
-      <p:ext uri="{BB962C8B-B14F-4D97-AF65-F5344CB8AC3E}">
-        <p14:creationId xmlns:p14="http://schemas.microsoft.com/office/powerpoint/2010/main" val="2821268332"/>
-      </p:ext>
-    </p:extLst>
-  </p:cSld>
-  <p:clrMapOvr>
-    <a:masterClrMapping/>
-  </p:clrMapOvr>
-</p:sldLayout>
-</file>
-
-<file path=ppt/slideLayouts/slideLayout18.xml><?xml version="1.0" encoding="utf-8"?>
-<p:sldLayout xmlns:a="http://schemas.openxmlformats.org/drawingml/2006/main" xmlns:r="http://schemas.openxmlformats.org/officeDocument/2006/relationships" xmlns:p="http://schemas.openxmlformats.org/presentationml/2006/main" type="titleOnly" preserve="1">
-  <p:cSld name="Title Only">
-    <p:spTree>
-      <p:nvGrpSpPr>
-        <p:cNvPr id="1" name=""/>
-        <p:cNvGrpSpPr/>
-        <p:nvPr/>
-      </p:nvGrpSpPr>
-      <p:grpSpPr>
-        <a:xfrm>
-          <a:off x="0" y="0"/>
-          <a:ext cx="0" cy="0"/>
-          <a:chOff x="0" y="0"/>
-          <a:chExt cx="0" cy="0"/>
-        </a:xfrm>
-      </p:grpSpPr>
-      <p:sp>
-        <p:nvSpPr>
-          <p:cNvPr id="2" name="Title 1">
-            <a:extLst>
-              <a:ext uri="{FF2B5EF4-FFF2-40B4-BE49-F238E27FC236}">
-                <a16:creationId xmlns:a16="http://schemas.microsoft.com/office/drawing/2014/main" id="{5B053813-8CBC-6EC2-6472-451315FB3E41}"/>
-              </a:ext>
-            </a:extLst>
-          </p:cNvPr>
-          <p:cNvSpPr>
-            <a:spLocks noGrp="1"/>
-          </p:cNvSpPr>
-          <p:nvPr>
-            <p:ph type="title"/>
-          </p:nvPr>
-        </p:nvSpPr>
-        <p:spPr/>
-        <p:txBody>
-          <a:bodyPr/>
-          <a:lstStyle/>
-          <a:p>
-            <a:r>
-              <a:rPr lang="en-US"/>
-              <a:t>Click to edit Master title style</a:t>
-            </a:r>
-          </a:p>
-        </p:txBody>
-      </p:sp>
-      <p:sp>
-        <p:nvSpPr>
-          <p:cNvPr id="3" name="Date Placeholder 2">
-            <a:extLst>
-              <a:ext uri="{FF2B5EF4-FFF2-40B4-BE49-F238E27FC236}">
-                <a16:creationId xmlns:a16="http://schemas.microsoft.com/office/drawing/2014/main" id="{72AF1B0D-A722-7B98-5246-E687C04851EB}"/>
-              </a:ext>
-            </a:extLst>
-          </p:cNvPr>
-          <p:cNvSpPr>
-            <a:spLocks noGrp="1"/>
-          </p:cNvSpPr>
-          <p:nvPr>
-            <p:ph type="dt" sz="half" idx="10"/>
-          </p:nvPr>
-        </p:nvSpPr>
-        <p:spPr/>
-        <p:txBody>
-          <a:bodyPr/>
-          <a:lstStyle/>
-          <a:p>
-            <a:fld id="{6F80DDAC-FE11-49DC-9261-11C1E994665B}" type="datetimeFigureOut">
-              <a:rPr lang="en-GB" smtClean="0"/>
-              <a:pPr/>
-              <a:t>29/07/2026</a:t>
-            </a:fld>
-            <a:endParaRPr lang="en-GB"/>
-          </a:p>
-        </p:txBody>
-      </p:sp>
-      <p:sp>
-        <p:nvSpPr>
-          <p:cNvPr id="4" name="Footer Placeholder 3">
-            <a:extLst>
-              <a:ext uri="{FF2B5EF4-FFF2-40B4-BE49-F238E27FC236}">
-                <a16:creationId xmlns:a16="http://schemas.microsoft.com/office/drawing/2014/main" id="{1369F1F6-743A-5F5A-56CE-5E37FF4D6D81}"/>
-              </a:ext>
-            </a:extLst>
-          </p:cNvPr>
-          <p:cNvSpPr>
-            <a:spLocks noGrp="1"/>
-          </p:cNvSpPr>
-          <p:nvPr>
-            <p:ph type="ftr" sz="quarter" idx="11"/>
-          </p:nvPr>
-        </p:nvSpPr>
-        <p:spPr/>
-        <p:txBody>
-          <a:bodyPr/>
-          <a:lstStyle/>
-          <a:p>
-            <a:endParaRPr lang="en-US"/>
-          </a:p>
-        </p:txBody>
-      </p:sp>
-      <p:sp>
-        <p:nvSpPr>
-          <p:cNvPr id="5" name="Slide Number Placeholder 4">
-            <a:extLst>
-              <a:ext uri="{FF2B5EF4-FFF2-40B4-BE49-F238E27FC236}">
-                <a16:creationId xmlns:a16="http://schemas.microsoft.com/office/drawing/2014/main" id="{2F33372C-6CE0-94BA-CEAA-6E70AC14E331}"/>
-              </a:ext>
-            </a:extLst>
-          </p:cNvPr>
-          <p:cNvSpPr>
-            <a:spLocks noGrp="1"/>
-          </p:cNvSpPr>
-          <p:nvPr>
-            <p:ph type="sldNum" sz="quarter" idx="12"/>
-          </p:nvPr>
-        </p:nvSpPr>
-        <p:spPr/>
-        <p:txBody>
-          <a:bodyPr/>
-          <a:lstStyle/>
-          <a:p>
-            <a:fld id="{3A73CC0E-67D5-43FD-BD59-BE5F44570CB2}" type="slidenum">
-              <a:rPr lang="en-GB" smtClean="0"/>
-              <a:pPr/>
-              <a:t>‹#›</a:t>
-            </a:fld>
-            <a:endParaRPr lang="en-GB"/>
-          </a:p>
-        </p:txBody>
-      </p:sp>
-    </p:spTree>
-    <p:extLst>
-      <p:ext uri="{BB962C8B-B14F-4D97-AF65-F5344CB8AC3E}">
-        <p14:creationId xmlns:p14="http://schemas.microsoft.com/office/powerpoint/2010/main" val="4154055688"/>
-      </p:ext>
-    </p:extLst>
-  </p:cSld>
-  <p:clrMapOvr>
-    <a:masterClrMapping/>
-  </p:clrMapOvr>
-</p:sldLayout>
-</file>
-
-<file path=ppt/slideLayouts/slideLayout19.xml><?xml version="1.0" encoding="utf-8"?>
-<p:sldLayout xmlns:a="http://schemas.openxmlformats.org/drawingml/2006/main" xmlns:r="http://schemas.openxmlformats.org/officeDocument/2006/relationships" xmlns:p="http://schemas.openxmlformats.org/presentationml/2006/main" type="blank" preserve="1">
-  <p:cSld name="Blank">
-    <p:spTree>
-      <p:nvGrpSpPr>
-        <p:cNvPr id="1" name=""/>
-        <p:cNvGrpSpPr/>
-        <p:nvPr/>
-      </p:nvGrpSpPr>
-      <p:grpSpPr>
-        <a:xfrm>
-          <a:off x="0" y="0"/>
-          <a:ext cx="0" cy="0"/>
-          <a:chOff x="0" y="0"/>
-          <a:chExt cx="0" cy="0"/>
-        </a:xfrm>
-      </p:grpSpPr>
-      <p:sp>
-        <p:nvSpPr>
-          <p:cNvPr id="2" name="Date Placeholder 1">
-            <a:extLst>
-              <a:ext uri="{FF2B5EF4-FFF2-40B4-BE49-F238E27FC236}">
-                <a16:creationId xmlns:a16="http://schemas.microsoft.com/office/drawing/2014/main" id="{19E1A100-3ECD-0F08-8FAB-72763E00D570}"/>
-              </a:ext>
-            </a:extLst>
-          </p:cNvPr>
-          <p:cNvSpPr>
-            <a:spLocks noGrp="1"/>
-          </p:cNvSpPr>
-          <p:nvPr>
-            <p:ph type="dt" sz="half" idx="10"/>
-          </p:nvPr>
-        </p:nvSpPr>
-        <p:spPr/>
-        <p:txBody>
-          <a:bodyPr/>
-          <a:lstStyle/>
-          <a:p>
-            <a:fld id="{6F80DDAC-FE11-49DC-9261-11C1E994665B}" type="datetimeFigureOut">
-              <a:rPr lang="en-GB" smtClean="0"/>
-              <a:pPr/>
-              <a:t>29/07/2026</a:t>
-            </a:fld>
-            <a:endParaRPr lang="en-GB"/>
-          </a:p>
-        </p:txBody>
-      </p:sp>
-      <p:sp>
-        <p:nvSpPr>
-          <p:cNvPr id="3" name="Footer Placeholder 2">
-            <a:extLst>
-              <a:ext uri="{FF2B5EF4-FFF2-40B4-BE49-F238E27FC236}">
-                <a16:creationId xmlns:a16="http://schemas.microsoft.com/office/drawing/2014/main" id="{A702BD16-0ED5-38A3-DB97-54E7D2D628E9}"/>
-              </a:ext>
-            </a:extLst>
-          </p:cNvPr>
-          <p:cNvSpPr>
-            <a:spLocks noGrp="1"/>
-          </p:cNvSpPr>
-          <p:nvPr>
-            <p:ph type="ftr" sz="quarter" idx="11"/>
-          </p:nvPr>
-        </p:nvSpPr>
-        <p:spPr/>
-        <p:txBody>
-          <a:bodyPr/>
-          <a:lstStyle/>
-          <a:p>
-            <a:endParaRPr lang="en-US"/>
-          </a:p>
-        </p:txBody>
-      </p:sp>
-      <p:sp>
-        <p:nvSpPr>
-          <p:cNvPr id="4" name="Slide Number Placeholder 3">
-            <a:extLst>
-              <a:ext uri="{FF2B5EF4-FFF2-40B4-BE49-F238E27FC236}">
-                <a16:creationId xmlns:a16="http://schemas.microsoft.com/office/drawing/2014/main" id="{4629CEB7-379E-AD7A-5F8F-72D05B8089FF}"/>
-              </a:ext>
-            </a:extLst>
-          </p:cNvPr>
-          <p:cNvSpPr>
-            <a:spLocks noGrp="1"/>
-          </p:cNvSpPr>
-          <p:nvPr>
-            <p:ph type="sldNum" sz="quarter" idx="12"/>
-          </p:nvPr>
-        </p:nvSpPr>
-        <p:spPr/>
-        <p:txBody>
-          <a:bodyPr/>
-          <a:lstStyle/>
-          <a:p>
-            <a:fld id="{3A73CC0E-67D5-43FD-BD59-BE5F44570CB2}" type="slidenum">
-              <a:rPr lang="en-GB" smtClean="0"/>
-              <a:pPr/>
-              <a:t>‹#›</a:t>
-            </a:fld>
-            <a:endParaRPr lang="en-GB"/>
-          </a:p>
-        </p:txBody>
-      </p:sp>
-    </p:spTree>
-    <p:extLst>
-      <p:ext uri="{BB962C8B-B14F-4D97-AF65-F5344CB8AC3E}">
-        <p14:creationId xmlns:p14="http://schemas.microsoft.com/office/powerpoint/2010/main" val="4056235112"/>
-      </p:ext>
-    </p:extLst>
-  </p:cSld>
-  <p:clrMapOvr>
-    <a:masterClrMapping/>
-  </p:clrMapOvr>
 </p:sldLayout>
 </file>
 
@@ -3390,7 +1751,7 @@
         <p:spPr>
           <a:xfrm>
             <a:off x="0" y="5455664"/>
-            <a:ext cx="9906000" cy="1402336"/>
+            <a:ext cx="12192000" cy="1402336"/>
           </a:xfrm>
           <a:prstGeom prst="rect">
             <a:avLst/>
@@ -3424,7 +1785,7 @@
           <a:p>
             <a:pPr algn="ctr"/>
             <a:r>
-              <a:rPr lang="en-GB">
+              <a:rPr lang="en-GB" sz="2215">
                 <a:ln>
                   <a:noFill/>
                 </a:ln>
@@ -3452,7 +1813,7 @@
         <p:spPr>
           <a:xfrm>
             <a:off x="0" y="0"/>
-            <a:ext cx="9906000" cy="5455664"/>
+            <a:ext cx="12192000" cy="5455664"/>
           </a:xfrm>
           <a:prstGeom prst="rect">
             <a:avLst/>
@@ -3482,7 +1843,7 @@
           <a:lstStyle/>
           <a:p>
             <a:pPr algn="ctr"/>
-            <a:endParaRPr lang="en-GB"/>
+            <a:endParaRPr lang="en-GB" sz="2215"/>
           </a:p>
         </p:txBody>
       </p:sp>
@@ -3517,8 +1878,8 @@
         </p:blipFill>
         <p:spPr>
           <a:xfrm>
-            <a:off x="1618546" y="-1941827"/>
-            <a:ext cx="9050813" cy="10076983"/>
+            <a:off x="1992057" y="-1941827"/>
+            <a:ext cx="11139462" cy="10076983"/>
           </a:xfrm>
           <a:prstGeom prst="rect">
             <a:avLst/>
@@ -3539,8 +1900,8 @@
         </p:nvSpPr>
         <p:spPr>
           <a:xfrm>
-            <a:off x="4303059" y="5833667"/>
-            <a:ext cx="5271247" cy="235962"/>
+            <a:off x="5296074" y="5833668"/>
+            <a:ext cx="6487689" cy="269048"/>
           </a:xfrm>
           <a:prstGeom prst="rect">
             <a:avLst/>
@@ -3555,7 +1916,7 @@
           <a:p>
             <a:pPr algn="r" rtl="0"/>
             <a:r>
-              <a:rPr lang="en-GB" sz="1400" b="1" i="0" u="none" strike="noStrike" kern="1200" baseline="30000">
+              <a:rPr lang="en-GB" sz="1723" b="1" i="0" u="none" strike="noStrike" kern="1200" baseline="30000">
                 <a:solidFill>
                   <a:schemeClr val="tx1"/>
                 </a:solidFill>
@@ -3582,8 +1943,8 @@
         </p:nvSpPr>
         <p:spPr>
           <a:xfrm>
-            <a:off x="5409560" y="6071907"/>
-            <a:ext cx="4164746" cy="235962"/>
+            <a:off x="6657920" y="6071907"/>
+            <a:ext cx="5125841" cy="269048"/>
           </a:xfrm>
           <a:prstGeom prst="rect">
             <a:avLst/>
@@ -3598,7 +1959,7 @@
           <a:p>
             <a:pPr algn="r" rtl="0"/>
             <a:r>
-              <a:rPr lang="en-GB" sz="1400" b="1" i="0" u="none" strike="noStrike" kern="1200" baseline="30000">
+              <a:rPr lang="en-GB" sz="1723" b="1" i="0" u="none" strike="noStrike" kern="1200" baseline="30000">
                 <a:solidFill>
                   <a:schemeClr val="tx1"/>
                 </a:solidFill>
@@ -3625,8 +1986,8 @@
         </p:nvSpPr>
         <p:spPr>
           <a:xfrm>
-            <a:off x="5409560" y="6320477"/>
-            <a:ext cx="4164746" cy="235962"/>
+            <a:off x="6657920" y="6320477"/>
+            <a:ext cx="5125841" cy="269048"/>
           </a:xfrm>
           <a:prstGeom prst="rect">
             <a:avLst/>
@@ -3641,7 +2002,7 @@
           <a:p>
             <a:pPr algn="r" rtl="0"/>
             <a:r>
-              <a:rPr lang="en-GB" sz="1400" b="1" i="0" u="none" strike="noStrike" kern="1200" baseline="30000">
+              <a:rPr lang="en-GB" sz="1723" b="1" i="0" u="none" strike="noStrike" kern="1200" baseline="30000">
                 <a:solidFill>
                   <a:schemeClr val="tx1"/>
                 </a:solidFill>
@@ -3685,8 +2046,8 @@
         </p:blipFill>
         <p:spPr>
           <a:xfrm>
-            <a:off x="426351" y="5833667"/>
-            <a:ext cx="1563813" cy="676589"/>
+            <a:off x="524742" y="5833670"/>
+            <a:ext cx="1924693" cy="676589"/>
           </a:xfrm>
           <a:prstGeom prst="rect">
             <a:avLst/>
@@ -3704,1307 +2065,6 @@
     <a:masterClrMapping/>
   </p:clrMapOvr>
   <p:hf hdr="0" ftr="0" dt="0"/>
-</p:sldLayout>
-</file>
-
-<file path=ppt/slideLayouts/slideLayout20.xml><?xml version="1.0" encoding="utf-8"?>
-<p:sldLayout xmlns:a="http://schemas.openxmlformats.org/drawingml/2006/main" xmlns:r="http://schemas.openxmlformats.org/officeDocument/2006/relationships" xmlns:p="http://schemas.openxmlformats.org/presentationml/2006/main" type="objTx" preserve="1">
-  <p:cSld name="Content with Caption">
-    <p:spTree>
-      <p:nvGrpSpPr>
-        <p:cNvPr id="1" name=""/>
-        <p:cNvGrpSpPr/>
-        <p:nvPr/>
-      </p:nvGrpSpPr>
-      <p:grpSpPr>
-        <a:xfrm>
-          <a:off x="0" y="0"/>
-          <a:ext cx="0" cy="0"/>
-          <a:chOff x="0" y="0"/>
-          <a:chExt cx="0" cy="0"/>
-        </a:xfrm>
-      </p:grpSpPr>
-      <p:sp>
-        <p:nvSpPr>
-          <p:cNvPr id="2" name="Title 1">
-            <a:extLst>
-              <a:ext uri="{FF2B5EF4-FFF2-40B4-BE49-F238E27FC236}">
-                <a16:creationId xmlns:a16="http://schemas.microsoft.com/office/drawing/2014/main" id="{4A7F6907-CF1C-35E1-F97E-1C5D6F257E40}"/>
-              </a:ext>
-            </a:extLst>
-          </p:cNvPr>
-          <p:cNvSpPr>
-            <a:spLocks noGrp="1"/>
-          </p:cNvSpPr>
-          <p:nvPr>
-            <p:ph type="title"/>
-          </p:nvPr>
-        </p:nvSpPr>
-        <p:spPr>
-          <a:xfrm>
-            <a:off x="682328" y="457200"/>
-            <a:ext cx="3194943" cy="1600200"/>
-          </a:xfrm>
-        </p:spPr>
-        <p:txBody>
-          <a:bodyPr anchor="b"/>
-          <a:lstStyle>
-            <a:lvl1pPr>
-              <a:defRPr sz="2600"/>
-            </a:lvl1pPr>
-          </a:lstStyle>
-          <a:p>
-            <a:r>
-              <a:rPr lang="en-US"/>
-              <a:t>Click to edit Master title style</a:t>
-            </a:r>
-          </a:p>
-        </p:txBody>
-      </p:sp>
-      <p:sp>
-        <p:nvSpPr>
-          <p:cNvPr id="3" name="Content Placeholder 2">
-            <a:extLst>
-              <a:ext uri="{FF2B5EF4-FFF2-40B4-BE49-F238E27FC236}">
-                <a16:creationId xmlns:a16="http://schemas.microsoft.com/office/drawing/2014/main" id="{B556CC27-EBD3-4B45-2A3F-4B0A79F6479C}"/>
-              </a:ext>
-            </a:extLst>
-          </p:cNvPr>
-          <p:cNvSpPr>
-            <a:spLocks noGrp="1"/>
-          </p:cNvSpPr>
-          <p:nvPr>
-            <p:ph idx="1"/>
-          </p:nvPr>
-        </p:nvSpPr>
-        <p:spPr>
-          <a:xfrm>
-            <a:off x="4211340" y="987426"/>
-            <a:ext cx="5014913" cy="4873625"/>
-          </a:xfrm>
-        </p:spPr>
-        <p:txBody>
-          <a:bodyPr/>
-          <a:lstStyle>
-            <a:lvl1pPr>
-              <a:defRPr sz="2600"/>
-            </a:lvl1pPr>
-            <a:lvl2pPr>
-              <a:defRPr sz="2275"/>
-            </a:lvl2pPr>
-            <a:lvl3pPr>
-              <a:defRPr sz="1950"/>
-            </a:lvl3pPr>
-            <a:lvl4pPr>
-              <a:defRPr sz="1625"/>
-            </a:lvl4pPr>
-            <a:lvl5pPr>
-              <a:defRPr sz="1625"/>
-            </a:lvl5pPr>
-            <a:lvl6pPr>
-              <a:defRPr sz="1625"/>
-            </a:lvl6pPr>
-            <a:lvl7pPr>
-              <a:defRPr sz="1625"/>
-            </a:lvl7pPr>
-            <a:lvl8pPr>
-              <a:defRPr sz="1625"/>
-            </a:lvl8pPr>
-            <a:lvl9pPr>
-              <a:defRPr sz="1625"/>
-            </a:lvl9pPr>
-          </a:lstStyle>
-          <a:p>
-            <a:pPr lvl="0"/>
-            <a:r>
-              <a:rPr lang="en-US"/>
-              <a:t>Click to edit Master text styles</a:t>
-            </a:r>
-          </a:p>
-          <a:p>
-            <a:pPr lvl="1"/>
-            <a:r>
-              <a:rPr lang="en-US"/>
-              <a:t>Second level</a:t>
-            </a:r>
-          </a:p>
-          <a:p>
-            <a:pPr lvl="2"/>
-            <a:r>
-              <a:rPr lang="en-US"/>
-              <a:t>Third level</a:t>
-            </a:r>
-          </a:p>
-          <a:p>
-            <a:pPr lvl="3"/>
-            <a:r>
-              <a:rPr lang="en-US"/>
-              <a:t>Fourth level</a:t>
-            </a:r>
-          </a:p>
-          <a:p>
-            <a:pPr lvl="4"/>
-            <a:r>
-              <a:rPr lang="en-US"/>
-              <a:t>Fifth level</a:t>
-            </a:r>
-          </a:p>
-        </p:txBody>
-      </p:sp>
-      <p:sp>
-        <p:nvSpPr>
-          <p:cNvPr id="4" name="Text Placeholder 3">
-            <a:extLst>
-              <a:ext uri="{FF2B5EF4-FFF2-40B4-BE49-F238E27FC236}">
-                <a16:creationId xmlns:a16="http://schemas.microsoft.com/office/drawing/2014/main" id="{7E3E76F3-BCF6-D2FE-2681-301A92CFAB58}"/>
-              </a:ext>
-            </a:extLst>
-          </p:cNvPr>
-          <p:cNvSpPr>
-            <a:spLocks noGrp="1"/>
-          </p:cNvSpPr>
-          <p:nvPr>
-            <p:ph type="body" sz="half" idx="2"/>
-          </p:nvPr>
-        </p:nvSpPr>
-        <p:spPr>
-          <a:xfrm>
-            <a:off x="682328" y="2057400"/>
-            <a:ext cx="3194943" cy="3811588"/>
-          </a:xfrm>
-        </p:spPr>
-        <p:txBody>
-          <a:bodyPr/>
-          <a:lstStyle>
-            <a:lvl1pPr marL="0" indent="0">
-              <a:buNone/>
-              <a:defRPr sz="1300"/>
-            </a:lvl1pPr>
-            <a:lvl2pPr marL="371475" indent="0">
-              <a:buNone/>
-              <a:defRPr sz="1138"/>
-            </a:lvl2pPr>
-            <a:lvl3pPr marL="742950" indent="0">
-              <a:buNone/>
-              <a:defRPr sz="975"/>
-            </a:lvl3pPr>
-            <a:lvl4pPr marL="1114425" indent="0">
-              <a:buNone/>
-              <a:defRPr sz="813"/>
-            </a:lvl4pPr>
-            <a:lvl5pPr marL="1485900" indent="0">
-              <a:buNone/>
-              <a:defRPr sz="813"/>
-            </a:lvl5pPr>
-            <a:lvl6pPr marL="1857375" indent="0">
-              <a:buNone/>
-              <a:defRPr sz="813"/>
-            </a:lvl6pPr>
-            <a:lvl7pPr marL="2228850" indent="0">
-              <a:buNone/>
-              <a:defRPr sz="813"/>
-            </a:lvl7pPr>
-            <a:lvl8pPr marL="2600325" indent="0">
-              <a:buNone/>
-              <a:defRPr sz="813"/>
-            </a:lvl8pPr>
-            <a:lvl9pPr marL="2971800" indent="0">
-              <a:buNone/>
-              <a:defRPr sz="813"/>
-            </a:lvl9pPr>
-          </a:lstStyle>
-          <a:p>
-            <a:pPr lvl="0"/>
-            <a:r>
-              <a:rPr lang="en-US"/>
-              <a:t>Click to edit Master text styles</a:t>
-            </a:r>
-          </a:p>
-        </p:txBody>
-      </p:sp>
-      <p:sp>
-        <p:nvSpPr>
-          <p:cNvPr id="5" name="Date Placeholder 4">
-            <a:extLst>
-              <a:ext uri="{FF2B5EF4-FFF2-40B4-BE49-F238E27FC236}">
-                <a16:creationId xmlns:a16="http://schemas.microsoft.com/office/drawing/2014/main" id="{F9B94648-A232-E19E-7F27-DF25D939E498}"/>
-              </a:ext>
-            </a:extLst>
-          </p:cNvPr>
-          <p:cNvSpPr>
-            <a:spLocks noGrp="1"/>
-          </p:cNvSpPr>
-          <p:nvPr>
-            <p:ph type="dt" sz="half" idx="10"/>
-          </p:nvPr>
-        </p:nvSpPr>
-        <p:spPr/>
-        <p:txBody>
-          <a:bodyPr/>
-          <a:lstStyle/>
-          <a:p>
-            <a:fld id="{6F80DDAC-FE11-49DC-9261-11C1E994665B}" type="datetimeFigureOut">
-              <a:rPr lang="en-GB" smtClean="0"/>
-              <a:pPr/>
-              <a:t>29/07/2026</a:t>
-            </a:fld>
-            <a:endParaRPr lang="en-GB"/>
-          </a:p>
-        </p:txBody>
-      </p:sp>
-      <p:sp>
-        <p:nvSpPr>
-          <p:cNvPr id="6" name="Footer Placeholder 5">
-            <a:extLst>
-              <a:ext uri="{FF2B5EF4-FFF2-40B4-BE49-F238E27FC236}">
-                <a16:creationId xmlns:a16="http://schemas.microsoft.com/office/drawing/2014/main" id="{DC7139CB-4739-DC6B-B8D1-5EB4874B75FF}"/>
-              </a:ext>
-            </a:extLst>
-          </p:cNvPr>
-          <p:cNvSpPr>
-            <a:spLocks noGrp="1"/>
-          </p:cNvSpPr>
-          <p:nvPr>
-            <p:ph type="ftr" sz="quarter" idx="11"/>
-          </p:nvPr>
-        </p:nvSpPr>
-        <p:spPr/>
-        <p:txBody>
-          <a:bodyPr/>
-          <a:lstStyle/>
-          <a:p>
-            <a:endParaRPr lang="en-US"/>
-          </a:p>
-        </p:txBody>
-      </p:sp>
-      <p:sp>
-        <p:nvSpPr>
-          <p:cNvPr id="7" name="Slide Number Placeholder 6">
-            <a:extLst>
-              <a:ext uri="{FF2B5EF4-FFF2-40B4-BE49-F238E27FC236}">
-                <a16:creationId xmlns:a16="http://schemas.microsoft.com/office/drawing/2014/main" id="{7FDC1281-25F7-F770-6D28-94F37807E1F9}"/>
-              </a:ext>
-            </a:extLst>
-          </p:cNvPr>
-          <p:cNvSpPr>
-            <a:spLocks noGrp="1"/>
-          </p:cNvSpPr>
-          <p:nvPr>
-            <p:ph type="sldNum" sz="quarter" idx="12"/>
-          </p:nvPr>
-        </p:nvSpPr>
-        <p:spPr/>
-        <p:txBody>
-          <a:bodyPr/>
-          <a:lstStyle/>
-          <a:p>
-            <a:fld id="{3A73CC0E-67D5-43FD-BD59-BE5F44570CB2}" type="slidenum">
-              <a:rPr lang="en-GB" smtClean="0"/>
-              <a:pPr/>
-              <a:t>‹#›</a:t>
-            </a:fld>
-            <a:endParaRPr lang="en-GB"/>
-          </a:p>
-        </p:txBody>
-      </p:sp>
-    </p:spTree>
-    <p:extLst>
-      <p:ext uri="{BB962C8B-B14F-4D97-AF65-F5344CB8AC3E}">
-        <p14:creationId xmlns:p14="http://schemas.microsoft.com/office/powerpoint/2010/main" val="4135746447"/>
-      </p:ext>
-    </p:extLst>
-  </p:cSld>
-  <p:clrMapOvr>
-    <a:masterClrMapping/>
-  </p:clrMapOvr>
-</p:sldLayout>
-</file>
-
-<file path=ppt/slideLayouts/slideLayout21.xml><?xml version="1.0" encoding="utf-8"?>
-<p:sldLayout xmlns:a="http://schemas.openxmlformats.org/drawingml/2006/main" xmlns:r="http://schemas.openxmlformats.org/officeDocument/2006/relationships" xmlns:p="http://schemas.openxmlformats.org/presentationml/2006/main" type="picTx" preserve="1">
-  <p:cSld name="Picture with Caption">
-    <p:spTree>
-      <p:nvGrpSpPr>
-        <p:cNvPr id="1" name=""/>
-        <p:cNvGrpSpPr/>
-        <p:nvPr/>
-      </p:nvGrpSpPr>
-      <p:grpSpPr>
-        <a:xfrm>
-          <a:off x="0" y="0"/>
-          <a:ext cx="0" cy="0"/>
-          <a:chOff x="0" y="0"/>
-          <a:chExt cx="0" cy="0"/>
-        </a:xfrm>
-      </p:grpSpPr>
-      <p:sp>
-        <p:nvSpPr>
-          <p:cNvPr id="2" name="Title 1">
-            <a:extLst>
-              <a:ext uri="{FF2B5EF4-FFF2-40B4-BE49-F238E27FC236}">
-                <a16:creationId xmlns:a16="http://schemas.microsoft.com/office/drawing/2014/main" id="{68FCF7B5-78C0-68DA-D0CA-E721D6A1895D}"/>
-              </a:ext>
-            </a:extLst>
-          </p:cNvPr>
-          <p:cNvSpPr>
-            <a:spLocks noGrp="1"/>
-          </p:cNvSpPr>
-          <p:nvPr>
-            <p:ph type="title"/>
-          </p:nvPr>
-        </p:nvSpPr>
-        <p:spPr>
-          <a:xfrm>
-            <a:off x="682328" y="457200"/>
-            <a:ext cx="3194943" cy="1600200"/>
-          </a:xfrm>
-        </p:spPr>
-        <p:txBody>
-          <a:bodyPr anchor="b"/>
-          <a:lstStyle>
-            <a:lvl1pPr>
-              <a:defRPr sz="2600"/>
-            </a:lvl1pPr>
-          </a:lstStyle>
-          <a:p>
-            <a:r>
-              <a:rPr lang="en-US"/>
-              <a:t>Click to edit Master title style</a:t>
-            </a:r>
-          </a:p>
-        </p:txBody>
-      </p:sp>
-      <p:sp>
-        <p:nvSpPr>
-          <p:cNvPr id="3" name="Picture Placeholder 2">
-            <a:extLst>
-              <a:ext uri="{FF2B5EF4-FFF2-40B4-BE49-F238E27FC236}">
-                <a16:creationId xmlns:a16="http://schemas.microsoft.com/office/drawing/2014/main" id="{ED58C724-76CE-199C-2F48-12B35E1808C7}"/>
-              </a:ext>
-            </a:extLst>
-          </p:cNvPr>
-          <p:cNvSpPr>
-            <a:spLocks noGrp="1"/>
-          </p:cNvSpPr>
-          <p:nvPr>
-            <p:ph type="pic" idx="1"/>
-          </p:nvPr>
-        </p:nvSpPr>
-        <p:spPr>
-          <a:xfrm>
-            <a:off x="4211340" y="987426"/>
-            <a:ext cx="5014913" cy="4873625"/>
-          </a:xfrm>
-        </p:spPr>
-        <p:txBody>
-          <a:bodyPr/>
-          <a:lstStyle>
-            <a:lvl1pPr marL="0" indent="0">
-              <a:buNone/>
-              <a:defRPr sz="2600"/>
-            </a:lvl1pPr>
-            <a:lvl2pPr marL="371475" indent="0">
-              <a:buNone/>
-              <a:defRPr sz="2275"/>
-            </a:lvl2pPr>
-            <a:lvl3pPr marL="742950" indent="0">
-              <a:buNone/>
-              <a:defRPr sz="1950"/>
-            </a:lvl3pPr>
-            <a:lvl4pPr marL="1114425" indent="0">
-              <a:buNone/>
-              <a:defRPr sz="1625"/>
-            </a:lvl4pPr>
-            <a:lvl5pPr marL="1485900" indent="0">
-              <a:buNone/>
-              <a:defRPr sz="1625"/>
-            </a:lvl5pPr>
-            <a:lvl6pPr marL="1857375" indent="0">
-              <a:buNone/>
-              <a:defRPr sz="1625"/>
-            </a:lvl6pPr>
-            <a:lvl7pPr marL="2228850" indent="0">
-              <a:buNone/>
-              <a:defRPr sz="1625"/>
-            </a:lvl7pPr>
-            <a:lvl8pPr marL="2600325" indent="0">
-              <a:buNone/>
-              <a:defRPr sz="1625"/>
-            </a:lvl8pPr>
-            <a:lvl9pPr marL="2971800" indent="0">
-              <a:buNone/>
-              <a:defRPr sz="1625"/>
-            </a:lvl9pPr>
-          </a:lstStyle>
-          <a:p>
-            <a:endParaRPr lang="en-US"/>
-          </a:p>
-        </p:txBody>
-      </p:sp>
-      <p:sp>
-        <p:nvSpPr>
-          <p:cNvPr id="4" name="Text Placeholder 3">
-            <a:extLst>
-              <a:ext uri="{FF2B5EF4-FFF2-40B4-BE49-F238E27FC236}">
-                <a16:creationId xmlns:a16="http://schemas.microsoft.com/office/drawing/2014/main" id="{0EBC6708-4A56-2AD6-1973-17D4E4BBB660}"/>
-              </a:ext>
-            </a:extLst>
-          </p:cNvPr>
-          <p:cNvSpPr>
-            <a:spLocks noGrp="1"/>
-          </p:cNvSpPr>
-          <p:nvPr>
-            <p:ph type="body" sz="half" idx="2"/>
-          </p:nvPr>
-        </p:nvSpPr>
-        <p:spPr>
-          <a:xfrm>
-            <a:off x="682328" y="2057400"/>
-            <a:ext cx="3194943" cy="3811588"/>
-          </a:xfrm>
-        </p:spPr>
-        <p:txBody>
-          <a:bodyPr/>
-          <a:lstStyle>
-            <a:lvl1pPr marL="0" indent="0">
-              <a:buNone/>
-              <a:defRPr sz="1300"/>
-            </a:lvl1pPr>
-            <a:lvl2pPr marL="371475" indent="0">
-              <a:buNone/>
-              <a:defRPr sz="1138"/>
-            </a:lvl2pPr>
-            <a:lvl3pPr marL="742950" indent="0">
-              <a:buNone/>
-              <a:defRPr sz="975"/>
-            </a:lvl3pPr>
-            <a:lvl4pPr marL="1114425" indent="0">
-              <a:buNone/>
-              <a:defRPr sz="813"/>
-            </a:lvl4pPr>
-            <a:lvl5pPr marL="1485900" indent="0">
-              <a:buNone/>
-              <a:defRPr sz="813"/>
-            </a:lvl5pPr>
-            <a:lvl6pPr marL="1857375" indent="0">
-              <a:buNone/>
-              <a:defRPr sz="813"/>
-            </a:lvl6pPr>
-            <a:lvl7pPr marL="2228850" indent="0">
-              <a:buNone/>
-              <a:defRPr sz="813"/>
-            </a:lvl7pPr>
-            <a:lvl8pPr marL="2600325" indent="0">
-              <a:buNone/>
-              <a:defRPr sz="813"/>
-            </a:lvl8pPr>
-            <a:lvl9pPr marL="2971800" indent="0">
-              <a:buNone/>
-              <a:defRPr sz="813"/>
-            </a:lvl9pPr>
-          </a:lstStyle>
-          <a:p>
-            <a:pPr lvl="0"/>
-            <a:r>
-              <a:rPr lang="en-US"/>
-              <a:t>Click to edit Master text styles</a:t>
-            </a:r>
-          </a:p>
-        </p:txBody>
-      </p:sp>
-      <p:sp>
-        <p:nvSpPr>
-          <p:cNvPr id="5" name="Date Placeholder 4">
-            <a:extLst>
-              <a:ext uri="{FF2B5EF4-FFF2-40B4-BE49-F238E27FC236}">
-                <a16:creationId xmlns:a16="http://schemas.microsoft.com/office/drawing/2014/main" id="{E339DD7A-904D-9541-50D0-324097228DED}"/>
-              </a:ext>
-            </a:extLst>
-          </p:cNvPr>
-          <p:cNvSpPr>
-            <a:spLocks noGrp="1"/>
-          </p:cNvSpPr>
-          <p:nvPr>
-            <p:ph type="dt" sz="half" idx="10"/>
-          </p:nvPr>
-        </p:nvSpPr>
-        <p:spPr/>
-        <p:txBody>
-          <a:bodyPr/>
-          <a:lstStyle/>
-          <a:p>
-            <a:fld id="{6F80DDAC-FE11-49DC-9261-11C1E994665B}" type="datetimeFigureOut">
-              <a:rPr lang="en-GB" smtClean="0"/>
-              <a:pPr/>
-              <a:t>29/07/2026</a:t>
-            </a:fld>
-            <a:endParaRPr lang="en-GB"/>
-          </a:p>
-        </p:txBody>
-      </p:sp>
-      <p:sp>
-        <p:nvSpPr>
-          <p:cNvPr id="6" name="Footer Placeholder 5">
-            <a:extLst>
-              <a:ext uri="{FF2B5EF4-FFF2-40B4-BE49-F238E27FC236}">
-                <a16:creationId xmlns:a16="http://schemas.microsoft.com/office/drawing/2014/main" id="{AEC1D43E-D8EA-6631-57D2-27CC02B595F4}"/>
-              </a:ext>
-            </a:extLst>
-          </p:cNvPr>
-          <p:cNvSpPr>
-            <a:spLocks noGrp="1"/>
-          </p:cNvSpPr>
-          <p:nvPr>
-            <p:ph type="ftr" sz="quarter" idx="11"/>
-          </p:nvPr>
-        </p:nvSpPr>
-        <p:spPr/>
-        <p:txBody>
-          <a:bodyPr/>
-          <a:lstStyle/>
-          <a:p>
-            <a:endParaRPr lang="en-US"/>
-          </a:p>
-        </p:txBody>
-      </p:sp>
-      <p:sp>
-        <p:nvSpPr>
-          <p:cNvPr id="7" name="Slide Number Placeholder 6">
-            <a:extLst>
-              <a:ext uri="{FF2B5EF4-FFF2-40B4-BE49-F238E27FC236}">
-                <a16:creationId xmlns:a16="http://schemas.microsoft.com/office/drawing/2014/main" id="{EDDD0AAE-91E6-6A71-0994-F3398C7EE377}"/>
-              </a:ext>
-            </a:extLst>
-          </p:cNvPr>
-          <p:cNvSpPr>
-            <a:spLocks noGrp="1"/>
-          </p:cNvSpPr>
-          <p:nvPr>
-            <p:ph type="sldNum" sz="quarter" idx="12"/>
-          </p:nvPr>
-        </p:nvSpPr>
-        <p:spPr/>
-        <p:txBody>
-          <a:bodyPr/>
-          <a:lstStyle/>
-          <a:p>
-            <a:fld id="{3A73CC0E-67D5-43FD-BD59-BE5F44570CB2}" type="slidenum">
-              <a:rPr lang="en-GB" smtClean="0"/>
-              <a:pPr/>
-              <a:t>‹#›</a:t>
-            </a:fld>
-            <a:endParaRPr lang="en-GB"/>
-          </a:p>
-        </p:txBody>
-      </p:sp>
-    </p:spTree>
-    <p:extLst>
-      <p:ext uri="{BB962C8B-B14F-4D97-AF65-F5344CB8AC3E}">
-        <p14:creationId xmlns:p14="http://schemas.microsoft.com/office/powerpoint/2010/main" val="2863476953"/>
-      </p:ext>
-    </p:extLst>
-  </p:cSld>
-  <p:clrMapOvr>
-    <a:masterClrMapping/>
-  </p:clrMapOvr>
-</p:sldLayout>
-</file>
-
-<file path=ppt/slideLayouts/slideLayout22.xml><?xml version="1.0" encoding="utf-8"?>
-<p:sldLayout xmlns:a="http://schemas.openxmlformats.org/drawingml/2006/main" xmlns:r="http://schemas.openxmlformats.org/officeDocument/2006/relationships" xmlns:p="http://schemas.openxmlformats.org/presentationml/2006/main" type="vertTx" preserve="1">
-  <p:cSld name="Title and Vertical Text">
-    <p:spTree>
-      <p:nvGrpSpPr>
-        <p:cNvPr id="1" name=""/>
-        <p:cNvGrpSpPr/>
-        <p:nvPr/>
-      </p:nvGrpSpPr>
-      <p:grpSpPr>
-        <a:xfrm>
-          <a:off x="0" y="0"/>
-          <a:ext cx="0" cy="0"/>
-          <a:chOff x="0" y="0"/>
-          <a:chExt cx="0" cy="0"/>
-        </a:xfrm>
-      </p:grpSpPr>
-      <p:sp>
-        <p:nvSpPr>
-          <p:cNvPr id="2" name="Title 1">
-            <a:extLst>
-              <a:ext uri="{FF2B5EF4-FFF2-40B4-BE49-F238E27FC236}">
-                <a16:creationId xmlns:a16="http://schemas.microsoft.com/office/drawing/2014/main" id="{56F05169-F474-260D-B705-70A46DF4C53E}"/>
-              </a:ext>
-            </a:extLst>
-          </p:cNvPr>
-          <p:cNvSpPr>
-            <a:spLocks noGrp="1"/>
-          </p:cNvSpPr>
-          <p:nvPr>
-            <p:ph type="title"/>
-          </p:nvPr>
-        </p:nvSpPr>
-        <p:spPr/>
-        <p:txBody>
-          <a:bodyPr/>
-          <a:lstStyle/>
-          <a:p>
-            <a:r>
-              <a:rPr lang="en-US"/>
-              <a:t>Click to edit Master title style</a:t>
-            </a:r>
-          </a:p>
-        </p:txBody>
-      </p:sp>
-      <p:sp>
-        <p:nvSpPr>
-          <p:cNvPr id="3" name="Vertical Text Placeholder 2">
-            <a:extLst>
-              <a:ext uri="{FF2B5EF4-FFF2-40B4-BE49-F238E27FC236}">
-                <a16:creationId xmlns:a16="http://schemas.microsoft.com/office/drawing/2014/main" id="{1CDEF85A-B4ED-FA31-8264-4CE6C242B938}"/>
-              </a:ext>
-            </a:extLst>
-          </p:cNvPr>
-          <p:cNvSpPr>
-            <a:spLocks noGrp="1"/>
-          </p:cNvSpPr>
-          <p:nvPr>
-            <p:ph type="body" orient="vert" idx="1"/>
-          </p:nvPr>
-        </p:nvSpPr>
-        <p:spPr/>
-        <p:txBody>
-          <a:bodyPr vert="eaVert"/>
-          <a:lstStyle/>
-          <a:p>
-            <a:pPr lvl="0"/>
-            <a:r>
-              <a:rPr lang="en-US"/>
-              <a:t>Click to edit Master text styles</a:t>
-            </a:r>
-          </a:p>
-          <a:p>
-            <a:pPr lvl="1"/>
-            <a:r>
-              <a:rPr lang="en-US"/>
-              <a:t>Second level</a:t>
-            </a:r>
-          </a:p>
-          <a:p>
-            <a:pPr lvl="2"/>
-            <a:r>
-              <a:rPr lang="en-US"/>
-              <a:t>Third level</a:t>
-            </a:r>
-          </a:p>
-          <a:p>
-            <a:pPr lvl="3"/>
-            <a:r>
-              <a:rPr lang="en-US"/>
-              <a:t>Fourth level</a:t>
-            </a:r>
-          </a:p>
-          <a:p>
-            <a:pPr lvl="4"/>
-            <a:r>
-              <a:rPr lang="en-US"/>
-              <a:t>Fifth level</a:t>
-            </a:r>
-          </a:p>
-        </p:txBody>
-      </p:sp>
-      <p:sp>
-        <p:nvSpPr>
-          <p:cNvPr id="4" name="Date Placeholder 3">
-            <a:extLst>
-              <a:ext uri="{FF2B5EF4-FFF2-40B4-BE49-F238E27FC236}">
-                <a16:creationId xmlns:a16="http://schemas.microsoft.com/office/drawing/2014/main" id="{AAF0C1F1-B01A-7A14-5133-211694F27170}"/>
-              </a:ext>
-            </a:extLst>
-          </p:cNvPr>
-          <p:cNvSpPr>
-            <a:spLocks noGrp="1"/>
-          </p:cNvSpPr>
-          <p:nvPr>
-            <p:ph type="dt" sz="half" idx="10"/>
-          </p:nvPr>
-        </p:nvSpPr>
-        <p:spPr/>
-        <p:txBody>
-          <a:bodyPr/>
-          <a:lstStyle/>
-          <a:p>
-            <a:fld id="{6F80DDAC-FE11-49DC-9261-11C1E994665B}" type="datetimeFigureOut">
-              <a:rPr lang="en-GB" smtClean="0"/>
-              <a:pPr/>
-              <a:t>29/07/2026</a:t>
-            </a:fld>
-            <a:endParaRPr lang="en-GB"/>
-          </a:p>
-        </p:txBody>
-      </p:sp>
-      <p:sp>
-        <p:nvSpPr>
-          <p:cNvPr id="5" name="Footer Placeholder 4">
-            <a:extLst>
-              <a:ext uri="{FF2B5EF4-FFF2-40B4-BE49-F238E27FC236}">
-                <a16:creationId xmlns:a16="http://schemas.microsoft.com/office/drawing/2014/main" id="{C889AB10-2B24-46A7-518C-CD230CDCC37C}"/>
-              </a:ext>
-            </a:extLst>
-          </p:cNvPr>
-          <p:cNvSpPr>
-            <a:spLocks noGrp="1"/>
-          </p:cNvSpPr>
-          <p:nvPr>
-            <p:ph type="ftr" sz="quarter" idx="11"/>
-          </p:nvPr>
-        </p:nvSpPr>
-        <p:spPr/>
-        <p:txBody>
-          <a:bodyPr/>
-          <a:lstStyle/>
-          <a:p>
-            <a:endParaRPr lang="en-US"/>
-          </a:p>
-        </p:txBody>
-      </p:sp>
-      <p:sp>
-        <p:nvSpPr>
-          <p:cNvPr id="6" name="Slide Number Placeholder 5">
-            <a:extLst>
-              <a:ext uri="{FF2B5EF4-FFF2-40B4-BE49-F238E27FC236}">
-                <a16:creationId xmlns:a16="http://schemas.microsoft.com/office/drawing/2014/main" id="{050D1DBB-D9C9-9C89-2BC3-598094A06770}"/>
-              </a:ext>
-            </a:extLst>
-          </p:cNvPr>
-          <p:cNvSpPr>
-            <a:spLocks noGrp="1"/>
-          </p:cNvSpPr>
-          <p:nvPr>
-            <p:ph type="sldNum" sz="quarter" idx="12"/>
-          </p:nvPr>
-        </p:nvSpPr>
-        <p:spPr/>
-        <p:txBody>
-          <a:bodyPr/>
-          <a:lstStyle/>
-          <a:p>
-            <a:fld id="{3A73CC0E-67D5-43FD-BD59-BE5F44570CB2}" type="slidenum">
-              <a:rPr lang="en-GB" smtClean="0"/>
-              <a:pPr/>
-              <a:t>‹#›</a:t>
-            </a:fld>
-            <a:endParaRPr lang="en-GB"/>
-          </a:p>
-        </p:txBody>
-      </p:sp>
-    </p:spTree>
-    <p:extLst>
-      <p:ext uri="{BB962C8B-B14F-4D97-AF65-F5344CB8AC3E}">
-        <p14:creationId xmlns:p14="http://schemas.microsoft.com/office/powerpoint/2010/main" val="137758170"/>
-      </p:ext>
-    </p:extLst>
-  </p:cSld>
-  <p:clrMapOvr>
-    <a:masterClrMapping/>
-  </p:clrMapOvr>
-</p:sldLayout>
-</file>
-
-<file path=ppt/slideLayouts/slideLayout23.xml><?xml version="1.0" encoding="utf-8"?>
-<p:sldLayout xmlns:a="http://schemas.openxmlformats.org/drawingml/2006/main" xmlns:r="http://schemas.openxmlformats.org/officeDocument/2006/relationships" xmlns:p="http://schemas.openxmlformats.org/presentationml/2006/main" type="vertTitleAndTx" preserve="1">
-  <p:cSld name="Vertical Title and Text">
-    <p:spTree>
-      <p:nvGrpSpPr>
-        <p:cNvPr id="1" name=""/>
-        <p:cNvGrpSpPr/>
-        <p:nvPr/>
-      </p:nvGrpSpPr>
-      <p:grpSpPr>
-        <a:xfrm>
-          <a:off x="0" y="0"/>
-          <a:ext cx="0" cy="0"/>
-          <a:chOff x="0" y="0"/>
-          <a:chExt cx="0" cy="0"/>
-        </a:xfrm>
-      </p:grpSpPr>
-      <p:sp>
-        <p:nvSpPr>
-          <p:cNvPr id="2" name="Vertical Title 1">
-            <a:extLst>
-              <a:ext uri="{FF2B5EF4-FFF2-40B4-BE49-F238E27FC236}">
-                <a16:creationId xmlns:a16="http://schemas.microsoft.com/office/drawing/2014/main" id="{0379E52E-0060-6B07-F383-113847D2F715}"/>
-              </a:ext>
-            </a:extLst>
-          </p:cNvPr>
-          <p:cNvSpPr>
-            <a:spLocks noGrp="1"/>
-          </p:cNvSpPr>
-          <p:nvPr>
-            <p:ph type="title" orient="vert"/>
-          </p:nvPr>
-        </p:nvSpPr>
-        <p:spPr>
-          <a:xfrm>
-            <a:off x="7088981" y="365125"/>
-            <a:ext cx="2135981" cy="5811838"/>
-          </a:xfrm>
-        </p:spPr>
-        <p:txBody>
-          <a:bodyPr vert="eaVert"/>
-          <a:lstStyle/>
-          <a:p>
-            <a:r>
-              <a:rPr lang="en-US"/>
-              <a:t>Click to edit Master title style</a:t>
-            </a:r>
-          </a:p>
-        </p:txBody>
-      </p:sp>
-      <p:sp>
-        <p:nvSpPr>
-          <p:cNvPr id="3" name="Vertical Text Placeholder 2">
-            <a:extLst>
-              <a:ext uri="{FF2B5EF4-FFF2-40B4-BE49-F238E27FC236}">
-                <a16:creationId xmlns:a16="http://schemas.microsoft.com/office/drawing/2014/main" id="{6D929278-A0F1-64D3-5304-A0606E4AFA40}"/>
-              </a:ext>
-            </a:extLst>
-          </p:cNvPr>
-          <p:cNvSpPr>
-            <a:spLocks noGrp="1"/>
-          </p:cNvSpPr>
-          <p:nvPr>
-            <p:ph type="body" orient="vert" idx="1"/>
-          </p:nvPr>
-        </p:nvSpPr>
-        <p:spPr>
-          <a:xfrm>
-            <a:off x="681037" y="365125"/>
-            <a:ext cx="6284119" cy="5811838"/>
-          </a:xfrm>
-        </p:spPr>
-        <p:txBody>
-          <a:bodyPr vert="eaVert"/>
-          <a:lstStyle/>
-          <a:p>
-            <a:pPr lvl="0"/>
-            <a:r>
-              <a:rPr lang="en-US"/>
-              <a:t>Click to edit Master text styles</a:t>
-            </a:r>
-          </a:p>
-          <a:p>
-            <a:pPr lvl="1"/>
-            <a:r>
-              <a:rPr lang="en-US"/>
-              <a:t>Second level</a:t>
-            </a:r>
-          </a:p>
-          <a:p>
-            <a:pPr lvl="2"/>
-            <a:r>
-              <a:rPr lang="en-US"/>
-              <a:t>Third level</a:t>
-            </a:r>
-          </a:p>
-          <a:p>
-            <a:pPr lvl="3"/>
-            <a:r>
-              <a:rPr lang="en-US"/>
-              <a:t>Fourth level</a:t>
-            </a:r>
-          </a:p>
-          <a:p>
-            <a:pPr lvl="4"/>
-            <a:r>
-              <a:rPr lang="en-US"/>
-              <a:t>Fifth level</a:t>
-            </a:r>
-          </a:p>
-        </p:txBody>
-      </p:sp>
-      <p:sp>
-        <p:nvSpPr>
-          <p:cNvPr id="4" name="Date Placeholder 3">
-            <a:extLst>
-              <a:ext uri="{FF2B5EF4-FFF2-40B4-BE49-F238E27FC236}">
-                <a16:creationId xmlns:a16="http://schemas.microsoft.com/office/drawing/2014/main" id="{4BBCF91E-A3F1-0403-311B-0B302558CFD3}"/>
-              </a:ext>
-            </a:extLst>
-          </p:cNvPr>
-          <p:cNvSpPr>
-            <a:spLocks noGrp="1"/>
-          </p:cNvSpPr>
-          <p:nvPr>
-            <p:ph type="dt" sz="half" idx="10"/>
-          </p:nvPr>
-        </p:nvSpPr>
-        <p:spPr/>
-        <p:txBody>
-          <a:bodyPr/>
-          <a:lstStyle/>
-          <a:p>
-            <a:fld id="{6F80DDAC-FE11-49DC-9261-11C1E994665B}" type="datetimeFigureOut">
-              <a:rPr lang="en-GB" smtClean="0"/>
-              <a:pPr/>
-              <a:t>29/07/2026</a:t>
-            </a:fld>
-            <a:endParaRPr lang="en-GB"/>
-          </a:p>
-        </p:txBody>
-      </p:sp>
-      <p:sp>
-        <p:nvSpPr>
-          <p:cNvPr id="5" name="Footer Placeholder 4">
-            <a:extLst>
-              <a:ext uri="{FF2B5EF4-FFF2-40B4-BE49-F238E27FC236}">
-                <a16:creationId xmlns:a16="http://schemas.microsoft.com/office/drawing/2014/main" id="{8F7EDA70-C912-8325-0339-221ACF266C68}"/>
-              </a:ext>
-            </a:extLst>
-          </p:cNvPr>
-          <p:cNvSpPr>
-            <a:spLocks noGrp="1"/>
-          </p:cNvSpPr>
-          <p:nvPr>
-            <p:ph type="ftr" sz="quarter" idx="11"/>
-          </p:nvPr>
-        </p:nvSpPr>
-        <p:spPr/>
-        <p:txBody>
-          <a:bodyPr/>
-          <a:lstStyle/>
-          <a:p>
-            <a:endParaRPr lang="en-US"/>
-          </a:p>
-        </p:txBody>
-      </p:sp>
-      <p:sp>
-        <p:nvSpPr>
-          <p:cNvPr id="6" name="Slide Number Placeholder 5">
-            <a:extLst>
-              <a:ext uri="{FF2B5EF4-FFF2-40B4-BE49-F238E27FC236}">
-                <a16:creationId xmlns:a16="http://schemas.microsoft.com/office/drawing/2014/main" id="{09A3C9B7-156A-E408-499B-DB7FFED307D2}"/>
-              </a:ext>
-            </a:extLst>
-          </p:cNvPr>
-          <p:cNvSpPr>
-            <a:spLocks noGrp="1"/>
-          </p:cNvSpPr>
-          <p:nvPr>
-            <p:ph type="sldNum" sz="quarter" idx="12"/>
-          </p:nvPr>
-        </p:nvSpPr>
-        <p:spPr/>
-        <p:txBody>
-          <a:bodyPr/>
-          <a:lstStyle/>
-          <a:p>
-            <a:fld id="{3A73CC0E-67D5-43FD-BD59-BE5F44570CB2}" type="slidenum">
-              <a:rPr lang="en-GB" smtClean="0"/>
-              <a:pPr/>
-              <a:t>‹#›</a:t>
-            </a:fld>
-            <a:endParaRPr lang="en-GB"/>
-          </a:p>
-        </p:txBody>
-      </p:sp>
-    </p:spTree>
-    <p:extLst>
-      <p:ext uri="{BB962C8B-B14F-4D97-AF65-F5344CB8AC3E}">
-        <p14:creationId xmlns:p14="http://schemas.microsoft.com/office/powerpoint/2010/main" val="3530029153"/>
-      </p:ext>
-    </p:extLst>
-  </p:cSld>
-  <p:clrMapOvr>
-    <a:masterClrMapping/>
-  </p:clrMapOvr>
-</p:sldLayout>
-</file>
-
-<file path=ppt/slideLayouts/slideLayout24.xml><?xml version="1.0" encoding="utf-8"?>
-<p:sldLayout xmlns:a="http://schemas.openxmlformats.org/drawingml/2006/main" xmlns:r="http://schemas.openxmlformats.org/officeDocument/2006/relationships" xmlns:p="http://schemas.openxmlformats.org/presentationml/2006/main" userDrawn="1">
-  <p:cSld name="Contents &amp; Photo">
-    <p:spTree>
-      <p:nvGrpSpPr>
-        <p:cNvPr id="1" name=""/>
-        <p:cNvGrpSpPr/>
-        <p:nvPr/>
-      </p:nvGrpSpPr>
-      <p:grpSpPr>
-        <a:xfrm>
-          <a:off x="0" y="0"/>
-          <a:ext cx="0" cy="0"/>
-          <a:chOff x="0" y="0"/>
-          <a:chExt cx="0" cy="0"/>
-        </a:xfrm>
-      </p:grpSpPr>
-      <p:sp>
-        <p:nvSpPr>
-          <p:cNvPr id="13" name="Picture Placeholder 10"/>
-          <p:cNvSpPr>
-            <a:spLocks noGrp="1"/>
-          </p:cNvSpPr>
-          <p:nvPr>
-            <p:ph type="pic" sz="quarter" idx="14"/>
-          </p:nvPr>
-        </p:nvSpPr>
-        <p:spPr>
-          <a:xfrm>
-            <a:off x="4953004" y="1270000"/>
-            <a:ext cx="4952996" cy="5588000"/>
-          </a:xfrm>
-        </p:spPr>
-        <p:txBody>
-          <a:bodyPr/>
-          <a:lstStyle/>
-          <a:p>
-            <a:endParaRPr lang="en-GB"/>
-          </a:p>
-        </p:txBody>
-      </p:sp>
-      <p:sp>
-        <p:nvSpPr>
-          <p:cNvPr id="17" name="Date Placeholder 3"/>
-          <p:cNvSpPr>
-            <a:spLocks noGrp="1"/>
-          </p:cNvSpPr>
-          <p:nvPr>
-            <p:ph type="dt" sz="half" idx="2"/>
-          </p:nvPr>
-        </p:nvSpPr>
-        <p:spPr>
-          <a:xfrm>
-            <a:off x="624841" y="6310630"/>
-            <a:ext cx="2341244" cy="547370"/>
-          </a:xfrm>
-          <a:prstGeom prst="rect">
-            <a:avLst/>
-          </a:prstGeom>
-        </p:spPr>
-        <p:txBody>
-          <a:bodyPr vert="horz" lIns="91440" tIns="45720" rIns="91440" bIns="45720" rtlCol="0" anchor="ctr"/>
-          <a:lstStyle>
-            <a:lvl1pPr algn="l">
-              <a:defRPr sz="1200">
-                <a:solidFill>
-                  <a:schemeClr val="tx1"/>
-                </a:solidFill>
-              </a:defRPr>
-            </a:lvl1pPr>
-          </a:lstStyle>
-          <a:p>
-            <a:fld id="{6F80DDAC-FE11-49DC-9261-11C1E994665B}" type="datetimeFigureOut">
-              <a:rPr lang="en-GB" smtClean="0"/>
-              <a:pPr/>
-              <a:t>29/07/2026</a:t>
-            </a:fld>
-            <a:endParaRPr lang="en-GB"/>
-          </a:p>
-        </p:txBody>
-      </p:sp>
-      <p:sp>
-        <p:nvSpPr>
-          <p:cNvPr id="18" name="Slide Number Placeholder 5"/>
-          <p:cNvSpPr>
-            <a:spLocks noGrp="1"/>
-          </p:cNvSpPr>
-          <p:nvPr>
-            <p:ph type="sldNum" sz="quarter" idx="4"/>
-          </p:nvPr>
-        </p:nvSpPr>
-        <p:spPr>
-          <a:xfrm>
-            <a:off x="6939916" y="6310630"/>
-            <a:ext cx="2341244" cy="547370"/>
-          </a:xfrm>
-          <a:prstGeom prst="rect">
-            <a:avLst/>
-          </a:prstGeom>
-        </p:spPr>
-        <p:txBody>
-          <a:bodyPr vert="horz" lIns="91440" tIns="45720" rIns="91440" bIns="45720" rtlCol="0" anchor="ctr"/>
-          <a:lstStyle>
-            <a:lvl1pPr algn="r">
-              <a:defRPr sz="1200">
-                <a:solidFill>
-                  <a:schemeClr val="bg1"/>
-                </a:solidFill>
-              </a:defRPr>
-            </a:lvl1pPr>
-          </a:lstStyle>
-          <a:p>
-            <a:fld id="{3A73CC0E-67D5-43FD-BD59-BE5F44570CB2}" type="slidenum">
-              <a:rPr lang="en-GB" smtClean="0"/>
-              <a:pPr/>
-              <a:t>‹#›</a:t>
-            </a:fld>
-            <a:endParaRPr lang="en-GB"/>
-          </a:p>
-        </p:txBody>
-      </p:sp>
-      <p:sp>
-        <p:nvSpPr>
-          <p:cNvPr id="19" name="Text Placeholder 2"/>
-          <p:cNvSpPr>
-            <a:spLocks noGrp="1"/>
-          </p:cNvSpPr>
-          <p:nvPr>
-            <p:ph idx="1"/>
-          </p:nvPr>
-        </p:nvSpPr>
-        <p:spPr>
-          <a:xfrm>
-            <a:off x="624841" y="1270000"/>
-            <a:ext cx="3619499" cy="5040630"/>
-          </a:xfrm>
-          <a:prstGeom prst="rect">
-            <a:avLst/>
-          </a:prstGeom>
-        </p:spPr>
-        <p:txBody>
-          <a:bodyPr vert="horz" lIns="91440" tIns="180000" rIns="91440" bIns="180000" rtlCol="0" anchor="ctr">
-            <a:normAutofit/>
-          </a:bodyPr>
-          <a:lstStyle>
-            <a:lvl1pPr marL="0" indent="0">
-              <a:spcBef>
-                <a:spcPts val="1800"/>
-              </a:spcBef>
-              <a:buNone/>
-              <a:defRPr sz="1400" b="0">
-                <a:latin typeface="Roboto Medium" panose="02000000000000000000" pitchFamily="2" charset="0"/>
-                <a:ea typeface="Roboto Medium" panose="02000000000000000000" pitchFamily="2" charset="0"/>
-              </a:defRPr>
-            </a:lvl1pPr>
-            <a:lvl2pPr marL="800100" indent="-342900">
-              <a:spcBef>
-                <a:spcPts val="0"/>
-              </a:spcBef>
-              <a:buClr>
-                <a:schemeClr val="accent1"/>
-              </a:buClr>
-              <a:buFont typeface="Wingdings" panose="05000000000000000000" pitchFamily="2" charset="2"/>
-              <a:buChar char="§"/>
-              <a:defRPr sz="1200">
-                <a:latin typeface="+mn-lt"/>
-              </a:defRPr>
-            </a:lvl2pPr>
-            <a:lvl3pPr marL="1257300" indent="-342900">
-              <a:spcBef>
-                <a:spcPts val="0"/>
-              </a:spcBef>
-              <a:buFont typeface="Roboto Light" panose="02000000000000000000" pitchFamily="2" charset="0"/>
-              <a:buChar char="-"/>
-              <a:defRPr sz="1200">
-                <a:latin typeface="+mn-lt"/>
-              </a:defRPr>
-            </a:lvl3pPr>
-            <a:lvl4pPr marL="1657350" indent="-285750">
-              <a:spcBef>
-                <a:spcPts val="0"/>
-              </a:spcBef>
-              <a:buFont typeface="Roboto Light" panose="02000000000000000000" pitchFamily="2" charset="0"/>
-              <a:buChar char="-"/>
-              <a:defRPr sz="1200">
-                <a:latin typeface="+mn-lt"/>
-              </a:defRPr>
-            </a:lvl4pPr>
-            <a:lvl5pPr marL="2114550" indent="-285750">
-              <a:spcBef>
-                <a:spcPts val="0"/>
-              </a:spcBef>
-              <a:buFont typeface="Roboto Light" panose="02000000000000000000" pitchFamily="2" charset="0"/>
-              <a:buChar char="-"/>
-              <a:defRPr sz="1200">
-                <a:latin typeface="+mn-lt"/>
-              </a:defRPr>
-            </a:lvl5pPr>
-          </a:lstStyle>
-          <a:p>
-            <a:pPr lvl="0"/>
-            <a:r>
-              <a:rPr lang="en-US"/>
-              <a:t>Edit Master text styles</a:t>
-            </a:r>
-          </a:p>
-          <a:p>
-            <a:pPr lvl="1"/>
-            <a:r>
-              <a:rPr lang="en-US"/>
-              <a:t>Second level</a:t>
-            </a:r>
-          </a:p>
-          <a:p>
-            <a:pPr lvl="2"/>
-            <a:r>
-              <a:rPr lang="en-US"/>
-              <a:t>Third level</a:t>
-            </a:r>
-          </a:p>
-          <a:p>
-            <a:pPr lvl="3"/>
-            <a:r>
-              <a:rPr lang="en-US"/>
-              <a:t>Fourth level</a:t>
-            </a:r>
-          </a:p>
-          <a:p>
-            <a:pPr lvl="4"/>
-            <a:r>
-              <a:rPr lang="en-US"/>
-              <a:t>Fifth level</a:t>
-            </a:r>
-          </a:p>
-        </p:txBody>
-      </p:sp>
-      <p:sp>
-        <p:nvSpPr>
-          <p:cNvPr id="7" name="Title Placeholder 1">
-            <a:extLst>
-              <a:ext uri="{FF2B5EF4-FFF2-40B4-BE49-F238E27FC236}">
-                <a16:creationId xmlns:a16="http://schemas.microsoft.com/office/drawing/2014/main" id="{49863A12-A66A-429E-8F66-C5A5F81F1B27}"/>
-              </a:ext>
-            </a:extLst>
-          </p:cNvPr>
-          <p:cNvSpPr>
-            <a:spLocks noGrp="1"/>
-          </p:cNvSpPr>
-          <p:nvPr>
-            <p:ph type="title"/>
-          </p:nvPr>
-        </p:nvSpPr>
-        <p:spPr>
-          <a:xfrm>
-            <a:off x="596204" y="191149"/>
-            <a:ext cx="8656319" cy="654201"/>
-          </a:xfrm>
-          <a:prstGeom prst="rect">
-            <a:avLst/>
-          </a:prstGeom>
-        </p:spPr>
-        <p:txBody>
-          <a:bodyPr vert="horz" lIns="91440" tIns="45720" rIns="91440" bIns="45720" rtlCol="0" anchor="ctr">
-            <a:noAutofit/>
-          </a:bodyPr>
-          <a:lstStyle/>
-          <a:p>
-            <a:r>
-              <a:rPr lang="en-US"/>
-              <a:t>Click to edit Master title style</a:t>
-            </a:r>
-            <a:endParaRPr lang="en-GB"/>
-          </a:p>
-        </p:txBody>
-      </p:sp>
-    </p:spTree>
-    <p:extLst>
-      <p:ext uri="{BB962C8B-B14F-4D97-AF65-F5344CB8AC3E}">
-        <p14:creationId xmlns:p14="http://schemas.microsoft.com/office/powerpoint/2010/main" val="3988602008"/>
-      </p:ext>
-    </p:extLst>
-  </p:cSld>
-  <p:clrMapOvr>
-    <a:masterClrMapping/>
-  </p:clrMapOvr>
 </p:sldLayout>
 </file>
 
@@ -5040,7 +2100,7 @@
         <p:spPr>
           <a:xfrm>
             <a:off x="0" y="0"/>
-            <a:ext cx="9906000" cy="6858000"/>
+            <a:ext cx="12192000" cy="6858000"/>
           </a:xfrm>
           <a:prstGeom prst="rect">
             <a:avLst/>
@@ -5070,7 +2130,7 @@
           <a:lstStyle/>
           <a:p>
             <a:pPr algn="ctr"/>
-            <a:endParaRPr lang="en-GB"/>
+            <a:endParaRPr lang="en-GB" sz="2215"/>
           </a:p>
         </p:txBody>
       </p:sp>
@@ -5086,8 +2146,8 @@
         </p:nvSpPr>
         <p:spPr>
           <a:xfrm>
-            <a:off x="675879" y="2065811"/>
-            <a:ext cx="8543925" cy="1125857"/>
+            <a:off x="831853" y="2065814"/>
+            <a:ext cx="10515600" cy="1125857"/>
           </a:xfrm>
         </p:spPr>
         <p:txBody>
@@ -5096,7 +2156,7 @@
           </a:bodyPr>
           <a:lstStyle>
             <a:lvl1pPr algn="l">
-              <a:defRPr sz="3200" b="1"/>
+              <a:defRPr sz="3939" b="1"/>
             </a:lvl1pPr>
           </a:lstStyle>
           <a:p>
@@ -5119,8 +2179,8 @@
         </p:nvSpPr>
         <p:spPr>
           <a:xfrm>
-            <a:off x="675879" y="3279027"/>
-            <a:ext cx="8543925" cy="1439816"/>
+            <a:off x="831853" y="3279027"/>
+            <a:ext cx="10515600" cy="1439816"/>
           </a:xfrm>
         </p:spPr>
         <p:txBody>
@@ -5130,16 +2190,16 @@
           <a:lstStyle>
             <a:lvl1pPr marL="0" indent="0">
               <a:buNone/>
-              <a:defRPr sz="1600" baseline="0">
+              <a:defRPr sz="1969" baseline="0">
                 <a:solidFill>
                   <a:schemeClr val="bg1"/>
                 </a:solidFill>
                 <a:latin typeface="+mj-lt"/>
               </a:defRPr>
             </a:lvl1pPr>
-            <a:lvl2pPr marL="457200" indent="0">
+            <a:lvl2pPr marL="562722" indent="0">
               <a:buNone/>
-              <a:defRPr sz="2000">
+              <a:defRPr sz="2462">
                 <a:solidFill>
                   <a:schemeClr val="tx1">
                     <a:tint val="75000"/>
@@ -5147,9 +2207,9 @@
                 </a:solidFill>
               </a:defRPr>
             </a:lvl2pPr>
-            <a:lvl3pPr marL="914400" indent="0">
+            <a:lvl3pPr marL="1125444" indent="0">
               <a:buNone/>
-              <a:defRPr sz="1800">
+              <a:defRPr sz="2215">
                 <a:solidFill>
                   <a:schemeClr val="tx1">
                     <a:tint val="75000"/>
@@ -5157,9 +2217,9 @@
                 </a:solidFill>
               </a:defRPr>
             </a:lvl3pPr>
-            <a:lvl4pPr marL="1371600" indent="0">
+            <a:lvl4pPr marL="1688165" indent="0">
               <a:buNone/>
-              <a:defRPr sz="1600">
+              <a:defRPr sz="1969">
                 <a:solidFill>
                   <a:schemeClr val="tx1">
                     <a:tint val="75000"/>
@@ -5167,9 +2227,9 @@
                 </a:solidFill>
               </a:defRPr>
             </a:lvl4pPr>
-            <a:lvl5pPr marL="1828800" indent="0">
+            <a:lvl5pPr marL="2250887" indent="0">
               <a:buNone/>
-              <a:defRPr sz="1600">
+              <a:defRPr sz="1969">
                 <a:solidFill>
                   <a:schemeClr val="tx1">
                     <a:tint val="75000"/>
@@ -5177,9 +2237,9 @@
                 </a:solidFill>
               </a:defRPr>
             </a:lvl5pPr>
-            <a:lvl6pPr marL="2286000" indent="0">
+            <a:lvl6pPr marL="2813609" indent="0">
               <a:buNone/>
-              <a:defRPr sz="1600">
+              <a:defRPr sz="1969">
                 <a:solidFill>
                   <a:schemeClr val="tx1">
                     <a:tint val="75000"/>
@@ -5187,9 +2247,9 @@
                 </a:solidFill>
               </a:defRPr>
             </a:lvl6pPr>
-            <a:lvl7pPr marL="2743200" indent="0">
+            <a:lvl7pPr marL="3376331" indent="0">
               <a:buNone/>
-              <a:defRPr sz="1600">
+              <a:defRPr sz="1969">
                 <a:solidFill>
                   <a:schemeClr val="tx1">
                     <a:tint val="75000"/>
@@ -5197,9 +2257,9 @@
                 </a:solidFill>
               </a:defRPr>
             </a:lvl7pPr>
-            <a:lvl8pPr marL="3200400" indent="0">
+            <a:lvl8pPr marL="3939052" indent="0">
               <a:buNone/>
-              <a:defRPr sz="1600">
+              <a:defRPr sz="1969">
                 <a:solidFill>
                   <a:schemeClr val="tx1">
                     <a:tint val="75000"/>
@@ -5207,9 +2267,9 @@
                 </a:solidFill>
               </a:defRPr>
             </a:lvl8pPr>
-            <a:lvl9pPr marL="3657600" indent="0">
+            <a:lvl9pPr marL="4501774" indent="0">
               <a:buNone/>
-              <a:defRPr sz="1600">
+              <a:defRPr sz="1969">
                 <a:solidFill>
                   <a:schemeClr val="tx1">
                     <a:tint val="75000"/>
@@ -5258,8 +2318,8 @@
         </p:blipFill>
         <p:spPr>
           <a:xfrm>
-            <a:off x="6123543" y="-1306634"/>
-            <a:ext cx="9050813" cy="10076983"/>
+            <a:off x="7536670" y="-1306634"/>
+            <a:ext cx="11139462" cy="10076983"/>
           </a:xfrm>
           <a:prstGeom prst="rect">
             <a:avLst/>
@@ -5309,8 +2369,8 @@
         </p:nvSpPr>
         <p:spPr>
           <a:xfrm>
-            <a:off x="624840" y="1270000"/>
-            <a:ext cx="8656319" cy="5040630"/>
+            <a:off x="769036" y="1270000"/>
+            <a:ext cx="10653931" cy="5040630"/>
           </a:xfrm>
         </p:spPr>
         <p:txBody>
@@ -5321,7 +2381,7 @@
             <a:lvl1pPr marL="0" indent="0">
               <a:buFont typeface="Wingdings" panose="05000000000000000000" pitchFamily="2" charset="2"/>
               <a:buNone/>
-              <a:defRPr sz="1400">
+              <a:defRPr sz="1723">
                 <a:solidFill>
                   <a:schemeClr val="tx1"/>
                 </a:solidFill>
@@ -5330,13 +2390,13 @@
                 <a:cs typeface="Roboto Medium" panose="02000000000000000000" pitchFamily="2" charset="0"/>
               </a:defRPr>
             </a:lvl1pPr>
-            <a:lvl2pPr marL="650132" indent="-278627">
+            <a:lvl2pPr marL="800182" indent="-342934">
               <a:buClr>
                 <a:schemeClr val="tx1"/>
               </a:buClr>
               <a:buFont typeface="+mj-lt"/>
               <a:buAutoNum type="arabicPeriod"/>
-              <a:defRPr sz="1200">
+              <a:defRPr sz="1477">
                 <a:solidFill>
                   <a:schemeClr val="tx1"/>
                 </a:solidFill>
@@ -5345,13 +2405,13 @@
                 <a:cs typeface="Roboto Light" panose="02000000000000000000" pitchFamily="2" charset="0"/>
               </a:defRPr>
             </a:lvl2pPr>
-            <a:lvl3pPr marL="1021633" indent="-278627">
+            <a:lvl3pPr marL="1257426" indent="-342934">
               <a:buClr>
                 <a:schemeClr val="tx1"/>
               </a:buClr>
               <a:buFont typeface="+mj-lt"/>
               <a:buAutoNum type="arabicPeriod"/>
-              <a:defRPr sz="1200">
+              <a:defRPr sz="1477">
                 <a:solidFill>
                   <a:schemeClr val="tx1"/>
                 </a:solidFill>
@@ -5360,13 +2420,13 @@
                 <a:cs typeface="Roboto Light" panose="02000000000000000000" pitchFamily="2" charset="0"/>
               </a:defRPr>
             </a:lvl3pPr>
-            <a:lvl4pPr marL="1393136" indent="-278627">
+            <a:lvl4pPr marL="1714672" indent="-342934">
               <a:buClr>
                 <a:schemeClr val="tx1"/>
               </a:buClr>
               <a:buFont typeface="+mj-lt"/>
               <a:buAutoNum type="arabicPeriod"/>
-              <a:defRPr sz="1100">
+              <a:defRPr sz="1354">
                 <a:solidFill>
                   <a:schemeClr val="tx1"/>
                 </a:solidFill>
@@ -5375,13 +2435,13 @@
                 <a:cs typeface="Roboto Light" panose="02000000000000000000" pitchFamily="2" charset="0"/>
               </a:defRPr>
             </a:lvl4pPr>
-            <a:lvl5pPr marL="1764638" indent="-278627">
+            <a:lvl5pPr marL="2171916" indent="-342934">
               <a:buClr>
                 <a:schemeClr val="tx1"/>
               </a:buClr>
               <a:buFont typeface="+mj-lt"/>
               <a:buAutoNum type="arabicPeriod"/>
-              <a:defRPr sz="1100">
+              <a:defRPr sz="1354">
                 <a:solidFill>
                   <a:schemeClr val="tx1"/>
                 </a:solidFill>
@@ -5441,8 +2501,8 @@
         </p:nvSpPr>
         <p:spPr>
           <a:xfrm>
-            <a:off x="624841" y="6310630"/>
-            <a:ext cx="2341244" cy="547370"/>
+            <a:off x="769035" y="6310630"/>
+            <a:ext cx="2881531" cy="547370"/>
           </a:xfrm>
           <a:prstGeom prst="rect">
             <a:avLst/>
@@ -5452,7 +2512,7 @@
           <a:bodyPr vert="horz" lIns="91440" tIns="45720" rIns="91440" bIns="45720" rtlCol="0" anchor="ctr"/>
           <a:lstStyle>
             <a:lvl1pPr algn="l">
-              <a:defRPr sz="1200">
+              <a:defRPr sz="1477">
                 <a:solidFill>
                   <a:schemeClr val="tx1"/>
                 </a:solidFill>
@@ -5481,8 +2541,8 @@
         </p:nvSpPr>
         <p:spPr>
           <a:xfrm>
-            <a:off x="6939916" y="6310630"/>
-            <a:ext cx="2341244" cy="547370"/>
+            <a:off x="8541435" y="6310630"/>
+            <a:ext cx="2881531" cy="547370"/>
           </a:xfrm>
           <a:prstGeom prst="rect">
             <a:avLst/>
@@ -5492,7 +2552,7 @@
           <a:bodyPr vert="horz" lIns="91440" tIns="45720" rIns="91440" bIns="45720" rtlCol="0" anchor="ctr"/>
           <a:lstStyle>
             <a:lvl1pPr algn="r">
-              <a:defRPr sz="1200">
+              <a:defRPr sz="1477">
                 <a:solidFill>
                   <a:schemeClr val="tx1"/>
                 </a:solidFill>
@@ -5527,8 +2587,8 @@
         </p:nvSpPr>
         <p:spPr>
           <a:xfrm>
-            <a:off x="596204" y="191149"/>
-            <a:ext cx="8656319" cy="654201"/>
+            <a:off x="733791" y="191152"/>
+            <a:ext cx="10653931" cy="654201"/>
           </a:xfrm>
           <a:prstGeom prst="rect">
             <a:avLst/>
@@ -5561,17 +2621,17 @@
   <p:extLst>
     <p:ext uri="{DCECCB84-F9BA-43D5-87BE-67443E8EF086}">
       <p15:sldGuideLst xmlns:p15="http://schemas.microsoft.com/office/powerpoint/2012/main">
-        <p15:guide id="1" orient="horz" pos="4320">
+        <p15:guide id="1" orient="horz" pos="4320" userDrawn="1">
           <p15:clr>
             <a:srgbClr val="FBAE40"/>
           </p15:clr>
         </p15:guide>
-        <p15:guide id="4" orient="horz" pos="2500">
+        <p15:guide id="4" orient="horz" pos="2500" userDrawn="1">
           <p15:clr>
             <a:srgbClr val="FBAE40"/>
           </p15:clr>
         </p15:guide>
-        <p15:guide id="10" orient="horz" pos="414">
+        <p15:guide id="10" orient="horz" pos="414" userDrawn="1">
           <p15:clr>
             <a:srgbClr val="FBAE40"/>
           </p15:clr>
@@ -5611,8 +2671,8 @@
         </p:nvSpPr>
         <p:spPr>
           <a:xfrm>
-            <a:off x="624841" y="6310630"/>
-            <a:ext cx="2341244" cy="547370"/>
+            <a:off x="769035" y="6310630"/>
+            <a:ext cx="2881531" cy="547370"/>
           </a:xfrm>
           <a:prstGeom prst="rect">
             <a:avLst/>
@@ -5622,7 +2682,7 @@
           <a:bodyPr vert="horz" lIns="91440" tIns="45720" rIns="91440" bIns="45720" rtlCol="0" anchor="ctr"/>
           <a:lstStyle>
             <a:lvl1pPr algn="l">
-              <a:defRPr sz="1200">
+              <a:defRPr sz="1477">
                 <a:solidFill>
                   <a:schemeClr val="tx1"/>
                 </a:solidFill>
@@ -5651,8 +2711,8 @@
         </p:nvSpPr>
         <p:spPr>
           <a:xfrm>
-            <a:off x="6939916" y="6310630"/>
-            <a:ext cx="2341244" cy="547370"/>
+            <a:off x="8541435" y="6310630"/>
+            <a:ext cx="2881531" cy="547370"/>
           </a:xfrm>
           <a:prstGeom prst="rect">
             <a:avLst/>
@@ -5662,7 +2722,7 @@
           <a:bodyPr vert="horz" lIns="91440" tIns="45720" rIns="91440" bIns="45720" rtlCol="0" anchor="ctr"/>
           <a:lstStyle>
             <a:lvl1pPr algn="r">
-              <a:defRPr sz="1200">
+              <a:defRPr sz="1477">
                 <a:solidFill>
                   <a:schemeClr val="tx1"/>
                 </a:solidFill>
@@ -5691,8 +2751,8 @@
         </p:nvSpPr>
         <p:spPr>
           <a:xfrm>
-            <a:off x="624841" y="1270000"/>
-            <a:ext cx="8656319" cy="5040630"/>
+            <a:off x="769037" y="1270000"/>
+            <a:ext cx="10653931" cy="5040630"/>
           </a:xfrm>
           <a:prstGeom prst="rect">
             <a:avLst/>
@@ -5704,19 +2764,19 @@
           </a:bodyPr>
           <a:lstStyle>
             <a:lvl1pPr>
-              <a:defRPr sz="1400"/>
+              <a:defRPr sz="1723"/>
             </a:lvl1pPr>
             <a:lvl2pPr>
-              <a:defRPr sz="1200"/>
+              <a:defRPr sz="1477"/>
             </a:lvl2pPr>
             <a:lvl3pPr>
-              <a:defRPr sz="1200"/>
+              <a:defRPr sz="1477"/>
             </a:lvl3pPr>
             <a:lvl4pPr>
-              <a:defRPr sz="1100"/>
+              <a:defRPr sz="1354"/>
             </a:lvl4pPr>
             <a:lvl5pPr>
-              <a:defRPr sz="1100"/>
+              <a:defRPr sz="1354"/>
             </a:lvl5pPr>
           </a:lstStyle>
           <a:p>
@@ -5774,8 +2834,8 @@
         </p:nvSpPr>
         <p:spPr>
           <a:xfrm>
-            <a:off x="596204" y="191149"/>
-            <a:ext cx="8656319" cy="654201"/>
+            <a:off x="733791" y="191152"/>
+            <a:ext cx="10653931" cy="654201"/>
           </a:xfrm>
           <a:prstGeom prst="rect">
             <a:avLst/>
@@ -5837,8 +2897,8 @@
         </p:nvSpPr>
         <p:spPr>
           <a:xfrm>
-            <a:off x="624841" y="6310630"/>
-            <a:ext cx="2341244" cy="547370"/>
+            <a:off x="769035" y="6310630"/>
+            <a:ext cx="2881531" cy="547370"/>
           </a:xfrm>
           <a:prstGeom prst="rect">
             <a:avLst/>
@@ -5848,7 +2908,7 @@
           <a:bodyPr vert="horz" lIns="91440" tIns="45720" rIns="91440" bIns="45720" rtlCol="0" anchor="ctr"/>
           <a:lstStyle>
             <a:lvl1pPr algn="l">
-              <a:defRPr sz="1200">
+              <a:defRPr sz="1477">
                 <a:solidFill>
                   <a:schemeClr val="tx1"/>
                 </a:solidFill>
@@ -5877,8 +2937,8 @@
         </p:nvSpPr>
         <p:spPr>
           <a:xfrm>
-            <a:off x="6939916" y="6310630"/>
-            <a:ext cx="2341244" cy="547370"/>
+            <a:off x="8541435" y="6310630"/>
+            <a:ext cx="2881531" cy="547370"/>
           </a:xfrm>
           <a:prstGeom prst="rect">
             <a:avLst/>
@@ -5888,7 +2948,7 @@
           <a:bodyPr vert="horz" lIns="91440" tIns="45720" rIns="91440" bIns="45720" rtlCol="0" anchor="ctr"/>
           <a:lstStyle>
             <a:lvl1pPr algn="r">
-              <a:defRPr sz="1200">
+              <a:defRPr sz="1477">
                 <a:solidFill>
                   <a:schemeClr val="tx1"/>
                 </a:solidFill>
@@ -5917,8 +2977,8 @@
         </p:nvSpPr>
         <p:spPr>
           <a:xfrm>
-            <a:off x="624841" y="1270000"/>
-            <a:ext cx="8656319" cy="5040630"/>
+            <a:off x="769037" y="1270000"/>
+            <a:ext cx="10653931" cy="5040630"/>
           </a:xfrm>
           <a:prstGeom prst="rect">
             <a:avLst/>
@@ -5931,11 +2991,11 @@
           <a:lstStyle>
             <a:lvl1pPr>
               <a:spcBef>
-                <a:spcPts val="1200"/>
+                <a:spcPts val="1477"/>
               </a:spcBef>
-              <a:defRPr sz="1400"/>
+              <a:defRPr sz="1723"/>
             </a:lvl1pPr>
-            <a:lvl2pPr marL="685800" indent="-228600">
+            <a:lvl2pPr marL="844083" indent="-281361">
               <a:spcBef>
                 <a:spcPts val="0"/>
               </a:spcBef>
@@ -5944,25 +3004,25 @@
               </a:buClr>
               <a:buFont typeface="Wingdings" panose="05000000000000000000" pitchFamily="2" charset="2"/>
               <a:buChar char="§"/>
-              <a:defRPr sz="1200"/>
+              <a:defRPr sz="1477"/>
             </a:lvl2pPr>
             <a:lvl3pPr>
               <a:spcBef>
                 <a:spcPts val="0"/>
               </a:spcBef>
-              <a:defRPr sz="1200"/>
+              <a:defRPr sz="1477"/>
             </a:lvl3pPr>
             <a:lvl4pPr>
               <a:spcBef>
                 <a:spcPts val="0"/>
               </a:spcBef>
-              <a:defRPr sz="1100"/>
+              <a:defRPr sz="1354"/>
             </a:lvl4pPr>
             <a:lvl5pPr>
               <a:spcBef>
                 <a:spcPts val="0"/>
               </a:spcBef>
-              <a:defRPr sz="1100"/>
+              <a:defRPr sz="1354"/>
             </a:lvl5pPr>
           </a:lstStyle>
           <a:p>
@@ -6020,8 +3080,8 @@
         </p:nvSpPr>
         <p:spPr>
           <a:xfrm>
-            <a:off x="596204" y="191149"/>
-            <a:ext cx="8656319" cy="654201"/>
+            <a:off x="733791" y="191152"/>
+            <a:ext cx="10653931" cy="654201"/>
           </a:xfrm>
           <a:prstGeom prst="rect">
             <a:avLst/>
@@ -6083,8 +3143,8 @@
         </p:nvSpPr>
         <p:spPr>
           <a:xfrm>
-            <a:off x="624841" y="6310630"/>
-            <a:ext cx="2341244" cy="547370"/>
+            <a:off x="769035" y="6310630"/>
+            <a:ext cx="2881531" cy="547370"/>
           </a:xfrm>
           <a:prstGeom prst="rect">
             <a:avLst/>
@@ -6094,7 +3154,7 @@
           <a:bodyPr vert="horz" lIns="91440" tIns="45720" rIns="91440" bIns="45720" rtlCol="0" anchor="ctr"/>
           <a:lstStyle>
             <a:lvl1pPr algn="l">
-              <a:defRPr sz="1200">
+              <a:defRPr sz="1477">
                 <a:solidFill>
                   <a:schemeClr val="tx1"/>
                 </a:solidFill>
@@ -6123,8 +3183,8 @@
         </p:nvSpPr>
         <p:spPr>
           <a:xfrm>
-            <a:off x="6939916" y="6310630"/>
-            <a:ext cx="2341244" cy="547370"/>
+            <a:off x="8541435" y="6310630"/>
+            <a:ext cx="2881531" cy="547370"/>
           </a:xfrm>
           <a:prstGeom prst="rect">
             <a:avLst/>
@@ -6134,7 +3194,7 @@
           <a:bodyPr vert="horz" lIns="91440" tIns="45720" rIns="91440" bIns="45720" rtlCol="0" anchor="ctr"/>
           <a:lstStyle>
             <a:lvl1pPr algn="r">
-              <a:defRPr sz="1200">
+              <a:defRPr sz="1477">
                 <a:solidFill>
                   <a:schemeClr val="tx1"/>
                 </a:solidFill>
@@ -6163,8 +3223,8 @@
         </p:nvSpPr>
         <p:spPr>
           <a:xfrm>
-            <a:off x="624841" y="1270000"/>
-            <a:ext cx="3964093" cy="5040630"/>
+            <a:off x="769037" y="1270000"/>
+            <a:ext cx="4878884" cy="5040630"/>
           </a:xfrm>
           <a:prstGeom prst="rect">
             <a:avLst/>
@@ -6175,25 +3235,25 @@
             <a:normAutofit/>
           </a:bodyPr>
           <a:lstStyle>
-            <a:lvl1pPr marL="342900" indent="-342900">
+            <a:lvl1pPr marL="422041" indent="-422041">
               <a:buFont typeface="Wingdings" panose="05000000000000000000" pitchFamily="2" charset="2"/>
               <a:buChar char="§"/>
-              <a:defRPr sz="1400">
+              <a:defRPr sz="1723">
                 <a:latin typeface="Roboto Medium" panose="02000000000000000000" pitchFamily="2" charset="0"/>
                 <a:ea typeface="Roboto Medium" panose="02000000000000000000" pitchFamily="2" charset="0"/>
               </a:defRPr>
             </a:lvl1pPr>
             <a:lvl2pPr>
-              <a:defRPr sz="1200"/>
+              <a:defRPr sz="1477"/>
             </a:lvl2pPr>
             <a:lvl3pPr>
-              <a:defRPr sz="1200"/>
+              <a:defRPr sz="1477"/>
             </a:lvl3pPr>
             <a:lvl4pPr>
-              <a:defRPr sz="1100"/>
+              <a:defRPr sz="1354"/>
             </a:lvl4pPr>
             <a:lvl5pPr>
-              <a:defRPr sz="1100"/>
+              <a:defRPr sz="1354"/>
             </a:lvl5pPr>
           </a:lstStyle>
           <a:p>
@@ -6245,8 +3305,8 @@
         </p:nvSpPr>
         <p:spPr>
           <a:xfrm>
-            <a:off x="5317067" y="1270000"/>
-            <a:ext cx="3964094" cy="5040630"/>
+            <a:off x="6544082" y="1270000"/>
+            <a:ext cx="4878885" cy="5040630"/>
           </a:xfrm>
           <a:prstGeom prst="rect">
             <a:avLst/>
@@ -6257,25 +3317,25 @@
             <a:normAutofit/>
           </a:bodyPr>
           <a:lstStyle>
-            <a:lvl1pPr marL="342900" indent="-342900">
+            <a:lvl1pPr marL="422041" indent="-422041">
               <a:buFont typeface="Wingdings" panose="05000000000000000000" pitchFamily="2" charset="2"/>
               <a:buChar char="§"/>
-              <a:defRPr sz="1400">
+              <a:defRPr sz="1723">
                 <a:latin typeface="Roboto Medium" panose="02000000000000000000" pitchFamily="2" charset="0"/>
                 <a:ea typeface="Roboto Medium" panose="02000000000000000000" pitchFamily="2" charset="0"/>
               </a:defRPr>
             </a:lvl1pPr>
             <a:lvl2pPr>
-              <a:defRPr sz="1200"/>
+              <a:defRPr sz="1477"/>
             </a:lvl2pPr>
             <a:lvl3pPr>
-              <a:defRPr sz="1200"/>
+              <a:defRPr sz="1477"/>
             </a:lvl3pPr>
             <a:lvl4pPr>
-              <a:defRPr sz="1100"/>
+              <a:defRPr sz="1354"/>
             </a:lvl4pPr>
             <a:lvl5pPr>
-              <a:defRPr sz="1100"/>
+              <a:defRPr sz="1354"/>
             </a:lvl5pPr>
           </a:lstStyle>
           <a:p>
@@ -6333,8 +3393,8 @@
         </p:nvSpPr>
         <p:spPr>
           <a:xfrm>
-            <a:off x="596204" y="191149"/>
-            <a:ext cx="8656319" cy="654201"/>
+            <a:off x="733791" y="191152"/>
+            <a:ext cx="10653931" cy="654201"/>
           </a:xfrm>
           <a:prstGeom prst="rect">
             <a:avLst/>
@@ -6396,8 +3456,8 @@
         </p:nvSpPr>
         <p:spPr>
           <a:xfrm>
-            <a:off x="4953004" y="1270000"/>
-            <a:ext cx="4952996" cy="5588000"/>
+            <a:off x="6096005" y="1270000"/>
+            <a:ext cx="6095995" cy="5588000"/>
           </a:xfrm>
         </p:spPr>
         <p:txBody>
@@ -6420,8 +3480,8 @@
         </p:nvSpPr>
         <p:spPr>
           <a:xfrm>
-            <a:off x="624841" y="6310630"/>
-            <a:ext cx="2341244" cy="547370"/>
+            <a:off x="769035" y="6310630"/>
+            <a:ext cx="2881531" cy="547370"/>
           </a:xfrm>
           <a:prstGeom prst="rect">
             <a:avLst/>
@@ -6431,7 +3491,7 @@
           <a:bodyPr vert="horz" lIns="91440" tIns="45720" rIns="91440" bIns="45720" rtlCol="0" anchor="ctr"/>
           <a:lstStyle>
             <a:lvl1pPr algn="l">
-              <a:defRPr sz="1200">
+              <a:defRPr sz="1477">
                 <a:solidFill>
                   <a:schemeClr val="tx1"/>
                 </a:solidFill>
@@ -6460,8 +3520,8 @@
         </p:nvSpPr>
         <p:spPr>
           <a:xfrm>
-            <a:off x="6939916" y="6310630"/>
-            <a:ext cx="2341244" cy="547370"/>
+            <a:off x="8541435" y="6310630"/>
+            <a:ext cx="2881531" cy="547370"/>
           </a:xfrm>
           <a:prstGeom prst="rect">
             <a:avLst/>
@@ -6471,7 +3531,7 @@
           <a:bodyPr vert="horz" lIns="91440" tIns="45720" rIns="91440" bIns="45720" rtlCol="0" anchor="ctr"/>
           <a:lstStyle>
             <a:lvl1pPr algn="r">
-              <a:defRPr sz="1200">
+              <a:defRPr sz="1477">
                 <a:solidFill>
                   <a:schemeClr val="bg1"/>
                 </a:solidFill>
@@ -6500,8 +3560,8 @@
         </p:nvSpPr>
         <p:spPr>
           <a:xfrm>
-            <a:off x="624841" y="1270000"/>
-            <a:ext cx="3619499" cy="5040630"/>
+            <a:off x="769037" y="1270000"/>
+            <a:ext cx="4454768" cy="5040630"/>
           </a:xfrm>
           <a:prstGeom prst="rect">
             <a:avLst/>
@@ -6512,39 +3572,39 @@
             <a:normAutofit/>
           </a:bodyPr>
           <a:lstStyle>
-            <a:lvl1pPr marL="457200" indent="-457200">
+            <a:lvl1pPr marL="562722" indent="-562722">
               <a:buClr>
                 <a:schemeClr val="tx1"/>
               </a:buClr>
               <a:buFont typeface="+mj-lt"/>
               <a:buAutoNum type="arabicPeriod"/>
-              <a:defRPr sz="1400">
+              <a:defRPr sz="1723">
                 <a:latin typeface="Roboto Medium" panose="02000000000000000000" pitchFamily="2" charset="0"/>
                 <a:ea typeface="Roboto Medium" panose="02000000000000000000" pitchFamily="2" charset="0"/>
               </a:defRPr>
             </a:lvl1pPr>
-            <a:lvl2pPr marL="800100" indent="-342900">
+            <a:lvl2pPr marL="984763" indent="-422041">
               <a:buClr>
                 <a:schemeClr val="tx1"/>
               </a:buClr>
               <a:buFont typeface="+mj-lt"/>
               <a:buAutoNum type="alphaLcPeriod"/>
-              <a:defRPr sz="1200"/>
+              <a:defRPr sz="1477"/>
             </a:lvl2pPr>
-            <a:lvl3pPr marL="1257300" indent="-342900">
+            <a:lvl3pPr marL="1547485" indent="-422041">
               <a:buFont typeface="+mj-lt"/>
               <a:buAutoNum type="romanLcPeriod"/>
-              <a:defRPr sz="1200"/>
+              <a:defRPr sz="1477"/>
             </a:lvl3pPr>
-            <a:lvl4pPr marL="1714500" indent="-342900">
+            <a:lvl4pPr marL="2110207" indent="-422041">
               <a:buFont typeface="+mj-lt"/>
               <a:buAutoNum type="romanLcPeriod"/>
-              <a:defRPr sz="1100"/>
+              <a:defRPr sz="1354"/>
             </a:lvl4pPr>
-            <a:lvl5pPr marL="2171700" indent="-342900">
+            <a:lvl5pPr marL="2672928" indent="-422041">
               <a:buFont typeface="+mj-lt"/>
               <a:buAutoNum type="romanLcPeriod"/>
-              <a:defRPr sz="1100"/>
+              <a:defRPr sz="1354"/>
             </a:lvl5pPr>
           </a:lstStyle>
           <a:p>
@@ -6602,8 +3662,8 @@
         </p:nvSpPr>
         <p:spPr>
           <a:xfrm>
-            <a:off x="596204" y="191149"/>
-            <a:ext cx="8656319" cy="654201"/>
+            <a:off x="733791" y="191152"/>
+            <a:ext cx="10653931" cy="654201"/>
           </a:xfrm>
           <a:prstGeom prst="rect">
             <a:avLst/>
@@ -6665,8 +3725,8 @@
         </p:nvSpPr>
         <p:spPr>
           <a:xfrm>
-            <a:off x="4953004" y="1270000"/>
-            <a:ext cx="4952996" cy="5588000"/>
+            <a:off x="6096005" y="1270000"/>
+            <a:ext cx="6095995" cy="5588000"/>
           </a:xfrm>
         </p:spPr>
         <p:txBody>
@@ -6689,8 +3749,8 @@
         </p:nvSpPr>
         <p:spPr>
           <a:xfrm>
-            <a:off x="624841" y="6310630"/>
-            <a:ext cx="2341244" cy="547370"/>
+            <a:off x="769035" y="6310630"/>
+            <a:ext cx="2881531" cy="547370"/>
           </a:xfrm>
           <a:prstGeom prst="rect">
             <a:avLst/>
@@ -6700,7 +3760,7 @@
           <a:bodyPr vert="horz" lIns="91440" tIns="45720" rIns="91440" bIns="45720" rtlCol="0" anchor="ctr"/>
           <a:lstStyle>
             <a:lvl1pPr algn="l">
-              <a:defRPr sz="1200">
+              <a:defRPr sz="1477">
                 <a:solidFill>
                   <a:schemeClr val="tx1"/>
                 </a:solidFill>
@@ -6729,8 +3789,8 @@
         </p:nvSpPr>
         <p:spPr>
           <a:xfrm>
-            <a:off x="6939916" y="6310630"/>
-            <a:ext cx="2341244" cy="547370"/>
+            <a:off x="8541435" y="6310630"/>
+            <a:ext cx="2881531" cy="547370"/>
           </a:xfrm>
           <a:prstGeom prst="rect">
             <a:avLst/>
@@ -6740,7 +3800,7 @@
           <a:bodyPr vert="horz" lIns="91440" tIns="45720" rIns="91440" bIns="45720" rtlCol="0" anchor="ctr"/>
           <a:lstStyle>
             <a:lvl1pPr algn="r">
-              <a:defRPr sz="1200">
+              <a:defRPr sz="1477">
                 <a:solidFill>
                   <a:schemeClr val="bg1"/>
                 </a:solidFill>
@@ -6769,8 +3829,8 @@
         </p:nvSpPr>
         <p:spPr>
           <a:xfrm>
-            <a:off x="624841" y="1270000"/>
-            <a:ext cx="3619499" cy="5040630"/>
+            <a:off x="769037" y="1270000"/>
+            <a:ext cx="4454768" cy="5040630"/>
           </a:xfrm>
           <a:prstGeom prst="rect">
             <a:avLst/>
@@ -6783,15 +3843,15 @@
           <a:lstStyle>
             <a:lvl1pPr marL="0" indent="0">
               <a:spcBef>
-                <a:spcPts val="1800"/>
+                <a:spcPts val="2215"/>
               </a:spcBef>
               <a:buNone/>
-              <a:defRPr sz="1400" b="0">
+              <a:defRPr sz="1723" b="0">
                 <a:latin typeface="Roboto Medium" panose="02000000000000000000" pitchFamily="2" charset="0"/>
                 <a:ea typeface="Roboto Medium" panose="02000000000000000000" pitchFamily="2" charset="0"/>
               </a:defRPr>
             </a:lvl1pPr>
-            <a:lvl2pPr marL="800100" indent="-342900">
+            <a:lvl2pPr marL="984763" indent="-422041">
               <a:spcBef>
                 <a:spcPts val="0"/>
               </a:spcBef>
@@ -6800,37 +3860,37 @@
               </a:buClr>
               <a:buFont typeface="Wingdings" panose="05000000000000000000" pitchFamily="2" charset="2"/>
               <a:buChar char="§"/>
-              <a:defRPr sz="1200">
+              <a:defRPr sz="1477">
                 <a:latin typeface="+mn-lt"/>
               </a:defRPr>
             </a:lvl2pPr>
-            <a:lvl3pPr marL="1257300" indent="-342900">
+            <a:lvl3pPr marL="1547485" indent="-422041">
               <a:spcBef>
                 <a:spcPts val="0"/>
               </a:spcBef>
               <a:buFont typeface="Roboto Light" panose="02000000000000000000" pitchFamily="2" charset="0"/>
               <a:buChar char="-"/>
-              <a:defRPr sz="1200">
+              <a:defRPr sz="1477">
                 <a:latin typeface="+mn-lt"/>
               </a:defRPr>
             </a:lvl3pPr>
-            <a:lvl4pPr marL="1657350" indent="-285750">
+            <a:lvl4pPr marL="2039866" indent="-351701">
               <a:spcBef>
                 <a:spcPts val="0"/>
               </a:spcBef>
               <a:buFont typeface="Roboto Light" panose="02000000000000000000" pitchFamily="2" charset="0"/>
               <a:buChar char="-"/>
-              <a:defRPr sz="1200">
+              <a:defRPr sz="1477">
                 <a:latin typeface="+mn-lt"/>
               </a:defRPr>
             </a:lvl4pPr>
-            <a:lvl5pPr marL="2114550" indent="-285750">
+            <a:lvl5pPr marL="2602588" indent="-351701">
               <a:spcBef>
                 <a:spcPts val="0"/>
               </a:spcBef>
               <a:buFont typeface="Roboto Light" panose="02000000000000000000" pitchFamily="2" charset="0"/>
               <a:buChar char="-"/>
-              <a:defRPr sz="1200">
+              <a:defRPr sz="1477">
                 <a:latin typeface="+mn-lt"/>
               </a:defRPr>
             </a:lvl5pPr>
@@ -6890,8 +3950,8 @@
         </p:nvSpPr>
         <p:spPr>
           <a:xfrm>
-            <a:off x="596204" y="191149"/>
-            <a:ext cx="8656319" cy="654201"/>
+            <a:off x="733791" y="191152"/>
+            <a:ext cx="10653931" cy="654201"/>
           </a:xfrm>
           <a:prstGeom prst="rect">
             <a:avLst/>
@@ -6958,8 +4018,8 @@
         </p:nvSpPr>
         <p:spPr>
           <a:xfrm>
-            <a:off x="609600" y="365127"/>
-            <a:ext cx="8686800" cy="1325563"/>
+            <a:off x="750277" y="365129"/>
+            <a:ext cx="10691446" cy="1325563"/>
           </a:xfrm>
           <a:prstGeom prst="rect">
             <a:avLst/>
@@ -6990,8 +4050,8 @@
         </p:nvSpPr>
         <p:spPr>
           <a:xfrm>
-            <a:off x="609600" y="1981200"/>
-            <a:ext cx="8686800" cy="4305299"/>
+            <a:off x="750277" y="1981201"/>
+            <a:ext cx="10691446" cy="4305299"/>
           </a:xfrm>
           <a:prstGeom prst="rect">
             <a:avLst/>
@@ -7051,8 +4111,8 @@
         </p:nvSpPr>
         <p:spPr>
           <a:xfrm>
-            <a:off x="681038" y="6356352"/>
-            <a:ext cx="2228850" cy="365125"/>
+            <a:off x="838201" y="6356355"/>
+            <a:ext cx="2743200" cy="365125"/>
           </a:xfrm>
           <a:prstGeom prst="rect">
             <a:avLst/>
@@ -7062,7 +4122,7 @@
           <a:bodyPr vert="horz" lIns="91440" tIns="45720" rIns="91440" bIns="45720" rtlCol="0" anchor="ctr"/>
           <a:lstStyle>
             <a:lvl1pPr algn="l">
-              <a:defRPr sz="1200">
+              <a:defRPr sz="1477">
                 <a:solidFill>
                   <a:schemeClr val="tx1">
                     <a:tint val="75000"/>
@@ -7092,8 +4152,8 @@
         </p:nvSpPr>
         <p:spPr>
           <a:xfrm>
-            <a:off x="3281363" y="6356352"/>
-            <a:ext cx="3343275" cy="365125"/>
+            <a:off x="4038601" y="6356355"/>
+            <a:ext cx="4114800" cy="365125"/>
           </a:xfrm>
           <a:prstGeom prst="rect">
             <a:avLst/>
@@ -7103,7 +4163,7 @@
           <a:bodyPr vert="horz" lIns="91440" tIns="45720" rIns="91440" bIns="45720" rtlCol="0" anchor="ctr"/>
           <a:lstStyle>
             <a:lvl1pPr algn="ctr">
-              <a:defRPr sz="1200">
+              <a:defRPr sz="1477">
                 <a:solidFill>
                   <a:schemeClr val="tx1">
                     <a:tint val="75000"/>
@@ -7129,8 +4189,8 @@
         </p:nvSpPr>
         <p:spPr>
           <a:xfrm>
-            <a:off x="6996113" y="6356352"/>
-            <a:ext cx="2228850" cy="365125"/>
+            <a:off x="8610601" y="6356355"/>
+            <a:ext cx="2743200" cy="365125"/>
           </a:xfrm>
           <a:prstGeom prst="rect">
             <a:avLst/>
@@ -7140,7 +4200,7 @@
           <a:bodyPr vert="horz" lIns="91440" tIns="45720" rIns="91440" bIns="45720" rtlCol="0" anchor="ctr"/>
           <a:lstStyle>
             <a:lvl1pPr algn="r">
-              <a:defRPr sz="1200">
+              <a:defRPr sz="1477">
                 <a:solidFill>
                   <a:schemeClr val="tx1">
                     <a:tint val="75000"/>
@@ -7174,7 +4234,7 @@
   <p:hf hdr="0" ftr="0" dt="0"/>
   <p:txStyles>
     <p:titleStyle>
-      <a:lvl1pPr algn="l" defTabSz="914400" rtl="0" eaLnBrk="1" latinLnBrk="0" hangingPunct="1">
+      <a:lvl1pPr algn="l" defTabSz="1125444" rtl="0" eaLnBrk="1" latinLnBrk="0" hangingPunct="1">
         <a:lnSpc>
           <a:spcPct val="90000"/>
         </a:lnSpc>
@@ -7182,7 +4242,7 @@
           <a:spcPct val="0"/>
         </a:spcBef>
         <a:buNone/>
-        <a:defRPr sz="3200" kern="1200">
+        <a:defRPr sz="3939" kern="1200">
           <a:solidFill>
             <a:schemeClr val="bg1"/>
           </a:solidFill>
@@ -7193,19 +4253,19 @@
       </a:lvl1pPr>
     </p:titleStyle>
     <p:bodyStyle>
-      <a:lvl1pPr marL="228600" indent="-228600" algn="l" defTabSz="914400" rtl="0" eaLnBrk="1" latinLnBrk="0" hangingPunct="1">
+      <a:lvl1pPr marL="281361" indent="-281361" algn="l" defTabSz="1125444" rtl="0" eaLnBrk="1" latinLnBrk="0" hangingPunct="1">
         <a:lnSpc>
           <a:spcPct val="90000"/>
         </a:lnSpc>
         <a:spcBef>
-          <a:spcPts val="1000"/>
+          <a:spcPts val="1231"/>
         </a:spcBef>
         <a:buClr>
           <a:schemeClr val="accent1"/>
         </a:buClr>
         <a:buFont typeface="Wingdings" panose="05000000000000000000" pitchFamily="2" charset="2"/>
         <a:buChar char="§"/>
-        <a:defRPr sz="1400" kern="1200">
+        <a:defRPr sz="1723" kern="1200">
           <a:solidFill>
             <a:schemeClr val="tx1"/>
           </a:solidFill>
@@ -7214,19 +4274,19 @@
           <a:cs typeface="+mn-cs"/>
         </a:defRPr>
       </a:lvl1pPr>
-      <a:lvl2pPr marL="685800" indent="-228600" algn="l" defTabSz="914400" rtl="0" eaLnBrk="1" latinLnBrk="0" hangingPunct="1">
+      <a:lvl2pPr marL="844083" indent="-281361" algn="l" defTabSz="1125444" rtl="0" eaLnBrk="1" latinLnBrk="0" hangingPunct="1">
         <a:lnSpc>
           <a:spcPct val="90000"/>
         </a:lnSpc>
         <a:spcBef>
-          <a:spcPts val="500"/>
+          <a:spcPts val="615"/>
         </a:spcBef>
         <a:buClr>
           <a:schemeClr val="tx1"/>
         </a:buClr>
         <a:buFont typeface="Roboto Light" panose="02000000000000000000" pitchFamily="2" charset="0"/>
         <a:buChar char="-"/>
-        <a:defRPr sz="1200" kern="1200">
+        <a:defRPr sz="1477" kern="1200">
           <a:solidFill>
             <a:schemeClr val="tx1"/>
           </a:solidFill>
@@ -7235,19 +4295,19 @@
           <a:cs typeface="+mn-cs"/>
         </a:defRPr>
       </a:lvl2pPr>
-      <a:lvl3pPr marL="1143000" indent="-228600" algn="l" defTabSz="914400" rtl="0" eaLnBrk="1" latinLnBrk="0" hangingPunct="1">
+      <a:lvl3pPr marL="1406804" indent="-281361" algn="l" defTabSz="1125444" rtl="0" eaLnBrk="1" latinLnBrk="0" hangingPunct="1">
         <a:lnSpc>
           <a:spcPct val="90000"/>
         </a:lnSpc>
         <a:spcBef>
-          <a:spcPts val="500"/>
+          <a:spcPts val="615"/>
         </a:spcBef>
         <a:buClr>
           <a:schemeClr val="tx1"/>
         </a:buClr>
         <a:buFont typeface="Roboto Light" panose="02000000000000000000" pitchFamily="2" charset="0"/>
         <a:buChar char="-"/>
-        <a:defRPr sz="1200" kern="1200">
+        <a:defRPr sz="1477" kern="1200">
           <a:solidFill>
             <a:schemeClr val="tx1"/>
           </a:solidFill>
@@ -7256,19 +4316,19 @@
           <a:cs typeface="+mn-cs"/>
         </a:defRPr>
       </a:lvl3pPr>
-      <a:lvl4pPr marL="1600200" indent="-228600" algn="l" defTabSz="914400" rtl="0" eaLnBrk="1" latinLnBrk="0" hangingPunct="1">
+      <a:lvl4pPr marL="1969526" indent="-281361" algn="l" defTabSz="1125444" rtl="0" eaLnBrk="1" latinLnBrk="0" hangingPunct="1">
         <a:lnSpc>
           <a:spcPct val="90000"/>
         </a:lnSpc>
         <a:spcBef>
-          <a:spcPts val="500"/>
+          <a:spcPts val="615"/>
         </a:spcBef>
         <a:buClr>
           <a:schemeClr val="tx1"/>
         </a:buClr>
         <a:buFont typeface="Roboto Light" panose="02000000000000000000" pitchFamily="2" charset="0"/>
         <a:buChar char="-"/>
-        <a:defRPr sz="1100" kern="1200">
+        <a:defRPr sz="1354" kern="1200">
           <a:solidFill>
             <a:schemeClr val="tx1"/>
           </a:solidFill>
@@ -7277,19 +4337,19 @@
           <a:cs typeface="+mn-cs"/>
         </a:defRPr>
       </a:lvl4pPr>
-      <a:lvl5pPr marL="2057400" indent="-228600" algn="l" defTabSz="914400" rtl="0" eaLnBrk="1" latinLnBrk="0" hangingPunct="1">
+      <a:lvl5pPr marL="2532248" indent="-281361" algn="l" defTabSz="1125444" rtl="0" eaLnBrk="1" latinLnBrk="0" hangingPunct="1">
         <a:lnSpc>
           <a:spcPct val="90000"/>
         </a:lnSpc>
         <a:spcBef>
-          <a:spcPts val="500"/>
+          <a:spcPts val="615"/>
         </a:spcBef>
         <a:buClr>
           <a:schemeClr val="tx1"/>
         </a:buClr>
         <a:buFont typeface="Roboto Light" panose="02000000000000000000" pitchFamily="2" charset="0"/>
         <a:buChar char="-"/>
-        <a:defRPr sz="1100" kern="1200">
+        <a:defRPr sz="1354" kern="1200">
           <a:solidFill>
             <a:schemeClr val="tx1"/>
           </a:solidFill>
@@ -7298,16 +4358,16 @@
           <a:cs typeface="+mn-cs"/>
         </a:defRPr>
       </a:lvl5pPr>
-      <a:lvl6pPr marL="2514600" indent="-228600" algn="l" defTabSz="914400" rtl="0" eaLnBrk="1" latinLnBrk="0" hangingPunct="1">
+      <a:lvl6pPr marL="3094970" indent="-281361" algn="l" defTabSz="1125444" rtl="0" eaLnBrk="1" latinLnBrk="0" hangingPunct="1">
         <a:lnSpc>
           <a:spcPct val="90000"/>
         </a:lnSpc>
         <a:spcBef>
-          <a:spcPts val="500"/>
+          <a:spcPts val="615"/>
         </a:spcBef>
         <a:buFont typeface="Arial" panose="020B0604020202020204" pitchFamily="34" charset="0"/>
         <a:buChar char="•"/>
-        <a:defRPr sz="1800" kern="1200">
+        <a:defRPr sz="2215" kern="1200">
           <a:solidFill>
             <a:schemeClr val="tx1"/>
           </a:solidFill>
@@ -7316,16 +4376,16 @@
           <a:cs typeface="+mn-cs"/>
         </a:defRPr>
       </a:lvl6pPr>
-      <a:lvl7pPr marL="2971800" indent="-228600" algn="l" defTabSz="914400" rtl="0" eaLnBrk="1" latinLnBrk="0" hangingPunct="1">
+      <a:lvl7pPr marL="3657691" indent="-281361" algn="l" defTabSz="1125444" rtl="0" eaLnBrk="1" latinLnBrk="0" hangingPunct="1">
         <a:lnSpc>
           <a:spcPct val="90000"/>
         </a:lnSpc>
         <a:spcBef>
-          <a:spcPts val="500"/>
+          <a:spcPts val="615"/>
         </a:spcBef>
         <a:buFont typeface="Arial" panose="020B0604020202020204" pitchFamily="34" charset="0"/>
         <a:buChar char="•"/>
-        <a:defRPr sz="1800" kern="1200">
+        <a:defRPr sz="2215" kern="1200">
           <a:solidFill>
             <a:schemeClr val="tx1"/>
           </a:solidFill>
@@ -7334,16 +4394,16 @@
           <a:cs typeface="+mn-cs"/>
         </a:defRPr>
       </a:lvl7pPr>
-      <a:lvl8pPr marL="3429000" indent="-228600" algn="l" defTabSz="914400" rtl="0" eaLnBrk="1" latinLnBrk="0" hangingPunct="1">
+      <a:lvl8pPr marL="4220413" indent="-281361" algn="l" defTabSz="1125444" rtl="0" eaLnBrk="1" latinLnBrk="0" hangingPunct="1">
         <a:lnSpc>
           <a:spcPct val="90000"/>
         </a:lnSpc>
         <a:spcBef>
-          <a:spcPts val="500"/>
+          <a:spcPts val="615"/>
         </a:spcBef>
         <a:buFont typeface="Arial" panose="020B0604020202020204" pitchFamily="34" charset="0"/>
         <a:buChar char="•"/>
-        <a:defRPr sz="1800" kern="1200">
+        <a:defRPr sz="2215" kern="1200">
           <a:solidFill>
             <a:schemeClr val="tx1"/>
           </a:solidFill>
@@ -7352,16 +4412,16 @@
           <a:cs typeface="+mn-cs"/>
         </a:defRPr>
       </a:lvl8pPr>
-      <a:lvl9pPr marL="3886200" indent="-228600" algn="l" defTabSz="914400" rtl="0" eaLnBrk="1" latinLnBrk="0" hangingPunct="1">
+      <a:lvl9pPr marL="4783135" indent="-281361" algn="l" defTabSz="1125444" rtl="0" eaLnBrk="1" latinLnBrk="0" hangingPunct="1">
         <a:lnSpc>
           <a:spcPct val="90000"/>
         </a:lnSpc>
         <a:spcBef>
-          <a:spcPts val="500"/>
+          <a:spcPts val="615"/>
         </a:spcBef>
         <a:buFont typeface="Arial" panose="020B0604020202020204" pitchFamily="34" charset="0"/>
         <a:buChar char="•"/>
-        <a:defRPr sz="1800" kern="1200">
+        <a:defRPr sz="2215" kern="1200">
           <a:solidFill>
             <a:schemeClr val="tx1"/>
           </a:solidFill>
@@ -7375,8 +4435,8 @@
       <a:defPPr>
         <a:defRPr lang="en-US"/>
       </a:defPPr>
-      <a:lvl1pPr marL="0" algn="l" defTabSz="914400" rtl="0" eaLnBrk="1" latinLnBrk="0" hangingPunct="1">
-        <a:defRPr sz="1800" kern="1200">
+      <a:lvl1pPr marL="0" algn="l" defTabSz="1125444" rtl="0" eaLnBrk="1" latinLnBrk="0" hangingPunct="1">
+        <a:defRPr sz="2215" kern="1200">
           <a:solidFill>
             <a:schemeClr val="tx1"/>
           </a:solidFill>
@@ -7385,8 +4445,8 @@
           <a:cs typeface="+mn-cs"/>
         </a:defRPr>
       </a:lvl1pPr>
-      <a:lvl2pPr marL="457200" algn="l" defTabSz="914400" rtl="0" eaLnBrk="1" latinLnBrk="0" hangingPunct="1">
-        <a:defRPr sz="1800" kern="1200">
+      <a:lvl2pPr marL="562722" algn="l" defTabSz="1125444" rtl="0" eaLnBrk="1" latinLnBrk="0" hangingPunct="1">
+        <a:defRPr sz="2215" kern="1200">
           <a:solidFill>
             <a:schemeClr val="tx1"/>
           </a:solidFill>
@@ -7395,8 +4455,8 @@
           <a:cs typeface="+mn-cs"/>
         </a:defRPr>
       </a:lvl2pPr>
-      <a:lvl3pPr marL="914400" algn="l" defTabSz="914400" rtl="0" eaLnBrk="1" latinLnBrk="0" hangingPunct="1">
-        <a:defRPr sz="1800" kern="1200">
+      <a:lvl3pPr marL="1125444" algn="l" defTabSz="1125444" rtl="0" eaLnBrk="1" latinLnBrk="0" hangingPunct="1">
+        <a:defRPr sz="2215" kern="1200">
           <a:solidFill>
             <a:schemeClr val="tx1"/>
           </a:solidFill>
@@ -7405,8 +4465,8 @@
           <a:cs typeface="+mn-cs"/>
         </a:defRPr>
       </a:lvl3pPr>
-      <a:lvl4pPr marL="1371600" algn="l" defTabSz="914400" rtl="0" eaLnBrk="1" latinLnBrk="0" hangingPunct="1">
-        <a:defRPr sz="1800" kern="1200">
+      <a:lvl4pPr marL="1688165" algn="l" defTabSz="1125444" rtl="0" eaLnBrk="1" latinLnBrk="0" hangingPunct="1">
+        <a:defRPr sz="2215" kern="1200">
           <a:solidFill>
             <a:schemeClr val="tx1"/>
           </a:solidFill>
@@ -7415,8 +4475,8 @@
           <a:cs typeface="+mn-cs"/>
         </a:defRPr>
       </a:lvl4pPr>
-      <a:lvl5pPr marL="1828800" algn="l" defTabSz="914400" rtl="0" eaLnBrk="1" latinLnBrk="0" hangingPunct="1">
-        <a:defRPr sz="1800" kern="1200">
+      <a:lvl5pPr marL="2250887" algn="l" defTabSz="1125444" rtl="0" eaLnBrk="1" latinLnBrk="0" hangingPunct="1">
+        <a:defRPr sz="2215" kern="1200">
           <a:solidFill>
             <a:schemeClr val="tx1"/>
           </a:solidFill>
@@ -7425,8 +4485,8 @@
           <a:cs typeface="+mn-cs"/>
         </a:defRPr>
       </a:lvl5pPr>
-      <a:lvl6pPr marL="2286000" algn="l" defTabSz="914400" rtl="0" eaLnBrk="1" latinLnBrk="0" hangingPunct="1">
-        <a:defRPr sz="1800" kern="1200">
+      <a:lvl6pPr marL="2813609" algn="l" defTabSz="1125444" rtl="0" eaLnBrk="1" latinLnBrk="0" hangingPunct="1">
+        <a:defRPr sz="2215" kern="1200">
           <a:solidFill>
             <a:schemeClr val="tx1"/>
           </a:solidFill>
@@ -7435,8 +4495,8 @@
           <a:cs typeface="+mn-cs"/>
         </a:defRPr>
       </a:lvl6pPr>
-      <a:lvl7pPr marL="2743200" algn="l" defTabSz="914400" rtl="0" eaLnBrk="1" latinLnBrk="0" hangingPunct="1">
-        <a:defRPr sz="1800" kern="1200">
+      <a:lvl7pPr marL="3376331" algn="l" defTabSz="1125444" rtl="0" eaLnBrk="1" latinLnBrk="0" hangingPunct="1">
+        <a:defRPr sz="2215" kern="1200">
           <a:solidFill>
             <a:schemeClr val="tx1"/>
           </a:solidFill>
@@ -7445,8 +4505,8 @@
           <a:cs typeface="+mn-cs"/>
         </a:defRPr>
       </a:lvl7pPr>
-      <a:lvl8pPr marL="3200400" algn="l" defTabSz="914400" rtl="0" eaLnBrk="1" latinLnBrk="0" hangingPunct="1">
-        <a:defRPr sz="1800" kern="1200">
+      <a:lvl8pPr marL="3939052" algn="l" defTabSz="1125444" rtl="0" eaLnBrk="1" latinLnBrk="0" hangingPunct="1">
+        <a:defRPr sz="2215" kern="1200">
           <a:solidFill>
             <a:schemeClr val="tx1"/>
           </a:solidFill>
@@ -7455,8 +4515,8 @@
           <a:cs typeface="+mn-cs"/>
         </a:defRPr>
       </a:lvl8pPr>
-      <a:lvl9pPr marL="3657600" algn="l" defTabSz="914400" rtl="0" eaLnBrk="1" latinLnBrk="0" hangingPunct="1">
-        <a:defRPr sz="1800" kern="1200">
+      <a:lvl9pPr marL="4501774" algn="l" defTabSz="1125444" rtl="0" eaLnBrk="1" latinLnBrk="0" hangingPunct="1">
+        <a:defRPr sz="2215" kern="1200">
           <a:solidFill>
             <a:schemeClr val="tx1"/>
           </a:solidFill>
@@ -7470,7 +4530,7 @@
   <p:extLst>
     <p:ext uri="{27BBF7A9-308A-43DC-89C8-2F10F3537804}">
       <p15:sldGuideLst xmlns:p15="http://schemas.microsoft.com/office/powerpoint/2012/main">
-        <p15:guide id="2" pos="3120">
+        <p15:guide id="2" pos="3840" userDrawn="1">
           <p15:clr>
             <a:srgbClr val="F26B43"/>
           </p15:clr>
@@ -7518,7 +4578,7 @@
         <p:spPr>
           <a:xfrm>
             <a:off x="0" y="0"/>
-            <a:ext cx="9906000" cy="937697"/>
+            <a:ext cx="12192000" cy="937697"/>
           </a:xfrm>
           <a:prstGeom prst="rect">
             <a:avLst/>
@@ -7551,7 +4611,7 @@
           <a:lstStyle/>
           <a:p>
             <a:pPr algn="ctr"/>
-            <a:endParaRPr lang="en-GB"/>
+            <a:endParaRPr lang="en-GB" sz="2215"/>
           </a:p>
         </p:txBody>
       </p:sp>
@@ -7567,8 +4627,8 @@
         </p:nvSpPr>
         <p:spPr>
           <a:xfrm>
-            <a:off x="596204" y="191149"/>
-            <a:ext cx="8656319" cy="654201"/>
+            <a:off x="733791" y="191152"/>
+            <a:ext cx="10653931" cy="654201"/>
           </a:xfrm>
           <a:prstGeom prst="rect">
             <a:avLst/>
@@ -7600,8 +4660,8 @@
         </p:nvSpPr>
         <p:spPr>
           <a:xfrm>
-            <a:off x="624841" y="1270000"/>
-            <a:ext cx="8656319" cy="5040630"/>
+            <a:off x="769037" y="1270000"/>
+            <a:ext cx="10653931" cy="5040630"/>
           </a:xfrm>
           <a:prstGeom prst="rect">
             <a:avLst/>
@@ -7661,8 +4721,8 @@
         </p:nvSpPr>
         <p:spPr>
           <a:xfrm>
-            <a:off x="624841" y="6310630"/>
-            <a:ext cx="2341244" cy="547370"/>
+            <a:off x="769035" y="6310630"/>
+            <a:ext cx="2881531" cy="547370"/>
           </a:xfrm>
           <a:prstGeom prst="rect">
             <a:avLst/>
@@ -7672,7 +4732,7 @@
           <a:bodyPr vert="horz" lIns="91440" tIns="45720" rIns="91440" bIns="45720" rtlCol="0" anchor="ctr"/>
           <a:lstStyle>
             <a:lvl1pPr algn="l">
-              <a:defRPr sz="1200">
+              <a:defRPr sz="1477">
                 <a:solidFill>
                   <a:schemeClr val="tx1"/>
                 </a:solidFill>
@@ -7701,8 +4761,8 @@
         </p:nvSpPr>
         <p:spPr>
           <a:xfrm>
-            <a:off x="6939916" y="6310630"/>
-            <a:ext cx="2341244" cy="547370"/>
+            <a:off x="8541435" y="6310630"/>
+            <a:ext cx="2881531" cy="547370"/>
           </a:xfrm>
           <a:prstGeom prst="rect">
             <a:avLst/>
@@ -7712,7 +4772,7 @@
           <a:bodyPr vert="horz" lIns="91440" tIns="45720" rIns="91440" bIns="45720" rtlCol="0" anchor="ctr"/>
           <a:lstStyle>
             <a:lvl1pPr algn="r">
-              <a:defRPr sz="1200">
+              <a:defRPr sz="1477">
                 <a:solidFill>
                   <a:schemeClr val="tx1"/>
                 </a:solidFill>
@@ -7743,8 +4803,8 @@
         </p:nvSpPr>
         <p:spPr>
           <a:xfrm>
-            <a:off x="82510" y="376501"/>
-            <a:ext cx="9906000" cy="937697"/>
+            <a:off x="101551" y="376504"/>
+            <a:ext cx="12192000" cy="937697"/>
           </a:xfrm>
           <a:prstGeom prst="rect">
             <a:avLst/>
@@ -7775,7 +4835,7 @@
           <a:lstStyle/>
           <a:p>
             <a:pPr algn="ctr"/>
-            <a:endParaRPr lang="en-GB"/>
+            <a:endParaRPr lang="en-GB" sz="2215"/>
           </a:p>
         </p:txBody>
       </p:sp>
@@ -7810,8 +4870,8 @@
         </p:blipFill>
         <p:spPr>
           <a:xfrm>
-            <a:off x="7029258" y="-559124"/>
-            <a:ext cx="2688790" cy="2993641"/>
+            <a:off x="8651394" y="-559124"/>
+            <a:ext cx="3309280" cy="2993641"/>
           </a:xfrm>
           <a:prstGeom prst="rect">
             <a:avLst/>
@@ -7839,7 +4899,7 @@
   </p:sldLayoutIdLst>
   <p:txStyles>
     <p:titleStyle>
-      <a:lvl1pPr algn="l" defTabSz="914400" rtl="0" eaLnBrk="1" latinLnBrk="0" hangingPunct="1">
+      <a:lvl1pPr algn="l" defTabSz="1125444" rtl="0" eaLnBrk="1" latinLnBrk="0" hangingPunct="1">
         <a:lnSpc>
           <a:spcPct val="90000"/>
         </a:lnSpc>
@@ -7847,7 +4907,7 @@
           <a:spcPct val="0"/>
         </a:spcBef>
         <a:buNone/>
-        <a:defRPr sz="2200" kern="1200">
+        <a:defRPr sz="2708" kern="1200">
           <a:solidFill>
             <a:schemeClr val="bg1"/>
           </a:solidFill>
@@ -7858,19 +4918,19 @@
       </a:lvl1pPr>
     </p:titleStyle>
     <p:bodyStyle>
-      <a:lvl1pPr marL="342900" indent="-342900" algn="l" defTabSz="914400" rtl="0" eaLnBrk="1" latinLnBrk="0" hangingPunct="1">
+      <a:lvl1pPr marL="422041" indent="-422041" algn="l" defTabSz="1125444" rtl="0" eaLnBrk="1" latinLnBrk="0" hangingPunct="1">
         <a:lnSpc>
           <a:spcPct val="90000"/>
         </a:lnSpc>
         <a:spcBef>
-          <a:spcPts val="1200"/>
+          <a:spcPts val="1477"/>
         </a:spcBef>
         <a:buClr>
           <a:schemeClr val="accent1"/>
         </a:buClr>
         <a:buFont typeface="Wingdings" panose="05000000000000000000" pitchFamily="2" charset="2"/>
         <a:buChar char="§"/>
-        <a:defRPr sz="1400" b="0" kern="1200">
+        <a:defRPr sz="1723" b="0" kern="1200">
           <a:solidFill>
             <a:schemeClr val="tx1"/>
           </a:solidFill>
@@ -7879,19 +4939,19 @@
           <a:cs typeface="Roboto Medium" panose="02000000000000000000" pitchFamily="2" charset="0"/>
         </a:defRPr>
       </a:lvl1pPr>
-      <a:lvl2pPr marL="685800" indent="-228600" algn="l" defTabSz="914400" rtl="0" eaLnBrk="1" latinLnBrk="0" hangingPunct="1">
+      <a:lvl2pPr marL="844083" indent="-281361" algn="l" defTabSz="1125444" rtl="0" eaLnBrk="1" latinLnBrk="0" hangingPunct="1">
         <a:lnSpc>
           <a:spcPct val="90000"/>
         </a:lnSpc>
         <a:spcBef>
-          <a:spcPts val="500"/>
+          <a:spcPts val="615"/>
         </a:spcBef>
         <a:buClr>
           <a:schemeClr val="tx1"/>
         </a:buClr>
         <a:buFont typeface="Wingdings" panose="05000000000000000000" pitchFamily="2" charset="2"/>
         <a:buChar char="§"/>
-        <a:defRPr sz="1200" kern="1200">
+        <a:defRPr sz="1477" kern="1200">
           <a:solidFill>
             <a:schemeClr val="tx1"/>
           </a:solidFill>
@@ -7900,19 +4960,19 @@
           <a:cs typeface="Roboto Light" panose="02000000000000000000" pitchFamily="2" charset="0"/>
         </a:defRPr>
       </a:lvl2pPr>
-      <a:lvl3pPr marL="1143000" indent="-228600" algn="l" defTabSz="914400" rtl="0" eaLnBrk="1" latinLnBrk="0" hangingPunct="1">
+      <a:lvl3pPr marL="1406804" indent="-281361" algn="l" defTabSz="1125444" rtl="0" eaLnBrk="1" latinLnBrk="0" hangingPunct="1">
         <a:lnSpc>
           <a:spcPct val="90000"/>
         </a:lnSpc>
         <a:spcBef>
-          <a:spcPts val="500"/>
+          <a:spcPts val="615"/>
         </a:spcBef>
         <a:buClr>
           <a:schemeClr val="tx1"/>
         </a:buClr>
         <a:buFont typeface="Roboto Light" panose="02000000000000000000" pitchFamily="2" charset="0"/>
         <a:buChar char="-"/>
-        <a:defRPr sz="1200" kern="1200">
+        <a:defRPr sz="1477" kern="1200">
           <a:solidFill>
             <a:schemeClr val="tx1"/>
           </a:solidFill>
@@ -7921,19 +4981,19 @@
           <a:cs typeface="Roboto Light" panose="02000000000000000000" pitchFamily="2" charset="0"/>
         </a:defRPr>
       </a:lvl3pPr>
-      <a:lvl4pPr marL="1600200" indent="-228600" algn="l" defTabSz="914400" rtl="0" eaLnBrk="1" latinLnBrk="0" hangingPunct="1">
+      <a:lvl4pPr marL="1969526" indent="-281361" algn="l" defTabSz="1125444" rtl="0" eaLnBrk="1" latinLnBrk="0" hangingPunct="1">
         <a:lnSpc>
           <a:spcPct val="90000"/>
         </a:lnSpc>
         <a:spcBef>
-          <a:spcPts val="500"/>
+          <a:spcPts val="615"/>
         </a:spcBef>
         <a:buClr>
           <a:schemeClr val="tx1"/>
         </a:buClr>
         <a:buFont typeface="Roboto Light" panose="02000000000000000000" pitchFamily="2" charset="0"/>
         <a:buChar char="-"/>
-        <a:defRPr sz="1100" kern="1200">
+        <a:defRPr sz="1354" kern="1200">
           <a:solidFill>
             <a:schemeClr val="tx1"/>
           </a:solidFill>
@@ -7942,19 +5002,19 @@
           <a:cs typeface="Roboto Light" panose="02000000000000000000" pitchFamily="2" charset="0"/>
         </a:defRPr>
       </a:lvl4pPr>
-      <a:lvl5pPr marL="2057400" indent="-228600" algn="l" defTabSz="914400" rtl="0" eaLnBrk="1" latinLnBrk="0" hangingPunct="1">
+      <a:lvl5pPr marL="2532248" indent="-281361" algn="l" defTabSz="1125444" rtl="0" eaLnBrk="1" latinLnBrk="0" hangingPunct="1">
         <a:lnSpc>
           <a:spcPct val="90000"/>
         </a:lnSpc>
         <a:spcBef>
-          <a:spcPts val="500"/>
+          <a:spcPts val="615"/>
         </a:spcBef>
         <a:buClr>
           <a:schemeClr val="tx1"/>
         </a:buClr>
         <a:buFont typeface="Roboto Light" panose="02000000000000000000" pitchFamily="2" charset="0"/>
         <a:buChar char="-"/>
-        <a:defRPr sz="1100" kern="1200">
+        <a:defRPr sz="1354" kern="1200">
           <a:solidFill>
             <a:schemeClr val="tx1"/>
           </a:solidFill>
@@ -7963,16 +5023,16 @@
           <a:cs typeface="Roboto Light" panose="02000000000000000000" pitchFamily="2" charset="0"/>
         </a:defRPr>
       </a:lvl5pPr>
-      <a:lvl6pPr marL="2514600" indent="-228600" algn="l" defTabSz="914400" rtl="0" eaLnBrk="1" latinLnBrk="0" hangingPunct="1">
+      <a:lvl6pPr marL="3094970" indent="-281361" algn="l" defTabSz="1125444" rtl="0" eaLnBrk="1" latinLnBrk="0" hangingPunct="1">
         <a:lnSpc>
           <a:spcPct val="90000"/>
         </a:lnSpc>
         <a:spcBef>
-          <a:spcPts val="500"/>
+          <a:spcPts val="615"/>
         </a:spcBef>
         <a:buFont typeface="Arial" panose="020B0604020202020204" pitchFamily="34" charset="0"/>
         <a:buChar char="•"/>
-        <a:defRPr sz="1800" kern="1200">
+        <a:defRPr sz="2215" kern="1200">
           <a:solidFill>
             <a:schemeClr val="tx1"/>
           </a:solidFill>
@@ -7981,16 +5041,16 @@
           <a:cs typeface="+mn-cs"/>
         </a:defRPr>
       </a:lvl6pPr>
-      <a:lvl7pPr marL="2971800" indent="-228600" algn="l" defTabSz="914400" rtl="0" eaLnBrk="1" latinLnBrk="0" hangingPunct="1">
+      <a:lvl7pPr marL="3657691" indent="-281361" algn="l" defTabSz="1125444" rtl="0" eaLnBrk="1" latinLnBrk="0" hangingPunct="1">
         <a:lnSpc>
           <a:spcPct val="90000"/>
         </a:lnSpc>
         <a:spcBef>
-          <a:spcPts val="500"/>
+          <a:spcPts val="615"/>
         </a:spcBef>
         <a:buFont typeface="Arial" panose="020B0604020202020204" pitchFamily="34" charset="0"/>
         <a:buChar char="•"/>
-        <a:defRPr sz="1800" kern="1200">
+        <a:defRPr sz="2215" kern="1200">
           <a:solidFill>
             <a:schemeClr val="tx1"/>
           </a:solidFill>
@@ -7999,16 +5059,16 @@
           <a:cs typeface="+mn-cs"/>
         </a:defRPr>
       </a:lvl7pPr>
-      <a:lvl8pPr marL="3429000" indent="-228600" algn="l" defTabSz="914400" rtl="0" eaLnBrk="1" latinLnBrk="0" hangingPunct="1">
+      <a:lvl8pPr marL="4220413" indent="-281361" algn="l" defTabSz="1125444" rtl="0" eaLnBrk="1" latinLnBrk="0" hangingPunct="1">
         <a:lnSpc>
           <a:spcPct val="90000"/>
         </a:lnSpc>
         <a:spcBef>
-          <a:spcPts val="500"/>
+          <a:spcPts val="615"/>
         </a:spcBef>
         <a:buFont typeface="Arial" panose="020B0604020202020204" pitchFamily="34" charset="0"/>
         <a:buChar char="•"/>
-        <a:defRPr sz="1800" kern="1200">
+        <a:defRPr sz="2215" kern="1200">
           <a:solidFill>
             <a:schemeClr val="tx1"/>
           </a:solidFill>
@@ -8017,16 +5077,16 @@
           <a:cs typeface="+mn-cs"/>
         </a:defRPr>
       </a:lvl8pPr>
-      <a:lvl9pPr marL="3886200" indent="-228600" algn="l" defTabSz="914400" rtl="0" eaLnBrk="1" latinLnBrk="0" hangingPunct="1">
+      <a:lvl9pPr marL="4783135" indent="-281361" algn="l" defTabSz="1125444" rtl="0" eaLnBrk="1" latinLnBrk="0" hangingPunct="1">
         <a:lnSpc>
           <a:spcPct val="90000"/>
         </a:lnSpc>
         <a:spcBef>
-          <a:spcPts val="500"/>
+          <a:spcPts val="615"/>
         </a:spcBef>
         <a:buFont typeface="Arial" panose="020B0604020202020204" pitchFamily="34" charset="0"/>
         <a:buChar char="•"/>
-        <a:defRPr sz="1800" kern="1200">
+        <a:defRPr sz="2215" kern="1200">
           <a:solidFill>
             <a:schemeClr val="tx1"/>
           </a:solidFill>
@@ -8040,8 +5100,8 @@
       <a:defPPr>
         <a:defRPr lang="en-US"/>
       </a:defPPr>
-      <a:lvl1pPr marL="0" algn="l" defTabSz="914400" rtl="0" eaLnBrk="1" latinLnBrk="0" hangingPunct="1">
-        <a:defRPr sz="1800" kern="1200">
+      <a:lvl1pPr marL="0" algn="l" defTabSz="1125444" rtl="0" eaLnBrk="1" latinLnBrk="0" hangingPunct="1">
+        <a:defRPr sz="2215" kern="1200">
           <a:solidFill>
             <a:schemeClr val="tx1"/>
           </a:solidFill>
@@ -8050,8 +5110,8 @@
           <a:cs typeface="+mn-cs"/>
         </a:defRPr>
       </a:lvl1pPr>
-      <a:lvl2pPr marL="457200" algn="l" defTabSz="914400" rtl="0" eaLnBrk="1" latinLnBrk="0" hangingPunct="1">
-        <a:defRPr sz="1800" kern="1200">
+      <a:lvl2pPr marL="562722" algn="l" defTabSz="1125444" rtl="0" eaLnBrk="1" latinLnBrk="0" hangingPunct="1">
+        <a:defRPr sz="2215" kern="1200">
           <a:solidFill>
             <a:schemeClr val="tx1"/>
           </a:solidFill>
@@ -8060,8 +5120,8 @@
           <a:cs typeface="+mn-cs"/>
         </a:defRPr>
       </a:lvl2pPr>
-      <a:lvl3pPr marL="914400" algn="l" defTabSz="914400" rtl="0" eaLnBrk="1" latinLnBrk="0" hangingPunct="1">
-        <a:defRPr sz="1800" kern="1200">
+      <a:lvl3pPr marL="1125444" algn="l" defTabSz="1125444" rtl="0" eaLnBrk="1" latinLnBrk="0" hangingPunct="1">
+        <a:defRPr sz="2215" kern="1200">
           <a:solidFill>
             <a:schemeClr val="tx1"/>
           </a:solidFill>
@@ -8070,8 +5130,8 @@
           <a:cs typeface="+mn-cs"/>
         </a:defRPr>
       </a:lvl3pPr>
-      <a:lvl4pPr marL="1371600" algn="l" defTabSz="914400" rtl="0" eaLnBrk="1" latinLnBrk="0" hangingPunct="1">
-        <a:defRPr sz="1800" kern="1200">
+      <a:lvl4pPr marL="1688165" algn="l" defTabSz="1125444" rtl="0" eaLnBrk="1" latinLnBrk="0" hangingPunct="1">
+        <a:defRPr sz="2215" kern="1200">
           <a:solidFill>
             <a:schemeClr val="tx1"/>
           </a:solidFill>
@@ -8080,8 +5140,8 @@
           <a:cs typeface="+mn-cs"/>
         </a:defRPr>
       </a:lvl4pPr>
-      <a:lvl5pPr marL="1828800" algn="l" defTabSz="914400" rtl="0" eaLnBrk="1" latinLnBrk="0" hangingPunct="1">
-        <a:defRPr sz="1800" kern="1200">
+      <a:lvl5pPr marL="2250887" algn="l" defTabSz="1125444" rtl="0" eaLnBrk="1" latinLnBrk="0" hangingPunct="1">
+        <a:defRPr sz="2215" kern="1200">
           <a:solidFill>
             <a:schemeClr val="tx1"/>
           </a:solidFill>
@@ -8090,8 +5150,8 @@
           <a:cs typeface="+mn-cs"/>
         </a:defRPr>
       </a:lvl5pPr>
-      <a:lvl6pPr marL="2286000" algn="l" defTabSz="914400" rtl="0" eaLnBrk="1" latinLnBrk="0" hangingPunct="1">
-        <a:defRPr sz="1800" kern="1200">
+      <a:lvl6pPr marL="2813609" algn="l" defTabSz="1125444" rtl="0" eaLnBrk="1" latinLnBrk="0" hangingPunct="1">
+        <a:defRPr sz="2215" kern="1200">
           <a:solidFill>
             <a:schemeClr val="tx1"/>
           </a:solidFill>
@@ -8100,8 +5160,8 @@
           <a:cs typeface="+mn-cs"/>
         </a:defRPr>
       </a:lvl6pPr>
-      <a:lvl7pPr marL="2743200" algn="l" defTabSz="914400" rtl="0" eaLnBrk="1" latinLnBrk="0" hangingPunct="1">
-        <a:defRPr sz="1800" kern="1200">
+      <a:lvl7pPr marL="3376331" algn="l" defTabSz="1125444" rtl="0" eaLnBrk="1" latinLnBrk="0" hangingPunct="1">
+        <a:defRPr sz="2215" kern="1200">
           <a:solidFill>
             <a:schemeClr val="tx1"/>
           </a:solidFill>
@@ -8110,8 +5170,8 @@
           <a:cs typeface="+mn-cs"/>
         </a:defRPr>
       </a:lvl7pPr>
-      <a:lvl8pPr marL="3200400" algn="l" defTabSz="914400" rtl="0" eaLnBrk="1" latinLnBrk="0" hangingPunct="1">
-        <a:defRPr sz="1800" kern="1200">
+      <a:lvl8pPr marL="3939052" algn="l" defTabSz="1125444" rtl="0" eaLnBrk="1" latinLnBrk="0" hangingPunct="1">
+        <a:defRPr sz="2215" kern="1200">
           <a:solidFill>
             <a:schemeClr val="tx1"/>
           </a:solidFill>
@@ -8120,8 +5180,8 @@
           <a:cs typeface="+mn-cs"/>
         </a:defRPr>
       </a:lvl8pPr>
-      <a:lvl9pPr marL="3657600" algn="l" defTabSz="914400" rtl="0" eaLnBrk="1" latinLnBrk="0" hangingPunct="1">
-        <a:defRPr sz="1800" kern="1200">
+      <a:lvl9pPr marL="4501774" algn="l" defTabSz="1125444" rtl="0" eaLnBrk="1" latinLnBrk="0" hangingPunct="1">
+        <a:defRPr sz="2215" kern="1200">
           <a:solidFill>
             <a:schemeClr val="tx1"/>
           </a:solidFill>
@@ -8145,759 +5205,17 @@
             <a:srgbClr val="F26B43"/>
           </p15:clr>
         </p15:guide>
-        <p15:guide id="4" pos="3120" userDrawn="1">
+        <p15:guide id="4" pos="3840" userDrawn="1">
           <p15:clr>
             <a:srgbClr val="F26B43"/>
           </p15:clr>
         </p15:guide>
-        <p15:guide id="5" pos="466" userDrawn="1">
+        <p15:guide id="5" pos="574" userDrawn="1">
           <p15:clr>
             <a:srgbClr val="F26B43"/>
           </p15:clr>
         </p15:guide>
-        <p15:guide id="10" pos="5774" userDrawn="1">
-          <p15:clr>
-            <a:srgbClr val="F26B43"/>
-          </p15:clr>
-        </p15:guide>
-      </p15:sldGuideLst>
-    </p:ext>
-  </p:extLst>
-</p:sldMaster>
-</file>
-
-<file path=ppt/slideMasters/slideMaster3.xml><?xml version="1.0" encoding="utf-8"?>
-<p:sldMaster xmlns:a="http://schemas.openxmlformats.org/drawingml/2006/main" xmlns:r="http://schemas.openxmlformats.org/officeDocument/2006/relationships" xmlns:p="http://schemas.openxmlformats.org/presentationml/2006/main">
-  <p:cSld>
-    <p:bg>
-      <p:bgRef idx="1001">
-        <a:schemeClr val="bg1"/>
-      </p:bgRef>
-    </p:bg>
-    <p:spTree>
-      <p:nvGrpSpPr>
-        <p:cNvPr id="1" name=""/>
-        <p:cNvGrpSpPr/>
-        <p:nvPr/>
-      </p:nvGrpSpPr>
-      <p:grpSpPr>
-        <a:xfrm>
-          <a:off x="0" y="0"/>
-          <a:ext cx="0" cy="0"/>
-          <a:chOff x="0" y="0"/>
-          <a:chExt cx="0" cy="0"/>
-        </a:xfrm>
-      </p:grpSpPr>
-      <p:sp>
-        <p:nvSpPr>
-          <p:cNvPr id="2" name="Title Placeholder 1">
-            <a:extLst>
-              <a:ext uri="{FF2B5EF4-FFF2-40B4-BE49-F238E27FC236}">
-                <a16:creationId xmlns:a16="http://schemas.microsoft.com/office/drawing/2014/main" id="{A26706E2-5FAA-84FA-2BA5-FE79CAD3CBE7}"/>
-              </a:ext>
-            </a:extLst>
-          </p:cNvPr>
-          <p:cNvSpPr>
-            <a:spLocks noGrp="1"/>
-          </p:cNvSpPr>
-          <p:nvPr>
-            <p:ph type="title"/>
-          </p:nvPr>
-        </p:nvSpPr>
-        <p:spPr>
-          <a:xfrm>
-            <a:off x="681038" y="365126"/>
-            <a:ext cx="8543925" cy="1325563"/>
-          </a:xfrm>
-          <a:prstGeom prst="rect">
-            <a:avLst/>
-          </a:prstGeom>
-        </p:spPr>
-        <p:txBody>
-          <a:bodyPr vert="horz" lIns="91440" tIns="45720" rIns="91440" bIns="45720" rtlCol="0" anchor="ctr">
-            <a:normAutofit/>
-          </a:bodyPr>
-          <a:lstStyle/>
-          <a:p>
-            <a:r>
-              <a:rPr lang="en-US"/>
-              <a:t>Click to edit Master title style</a:t>
-            </a:r>
-          </a:p>
-        </p:txBody>
-      </p:sp>
-      <p:sp>
-        <p:nvSpPr>
-          <p:cNvPr id="3" name="Text Placeholder 2">
-            <a:extLst>
-              <a:ext uri="{FF2B5EF4-FFF2-40B4-BE49-F238E27FC236}">
-                <a16:creationId xmlns:a16="http://schemas.microsoft.com/office/drawing/2014/main" id="{874C0190-CDC1-B11F-77F2-806F5CA2BFE7}"/>
-              </a:ext>
-            </a:extLst>
-          </p:cNvPr>
-          <p:cNvSpPr>
-            <a:spLocks noGrp="1"/>
-          </p:cNvSpPr>
-          <p:nvPr>
-            <p:ph type="body" idx="1"/>
-          </p:nvPr>
-        </p:nvSpPr>
-        <p:spPr>
-          <a:xfrm>
-            <a:off x="681038" y="1825625"/>
-            <a:ext cx="8543925" cy="4351338"/>
-          </a:xfrm>
-          <a:prstGeom prst="rect">
-            <a:avLst/>
-          </a:prstGeom>
-        </p:spPr>
-        <p:txBody>
-          <a:bodyPr vert="horz" lIns="91440" tIns="45720" rIns="91440" bIns="45720" rtlCol="0">
-            <a:normAutofit/>
-          </a:bodyPr>
-          <a:lstStyle/>
-          <a:p>
-            <a:pPr lvl="0"/>
-            <a:r>
-              <a:rPr lang="en-US"/>
-              <a:t>Click to edit Master text styles</a:t>
-            </a:r>
-          </a:p>
-          <a:p>
-            <a:pPr lvl="1"/>
-            <a:r>
-              <a:rPr lang="en-US"/>
-              <a:t>Second level</a:t>
-            </a:r>
-          </a:p>
-          <a:p>
-            <a:pPr lvl="2"/>
-            <a:r>
-              <a:rPr lang="en-US"/>
-              <a:t>Third level</a:t>
-            </a:r>
-          </a:p>
-          <a:p>
-            <a:pPr lvl="3"/>
-            <a:r>
-              <a:rPr lang="en-US"/>
-              <a:t>Fourth level</a:t>
-            </a:r>
-          </a:p>
-          <a:p>
-            <a:pPr lvl="4"/>
-            <a:r>
-              <a:rPr lang="en-US"/>
-              <a:t>Fifth level</a:t>
-            </a:r>
-          </a:p>
-        </p:txBody>
-      </p:sp>
-      <p:sp>
-        <p:nvSpPr>
-          <p:cNvPr id="4" name="Date Placeholder 3">
-            <a:extLst>
-              <a:ext uri="{FF2B5EF4-FFF2-40B4-BE49-F238E27FC236}">
-                <a16:creationId xmlns:a16="http://schemas.microsoft.com/office/drawing/2014/main" id="{4EDD5702-9985-065D-0AB2-8A50FAB462B3}"/>
-              </a:ext>
-            </a:extLst>
-          </p:cNvPr>
-          <p:cNvSpPr>
-            <a:spLocks noGrp="1"/>
-          </p:cNvSpPr>
-          <p:nvPr>
-            <p:ph type="dt" sz="half" idx="2"/>
-          </p:nvPr>
-        </p:nvSpPr>
-        <p:spPr>
-          <a:xfrm>
-            <a:off x="681038" y="6356351"/>
-            <a:ext cx="2228850" cy="365125"/>
-          </a:xfrm>
-          <a:prstGeom prst="rect">
-            <a:avLst/>
-          </a:prstGeom>
-        </p:spPr>
-        <p:txBody>
-          <a:bodyPr vert="horz" lIns="91440" tIns="45720" rIns="91440" bIns="45720" rtlCol="0" anchor="ctr"/>
-          <a:lstStyle>
-            <a:lvl1pPr algn="l">
-              <a:defRPr sz="975">
-                <a:solidFill>
-                  <a:schemeClr val="tx1">
-                    <a:tint val="82000"/>
-                  </a:schemeClr>
-                </a:solidFill>
-              </a:defRPr>
-            </a:lvl1pPr>
-          </a:lstStyle>
-          <a:p>
-            <a:fld id="{B3200F2B-F467-4C29-9963-7410829293A6}" type="datetime1">
-              <a:rPr lang="en-GB" smtClean="0"/>
-              <a:t>29/07/2026</a:t>
-            </a:fld>
-            <a:endParaRPr lang="en-GB"/>
-          </a:p>
-        </p:txBody>
-      </p:sp>
-      <p:sp>
-        <p:nvSpPr>
-          <p:cNvPr id="5" name="Footer Placeholder 4">
-            <a:extLst>
-              <a:ext uri="{FF2B5EF4-FFF2-40B4-BE49-F238E27FC236}">
-                <a16:creationId xmlns:a16="http://schemas.microsoft.com/office/drawing/2014/main" id="{F757D5C0-8D58-1C1F-A78A-228B0436F7C8}"/>
-              </a:ext>
-            </a:extLst>
-          </p:cNvPr>
-          <p:cNvSpPr>
-            <a:spLocks noGrp="1"/>
-          </p:cNvSpPr>
-          <p:nvPr>
-            <p:ph type="ftr" sz="quarter" idx="3"/>
-          </p:nvPr>
-        </p:nvSpPr>
-        <p:spPr>
-          <a:xfrm>
-            <a:off x="3281363" y="6356351"/>
-            <a:ext cx="3343275" cy="365125"/>
-          </a:xfrm>
-          <a:prstGeom prst="rect">
-            <a:avLst/>
-          </a:prstGeom>
-        </p:spPr>
-        <p:txBody>
-          <a:bodyPr vert="horz" lIns="91440" tIns="45720" rIns="91440" bIns="45720" rtlCol="0" anchor="ctr"/>
-          <a:lstStyle>
-            <a:lvl1pPr algn="ctr">
-              <a:defRPr sz="975">
-                <a:solidFill>
-                  <a:schemeClr val="tx1">
-                    <a:tint val="82000"/>
-                  </a:schemeClr>
-                </a:solidFill>
-              </a:defRPr>
-            </a:lvl1pPr>
-          </a:lstStyle>
-          <a:p>
-            <a:endParaRPr lang="en-GB"/>
-          </a:p>
-        </p:txBody>
-      </p:sp>
-      <p:sp>
-        <p:nvSpPr>
-          <p:cNvPr id="6" name="Slide Number Placeholder 5">
-            <a:extLst>
-              <a:ext uri="{FF2B5EF4-FFF2-40B4-BE49-F238E27FC236}">
-                <a16:creationId xmlns:a16="http://schemas.microsoft.com/office/drawing/2014/main" id="{90DE8CF6-4336-9D2A-79F2-C80B07BBF415}"/>
-              </a:ext>
-            </a:extLst>
-          </p:cNvPr>
-          <p:cNvSpPr>
-            <a:spLocks noGrp="1"/>
-          </p:cNvSpPr>
-          <p:nvPr>
-            <p:ph type="sldNum" sz="quarter" idx="4"/>
-          </p:nvPr>
-        </p:nvSpPr>
-        <p:spPr>
-          <a:xfrm>
-            <a:off x="6996113" y="6356351"/>
-            <a:ext cx="2228850" cy="365125"/>
-          </a:xfrm>
-          <a:prstGeom prst="rect">
-            <a:avLst/>
-          </a:prstGeom>
-        </p:spPr>
-        <p:txBody>
-          <a:bodyPr vert="horz" lIns="91440" tIns="45720" rIns="91440" bIns="45720" rtlCol="0" anchor="ctr"/>
-          <a:lstStyle>
-            <a:lvl1pPr algn="r">
-              <a:defRPr sz="975">
-                <a:solidFill>
-                  <a:schemeClr val="tx1">
-                    <a:tint val="82000"/>
-                  </a:schemeClr>
-                </a:solidFill>
-              </a:defRPr>
-            </a:lvl1pPr>
-          </a:lstStyle>
-          <a:p>
-            <a:fld id="{6854B3B4-4093-4FBB-A391-3009E9C94F95}" type="slidenum">
-              <a:rPr lang="en-GB" smtClean="0"/>
-              <a:t>‹#›</a:t>
-            </a:fld>
-            <a:endParaRPr lang="en-GB"/>
-          </a:p>
-        </p:txBody>
-      </p:sp>
-      <p:sp>
-        <p:nvSpPr>
-          <p:cNvPr id="7" name="Rectangle 6">
-            <a:extLst>
-              <a:ext uri="{FF2B5EF4-FFF2-40B4-BE49-F238E27FC236}">
-                <a16:creationId xmlns:a16="http://schemas.microsoft.com/office/drawing/2014/main" id="{ACF4DD7E-A58E-ABD5-09A2-5FB5700DB8C3}"/>
-              </a:ext>
-            </a:extLst>
-          </p:cNvPr>
-          <p:cNvSpPr/>
-          <p:nvPr userDrawn="1"/>
-        </p:nvSpPr>
-        <p:spPr>
-          <a:xfrm>
-            <a:off x="0" y="0"/>
-            <a:ext cx="9906000" cy="937697"/>
-          </a:xfrm>
-          <a:prstGeom prst="rect">
-            <a:avLst/>
-          </a:prstGeom>
-          <a:solidFill>
-            <a:srgbClr val="1767D2"/>
-          </a:solidFill>
-          <a:ln>
-            <a:noFill/>
-          </a:ln>
-        </p:spPr>
-        <p:style>
-          <a:lnRef idx="2">
-            <a:schemeClr val="accent1">
-              <a:shade val="50000"/>
-            </a:schemeClr>
-          </a:lnRef>
-          <a:fillRef idx="1">
-            <a:schemeClr val="accent1"/>
-          </a:fillRef>
-          <a:effectRef idx="0">
-            <a:schemeClr val="accent1"/>
-          </a:effectRef>
-          <a:fontRef idx="minor">
-            <a:schemeClr val="lt1"/>
-          </a:fontRef>
-        </p:style>
-        <p:txBody>
-          <a:bodyPr rtlCol="0" anchor="ctr"/>
-          <a:lstStyle/>
-          <a:p>
-            <a:pPr algn="ctr"/>
-            <a:endParaRPr lang="en-GB"/>
-          </a:p>
-        </p:txBody>
-      </p:sp>
-      <p:sp>
-        <p:nvSpPr>
-          <p:cNvPr id="8" name="Rectangle 7">
-            <a:extLst>
-              <a:ext uri="{FF2B5EF4-FFF2-40B4-BE49-F238E27FC236}">
-                <a16:creationId xmlns:a16="http://schemas.microsoft.com/office/drawing/2014/main" id="{CF83EFDE-40D5-5DED-EC2D-04C76685548C}"/>
-              </a:ext>
-            </a:extLst>
-          </p:cNvPr>
-          <p:cNvSpPr/>
-          <p:nvPr userDrawn="1"/>
-        </p:nvSpPr>
-        <p:spPr>
-          <a:xfrm>
-            <a:off x="82510" y="376501"/>
-            <a:ext cx="9906000" cy="937697"/>
-          </a:xfrm>
-          <a:prstGeom prst="rect">
-            <a:avLst/>
-          </a:prstGeom>
-          <a:noFill/>
-          <a:ln>
-            <a:noFill/>
-          </a:ln>
-        </p:spPr>
-        <p:style>
-          <a:lnRef idx="2">
-            <a:schemeClr val="accent1">
-              <a:shade val="50000"/>
-            </a:schemeClr>
-          </a:lnRef>
-          <a:fillRef idx="1">
-            <a:schemeClr val="accent1"/>
-          </a:fillRef>
-          <a:effectRef idx="0">
-            <a:schemeClr val="accent1"/>
-          </a:effectRef>
-          <a:fontRef idx="minor">
-            <a:schemeClr val="lt1"/>
-          </a:fontRef>
-        </p:style>
-        <p:txBody>
-          <a:bodyPr rtlCol="0" anchor="ctr"/>
-          <a:lstStyle/>
-          <a:p>
-            <a:pPr algn="ctr"/>
-            <a:endParaRPr lang="en-GB"/>
-          </a:p>
-        </p:txBody>
-      </p:sp>
-      <p:pic>
-        <p:nvPicPr>
-          <p:cNvPr id="9" name="Graphic 8">
-            <a:extLst>
-              <a:ext uri="{FF2B5EF4-FFF2-40B4-BE49-F238E27FC236}">
-                <a16:creationId xmlns:a16="http://schemas.microsoft.com/office/drawing/2014/main" id="{1857AE01-FD5E-3922-26A9-AC9765042781}"/>
-              </a:ext>
-            </a:extLst>
-          </p:cNvPr>
-          <p:cNvPicPr>
-            <a:picLocks noChangeAspect="1"/>
-          </p:cNvPicPr>
-          <p:nvPr userDrawn="1"/>
-        </p:nvPicPr>
-        <p:blipFill>
-          <a:blip>
-            <a:extLst>
-              <a:ext uri="{28A0092B-C50C-407E-A947-70E740481C1C}">
-                <a14:useLocalDpi xmlns:a14="http://schemas.microsoft.com/office/drawing/2010/main" val="0"/>
-              </a:ext>
-              <a:ext uri="{96DAC541-7B7A-43D3-8B79-37D633B846F1}">
-                <asvg:svgBlip xmlns:asvg="http://schemas.microsoft.com/office/drawing/2016/SVG/main" r:embed="rId14"/>
-              </a:ext>
-            </a:extLst>
-          </a:blip>
-          <a:stretch>
-            <a:fillRect/>
-          </a:stretch>
-        </p:blipFill>
-        <p:spPr>
-          <a:xfrm>
-            <a:off x="7029258" y="-559124"/>
-            <a:ext cx="2688790" cy="2993641"/>
-          </a:xfrm>
-          <a:prstGeom prst="rect">
-            <a:avLst/>
-          </a:prstGeom>
-        </p:spPr>
-      </p:pic>
-    </p:spTree>
-    <p:extLst>
-      <p:ext uri="{BB962C8B-B14F-4D97-AF65-F5344CB8AC3E}">
-        <p14:creationId xmlns:p14="http://schemas.microsoft.com/office/powerpoint/2010/main" val="1674215266"/>
-      </p:ext>
-    </p:extLst>
-  </p:cSld>
-  <p:clrMap bg1="lt1" tx1="dk1" bg2="lt2" tx2="dk2" accent1="accent1" accent2="accent2" accent3="accent3" accent4="accent4" accent5="accent5" accent6="accent6" hlink="hlink" folHlink="folHlink"/>
-  <p:sldLayoutIdLst>
-    <p:sldLayoutId id="2147483746" r:id="rId1"/>
-    <p:sldLayoutId id="2147483747" r:id="rId2"/>
-    <p:sldLayoutId id="2147483748" r:id="rId3"/>
-    <p:sldLayoutId id="2147483749" r:id="rId4"/>
-    <p:sldLayoutId id="2147483750" r:id="rId5"/>
-    <p:sldLayoutId id="2147483751" r:id="rId6"/>
-    <p:sldLayoutId id="2147483752" r:id="rId7"/>
-    <p:sldLayoutId id="2147483753" r:id="rId8"/>
-    <p:sldLayoutId id="2147483754" r:id="rId9"/>
-    <p:sldLayoutId id="2147483755" r:id="rId10"/>
-    <p:sldLayoutId id="2147483756" r:id="rId11"/>
-    <p:sldLayoutId id="2147483757" r:id="rId12"/>
-  </p:sldLayoutIdLst>
-  <p:hf hdr="0" ftr="0" dt="0"/>
-  <p:txStyles>
-    <p:titleStyle>
-      <a:lvl1pPr algn="l" defTabSz="742950" rtl="0" eaLnBrk="1" latinLnBrk="0" hangingPunct="1">
-        <a:lnSpc>
-          <a:spcPct val="90000"/>
-        </a:lnSpc>
-        <a:spcBef>
-          <a:spcPct val="0"/>
-        </a:spcBef>
-        <a:buNone/>
-        <a:defRPr sz="3575" kern="1200">
-          <a:solidFill>
-            <a:schemeClr val="tx1"/>
-          </a:solidFill>
-          <a:latin typeface="+mj-lt"/>
-          <a:ea typeface="+mj-ea"/>
-          <a:cs typeface="+mj-cs"/>
-        </a:defRPr>
-      </a:lvl1pPr>
-    </p:titleStyle>
-    <p:bodyStyle>
-      <a:lvl1pPr marL="185738" indent="-185738" algn="l" defTabSz="742950" rtl="0" eaLnBrk="1" latinLnBrk="0" hangingPunct="1">
-        <a:lnSpc>
-          <a:spcPct val="90000"/>
-        </a:lnSpc>
-        <a:spcBef>
-          <a:spcPts val="813"/>
-        </a:spcBef>
-        <a:buFont typeface="Arial" panose="020B0604020202020204" pitchFamily="34" charset="0"/>
-        <a:buChar char="•"/>
-        <a:defRPr sz="2275" kern="1200">
-          <a:solidFill>
-            <a:schemeClr val="tx1"/>
-          </a:solidFill>
-          <a:latin typeface="+mn-lt"/>
-          <a:ea typeface="+mn-ea"/>
-          <a:cs typeface="+mn-cs"/>
-        </a:defRPr>
-      </a:lvl1pPr>
-      <a:lvl2pPr marL="557213" indent="-185738" algn="l" defTabSz="742950" rtl="0" eaLnBrk="1" latinLnBrk="0" hangingPunct="1">
-        <a:lnSpc>
-          <a:spcPct val="90000"/>
-        </a:lnSpc>
-        <a:spcBef>
-          <a:spcPts val="406"/>
-        </a:spcBef>
-        <a:buFont typeface="Arial" panose="020B0604020202020204" pitchFamily="34" charset="0"/>
-        <a:buChar char="•"/>
-        <a:defRPr sz="1950" kern="1200">
-          <a:solidFill>
-            <a:schemeClr val="tx1"/>
-          </a:solidFill>
-          <a:latin typeface="+mn-lt"/>
-          <a:ea typeface="+mn-ea"/>
-          <a:cs typeface="+mn-cs"/>
-        </a:defRPr>
-      </a:lvl2pPr>
-      <a:lvl3pPr marL="928688" indent="-185738" algn="l" defTabSz="742950" rtl="0" eaLnBrk="1" latinLnBrk="0" hangingPunct="1">
-        <a:lnSpc>
-          <a:spcPct val="90000"/>
-        </a:lnSpc>
-        <a:spcBef>
-          <a:spcPts val="406"/>
-        </a:spcBef>
-        <a:buFont typeface="Arial" panose="020B0604020202020204" pitchFamily="34" charset="0"/>
-        <a:buChar char="•"/>
-        <a:defRPr sz="1625" kern="1200">
-          <a:solidFill>
-            <a:schemeClr val="tx1"/>
-          </a:solidFill>
-          <a:latin typeface="+mn-lt"/>
-          <a:ea typeface="+mn-ea"/>
-          <a:cs typeface="+mn-cs"/>
-        </a:defRPr>
-      </a:lvl3pPr>
-      <a:lvl4pPr marL="1300163" indent="-185738" algn="l" defTabSz="742950" rtl="0" eaLnBrk="1" latinLnBrk="0" hangingPunct="1">
-        <a:lnSpc>
-          <a:spcPct val="90000"/>
-        </a:lnSpc>
-        <a:spcBef>
-          <a:spcPts val="406"/>
-        </a:spcBef>
-        <a:buFont typeface="Arial" panose="020B0604020202020204" pitchFamily="34" charset="0"/>
-        <a:buChar char="•"/>
-        <a:defRPr sz="1463" kern="1200">
-          <a:solidFill>
-            <a:schemeClr val="tx1"/>
-          </a:solidFill>
-          <a:latin typeface="+mn-lt"/>
-          <a:ea typeface="+mn-ea"/>
-          <a:cs typeface="+mn-cs"/>
-        </a:defRPr>
-      </a:lvl4pPr>
-      <a:lvl5pPr marL="1671638" indent="-185738" algn="l" defTabSz="742950" rtl="0" eaLnBrk="1" latinLnBrk="0" hangingPunct="1">
-        <a:lnSpc>
-          <a:spcPct val="90000"/>
-        </a:lnSpc>
-        <a:spcBef>
-          <a:spcPts val="406"/>
-        </a:spcBef>
-        <a:buFont typeface="Arial" panose="020B0604020202020204" pitchFamily="34" charset="0"/>
-        <a:buChar char="•"/>
-        <a:defRPr sz="1463" kern="1200">
-          <a:solidFill>
-            <a:schemeClr val="tx1"/>
-          </a:solidFill>
-          <a:latin typeface="+mn-lt"/>
-          <a:ea typeface="+mn-ea"/>
-          <a:cs typeface="+mn-cs"/>
-        </a:defRPr>
-      </a:lvl5pPr>
-      <a:lvl6pPr marL="2043113" indent="-185738" algn="l" defTabSz="742950" rtl="0" eaLnBrk="1" latinLnBrk="0" hangingPunct="1">
-        <a:lnSpc>
-          <a:spcPct val="90000"/>
-        </a:lnSpc>
-        <a:spcBef>
-          <a:spcPts val="406"/>
-        </a:spcBef>
-        <a:buFont typeface="Arial" panose="020B0604020202020204" pitchFamily="34" charset="0"/>
-        <a:buChar char="•"/>
-        <a:defRPr sz="1463" kern="1200">
-          <a:solidFill>
-            <a:schemeClr val="tx1"/>
-          </a:solidFill>
-          <a:latin typeface="+mn-lt"/>
-          <a:ea typeface="+mn-ea"/>
-          <a:cs typeface="+mn-cs"/>
-        </a:defRPr>
-      </a:lvl6pPr>
-      <a:lvl7pPr marL="2414588" indent="-185738" algn="l" defTabSz="742950" rtl="0" eaLnBrk="1" latinLnBrk="0" hangingPunct="1">
-        <a:lnSpc>
-          <a:spcPct val="90000"/>
-        </a:lnSpc>
-        <a:spcBef>
-          <a:spcPts val="406"/>
-        </a:spcBef>
-        <a:buFont typeface="Arial" panose="020B0604020202020204" pitchFamily="34" charset="0"/>
-        <a:buChar char="•"/>
-        <a:defRPr sz="1463" kern="1200">
-          <a:solidFill>
-            <a:schemeClr val="tx1"/>
-          </a:solidFill>
-          <a:latin typeface="+mn-lt"/>
-          <a:ea typeface="+mn-ea"/>
-          <a:cs typeface="+mn-cs"/>
-        </a:defRPr>
-      </a:lvl7pPr>
-      <a:lvl8pPr marL="2786063" indent="-185738" algn="l" defTabSz="742950" rtl="0" eaLnBrk="1" latinLnBrk="0" hangingPunct="1">
-        <a:lnSpc>
-          <a:spcPct val="90000"/>
-        </a:lnSpc>
-        <a:spcBef>
-          <a:spcPts val="406"/>
-        </a:spcBef>
-        <a:buFont typeface="Arial" panose="020B0604020202020204" pitchFamily="34" charset="0"/>
-        <a:buChar char="•"/>
-        <a:defRPr sz="1463" kern="1200">
-          <a:solidFill>
-            <a:schemeClr val="tx1"/>
-          </a:solidFill>
-          <a:latin typeface="+mn-lt"/>
-          <a:ea typeface="+mn-ea"/>
-          <a:cs typeface="+mn-cs"/>
-        </a:defRPr>
-      </a:lvl8pPr>
-      <a:lvl9pPr marL="3157538" indent="-185738" algn="l" defTabSz="742950" rtl="0" eaLnBrk="1" latinLnBrk="0" hangingPunct="1">
-        <a:lnSpc>
-          <a:spcPct val="90000"/>
-        </a:lnSpc>
-        <a:spcBef>
-          <a:spcPts val="406"/>
-        </a:spcBef>
-        <a:buFont typeface="Arial" panose="020B0604020202020204" pitchFamily="34" charset="0"/>
-        <a:buChar char="•"/>
-        <a:defRPr sz="1463" kern="1200">
-          <a:solidFill>
-            <a:schemeClr val="tx1"/>
-          </a:solidFill>
-          <a:latin typeface="+mn-lt"/>
-          <a:ea typeface="+mn-ea"/>
-          <a:cs typeface="+mn-cs"/>
-        </a:defRPr>
-      </a:lvl9pPr>
-    </p:bodyStyle>
-    <p:otherStyle>
-      <a:defPPr>
-        <a:defRPr lang="en-US"/>
-      </a:defPPr>
-      <a:lvl1pPr marL="0" algn="l" defTabSz="742950" rtl="0" eaLnBrk="1" latinLnBrk="0" hangingPunct="1">
-        <a:defRPr sz="1463" kern="1200">
-          <a:solidFill>
-            <a:schemeClr val="tx1"/>
-          </a:solidFill>
-          <a:latin typeface="+mn-lt"/>
-          <a:ea typeface="+mn-ea"/>
-          <a:cs typeface="+mn-cs"/>
-        </a:defRPr>
-      </a:lvl1pPr>
-      <a:lvl2pPr marL="371475" algn="l" defTabSz="742950" rtl="0" eaLnBrk="1" latinLnBrk="0" hangingPunct="1">
-        <a:defRPr sz="1463" kern="1200">
-          <a:solidFill>
-            <a:schemeClr val="tx1"/>
-          </a:solidFill>
-          <a:latin typeface="+mn-lt"/>
-          <a:ea typeface="+mn-ea"/>
-          <a:cs typeface="+mn-cs"/>
-        </a:defRPr>
-      </a:lvl2pPr>
-      <a:lvl3pPr marL="742950" algn="l" defTabSz="742950" rtl="0" eaLnBrk="1" latinLnBrk="0" hangingPunct="1">
-        <a:defRPr sz="1463" kern="1200">
-          <a:solidFill>
-            <a:schemeClr val="tx1"/>
-          </a:solidFill>
-          <a:latin typeface="+mn-lt"/>
-          <a:ea typeface="+mn-ea"/>
-          <a:cs typeface="+mn-cs"/>
-        </a:defRPr>
-      </a:lvl3pPr>
-      <a:lvl4pPr marL="1114425" algn="l" defTabSz="742950" rtl="0" eaLnBrk="1" latinLnBrk="0" hangingPunct="1">
-        <a:defRPr sz="1463" kern="1200">
-          <a:solidFill>
-            <a:schemeClr val="tx1"/>
-          </a:solidFill>
-          <a:latin typeface="+mn-lt"/>
-          <a:ea typeface="+mn-ea"/>
-          <a:cs typeface="+mn-cs"/>
-        </a:defRPr>
-      </a:lvl4pPr>
-      <a:lvl5pPr marL="1485900" algn="l" defTabSz="742950" rtl="0" eaLnBrk="1" latinLnBrk="0" hangingPunct="1">
-        <a:defRPr sz="1463" kern="1200">
-          <a:solidFill>
-            <a:schemeClr val="tx1"/>
-          </a:solidFill>
-          <a:latin typeface="+mn-lt"/>
-          <a:ea typeface="+mn-ea"/>
-          <a:cs typeface="+mn-cs"/>
-        </a:defRPr>
-      </a:lvl5pPr>
-      <a:lvl6pPr marL="1857375" algn="l" defTabSz="742950" rtl="0" eaLnBrk="1" latinLnBrk="0" hangingPunct="1">
-        <a:defRPr sz="1463" kern="1200">
-          <a:solidFill>
-            <a:schemeClr val="tx1"/>
-          </a:solidFill>
-          <a:latin typeface="+mn-lt"/>
-          <a:ea typeface="+mn-ea"/>
-          <a:cs typeface="+mn-cs"/>
-        </a:defRPr>
-      </a:lvl6pPr>
-      <a:lvl7pPr marL="2228850" algn="l" defTabSz="742950" rtl="0" eaLnBrk="1" latinLnBrk="0" hangingPunct="1">
-        <a:defRPr sz="1463" kern="1200">
-          <a:solidFill>
-            <a:schemeClr val="tx1"/>
-          </a:solidFill>
-          <a:latin typeface="+mn-lt"/>
-          <a:ea typeface="+mn-ea"/>
-          <a:cs typeface="+mn-cs"/>
-        </a:defRPr>
-      </a:lvl7pPr>
-      <a:lvl8pPr marL="2600325" algn="l" defTabSz="742950" rtl="0" eaLnBrk="1" latinLnBrk="0" hangingPunct="1">
-        <a:defRPr sz="1463" kern="1200">
-          <a:solidFill>
-            <a:schemeClr val="tx1"/>
-          </a:solidFill>
-          <a:latin typeface="+mn-lt"/>
-          <a:ea typeface="+mn-ea"/>
-          <a:cs typeface="+mn-cs"/>
-        </a:defRPr>
-      </a:lvl8pPr>
-      <a:lvl9pPr marL="2971800" algn="l" defTabSz="742950" rtl="0" eaLnBrk="1" latinLnBrk="0" hangingPunct="1">
-        <a:defRPr sz="1463" kern="1200">
-          <a:solidFill>
-            <a:schemeClr val="tx1"/>
-          </a:solidFill>
-          <a:latin typeface="+mn-lt"/>
-          <a:ea typeface="+mn-ea"/>
-          <a:cs typeface="+mn-cs"/>
-        </a:defRPr>
-      </a:lvl9pPr>
-    </p:otherStyle>
-  </p:txStyles>
-  <p:extLst>
-    <p:ext uri="{27BBF7A9-308A-43DC-89C8-2F10F3537804}">
-      <p15:sldGuideLst xmlns:p15="http://schemas.microsoft.com/office/powerpoint/2012/main">
-        <p15:guide id="1" orient="horz" pos="1026" userDrawn="1">
-          <p15:clr>
-            <a:srgbClr val="F26B43"/>
-          </p15:clr>
-        </p15:guide>
-        <p15:guide id="2" orient="horz" pos="3748" userDrawn="1">
-          <p15:clr>
-            <a:srgbClr val="F26B43"/>
-          </p15:clr>
-        </p15:guide>
-        <p15:guide id="3" pos="3120" userDrawn="1">
-          <p15:clr>
-            <a:srgbClr val="F26B43"/>
-          </p15:clr>
-        </p15:guide>
-        <p15:guide id="4" pos="466" userDrawn="1">
-          <p15:clr>
-            <a:srgbClr val="F26B43"/>
-          </p15:clr>
-        </p15:guide>
-        <p15:guide id="5" pos="5774" userDrawn="1">
+        <p15:guide id="10" pos="7106" userDrawn="1">
           <p15:clr>
             <a:srgbClr val="F26B43"/>
           </p15:clr>
@@ -8951,8 +5269,8 @@
         </p:nvSpPr>
         <p:spPr>
           <a:xfrm>
-            <a:off x="742950" y="4130165"/>
-            <a:ext cx="8420100" cy="1328455"/>
+            <a:off x="914400" y="4291975"/>
+            <a:ext cx="10363200" cy="1635022"/>
           </a:xfrm>
         </p:spPr>
         <p:txBody>
@@ -8963,14 +5281,14 @@
           <a:p>
             <a:pPr algn="l"/>
             <a:r>
-              <a:rPr lang="en-US" sz="4400" kern="0" spc="-94" dirty="0">
+              <a:rPr lang="en-US" sz="5416" kern="0" spc="-116" dirty="0">
                 <a:latin typeface="Arial" pitchFamily="34" charset="0"/>
                 <a:ea typeface="Arial" pitchFamily="34" charset="-122"/>
                 <a:cs typeface="Arial" pitchFamily="34" charset="-120"/>
               </a:rPr>
               <a:t>Portfolio &amp; Building Analytics</a:t>
             </a:r>
-            <a:endParaRPr lang="en-US" sz="4400" dirty="0"/>
+            <a:endParaRPr lang="en-US" sz="5416" dirty="0"/>
           </a:p>
         </p:txBody>
       </p:sp>
@@ -8986,20 +5304,20 @@
         </p:nvSpPr>
         <p:spPr/>
         <p:txBody>
-          <a:bodyPr vert="horz" lIns="91440" tIns="45720" rIns="91440" bIns="45720" rtlCol="0" anchor="t">
-            <a:normAutofit fontScale="92500" lnSpcReduction="10000"/>
+          <a:bodyPr vert="horz" lIns="112542" tIns="56271" rIns="112542" bIns="56271" rtlCol="0" anchor="t">
+            <a:normAutofit fontScale="70000" lnSpcReduction="20000"/>
           </a:bodyPr>
           <a:lstStyle/>
           <a:p>
             <a:r>
-              <a:rPr lang="en-US" sz="2400" kern="0" spc="-94" dirty="0">
+              <a:rPr lang="en-US" sz="2954" kern="0" spc="-116" dirty="0">
                 <a:latin typeface="Arial" pitchFamily="34" charset="0"/>
                 <a:ea typeface="Arial" pitchFamily="34" charset="-122"/>
                 <a:cs typeface="Arial" pitchFamily="34" charset="-120"/>
               </a:rPr>
               <a:t>Americas Real Estate Insights</a:t>
             </a:r>
-            <a:endParaRPr lang="en-US" sz="2400" dirty="0"/>
+            <a:endParaRPr lang="en-US" sz="2954" dirty="0"/>
           </a:p>
         </p:txBody>
       </p:sp>
@@ -9021,7 +5339,13 @@
   <p:cSld>
     <p:spTree>
       <p:nvGrpSpPr>
-        <p:cNvPr id="1" name=""/>
+        <p:cNvPr id="1" name="">
+          <a:extLst>
+            <a:ext uri="{FF2B5EF4-FFF2-40B4-BE49-F238E27FC236}">
+              <a16:creationId xmlns:a16="http://schemas.microsoft.com/office/drawing/2014/main" id="{08FF5D8A-18FF-87D5-9766-DE5F759FB577}"/>
+            </a:ext>
+          </a:extLst>
+        </p:cNvPr>
         <p:cNvGrpSpPr/>
         <p:nvPr/>
       </p:nvGrpSpPr>
@@ -9035,63 +5359,10 @@
       </p:grpSpPr>
       <p:sp>
         <p:nvSpPr>
-          <p:cNvPr id="10" name="TextBox 9">
+          <p:cNvPr id="5" name="Rectangle: Rounded Corners 4">
             <a:extLst>
               <a:ext uri="{FF2B5EF4-FFF2-40B4-BE49-F238E27FC236}">
-                <a16:creationId xmlns:a16="http://schemas.microsoft.com/office/drawing/2014/main" id="{0D81F1DA-39EA-A422-4FB7-F151AE75E95B}"/>
-              </a:ext>
-            </a:extLst>
-          </p:cNvPr>
-          <p:cNvSpPr txBox="1"/>
-          <p:nvPr/>
-        </p:nvSpPr>
-        <p:spPr>
-          <a:xfrm>
-            <a:off x="4642375" y="4100053"/>
-            <a:ext cx="4973574" cy="2308324"/>
-          </a:xfrm>
-          <a:prstGeom prst="rect">
-            <a:avLst/>
-          </a:prstGeom>
-          <a:noFill/>
-        </p:spPr>
-        <p:txBody>
-          <a:bodyPr wrap="square">
-            <a:spAutoFit/>
-          </a:bodyPr>
-          <a:lstStyle/>
-          <a:p>
-            <a:pPr>
-              <a:buNone/>
-            </a:pPr>
-            <a:r>
-              <a:rPr lang="en-US" sz="1600" dirty="0"/>
-              <a:t>Across the 10 Americas buildings, vacancy rates are consistently low — ranging from 4.1% to 5.7% for nine of the buildings. Building F stands as a significant outlier at 24% vacancy, nearly 5x the portfolio average.</a:t>
-            </a:r>
-          </a:p>
-          <a:p>
-            <a:pPr>
-              <a:buNone/>
-            </a:pPr>
-            <a:endParaRPr lang="en-US" sz="1600" dirty="0"/>
-          </a:p>
-          <a:p>
-            <a:pPr>
-              <a:buNone/>
-            </a:pPr>
-            <a:r>
-              <a:rPr lang="en-US" sz="1600" dirty="0"/>
-              <a:t>Building E has the next highest vacancy at 5.7%, followed by Building H at 5.6%. Buildings G and A are the most efficiently utilized at 4.1% and 4.4% respectively.</a:t>
-            </a:r>
-          </a:p>
-        </p:txBody>
-      </p:sp>
-      <p:sp>
-        <p:nvSpPr>
-          <p:cNvPr id="13" name="Rectangle 12">
-            <a:extLst>
-              <a:ext uri="{FF2B5EF4-FFF2-40B4-BE49-F238E27FC236}">
-                <a16:creationId xmlns:a16="http://schemas.microsoft.com/office/drawing/2014/main" id="{7C0FE98C-A16B-B331-9711-B23546B52257}"/>
+                <a16:creationId xmlns:a16="http://schemas.microsoft.com/office/drawing/2014/main" id="{8995F7BB-EC1C-2567-CE18-F65655EC3886}"/>
               </a:ext>
             </a:extLst>
           </p:cNvPr>
@@ -9100,18 +5371,24 @@
         </p:nvSpPr>
         <p:spPr>
           <a:xfrm>
-            <a:off x="0" y="0"/>
-            <a:ext cx="9906000" cy="953729"/>
-          </a:xfrm>
-          <a:prstGeom prst="rect">
-            <a:avLst/>
+            <a:off x="479064" y="1079239"/>
+            <a:ext cx="5194149" cy="5587609"/>
+          </a:xfrm>
+          <a:prstGeom prst="roundRect">
+            <a:avLst>
+              <a:gd name="adj" fmla="val 6066"/>
+            </a:avLst>
           </a:prstGeom>
           <a:solidFill>
-            <a:schemeClr val="bg1"/>
+            <a:schemeClr val="bg1">
+              <a:lumMod val="95000"/>
+            </a:schemeClr>
           </a:solidFill>
           <a:ln>
             <a:solidFill>
-              <a:schemeClr val="bg1"/>
+              <a:schemeClr val="bg1">
+                <a:lumMod val="95000"/>
+              </a:schemeClr>
             </a:solidFill>
           </a:ln>
         </p:spPr>
@@ -9142,48 +5419,127 @@
       </p:sp>
       <p:sp>
         <p:nvSpPr>
-          <p:cNvPr id="12" name="TextBox 11">
+          <p:cNvPr id="3" name="Content Placeholder 2">
             <a:extLst>
               <a:ext uri="{FF2B5EF4-FFF2-40B4-BE49-F238E27FC236}">
-                <a16:creationId xmlns:a16="http://schemas.microsoft.com/office/drawing/2014/main" id="{D1D04286-3226-6A86-B428-27A06188B343}"/>
+                <a16:creationId xmlns:a16="http://schemas.microsoft.com/office/drawing/2014/main" id="{EFA3789E-094F-B341-1136-7D99EA13AC9A}"/>
               </a:ext>
             </a:extLst>
           </p:cNvPr>
-          <p:cNvSpPr txBox="1"/>
-          <p:nvPr/>
-        </p:nvSpPr>
-        <p:spPr>
-          <a:xfrm>
-            <a:off x="290051" y="4208208"/>
-            <a:ext cx="4026309" cy="954107"/>
-          </a:xfrm>
-          <a:prstGeom prst="rect">
-            <a:avLst/>
-          </a:prstGeom>
-          <a:noFill/>
-        </p:spPr>
-        <p:txBody>
-          <a:bodyPr wrap="square">
-            <a:spAutoFit/>
+          <p:cNvSpPr>
+            <a:spLocks noGrp="1"/>
+          </p:cNvSpPr>
+          <p:nvPr>
+            <p:ph idx="1"/>
+          </p:nvPr>
+        </p:nvSpPr>
+        <p:spPr>
+          <a:xfrm>
+            <a:off x="733791" y="1715115"/>
+            <a:ext cx="4760174" cy="4951733"/>
+          </a:xfrm>
+        </p:spPr>
+        <p:txBody>
+          <a:bodyPr>
+            <a:normAutofit/>
           </a:bodyPr>
           <a:lstStyle/>
           <a:p>
-            <a:pPr>
-              <a:buNone/>
+            <a:pPr marL="351701" indent="-351701">
+              <a:lnSpc>
+                <a:spcPct val="100000"/>
+              </a:lnSpc>
+              <a:buFont typeface="Arial" panose="020B0604020202020204" pitchFamily="34" charset="0"/>
+              <a:buChar char="•"/>
             </a:pPr>
             <a:r>
-              <a:rPr lang="en-US" sz="2800" b="1" dirty="0"/>
-              <a:t>Building Level Metrics – </a:t>
-            </a:r>
-          </a:p>
-          <a:p>
-            <a:pPr>
-              <a:buNone/>
+              <a:rPr lang="en-US" sz="2000" dirty="0">
+                <a:latin typeface="Roboto" panose="02000000000000000000" pitchFamily="2" charset="0"/>
+                <a:ea typeface="Roboto" panose="02000000000000000000" pitchFamily="2" charset="0"/>
+                <a:cs typeface="Roboto" panose="02000000000000000000" pitchFamily="2" charset="0"/>
+              </a:rPr>
+              <a:t>Analyzed 10 buildings across the Americas region</a:t>
+            </a:r>
+          </a:p>
+          <a:p>
+            <a:pPr marL="351701" indent="-351701">
+              <a:lnSpc>
+                <a:spcPct val="100000"/>
+              </a:lnSpc>
+              <a:buFont typeface="Arial" panose="020B0604020202020204" pitchFamily="34" charset="0"/>
+              <a:buChar char="•"/>
             </a:pPr>
             <a:r>
-              <a:rPr lang="en-US" sz="2800" b="1" dirty="0"/>
-              <a:t>Vacant % by Building</a:t>
-            </a:r>
+              <a:rPr lang="en-US" sz="2000" dirty="0">
+                <a:latin typeface="Roboto" panose="02000000000000000000" pitchFamily="2" charset="0"/>
+                <a:ea typeface="Roboto" panose="02000000000000000000" pitchFamily="2" charset="0"/>
+                <a:cs typeface="Roboto" panose="02000000000000000000" pitchFamily="2" charset="0"/>
+              </a:rPr>
+              <a:t>Building F is a clear outlier at 24% vacancy - well above portfolio average</a:t>
+            </a:r>
+          </a:p>
+          <a:p>
+            <a:pPr marL="351701" indent="-351701">
+              <a:lnSpc>
+                <a:spcPct val="100000"/>
+              </a:lnSpc>
+              <a:buFont typeface="Arial" panose="020B0604020202020204" pitchFamily="34" charset="0"/>
+              <a:buChar char="•"/>
+            </a:pPr>
+            <a:r>
+              <a:rPr lang="en-US" sz="2000" dirty="0">
+                <a:latin typeface="Roboto" panose="02000000000000000000" pitchFamily="2" charset="0"/>
+                <a:ea typeface="Roboto" panose="02000000000000000000" pitchFamily="2" charset="0"/>
+                <a:cs typeface="Roboto" panose="02000000000000000000" pitchFamily="2" charset="0"/>
+              </a:rPr>
+              <a:t>Remaining buildings (E, H, C, B, etc.) mostly below 10% vacancy</a:t>
+            </a:r>
+          </a:p>
+          <a:p>
+            <a:pPr marL="351701" indent="-351701">
+              <a:lnSpc>
+                <a:spcPct val="100000"/>
+              </a:lnSpc>
+              <a:buFont typeface="Arial" panose="020B0604020202020204" pitchFamily="34" charset="0"/>
+              <a:buChar char="•"/>
+            </a:pPr>
+            <a:r>
+              <a:rPr lang="en-US" sz="2000" dirty="0">
+                <a:latin typeface="Roboto" panose="02000000000000000000" pitchFamily="2" charset="0"/>
+                <a:ea typeface="Roboto" panose="02000000000000000000" pitchFamily="2" charset="0"/>
+                <a:cs typeface="Roboto" panose="02000000000000000000" pitchFamily="2" charset="0"/>
+              </a:rPr>
+              <a:t>Indicates strong space utilization across the region, aside from Building F</a:t>
+            </a:r>
+          </a:p>
+        </p:txBody>
+      </p:sp>
+      <p:sp>
+        <p:nvSpPr>
+          <p:cNvPr id="4" name="Title 3">
+            <a:extLst>
+              <a:ext uri="{FF2B5EF4-FFF2-40B4-BE49-F238E27FC236}">
+                <a16:creationId xmlns:a16="http://schemas.microsoft.com/office/drawing/2014/main" id="{E259C936-6549-7E39-4EB2-235CC7DCF66F}"/>
+              </a:ext>
+            </a:extLst>
+          </p:cNvPr>
+          <p:cNvSpPr>
+            <a:spLocks noGrp="1"/>
+          </p:cNvSpPr>
+          <p:nvPr>
+            <p:ph type="title"/>
+          </p:nvPr>
+        </p:nvSpPr>
+        <p:spPr/>
+        <p:txBody>
+          <a:bodyPr/>
+          <a:lstStyle/>
+          <a:p>
+            <a:r>
+              <a:rPr lang="en-US" b="1" spc="246" dirty="0"/>
+              <a:t>Vacancy Analysis Across Americas Portfolio</a:t>
+            </a:r>
+            <a:endParaRPr lang="en-US" spc="246" dirty="0"/>
           </a:p>
         </p:txBody>
       </p:sp>
@@ -9192,7 +5548,7 @@
           <p:cNvPr id="6" name="Picture 5">
             <a:extLst>
               <a:ext uri="{FF2B5EF4-FFF2-40B4-BE49-F238E27FC236}">
-                <a16:creationId xmlns:a16="http://schemas.microsoft.com/office/drawing/2014/main" id="{6313C5A4-A268-7C6A-1F86-CD3588472186}"/>
+                <a16:creationId xmlns:a16="http://schemas.microsoft.com/office/drawing/2014/main" id="{BB757E95-63C6-F662-6046-4044A3E7CBA5}"/>
               </a:ext>
             </a:extLst>
           </p:cNvPr>
@@ -9203,24 +5559,91 @@
         </p:nvPicPr>
         <p:blipFill>
           <a:blip r:embed="rId2"/>
+          <a:srcRect t="4440" r="2416" b="2650"/>
           <a:stretch>
             <a:fillRect/>
           </a:stretch>
         </p:blipFill>
         <p:spPr>
           <a:xfrm>
-            <a:off x="144115" y="202654"/>
-            <a:ext cx="9617769" cy="3422991"/>
+            <a:off x="6096000" y="1135732"/>
+            <a:ext cx="5887287" cy="5531116"/>
           </a:xfrm>
           <a:prstGeom prst="rect">
             <a:avLst/>
           </a:prstGeom>
+          <a:ln>
+            <a:solidFill>
+              <a:schemeClr val="bg1"/>
+            </a:solidFill>
+          </a:ln>
         </p:spPr>
       </p:pic>
+      <p:sp>
+        <p:nvSpPr>
+          <p:cNvPr id="7" name="Rectangle: Rounded Corners 6">
+            <a:extLst>
+              <a:ext uri="{FF2B5EF4-FFF2-40B4-BE49-F238E27FC236}">
+                <a16:creationId xmlns:a16="http://schemas.microsoft.com/office/drawing/2014/main" id="{6C427A11-F1BF-BC96-097C-C5D3FA5C244A}"/>
+              </a:ext>
+            </a:extLst>
+          </p:cNvPr>
+          <p:cNvSpPr/>
+          <p:nvPr/>
+        </p:nvSpPr>
+        <p:spPr>
+          <a:xfrm>
+            <a:off x="855406" y="1366684"/>
+            <a:ext cx="4355691" cy="599768"/>
+          </a:xfrm>
+          <a:prstGeom prst="roundRect">
+            <a:avLst>
+              <a:gd name="adj" fmla="val 50000"/>
+            </a:avLst>
+          </a:prstGeom>
+          <a:solidFill>
+            <a:srgbClr val="1767D2"/>
+          </a:solidFill>
+          <a:ln>
+            <a:solidFill>
+              <a:srgbClr val="1767D2"/>
+            </a:solidFill>
+          </a:ln>
+        </p:spPr>
+        <p:style>
+          <a:lnRef idx="2">
+            <a:schemeClr val="accent1">
+              <a:shade val="15000"/>
+            </a:schemeClr>
+          </a:lnRef>
+          <a:fillRef idx="1">
+            <a:schemeClr val="accent1"/>
+          </a:fillRef>
+          <a:effectRef idx="0">
+            <a:schemeClr val="accent1"/>
+          </a:effectRef>
+          <a:fontRef idx="minor">
+            <a:schemeClr val="lt1"/>
+          </a:fontRef>
+        </p:style>
+        <p:txBody>
+          <a:bodyPr rtlCol="0" anchor="ctr"/>
+          <a:lstStyle/>
+          <a:p>
+            <a:pPr algn="ctr"/>
+            <a:r>
+              <a:rPr lang="en-US" sz="1600" b="1" dirty="0">
+                <a:latin typeface="+mj-lt"/>
+              </a:rPr>
+              <a:t>24% VACANCY – BUILDING F IS THE OUTLIER</a:t>
+            </a:r>
+          </a:p>
+        </p:txBody>
+      </p:sp>
     </p:spTree>
     <p:extLst>
       <p:ext uri="{BB962C8B-B14F-4D97-AF65-F5344CB8AC3E}">
-        <p14:creationId xmlns:p14="http://schemas.microsoft.com/office/powerpoint/2010/main" val="1578780350"/>
+        <p14:creationId xmlns:p14="http://schemas.microsoft.com/office/powerpoint/2010/main" val="205393220"/>
       </p:ext>
     </p:extLst>
   </p:cSld>
@@ -9238,7 +5661,7 @@
         <p:cNvPr id="1" name="">
           <a:extLst>
             <a:ext uri="{FF2B5EF4-FFF2-40B4-BE49-F238E27FC236}">
-              <a16:creationId xmlns:a16="http://schemas.microsoft.com/office/drawing/2014/main" id="{410F1259-5130-AB37-9F08-E6382A556327}"/>
+              <a16:creationId xmlns:a16="http://schemas.microsoft.com/office/drawing/2014/main" id="{3CC1E205-ADD0-934E-9E56-6CD3CFB1CBEB}"/>
             </a:ext>
           </a:extLst>
         </p:cNvPr>
@@ -9255,10 +5678,131 @@
       </p:grpSpPr>
       <p:sp>
         <p:nvSpPr>
+          <p:cNvPr id="12" name="Rectangle: Rounded Corners 11">
+            <a:extLst>
+              <a:ext uri="{FF2B5EF4-FFF2-40B4-BE49-F238E27FC236}">
+                <a16:creationId xmlns:a16="http://schemas.microsoft.com/office/drawing/2014/main" id="{FCB7F9BB-0450-325A-7380-2C316D4B0B7D}"/>
+              </a:ext>
+            </a:extLst>
+          </p:cNvPr>
+          <p:cNvSpPr/>
+          <p:nvPr/>
+        </p:nvSpPr>
+        <p:spPr>
+          <a:xfrm>
+            <a:off x="479064" y="5053312"/>
+            <a:ext cx="5244826" cy="1613536"/>
+          </a:xfrm>
+          <a:prstGeom prst="roundRect">
+            <a:avLst>
+              <a:gd name="adj" fmla="val 12769"/>
+            </a:avLst>
+          </a:prstGeom>
+          <a:solidFill>
+            <a:schemeClr val="accent1">
+              <a:lumMod val="20000"/>
+              <a:lumOff val="80000"/>
+            </a:schemeClr>
+          </a:solidFill>
+          <a:ln>
+            <a:solidFill>
+              <a:schemeClr val="bg1">
+                <a:lumMod val="95000"/>
+              </a:schemeClr>
+            </a:solidFill>
+          </a:ln>
+        </p:spPr>
+        <p:style>
+          <a:lnRef idx="2">
+            <a:schemeClr val="accent1">
+              <a:shade val="15000"/>
+            </a:schemeClr>
+          </a:lnRef>
+          <a:fillRef idx="1">
+            <a:schemeClr val="accent1"/>
+          </a:fillRef>
+          <a:effectRef idx="0">
+            <a:schemeClr val="accent1"/>
+          </a:effectRef>
+          <a:fontRef idx="minor">
+            <a:schemeClr val="lt1"/>
+          </a:fontRef>
+        </p:style>
+        <p:txBody>
+          <a:bodyPr rtlCol="0" anchor="ctr"/>
+          <a:lstStyle/>
+          <a:p>
+            <a:pPr algn="ctr"/>
+            <a:endParaRPr lang="en-US"/>
+          </a:p>
+        </p:txBody>
+      </p:sp>
+      <p:sp>
+        <p:nvSpPr>
+          <p:cNvPr id="5" name="Rectangle: Rounded Corners 4">
+            <a:extLst>
+              <a:ext uri="{FF2B5EF4-FFF2-40B4-BE49-F238E27FC236}">
+                <a16:creationId xmlns:a16="http://schemas.microsoft.com/office/drawing/2014/main" id="{0B0ED335-620B-D0F2-A181-4351B9F74562}"/>
+              </a:ext>
+            </a:extLst>
+          </p:cNvPr>
+          <p:cNvSpPr/>
+          <p:nvPr/>
+        </p:nvSpPr>
+        <p:spPr>
+          <a:xfrm>
+            <a:off x="479064" y="1079240"/>
+            <a:ext cx="5194149" cy="3786789"/>
+          </a:xfrm>
+          <a:prstGeom prst="roundRect">
+            <a:avLst>
+              <a:gd name="adj" fmla="val 6066"/>
+            </a:avLst>
+          </a:prstGeom>
+          <a:solidFill>
+            <a:schemeClr val="bg1">
+              <a:lumMod val="95000"/>
+            </a:schemeClr>
+          </a:solidFill>
+          <a:ln>
+            <a:solidFill>
+              <a:schemeClr val="bg1">
+                <a:lumMod val="95000"/>
+              </a:schemeClr>
+            </a:solidFill>
+          </a:ln>
+        </p:spPr>
+        <p:style>
+          <a:lnRef idx="2">
+            <a:schemeClr val="accent1">
+              <a:shade val="15000"/>
+            </a:schemeClr>
+          </a:lnRef>
+          <a:fillRef idx="1">
+            <a:schemeClr val="accent1"/>
+          </a:fillRef>
+          <a:effectRef idx="0">
+            <a:schemeClr val="accent1"/>
+          </a:effectRef>
+          <a:fontRef idx="minor">
+            <a:schemeClr val="lt1"/>
+          </a:fontRef>
+        </p:style>
+        <p:txBody>
+          <a:bodyPr rtlCol="0" anchor="ctr"/>
+          <a:lstStyle/>
+          <a:p>
+            <a:pPr algn="ctr"/>
+            <a:endParaRPr lang="en-US"/>
+          </a:p>
+        </p:txBody>
+      </p:sp>
+      <p:sp>
+        <p:nvSpPr>
           <p:cNvPr id="3" name="Content Placeholder 2">
             <a:extLst>
               <a:ext uri="{FF2B5EF4-FFF2-40B4-BE49-F238E27FC236}">
-                <a16:creationId xmlns:a16="http://schemas.microsoft.com/office/drawing/2014/main" id="{EBC2478C-BEF6-73CC-C164-5B6E7ED9D37D}"/>
+                <a16:creationId xmlns:a16="http://schemas.microsoft.com/office/drawing/2014/main" id="{C1C0D56A-47C7-A6FD-01AC-EFCBE766D134}"/>
               </a:ext>
             </a:extLst>
           </p:cNvPr>
@@ -9271,8 +5815,8 @@
         </p:nvSpPr>
         <p:spPr>
           <a:xfrm>
-            <a:off x="438398" y="1440082"/>
-            <a:ext cx="4261421" cy="2706329"/>
+            <a:off x="792784" y="1813436"/>
+            <a:ext cx="4760174" cy="3160745"/>
           </a:xfrm>
         </p:spPr>
         <p:txBody>
@@ -9281,12 +5825,26 @@
           </a:bodyPr>
           <a:lstStyle/>
           <a:p>
-            <a:pPr marL="285750" indent="-285750">
+            <a:pPr marL="351701" indent="-351701">
               <a:buFont typeface="Arial" panose="020B0604020202020204" pitchFamily="34" charset="0"/>
               <a:buChar char="•"/>
             </a:pPr>
             <a:r>
-              <a:rPr lang="en-US" sz="1600" dirty="0">
+              <a:rPr lang="en-US" sz="1800" dirty="0">
+                <a:latin typeface="Roboto" panose="02000000000000000000" pitchFamily="2" charset="0"/>
+                <a:ea typeface="Roboto" panose="02000000000000000000" pitchFamily="2" charset="0"/>
+                <a:cs typeface="Roboto" panose="02000000000000000000" pitchFamily="2" charset="0"/>
+              </a:rPr>
+              <a:t>Retail is a clear outlier at 68% alignment (32% misallocated) — nearly 3x the building average</a:t>
+            </a:r>
+          </a:p>
+          <a:p>
+            <a:pPr marL="351701" indent="-351701">
+              <a:buFont typeface="Arial" panose="020B0604020202020204" pitchFamily="34" charset="0"/>
+              <a:buChar char="•"/>
+            </a:pPr>
+            <a:r>
+              <a:rPr lang="en-US" sz="1800" dirty="0">
                 <a:latin typeface="Roboto" panose="02000000000000000000" pitchFamily="2" charset="0"/>
                 <a:ea typeface="Roboto" panose="02000000000000000000" pitchFamily="2" charset="0"/>
                 <a:cs typeface="Roboto" panose="02000000000000000000" pitchFamily="2" charset="0"/>
@@ -9295,12 +5853,12 @@
             </a:r>
           </a:p>
           <a:p>
-            <a:pPr marL="285750" indent="-285750">
+            <a:pPr marL="351701" indent="-351701">
               <a:buFont typeface="Arial" panose="020B0604020202020204" pitchFamily="34" charset="0"/>
               <a:buChar char="•"/>
             </a:pPr>
             <a:r>
-              <a:rPr lang="en-US" sz="1600" dirty="0">
+              <a:rPr lang="en-US" sz="1800" dirty="0">
                 <a:latin typeface="Roboto" panose="02000000000000000000" pitchFamily="2" charset="0"/>
                 <a:ea typeface="Roboto" panose="02000000000000000000" pitchFamily="2" charset="0"/>
                 <a:cs typeface="Roboto" panose="02000000000000000000" pitchFamily="2" charset="0"/>
@@ -9308,20 +5866,6 @@
               <a:t>Engineering, Finance, Staff Groups, Operations all Healthy/Excellent (89–96%)</a:t>
             </a:r>
           </a:p>
-          <a:p>
-            <a:pPr marL="285750" indent="-285750">
-              <a:buFont typeface="Arial" panose="020B0604020202020204" pitchFamily="34" charset="0"/>
-              <a:buChar char="•"/>
-            </a:pPr>
-            <a:r>
-              <a:rPr lang="en-US" sz="1600" dirty="0">
-                <a:latin typeface="Roboto" panose="02000000000000000000" pitchFamily="2" charset="0"/>
-                <a:ea typeface="Roboto" panose="02000000000000000000" pitchFamily="2" charset="0"/>
-                <a:cs typeface="Roboto" panose="02000000000000000000" pitchFamily="2" charset="0"/>
-              </a:rPr>
-              <a:t>Retail is a clear outlier at 68% alignment (32% misallocated) — nearly 3x the building average</a:t>
-            </a:r>
-          </a:p>
         </p:txBody>
       </p:sp>
       <p:sp>
@@ -9329,7 +5873,7 @@
           <p:cNvPr id="4" name="Title 3">
             <a:extLst>
               <a:ext uri="{FF2B5EF4-FFF2-40B4-BE49-F238E27FC236}">
-                <a16:creationId xmlns:a16="http://schemas.microsoft.com/office/drawing/2014/main" id="{5C55D89B-124F-4845-E705-F44BC7BFFCFE}"/>
+                <a16:creationId xmlns:a16="http://schemas.microsoft.com/office/drawing/2014/main" id="{13D2FD26-8A6C-05E3-0F2B-02C661F866F3}"/>
               </a:ext>
             </a:extLst>
           </p:cNvPr>
@@ -9346,19 +5890,80 @@
           <a:lstStyle/>
           <a:p>
             <a:r>
-              <a:rPr lang="en-US" b="1" kern="1400" spc="200" dirty="0"/>
-              <a:t>Actual vs. Allocated Space Alignment – Building F</a:t>
-            </a:r>
-            <a:endParaRPr lang="en-US" kern="1400" spc="200" dirty="0"/>
+              <a:rPr lang="en-US" b="1" spc="246" dirty="0"/>
+              <a:t>Actual vs Allocated Space Alignment – Building F</a:t>
+            </a:r>
+            <a:endParaRPr lang="en-US" spc="246" dirty="0"/>
+          </a:p>
+        </p:txBody>
+      </p:sp>
+      <p:sp>
+        <p:nvSpPr>
+          <p:cNvPr id="7" name="Rectangle: Rounded Corners 6">
+            <a:extLst>
+              <a:ext uri="{FF2B5EF4-FFF2-40B4-BE49-F238E27FC236}">
+                <a16:creationId xmlns:a16="http://schemas.microsoft.com/office/drawing/2014/main" id="{D19FF3F1-D6A3-2DC3-E685-CECEF7D65909}"/>
+              </a:ext>
+            </a:extLst>
+          </p:cNvPr>
+          <p:cNvSpPr/>
+          <p:nvPr/>
+        </p:nvSpPr>
+        <p:spPr>
+          <a:xfrm>
+            <a:off x="855406" y="1238860"/>
+            <a:ext cx="4355691" cy="599768"/>
+          </a:xfrm>
+          <a:prstGeom prst="roundRect">
+            <a:avLst>
+              <a:gd name="adj" fmla="val 50000"/>
+            </a:avLst>
+          </a:prstGeom>
+          <a:solidFill>
+            <a:srgbClr val="1767D2"/>
+          </a:solidFill>
+          <a:ln>
+            <a:solidFill>
+              <a:srgbClr val="1767D2"/>
+            </a:solidFill>
+          </a:ln>
+        </p:spPr>
+        <p:style>
+          <a:lnRef idx="2">
+            <a:schemeClr val="accent1">
+              <a:shade val="15000"/>
+            </a:schemeClr>
+          </a:lnRef>
+          <a:fillRef idx="1">
+            <a:schemeClr val="accent1"/>
+          </a:fillRef>
+          <a:effectRef idx="0">
+            <a:schemeClr val="accent1"/>
+          </a:effectRef>
+          <a:fontRef idx="minor">
+            <a:schemeClr val="lt1"/>
+          </a:fontRef>
+        </p:style>
+        <p:txBody>
+          <a:bodyPr rtlCol="0" anchor="ctr"/>
+          <a:lstStyle/>
+          <a:p>
+            <a:pPr algn="ctr"/>
+            <a:r>
+              <a:rPr lang="en-US" sz="1600" b="1" dirty="0">
+                <a:latin typeface="+mj-lt"/>
+              </a:rPr>
+              <a:t>68% ALIGNED – RETAIL IS THE OUTLIER</a:t>
+            </a:r>
           </a:p>
         </p:txBody>
       </p:sp>
       <p:pic>
         <p:nvPicPr>
-          <p:cNvPr id="5" name="Picture 4">
+          <p:cNvPr id="8" name="Picture 7">
             <a:extLst>
               <a:ext uri="{FF2B5EF4-FFF2-40B4-BE49-F238E27FC236}">
-                <a16:creationId xmlns:a16="http://schemas.microsoft.com/office/drawing/2014/main" id="{81EF81EE-0C21-21CA-48AA-B9ADA59BE318}"/>
+                <a16:creationId xmlns:a16="http://schemas.microsoft.com/office/drawing/2014/main" id="{A6FFF25E-E041-7CA4-EAC2-328AA7AB0BB3}"/>
               </a:ext>
             </a:extLst>
           </p:cNvPr>
@@ -9375,25 +5980,25 @@
         </p:blipFill>
         <p:spPr>
           <a:xfrm>
-            <a:off x="4939950" y="1422876"/>
-            <a:ext cx="4484494" cy="4220840"/>
+            <a:off x="6290087" y="1189700"/>
+            <a:ext cx="5519377" cy="5194880"/>
           </a:xfrm>
           <a:prstGeom prst="rect">
             <a:avLst/>
           </a:prstGeom>
           <a:ln>
             <a:solidFill>
-              <a:schemeClr val="tx1"/>
+              <a:schemeClr val="bg1"/>
             </a:solidFill>
           </a:ln>
         </p:spPr>
       </p:pic>
       <p:sp>
         <p:nvSpPr>
-          <p:cNvPr id="2" name="Content Placeholder 2">
+          <p:cNvPr id="10" name="Content Placeholder 2">
             <a:extLst>
               <a:ext uri="{FF2B5EF4-FFF2-40B4-BE49-F238E27FC236}">
-                <a16:creationId xmlns:a16="http://schemas.microsoft.com/office/drawing/2014/main" id="{B1FF8A76-5998-AB9D-227B-A0C933D2DED5}"/>
+                <a16:creationId xmlns:a16="http://schemas.microsoft.com/office/drawing/2014/main" id="{55051498-C6FC-DA78-BDBA-FB319ED07C10}"/>
               </a:ext>
             </a:extLst>
           </p:cNvPr>
@@ -9404,15 +6009,575 @@
         </p:nvSpPr>
         <p:spPr>
           <a:xfrm>
-            <a:off x="662942" y="4146411"/>
-            <a:ext cx="4261421" cy="1596102"/>
+            <a:off x="657089" y="5053312"/>
+            <a:ext cx="5244826" cy="1613537"/>
           </a:xfrm>
           <a:prstGeom prst="rect">
             <a:avLst/>
           </a:prstGeom>
         </p:spPr>
         <p:txBody>
-          <a:bodyPr vert="horz" lIns="91440" tIns="180000" rIns="91440" bIns="180000" rtlCol="0" anchor="ctr">
+          <a:bodyPr vert="horz" lIns="112542" tIns="221538" rIns="112542" bIns="221538" rtlCol="0" anchor="ctr">
+            <a:normAutofit lnSpcReduction="10000"/>
+          </a:bodyPr>
+          <a:lstStyle>
+            <a:lvl1pPr marL="0" indent="0" algn="l" defTabSz="914400" rtl="0" eaLnBrk="1" latinLnBrk="0" hangingPunct="1">
+              <a:lnSpc>
+                <a:spcPct val="90000"/>
+              </a:lnSpc>
+              <a:spcBef>
+                <a:spcPts val="1800"/>
+              </a:spcBef>
+              <a:buClr>
+                <a:schemeClr val="accent1"/>
+              </a:buClr>
+              <a:buFont typeface="Wingdings" panose="05000000000000000000" pitchFamily="2" charset="2"/>
+              <a:buNone/>
+              <a:defRPr sz="1400" b="0" kern="1200">
+                <a:solidFill>
+                  <a:schemeClr val="tx1"/>
+                </a:solidFill>
+                <a:latin typeface="Roboto Medium" panose="02000000000000000000" pitchFamily="2" charset="0"/>
+                <a:ea typeface="Roboto Medium" panose="02000000000000000000" pitchFamily="2" charset="0"/>
+                <a:cs typeface="Roboto Medium" panose="02000000000000000000" pitchFamily="2" charset="0"/>
+              </a:defRPr>
+            </a:lvl1pPr>
+            <a:lvl2pPr marL="800100" indent="-342900" algn="l" defTabSz="914400" rtl="0" eaLnBrk="1" latinLnBrk="0" hangingPunct="1">
+              <a:lnSpc>
+                <a:spcPct val="90000"/>
+              </a:lnSpc>
+              <a:spcBef>
+                <a:spcPts val="0"/>
+              </a:spcBef>
+              <a:buClr>
+                <a:schemeClr val="accent1"/>
+              </a:buClr>
+              <a:buFont typeface="Wingdings" panose="05000000000000000000" pitchFamily="2" charset="2"/>
+              <a:buChar char="§"/>
+              <a:defRPr sz="1200" kern="1200">
+                <a:solidFill>
+                  <a:schemeClr val="tx1"/>
+                </a:solidFill>
+                <a:latin typeface="+mn-lt"/>
+                <a:ea typeface="Roboto Light" panose="02000000000000000000" pitchFamily="2" charset="0"/>
+                <a:cs typeface="Roboto Light" panose="02000000000000000000" pitchFamily="2" charset="0"/>
+              </a:defRPr>
+            </a:lvl2pPr>
+            <a:lvl3pPr marL="1257300" indent="-342900" algn="l" defTabSz="914400" rtl="0" eaLnBrk="1" latinLnBrk="0" hangingPunct="1">
+              <a:lnSpc>
+                <a:spcPct val="90000"/>
+              </a:lnSpc>
+              <a:spcBef>
+                <a:spcPts val="0"/>
+              </a:spcBef>
+              <a:buClr>
+                <a:schemeClr val="tx1"/>
+              </a:buClr>
+              <a:buFont typeface="Roboto Light" panose="02000000000000000000" pitchFamily="2" charset="0"/>
+              <a:buChar char="-"/>
+              <a:defRPr sz="1200" kern="1200">
+                <a:solidFill>
+                  <a:schemeClr val="tx1"/>
+                </a:solidFill>
+                <a:latin typeface="+mn-lt"/>
+                <a:ea typeface="Roboto Light" panose="02000000000000000000" pitchFamily="2" charset="0"/>
+                <a:cs typeface="Roboto Light" panose="02000000000000000000" pitchFamily="2" charset="0"/>
+              </a:defRPr>
+            </a:lvl3pPr>
+            <a:lvl4pPr marL="1657350" indent="-285750" algn="l" defTabSz="914400" rtl="0" eaLnBrk="1" latinLnBrk="0" hangingPunct="1">
+              <a:lnSpc>
+                <a:spcPct val="90000"/>
+              </a:lnSpc>
+              <a:spcBef>
+                <a:spcPts val="0"/>
+              </a:spcBef>
+              <a:buClr>
+                <a:schemeClr val="tx1"/>
+              </a:buClr>
+              <a:buFont typeface="Roboto Light" panose="02000000000000000000" pitchFamily="2" charset="0"/>
+              <a:buChar char="-"/>
+              <a:defRPr sz="1200" kern="1200">
+                <a:solidFill>
+                  <a:schemeClr val="tx1"/>
+                </a:solidFill>
+                <a:latin typeface="+mn-lt"/>
+                <a:ea typeface="Roboto Light" panose="02000000000000000000" pitchFamily="2" charset="0"/>
+                <a:cs typeface="Roboto Light" panose="02000000000000000000" pitchFamily="2" charset="0"/>
+              </a:defRPr>
+            </a:lvl4pPr>
+            <a:lvl5pPr marL="2114550" indent="-285750" algn="l" defTabSz="914400" rtl="0" eaLnBrk="1" latinLnBrk="0" hangingPunct="1">
+              <a:lnSpc>
+                <a:spcPct val="90000"/>
+              </a:lnSpc>
+              <a:spcBef>
+                <a:spcPts val="0"/>
+              </a:spcBef>
+              <a:buClr>
+                <a:schemeClr val="tx1"/>
+              </a:buClr>
+              <a:buFont typeface="Roboto Light" panose="02000000000000000000" pitchFamily="2" charset="0"/>
+              <a:buChar char="-"/>
+              <a:defRPr sz="1200" kern="1200">
+                <a:solidFill>
+                  <a:schemeClr val="tx1"/>
+                </a:solidFill>
+                <a:latin typeface="+mn-lt"/>
+                <a:ea typeface="Roboto Light" panose="02000000000000000000" pitchFamily="2" charset="0"/>
+                <a:cs typeface="Roboto Light" panose="02000000000000000000" pitchFamily="2" charset="0"/>
+              </a:defRPr>
+            </a:lvl5pPr>
+            <a:lvl6pPr marL="2514600" indent="-228600" algn="l" defTabSz="914400" rtl="0" eaLnBrk="1" latinLnBrk="0" hangingPunct="1">
+              <a:lnSpc>
+                <a:spcPct val="90000"/>
+              </a:lnSpc>
+              <a:spcBef>
+                <a:spcPts val="500"/>
+              </a:spcBef>
+              <a:buFont typeface="Arial" panose="020B0604020202020204" pitchFamily="34" charset="0"/>
+              <a:buChar char="•"/>
+              <a:defRPr sz="1800" kern="1200">
+                <a:solidFill>
+                  <a:schemeClr val="tx1"/>
+                </a:solidFill>
+                <a:latin typeface="+mn-lt"/>
+                <a:ea typeface="+mn-ea"/>
+                <a:cs typeface="+mn-cs"/>
+              </a:defRPr>
+            </a:lvl6pPr>
+            <a:lvl7pPr marL="2971800" indent="-228600" algn="l" defTabSz="914400" rtl="0" eaLnBrk="1" latinLnBrk="0" hangingPunct="1">
+              <a:lnSpc>
+                <a:spcPct val="90000"/>
+              </a:lnSpc>
+              <a:spcBef>
+                <a:spcPts val="500"/>
+              </a:spcBef>
+              <a:buFont typeface="Arial" panose="020B0604020202020204" pitchFamily="34" charset="0"/>
+              <a:buChar char="•"/>
+              <a:defRPr sz="1800" kern="1200">
+                <a:solidFill>
+                  <a:schemeClr val="tx1"/>
+                </a:solidFill>
+                <a:latin typeface="+mn-lt"/>
+                <a:ea typeface="+mn-ea"/>
+                <a:cs typeface="+mn-cs"/>
+              </a:defRPr>
+            </a:lvl7pPr>
+            <a:lvl8pPr marL="3429000" indent="-228600" algn="l" defTabSz="914400" rtl="0" eaLnBrk="1" latinLnBrk="0" hangingPunct="1">
+              <a:lnSpc>
+                <a:spcPct val="90000"/>
+              </a:lnSpc>
+              <a:spcBef>
+                <a:spcPts val="500"/>
+              </a:spcBef>
+              <a:buFont typeface="Arial" panose="020B0604020202020204" pitchFamily="34" charset="0"/>
+              <a:buChar char="•"/>
+              <a:defRPr sz="1800" kern="1200">
+                <a:solidFill>
+                  <a:schemeClr val="tx1"/>
+                </a:solidFill>
+                <a:latin typeface="+mn-lt"/>
+                <a:ea typeface="+mn-ea"/>
+                <a:cs typeface="+mn-cs"/>
+              </a:defRPr>
+            </a:lvl8pPr>
+            <a:lvl9pPr marL="3886200" indent="-228600" algn="l" defTabSz="914400" rtl="0" eaLnBrk="1" latinLnBrk="0" hangingPunct="1">
+              <a:lnSpc>
+                <a:spcPct val="90000"/>
+              </a:lnSpc>
+              <a:spcBef>
+                <a:spcPts val="500"/>
+              </a:spcBef>
+              <a:buFont typeface="Arial" panose="020B0604020202020204" pitchFamily="34" charset="0"/>
+              <a:buChar char="•"/>
+              <a:defRPr sz="1800" kern="1200">
+                <a:solidFill>
+                  <a:schemeClr val="tx1"/>
+                </a:solidFill>
+                <a:latin typeface="+mn-lt"/>
+                <a:ea typeface="+mn-ea"/>
+                <a:cs typeface="+mn-cs"/>
+              </a:defRPr>
+            </a:lvl9pPr>
+          </a:lstStyle>
+          <a:p>
+            <a:r>
+              <a:rPr lang="en-US" sz="1800" b="1" dirty="0">
+                <a:solidFill>
+                  <a:schemeClr val="accent1"/>
+                </a:solidFill>
+                <a:latin typeface="Roboto" panose="02000000000000000000" pitchFamily="2" charset="0"/>
+                <a:ea typeface="Roboto" panose="02000000000000000000" pitchFamily="2" charset="0"/>
+                <a:cs typeface="Roboto" panose="02000000000000000000" pitchFamily="2" charset="0"/>
+              </a:rPr>
+              <a:t>Recommendation</a:t>
+            </a:r>
+            <a:r>
+              <a:rPr lang="en-US" sz="1800" dirty="0">
+                <a:solidFill>
+                  <a:schemeClr val="accent1"/>
+                </a:solidFill>
+                <a:latin typeface="Roboto" panose="02000000000000000000" pitchFamily="2" charset="0"/>
+                <a:ea typeface="Roboto" panose="02000000000000000000" pitchFamily="2" charset="0"/>
+                <a:cs typeface="Roboto" panose="02000000000000000000" pitchFamily="2" charset="0"/>
+              </a:rPr>
+              <a:t>: </a:t>
+            </a:r>
+          </a:p>
+          <a:p>
+            <a:r>
+              <a:rPr lang="en-US" sz="1800" dirty="0">
+                <a:latin typeface="Roboto" panose="02000000000000000000" pitchFamily="2" charset="0"/>
+                <a:ea typeface="Roboto" panose="02000000000000000000" pitchFamily="2" charset="0"/>
+                <a:cs typeface="Roboto" panose="02000000000000000000" pitchFamily="2" charset="0"/>
+              </a:rPr>
+              <a:t>Investigate Retail's space misalignment — confirm if intentional (project seating, temp moves) or needs reallocation</a:t>
+            </a:r>
+          </a:p>
+        </p:txBody>
+      </p:sp>
+    </p:spTree>
+    <p:extLst>
+      <p:ext uri="{BB962C8B-B14F-4D97-AF65-F5344CB8AC3E}">
+        <p14:creationId xmlns:p14="http://schemas.microsoft.com/office/powerpoint/2010/main" val="147831049"/>
+      </p:ext>
+    </p:extLst>
+  </p:cSld>
+  <p:clrMapOvr>
+    <a:masterClrMapping/>
+  </p:clrMapOvr>
+</p:sld>
+</file>
+
+<file path=ppt/slides/slide4.xml><?xml version="1.0" encoding="utf-8"?>
+<p:sld xmlns:a="http://schemas.openxmlformats.org/drawingml/2006/main" xmlns:r="http://schemas.openxmlformats.org/officeDocument/2006/relationships" xmlns:p="http://schemas.openxmlformats.org/presentationml/2006/main">
+  <p:cSld>
+    <p:spTree>
+      <p:nvGrpSpPr>
+        <p:cNvPr id="1" name="">
+          <a:extLst>
+            <a:ext uri="{FF2B5EF4-FFF2-40B4-BE49-F238E27FC236}">
+              <a16:creationId xmlns:a16="http://schemas.microsoft.com/office/drawing/2014/main" id="{D531EEAB-738F-63CC-46B1-9135381753AF}"/>
+            </a:ext>
+          </a:extLst>
+        </p:cNvPr>
+        <p:cNvGrpSpPr/>
+        <p:nvPr/>
+      </p:nvGrpSpPr>
+      <p:grpSpPr>
+        <a:xfrm>
+          <a:off x="0" y="0"/>
+          <a:ext cx="0" cy="0"/>
+          <a:chOff x="0" y="0"/>
+          <a:chExt cx="0" cy="0"/>
+        </a:xfrm>
+      </p:grpSpPr>
+      <p:sp>
+        <p:nvSpPr>
+          <p:cNvPr id="12" name="Rectangle: Rounded Corners 11">
+            <a:extLst>
+              <a:ext uri="{FF2B5EF4-FFF2-40B4-BE49-F238E27FC236}">
+                <a16:creationId xmlns:a16="http://schemas.microsoft.com/office/drawing/2014/main" id="{C7EC4E44-5373-482A-19C0-EBABFC659091}"/>
+              </a:ext>
+            </a:extLst>
+          </p:cNvPr>
+          <p:cNvSpPr/>
+          <p:nvPr/>
+        </p:nvSpPr>
+        <p:spPr>
+          <a:xfrm>
+            <a:off x="303285" y="6131627"/>
+            <a:ext cx="11585431" cy="564716"/>
+          </a:xfrm>
+          <a:prstGeom prst="roundRect">
+            <a:avLst>
+              <a:gd name="adj" fmla="val 12769"/>
+            </a:avLst>
+          </a:prstGeom>
+          <a:solidFill>
+            <a:schemeClr val="accent1">
+              <a:lumMod val="20000"/>
+              <a:lumOff val="80000"/>
+            </a:schemeClr>
+          </a:solidFill>
+          <a:ln>
+            <a:solidFill>
+              <a:schemeClr val="bg1">
+                <a:lumMod val="95000"/>
+              </a:schemeClr>
+            </a:solidFill>
+          </a:ln>
+        </p:spPr>
+        <p:style>
+          <a:lnRef idx="2">
+            <a:schemeClr val="accent1">
+              <a:shade val="15000"/>
+            </a:schemeClr>
+          </a:lnRef>
+          <a:fillRef idx="1">
+            <a:schemeClr val="accent1"/>
+          </a:fillRef>
+          <a:effectRef idx="0">
+            <a:schemeClr val="accent1"/>
+          </a:effectRef>
+          <a:fontRef idx="minor">
+            <a:schemeClr val="lt1"/>
+          </a:fontRef>
+        </p:style>
+        <p:txBody>
+          <a:bodyPr rtlCol="0" anchor="ctr"/>
+          <a:lstStyle/>
+          <a:p>
+            <a:pPr algn="ctr"/>
+            <a:endParaRPr lang="en-US"/>
+          </a:p>
+        </p:txBody>
+      </p:sp>
+      <p:sp>
+        <p:nvSpPr>
+          <p:cNvPr id="5" name="Rectangle: Rounded Corners 4">
+            <a:extLst>
+              <a:ext uri="{FF2B5EF4-FFF2-40B4-BE49-F238E27FC236}">
+                <a16:creationId xmlns:a16="http://schemas.microsoft.com/office/drawing/2014/main" id="{DBE52E65-FBCF-8C9F-6EB0-B37844A99743}"/>
+              </a:ext>
+            </a:extLst>
+          </p:cNvPr>
+          <p:cNvSpPr/>
+          <p:nvPr/>
+        </p:nvSpPr>
+        <p:spPr>
+          <a:xfrm>
+            <a:off x="6643890" y="1079239"/>
+            <a:ext cx="5194149" cy="4830395"/>
+          </a:xfrm>
+          <a:prstGeom prst="roundRect">
+            <a:avLst>
+              <a:gd name="adj" fmla="val 6066"/>
+            </a:avLst>
+          </a:prstGeom>
+          <a:solidFill>
+            <a:schemeClr val="bg1">
+              <a:lumMod val="95000"/>
+            </a:schemeClr>
+          </a:solidFill>
+          <a:ln>
+            <a:solidFill>
+              <a:schemeClr val="bg1">
+                <a:lumMod val="95000"/>
+              </a:schemeClr>
+            </a:solidFill>
+          </a:ln>
+        </p:spPr>
+        <p:style>
+          <a:lnRef idx="2">
+            <a:schemeClr val="accent1">
+              <a:shade val="15000"/>
+            </a:schemeClr>
+          </a:lnRef>
+          <a:fillRef idx="1">
+            <a:schemeClr val="accent1"/>
+          </a:fillRef>
+          <a:effectRef idx="0">
+            <a:schemeClr val="accent1"/>
+          </a:effectRef>
+          <a:fontRef idx="minor">
+            <a:schemeClr val="lt1"/>
+          </a:fontRef>
+        </p:style>
+        <p:txBody>
+          <a:bodyPr rtlCol="0" anchor="ctr"/>
+          <a:lstStyle/>
+          <a:p>
+            <a:pPr algn="ctr"/>
+            <a:endParaRPr lang="en-US"/>
+          </a:p>
+        </p:txBody>
+      </p:sp>
+      <p:sp>
+        <p:nvSpPr>
+          <p:cNvPr id="3" name="Content Placeholder 2">
+            <a:extLst>
+              <a:ext uri="{FF2B5EF4-FFF2-40B4-BE49-F238E27FC236}">
+                <a16:creationId xmlns:a16="http://schemas.microsoft.com/office/drawing/2014/main" id="{1DD97887-F158-15CB-AFDA-B1A49419B5CC}"/>
+              </a:ext>
+            </a:extLst>
+          </p:cNvPr>
+          <p:cNvSpPr>
+            <a:spLocks noGrp="1"/>
+          </p:cNvSpPr>
+          <p:nvPr>
+            <p:ph idx="1"/>
+          </p:nvPr>
+        </p:nvSpPr>
+        <p:spPr>
+          <a:xfrm>
+            <a:off x="6860877" y="2325818"/>
+            <a:ext cx="4760174" cy="3160745"/>
+          </a:xfrm>
+        </p:spPr>
+        <p:txBody>
+          <a:bodyPr>
+            <a:normAutofit/>
+          </a:bodyPr>
+          <a:lstStyle/>
+          <a:p>
+            <a:pPr marL="351701" indent="-351701">
+              <a:buFont typeface="Arial" panose="020B0604020202020204" pitchFamily="34" charset="0"/>
+              <a:buChar char="•"/>
+            </a:pPr>
+            <a:r>
+              <a:rPr lang="en-US" sz="2000" dirty="0">
+                <a:latin typeface="Roboto" panose="02000000000000000000" pitchFamily="2" charset="0"/>
+                <a:ea typeface="Roboto" panose="02000000000000000000" pitchFamily="2" charset="0"/>
+                <a:cs typeface="Roboto" panose="02000000000000000000" pitchFamily="2" charset="0"/>
+              </a:rPr>
+              <a:t>Floor 1: 72% aligned — office-heavy, low flex capacity</a:t>
+            </a:r>
+          </a:p>
+          <a:p>
+            <a:pPr marL="351701" indent="-351701">
+              <a:buFont typeface="Arial" panose="020B0604020202020204" pitchFamily="34" charset="0"/>
+              <a:buChar char="•"/>
+            </a:pPr>
+            <a:r>
+              <a:rPr lang="en-US" sz="2000" dirty="0">
+                <a:latin typeface="Roboto" panose="02000000000000000000" pitchFamily="2" charset="0"/>
+                <a:ea typeface="Roboto" panose="02000000000000000000" pitchFamily="2" charset="0"/>
+                <a:cs typeface="Roboto" panose="02000000000000000000" pitchFamily="2" charset="0"/>
+              </a:rPr>
+              <a:t>Floor 2: 65% aligned — more flex seats, but overflow spills into other orgs' space</a:t>
+            </a:r>
+          </a:p>
+          <a:p>
+            <a:pPr marL="351701" indent="-351701">
+              <a:buFont typeface="Arial" panose="020B0604020202020204" pitchFamily="34" charset="0"/>
+              <a:buChar char="•"/>
+            </a:pPr>
+            <a:r>
+              <a:rPr lang="en-US" sz="2000" dirty="0">
+                <a:latin typeface="Roboto" panose="02000000000000000000" pitchFamily="2" charset="0"/>
+                <a:ea typeface="Roboto" panose="02000000000000000000" pitchFamily="2" charset="0"/>
+                <a:cs typeface="Roboto" panose="02000000000000000000" pitchFamily="2" charset="0"/>
+              </a:rPr>
+              <a:t>Root cause: insufficient Retail-allocated seats on either floor</a:t>
+            </a:r>
+          </a:p>
+        </p:txBody>
+      </p:sp>
+      <p:sp>
+        <p:nvSpPr>
+          <p:cNvPr id="4" name="Title 3">
+            <a:extLst>
+              <a:ext uri="{FF2B5EF4-FFF2-40B4-BE49-F238E27FC236}">
+                <a16:creationId xmlns:a16="http://schemas.microsoft.com/office/drawing/2014/main" id="{F365F265-7CD2-E5BB-C05A-E23121733B39}"/>
+              </a:ext>
+            </a:extLst>
+          </p:cNvPr>
+          <p:cNvSpPr>
+            <a:spLocks noGrp="1"/>
+          </p:cNvSpPr>
+          <p:nvPr>
+            <p:ph type="title"/>
+          </p:nvPr>
+        </p:nvSpPr>
+        <p:spPr/>
+        <p:txBody>
+          <a:bodyPr/>
+          <a:lstStyle/>
+          <a:p>
+            <a:r>
+              <a:rPr lang="en-US" b="1" spc="246" dirty="0"/>
+              <a:t>Retail Workspace Allocation by Floor</a:t>
+            </a:r>
+            <a:endParaRPr lang="en-US" spc="246" dirty="0"/>
+          </a:p>
+        </p:txBody>
+      </p:sp>
+      <p:sp>
+        <p:nvSpPr>
+          <p:cNvPr id="7" name="Rectangle: Rounded Corners 6">
+            <a:extLst>
+              <a:ext uri="{FF2B5EF4-FFF2-40B4-BE49-F238E27FC236}">
+                <a16:creationId xmlns:a16="http://schemas.microsoft.com/office/drawing/2014/main" id="{A350263B-2CD8-CD9C-22B9-18510F46DF9E}"/>
+              </a:ext>
+            </a:extLst>
+          </p:cNvPr>
+          <p:cNvSpPr/>
+          <p:nvPr/>
+        </p:nvSpPr>
+        <p:spPr>
+          <a:xfrm>
+            <a:off x="6879748" y="1320589"/>
+            <a:ext cx="2222091" cy="599768"/>
+          </a:xfrm>
+          <a:prstGeom prst="roundRect">
+            <a:avLst>
+              <a:gd name="adj" fmla="val 50000"/>
+            </a:avLst>
+          </a:prstGeom>
+          <a:solidFill>
+            <a:srgbClr val="1767D2"/>
+          </a:solidFill>
+          <a:ln>
+            <a:solidFill>
+              <a:srgbClr val="1767D2"/>
+            </a:solidFill>
+          </a:ln>
+        </p:spPr>
+        <p:style>
+          <a:lnRef idx="2">
+            <a:schemeClr val="accent1">
+              <a:shade val="15000"/>
+            </a:schemeClr>
+          </a:lnRef>
+          <a:fillRef idx="1">
+            <a:schemeClr val="accent1"/>
+          </a:fillRef>
+          <a:effectRef idx="0">
+            <a:schemeClr val="accent1"/>
+          </a:effectRef>
+          <a:fontRef idx="minor">
+            <a:schemeClr val="lt1"/>
+          </a:fontRef>
+        </p:style>
+        <p:txBody>
+          <a:bodyPr rtlCol="0" anchor="ctr"/>
+          <a:lstStyle/>
+          <a:p>
+            <a:pPr algn="ctr"/>
+            <a:r>
+              <a:rPr lang="en-US" sz="1600" b="1" dirty="0">
+                <a:latin typeface="+mj-lt"/>
+              </a:rPr>
+              <a:t>FLOOR 1 : 72%</a:t>
+            </a:r>
+          </a:p>
+        </p:txBody>
+      </p:sp>
+      <p:sp>
+        <p:nvSpPr>
+          <p:cNvPr id="10" name="Content Placeholder 2">
+            <a:extLst>
+              <a:ext uri="{FF2B5EF4-FFF2-40B4-BE49-F238E27FC236}">
+                <a16:creationId xmlns:a16="http://schemas.microsoft.com/office/drawing/2014/main" id="{8F082F4B-6600-BAED-3D8B-85FBAC2B57D0}"/>
+              </a:ext>
+            </a:extLst>
+          </p:cNvPr>
+          <p:cNvSpPr txBox="1">
+            <a:spLocks/>
+          </p:cNvSpPr>
+          <p:nvPr/>
+        </p:nvSpPr>
+        <p:spPr>
+          <a:xfrm>
+            <a:off x="314631" y="6003336"/>
+            <a:ext cx="11661060" cy="786709"/>
+          </a:xfrm>
+          <a:prstGeom prst="rect">
+            <a:avLst/>
+          </a:prstGeom>
+        </p:spPr>
+        <p:txBody>
+          <a:bodyPr vert="horz" lIns="112542" tIns="221538" rIns="112542" bIns="221538" rtlCol="0" anchor="ctr">
             <a:normAutofit/>
           </a:bodyPr>
           <a:lstStyle>
@@ -9596,7 +6761,10 @@
           </a:lstStyle>
           <a:p>
             <a:r>
-              <a:rPr lang="en-US" sz="1600" b="1" dirty="0">
+              <a:rPr lang="en-US" b="1" dirty="0">
+                <a:solidFill>
+                  <a:schemeClr val="accent1"/>
+                </a:solidFill>
                 <a:latin typeface="Roboto" panose="02000000000000000000" pitchFamily="2" charset="0"/>
                 <a:ea typeface="Roboto" panose="02000000000000000000" pitchFamily="2" charset="0"/>
                 <a:cs typeface="Roboto" panose="02000000000000000000" pitchFamily="2" charset="0"/>
@@ -9604,167 +6772,33 @@
               <a:t>Recommendation</a:t>
             </a:r>
             <a:r>
-              <a:rPr lang="en-US" sz="1600" dirty="0">
+              <a:rPr lang="en-US" dirty="0">
+                <a:solidFill>
+                  <a:schemeClr val="accent1"/>
+                </a:solidFill>
                 <a:latin typeface="Roboto" panose="02000000000000000000" pitchFamily="2" charset="0"/>
                 <a:ea typeface="Roboto" panose="02000000000000000000" pitchFamily="2" charset="0"/>
                 <a:cs typeface="Roboto" panose="02000000000000000000" pitchFamily="2" charset="0"/>
               </a:rPr>
               <a:t>: </a:t>
             </a:r>
-          </a:p>
-          <a:p>
-            <a:r>
-              <a:rPr lang="en-US" sz="1600" dirty="0">
+            <a:r>
+              <a:rPr lang="en-US" dirty="0">
                 <a:latin typeface="Roboto" panose="02000000000000000000" pitchFamily="2" charset="0"/>
                 <a:ea typeface="Roboto" panose="02000000000000000000" pitchFamily="2" charset="0"/>
                 <a:cs typeface="Roboto" panose="02000000000000000000" pitchFamily="2" charset="0"/>
               </a:rPr>
-              <a:t>Investigate Retail's space misalignment — confirm if intentional (project seating, temp moves) or needs reallocation</a:t>
-            </a:r>
-          </a:p>
-        </p:txBody>
-      </p:sp>
-    </p:spTree>
-    <p:extLst>
-      <p:ext uri="{BB962C8B-B14F-4D97-AF65-F5344CB8AC3E}">
-        <p14:creationId xmlns:p14="http://schemas.microsoft.com/office/powerpoint/2010/main" val="662444546"/>
-      </p:ext>
-    </p:extLst>
-  </p:cSld>
-  <p:clrMapOvr>
-    <a:masterClrMapping/>
-  </p:clrMapOvr>
-</p:sld>
-</file>
-
-<file path=ppt/slides/slide4.xml><?xml version="1.0" encoding="utf-8"?>
-<p:sld xmlns:a="http://schemas.openxmlformats.org/drawingml/2006/main" xmlns:r="http://schemas.openxmlformats.org/officeDocument/2006/relationships" xmlns:p="http://schemas.openxmlformats.org/presentationml/2006/main">
-  <p:cSld>
-    <p:spTree>
-      <p:nvGrpSpPr>
-        <p:cNvPr id="1" name="">
-          <a:extLst>
-            <a:ext uri="{FF2B5EF4-FFF2-40B4-BE49-F238E27FC236}">
-              <a16:creationId xmlns:a16="http://schemas.microsoft.com/office/drawing/2014/main" id="{02BB24FD-295C-0F8B-BEB2-F72A2BECE26B}"/>
-            </a:ext>
-          </a:extLst>
-        </p:cNvPr>
-        <p:cNvGrpSpPr/>
-        <p:nvPr/>
-      </p:nvGrpSpPr>
-      <p:grpSpPr>
-        <a:xfrm>
-          <a:off x="0" y="0"/>
-          <a:ext cx="0" cy="0"/>
-          <a:chOff x="0" y="0"/>
-          <a:chExt cx="0" cy="0"/>
-        </a:xfrm>
-      </p:grpSpPr>
-      <p:sp>
-        <p:nvSpPr>
-          <p:cNvPr id="7" name="Content Placeholder 2">
+              <a:t>Consolidate Retail, reallocate surplus from under-used orgs (e.g., Engineering), and add flex seating on Floor 1 — then monitor</a:t>
+            </a:r>
+          </a:p>
+        </p:txBody>
+      </p:sp>
+      <p:pic>
+        <p:nvPicPr>
+          <p:cNvPr id="6" name="Picture 5">
             <a:extLst>
               <a:ext uri="{FF2B5EF4-FFF2-40B4-BE49-F238E27FC236}">
-                <a16:creationId xmlns:a16="http://schemas.microsoft.com/office/drawing/2014/main" id="{307F34A8-1176-3F01-4E4F-F3D3C293A21D}"/>
-              </a:ext>
-            </a:extLst>
-          </p:cNvPr>
-          <p:cNvSpPr>
-            <a:spLocks noGrp="1"/>
-          </p:cNvSpPr>
-          <p:nvPr>
-            <p:ph idx="1"/>
-          </p:nvPr>
-        </p:nvSpPr>
-        <p:spPr>
-          <a:xfrm>
-            <a:off x="438398" y="1440082"/>
-            <a:ext cx="4261421" cy="2706329"/>
-          </a:xfrm>
-        </p:spPr>
-        <p:txBody>
-          <a:bodyPr>
-            <a:normAutofit/>
-          </a:bodyPr>
-          <a:lstStyle/>
-          <a:p>
-            <a:pPr marL="285750" indent="-285750">
-              <a:buFont typeface="Arial" panose="020B0604020202020204" pitchFamily="34" charset="0"/>
-              <a:buChar char="•"/>
-            </a:pPr>
-            <a:r>
-              <a:rPr lang="en-US" sz="1600" dirty="0">
-                <a:latin typeface="Roboto" panose="02000000000000000000" pitchFamily="2" charset="0"/>
-                <a:ea typeface="Roboto" panose="02000000000000000000" pitchFamily="2" charset="0"/>
-                <a:cs typeface="Roboto" panose="02000000000000000000" pitchFamily="2" charset="0"/>
-              </a:rPr>
-              <a:t>Floor 1: 72% aligned — office-heavy, low flex capacity</a:t>
-            </a:r>
-          </a:p>
-          <a:p>
-            <a:pPr marL="285750" indent="-285750">
-              <a:buFont typeface="Arial" panose="020B0604020202020204" pitchFamily="34" charset="0"/>
-              <a:buChar char="•"/>
-            </a:pPr>
-            <a:r>
-              <a:rPr lang="en-US" sz="1600" dirty="0">
-                <a:latin typeface="Roboto" panose="02000000000000000000" pitchFamily="2" charset="0"/>
-                <a:ea typeface="Roboto" panose="02000000000000000000" pitchFamily="2" charset="0"/>
-                <a:cs typeface="Roboto" panose="02000000000000000000" pitchFamily="2" charset="0"/>
-              </a:rPr>
-              <a:t>Floor 2: 65% aligned — more flex seats, but overflow spills into other orgs' space</a:t>
-            </a:r>
-          </a:p>
-          <a:p>
-            <a:pPr marL="285750" indent="-285750">
-              <a:buFont typeface="Arial" panose="020B0604020202020204" pitchFamily="34" charset="0"/>
-              <a:buChar char="•"/>
-            </a:pPr>
-            <a:r>
-              <a:rPr lang="en-US" sz="1600" dirty="0">
-                <a:latin typeface="Roboto" panose="02000000000000000000" pitchFamily="2" charset="0"/>
-                <a:ea typeface="Roboto" panose="02000000000000000000" pitchFamily="2" charset="0"/>
-                <a:cs typeface="Roboto" panose="02000000000000000000" pitchFamily="2" charset="0"/>
-              </a:rPr>
-              <a:t>Root cause: insufficient Retail-allocated seats on either floor</a:t>
-            </a:r>
-          </a:p>
-        </p:txBody>
-      </p:sp>
-      <p:sp>
-        <p:nvSpPr>
-          <p:cNvPr id="4" name="Title 3">
-            <a:extLst>
-              <a:ext uri="{FF2B5EF4-FFF2-40B4-BE49-F238E27FC236}">
-                <a16:creationId xmlns:a16="http://schemas.microsoft.com/office/drawing/2014/main" id="{CE5AD8F9-1CEE-B7CE-5E31-62D4617B8CFE}"/>
-              </a:ext>
-            </a:extLst>
-          </p:cNvPr>
-          <p:cNvSpPr>
-            <a:spLocks noGrp="1"/>
-          </p:cNvSpPr>
-          <p:nvPr>
-            <p:ph type="title"/>
-          </p:nvPr>
-        </p:nvSpPr>
-        <p:spPr/>
-        <p:txBody>
-          <a:bodyPr/>
-          <a:lstStyle/>
-          <a:p>
-            <a:r>
-              <a:rPr lang="en-US" b="1" spc="200" dirty="0"/>
-              <a:t>Retail Workspace Allocation by Floor</a:t>
-            </a:r>
-          </a:p>
-        </p:txBody>
-      </p:sp>
-      <p:pic>
-        <p:nvPicPr>
-          <p:cNvPr id="5" name="Picture 4">
-            <a:extLst>
-              <a:ext uri="{FF2B5EF4-FFF2-40B4-BE49-F238E27FC236}">
-                <a16:creationId xmlns:a16="http://schemas.microsoft.com/office/drawing/2014/main" id="{744F7744-708D-3292-6FB7-85EDA3FC642A}"/>
+                <a16:creationId xmlns:a16="http://schemas.microsoft.com/office/drawing/2014/main" id="{41E5443F-D482-24B0-9B2D-0052C464EA20}"/>
               </a:ext>
             </a:extLst>
           </p:cNvPr>
@@ -9781,251 +6815,76 @@
         </p:blipFill>
         <p:spPr>
           <a:xfrm>
-            <a:off x="4981639" y="1478322"/>
-            <a:ext cx="4426968" cy="4678801"/>
+            <a:off x="733791" y="1022555"/>
+            <a:ext cx="4677667" cy="4943761"/>
           </a:xfrm>
           <a:prstGeom prst="rect">
             <a:avLst/>
           </a:prstGeom>
           <a:ln>
             <a:solidFill>
-              <a:schemeClr val="tx1"/>
+              <a:schemeClr val="bg1"/>
             </a:solidFill>
           </a:ln>
         </p:spPr>
       </p:pic>
       <p:sp>
         <p:nvSpPr>
-          <p:cNvPr id="8" name="Content Placeholder 2">
+          <p:cNvPr id="11" name="Rectangle: Rounded Corners 10">
             <a:extLst>
               <a:ext uri="{FF2B5EF4-FFF2-40B4-BE49-F238E27FC236}">
-                <a16:creationId xmlns:a16="http://schemas.microsoft.com/office/drawing/2014/main" id="{9AE0BB90-C764-FED9-4E5F-2F2D0F95D033}"/>
+                <a16:creationId xmlns:a16="http://schemas.microsoft.com/office/drawing/2014/main" id="{69E11265-731C-2EED-67C2-DADF4249A4C2}"/>
               </a:ext>
             </a:extLst>
           </p:cNvPr>
-          <p:cNvSpPr txBox="1">
-            <a:spLocks/>
-          </p:cNvSpPr>
+          <p:cNvSpPr/>
           <p:nvPr/>
         </p:nvSpPr>
         <p:spPr>
           <a:xfrm>
-            <a:off x="662942" y="4146411"/>
-            <a:ext cx="4261421" cy="1596102"/>
-          </a:xfrm>
-          <a:prstGeom prst="rect">
-            <a:avLst/>
+            <a:off x="9298766" y="1338199"/>
+            <a:ext cx="2222091" cy="599768"/>
+          </a:xfrm>
+          <a:prstGeom prst="roundRect">
+            <a:avLst>
+              <a:gd name="adj" fmla="val 50000"/>
+            </a:avLst>
           </a:prstGeom>
-        </p:spPr>
-        <p:txBody>
-          <a:bodyPr vert="horz" lIns="91440" tIns="180000" rIns="91440" bIns="180000" rtlCol="0" anchor="ctr">
-            <a:normAutofit/>
-          </a:bodyPr>
-          <a:lstStyle>
-            <a:lvl1pPr marL="0" indent="0" algn="l" defTabSz="914400" rtl="0" eaLnBrk="1" latinLnBrk="0" hangingPunct="1">
-              <a:lnSpc>
-                <a:spcPct val="90000"/>
-              </a:lnSpc>
-              <a:spcBef>
-                <a:spcPts val="1800"/>
-              </a:spcBef>
-              <a:buClr>
-                <a:schemeClr val="accent1"/>
-              </a:buClr>
-              <a:buFont typeface="Wingdings" panose="05000000000000000000" pitchFamily="2" charset="2"/>
-              <a:buNone/>
-              <a:defRPr sz="1400" b="0" kern="1200">
-                <a:solidFill>
-                  <a:schemeClr val="tx1"/>
-                </a:solidFill>
-                <a:latin typeface="Roboto Medium" panose="02000000000000000000" pitchFamily="2" charset="0"/>
-                <a:ea typeface="Roboto Medium" panose="02000000000000000000" pitchFamily="2" charset="0"/>
-                <a:cs typeface="Roboto Medium" panose="02000000000000000000" pitchFamily="2" charset="0"/>
-              </a:defRPr>
-            </a:lvl1pPr>
-            <a:lvl2pPr marL="800100" indent="-342900" algn="l" defTabSz="914400" rtl="0" eaLnBrk="1" latinLnBrk="0" hangingPunct="1">
-              <a:lnSpc>
-                <a:spcPct val="90000"/>
-              </a:lnSpc>
-              <a:spcBef>
-                <a:spcPts val="0"/>
-              </a:spcBef>
-              <a:buClr>
-                <a:schemeClr val="accent1"/>
-              </a:buClr>
-              <a:buFont typeface="Wingdings" panose="05000000000000000000" pitchFamily="2" charset="2"/>
-              <a:buChar char="§"/>
-              <a:defRPr sz="1200" kern="1200">
-                <a:solidFill>
-                  <a:schemeClr val="tx1"/>
-                </a:solidFill>
-                <a:latin typeface="+mn-lt"/>
-                <a:ea typeface="Roboto Light" panose="02000000000000000000" pitchFamily="2" charset="0"/>
-                <a:cs typeface="Roboto Light" panose="02000000000000000000" pitchFamily="2" charset="0"/>
-              </a:defRPr>
-            </a:lvl2pPr>
-            <a:lvl3pPr marL="1257300" indent="-342900" algn="l" defTabSz="914400" rtl="0" eaLnBrk="1" latinLnBrk="0" hangingPunct="1">
-              <a:lnSpc>
-                <a:spcPct val="90000"/>
-              </a:lnSpc>
-              <a:spcBef>
-                <a:spcPts val="0"/>
-              </a:spcBef>
-              <a:buClr>
-                <a:schemeClr val="tx1"/>
-              </a:buClr>
-              <a:buFont typeface="Roboto Light" panose="02000000000000000000" pitchFamily="2" charset="0"/>
-              <a:buChar char="-"/>
-              <a:defRPr sz="1200" kern="1200">
-                <a:solidFill>
-                  <a:schemeClr val="tx1"/>
-                </a:solidFill>
-                <a:latin typeface="+mn-lt"/>
-                <a:ea typeface="Roboto Light" panose="02000000000000000000" pitchFamily="2" charset="0"/>
-                <a:cs typeface="Roboto Light" panose="02000000000000000000" pitchFamily="2" charset="0"/>
-              </a:defRPr>
-            </a:lvl3pPr>
-            <a:lvl4pPr marL="1657350" indent="-285750" algn="l" defTabSz="914400" rtl="0" eaLnBrk="1" latinLnBrk="0" hangingPunct="1">
-              <a:lnSpc>
-                <a:spcPct val="90000"/>
-              </a:lnSpc>
-              <a:spcBef>
-                <a:spcPts val="0"/>
-              </a:spcBef>
-              <a:buClr>
-                <a:schemeClr val="tx1"/>
-              </a:buClr>
-              <a:buFont typeface="Roboto Light" panose="02000000000000000000" pitchFamily="2" charset="0"/>
-              <a:buChar char="-"/>
-              <a:defRPr sz="1200" kern="1200">
-                <a:solidFill>
-                  <a:schemeClr val="tx1"/>
-                </a:solidFill>
-                <a:latin typeface="+mn-lt"/>
-                <a:ea typeface="Roboto Light" panose="02000000000000000000" pitchFamily="2" charset="0"/>
-                <a:cs typeface="Roboto Light" panose="02000000000000000000" pitchFamily="2" charset="0"/>
-              </a:defRPr>
-            </a:lvl4pPr>
-            <a:lvl5pPr marL="2114550" indent="-285750" algn="l" defTabSz="914400" rtl="0" eaLnBrk="1" latinLnBrk="0" hangingPunct="1">
-              <a:lnSpc>
-                <a:spcPct val="90000"/>
-              </a:lnSpc>
-              <a:spcBef>
-                <a:spcPts val="0"/>
-              </a:spcBef>
-              <a:buClr>
-                <a:schemeClr val="tx1"/>
-              </a:buClr>
-              <a:buFont typeface="Roboto Light" panose="02000000000000000000" pitchFamily="2" charset="0"/>
-              <a:buChar char="-"/>
-              <a:defRPr sz="1200" kern="1200">
-                <a:solidFill>
-                  <a:schemeClr val="tx1"/>
-                </a:solidFill>
-                <a:latin typeface="+mn-lt"/>
-                <a:ea typeface="Roboto Light" panose="02000000000000000000" pitchFamily="2" charset="0"/>
-                <a:cs typeface="Roboto Light" panose="02000000000000000000" pitchFamily="2" charset="0"/>
-              </a:defRPr>
-            </a:lvl5pPr>
-            <a:lvl6pPr marL="2514600" indent="-228600" algn="l" defTabSz="914400" rtl="0" eaLnBrk="1" latinLnBrk="0" hangingPunct="1">
-              <a:lnSpc>
-                <a:spcPct val="90000"/>
-              </a:lnSpc>
-              <a:spcBef>
-                <a:spcPts val="500"/>
-              </a:spcBef>
-              <a:buFont typeface="Arial" panose="020B0604020202020204" pitchFamily="34" charset="0"/>
-              <a:buChar char="•"/>
-              <a:defRPr sz="1800" kern="1200">
-                <a:solidFill>
-                  <a:schemeClr val="tx1"/>
-                </a:solidFill>
-                <a:latin typeface="+mn-lt"/>
-                <a:ea typeface="+mn-ea"/>
-                <a:cs typeface="+mn-cs"/>
-              </a:defRPr>
-            </a:lvl6pPr>
-            <a:lvl7pPr marL="2971800" indent="-228600" algn="l" defTabSz="914400" rtl="0" eaLnBrk="1" latinLnBrk="0" hangingPunct="1">
-              <a:lnSpc>
-                <a:spcPct val="90000"/>
-              </a:lnSpc>
-              <a:spcBef>
-                <a:spcPts val="500"/>
-              </a:spcBef>
-              <a:buFont typeface="Arial" panose="020B0604020202020204" pitchFamily="34" charset="0"/>
-              <a:buChar char="•"/>
-              <a:defRPr sz="1800" kern="1200">
-                <a:solidFill>
-                  <a:schemeClr val="tx1"/>
-                </a:solidFill>
-                <a:latin typeface="+mn-lt"/>
-                <a:ea typeface="+mn-ea"/>
-                <a:cs typeface="+mn-cs"/>
-              </a:defRPr>
-            </a:lvl7pPr>
-            <a:lvl8pPr marL="3429000" indent="-228600" algn="l" defTabSz="914400" rtl="0" eaLnBrk="1" latinLnBrk="0" hangingPunct="1">
-              <a:lnSpc>
-                <a:spcPct val="90000"/>
-              </a:lnSpc>
-              <a:spcBef>
-                <a:spcPts val="500"/>
-              </a:spcBef>
-              <a:buFont typeface="Arial" panose="020B0604020202020204" pitchFamily="34" charset="0"/>
-              <a:buChar char="•"/>
-              <a:defRPr sz="1800" kern="1200">
-                <a:solidFill>
-                  <a:schemeClr val="tx1"/>
-                </a:solidFill>
-                <a:latin typeface="+mn-lt"/>
-                <a:ea typeface="+mn-ea"/>
-                <a:cs typeface="+mn-cs"/>
-              </a:defRPr>
-            </a:lvl8pPr>
-            <a:lvl9pPr marL="3886200" indent="-228600" algn="l" defTabSz="914400" rtl="0" eaLnBrk="1" latinLnBrk="0" hangingPunct="1">
-              <a:lnSpc>
-                <a:spcPct val="90000"/>
-              </a:lnSpc>
-              <a:spcBef>
-                <a:spcPts val="500"/>
-              </a:spcBef>
-              <a:buFont typeface="Arial" panose="020B0604020202020204" pitchFamily="34" charset="0"/>
-              <a:buChar char="•"/>
-              <a:defRPr sz="1800" kern="1200">
-                <a:solidFill>
-                  <a:schemeClr val="tx1"/>
-                </a:solidFill>
-                <a:latin typeface="+mn-lt"/>
-                <a:ea typeface="+mn-ea"/>
-                <a:cs typeface="+mn-cs"/>
-              </a:defRPr>
-            </a:lvl9pPr>
-          </a:lstStyle>
-          <a:p>
+          <a:solidFill>
+            <a:srgbClr val="1767D2"/>
+          </a:solidFill>
+          <a:ln>
+            <a:solidFill>
+              <a:srgbClr val="1767D2"/>
+            </a:solidFill>
+          </a:ln>
+        </p:spPr>
+        <p:style>
+          <a:lnRef idx="2">
+            <a:schemeClr val="accent1">
+              <a:shade val="15000"/>
+            </a:schemeClr>
+          </a:lnRef>
+          <a:fillRef idx="1">
+            <a:schemeClr val="accent1"/>
+          </a:fillRef>
+          <a:effectRef idx="0">
+            <a:schemeClr val="accent1"/>
+          </a:effectRef>
+          <a:fontRef idx="minor">
+            <a:schemeClr val="lt1"/>
+          </a:fontRef>
+        </p:style>
+        <p:txBody>
+          <a:bodyPr rtlCol="0" anchor="ctr"/>
+          <a:lstStyle/>
+          <a:p>
+            <a:pPr algn="ctr"/>
             <a:r>
               <a:rPr lang="en-US" sz="1600" b="1" dirty="0">
-                <a:latin typeface="Roboto" panose="02000000000000000000" pitchFamily="2" charset="0"/>
-                <a:ea typeface="Roboto" panose="02000000000000000000" pitchFamily="2" charset="0"/>
-                <a:cs typeface="Roboto" panose="02000000000000000000" pitchFamily="2" charset="0"/>
+                <a:latin typeface="+mj-lt"/>
               </a:rPr>
-              <a:t>Recommendation</a:t>
-            </a:r>
-            <a:r>
-              <a:rPr lang="en-US" sz="1600" dirty="0">
-                <a:latin typeface="Roboto" panose="02000000000000000000" pitchFamily="2" charset="0"/>
-                <a:ea typeface="Roboto" panose="02000000000000000000" pitchFamily="2" charset="0"/>
-                <a:cs typeface="Roboto" panose="02000000000000000000" pitchFamily="2" charset="0"/>
-              </a:rPr>
-              <a:t>: </a:t>
-            </a:r>
-          </a:p>
-          <a:p>
-            <a:r>
-              <a:rPr lang="en-US" sz="1600" dirty="0">
-                <a:latin typeface="Roboto" panose="02000000000000000000" pitchFamily="2" charset="0"/>
-                <a:ea typeface="Roboto" panose="02000000000000000000" pitchFamily="2" charset="0"/>
-                <a:cs typeface="Roboto" panose="02000000000000000000" pitchFamily="2" charset="0"/>
-              </a:rPr>
-              <a:t>Consolidate Retail, reallocate surplus from under-used orgs (e.g., Engineering), and add flex seating on Floor 1 — then monitor</a:t>
+              <a:t>FLOOR 2 : 65%</a:t>
             </a:r>
           </a:p>
         </p:txBody>
@@ -10033,7 +6892,7 @@
     </p:spTree>
     <p:extLst>
       <p:ext uri="{BB962C8B-B14F-4D97-AF65-F5344CB8AC3E}">
-        <p14:creationId xmlns:p14="http://schemas.microsoft.com/office/powerpoint/2010/main" val="819619271"/>
+        <p14:creationId xmlns:p14="http://schemas.microsoft.com/office/powerpoint/2010/main" val="3062880915"/>
       </p:ext>
     </p:extLst>
   </p:cSld>
@@ -10051,7 +6910,7 @@
         <p:cNvPr id="1" name="">
           <a:extLst>
             <a:ext uri="{FF2B5EF4-FFF2-40B4-BE49-F238E27FC236}">
-              <a16:creationId xmlns:a16="http://schemas.microsoft.com/office/drawing/2014/main" id="{80A639DD-1B32-7A6A-DC60-2A57C30A1CCA}"/>
+              <a16:creationId xmlns:a16="http://schemas.microsoft.com/office/drawing/2014/main" id="{7D567005-5EB1-0187-3405-ACBE409867B1}"/>
             </a:ext>
           </a:extLst>
         </p:cNvPr>
@@ -10068,10 +6927,70 @@
       </p:grpSpPr>
       <p:sp>
         <p:nvSpPr>
+          <p:cNvPr id="5" name="Rectangle: Rounded Corners 4">
+            <a:extLst>
+              <a:ext uri="{FF2B5EF4-FFF2-40B4-BE49-F238E27FC236}">
+                <a16:creationId xmlns:a16="http://schemas.microsoft.com/office/drawing/2014/main" id="{77E828F0-1E4C-4ED4-D536-AA8862DDEA3B}"/>
+              </a:ext>
+            </a:extLst>
+          </p:cNvPr>
+          <p:cNvSpPr/>
+          <p:nvPr/>
+        </p:nvSpPr>
+        <p:spPr>
+          <a:xfrm>
+            <a:off x="479064" y="1079239"/>
+            <a:ext cx="5194149" cy="5587609"/>
+          </a:xfrm>
+          <a:prstGeom prst="roundRect">
+            <a:avLst>
+              <a:gd name="adj" fmla="val 6066"/>
+            </a:avLst>
+          </a:prstGeom>
+          <a:solidFill>
+            <a:schemeClr val="bg1">
+              <a:lumMod val="95000"/>
+            </a:schemeClr>
+          </a:solidFill>
+          <a:ln>
+            <a:solidFill>
+              <a:schemeClr val="bg1">
+                <a:lumMod val="95000"/>
+              </a:schemeClr>
+            </a:solidFill>
+          </a:ln>
+        </p:spPr>
+        <p:style>
+          <a:lnRef idx="2">
+            <a:schemeClr val="accent1">
+              <a:shade val="15000"/>
+            </a:schemeClr>
+          </a:lnRef>
+          <a:fillRef idx="1">
+            <a:schemeClr val="accent1"/>
+          </a:fillRef>
+          <a:effectRef idx="0">
+            <a:schemeClr val="accent1"/>
+          </a:effectRef>
+          <a:fontRef idx="minor">
+            <a:schemeClr val="lt1"/>
+          </a:fontRef>
+        </p:style>
+        <p:txBody>
+          <a:bodyPr rtlCol="0" anchor="ctr"/>
+          <a:lstStyle/>
+          <a:p>
+            <a:pPr algn="ctr"/>
+            <a:endParaRPr lang="en-US"/>
+          </a:p>
+        </p:txBody>
+      </p:sp>
+      <p:sp>
+        <p:nvSpPr>
           <p:cNvPr id="3" name="Content Placeholder 2">
             <a:extLst>
               <a:ext uri="{FF2B5EF4-FFF2-40B4-BE49-F238E27FC236}">
-                <a16:creationId xmlns:a16="http://schemas.microsoft.com/office/drawing/2014/main" id="{5F114CC2-9F05-AB75-A23A-AB77BBF9FE79}"/>
+                <a16:creationId xmlns:a16="http://schemas.microsoft.com/office/drawing/2014/main" id="{BDCCF518-BFC3-CC93-E665-EC1A420EB496}"/>
               </a:ext>
             </a:extLst>
           </p:cNvPr>
@@ -10084,8 +7003,8 @@
         </p:nvSpPr>
         <p:spPr>
           <a:xfrm>
-            <a:off x="459292" y="1358041"/>
-            <a:ext cx="4493708" cy="5040630"/>
+            <a:off x="733791" y="1715115"/>
+            <a:ext cx="4760174" cy="4951733"/>
           </a:xfrm>
         </p:spPr>
         <p:txBody>
@@ -10094,12 +7013,12 @@
           </a:bodyPr>
           <a:lstStyle/>
           <a:p>
-            <a:pPr marL="285750" indent="-285750">
+            <a:pPr marL="351701" indent="-351701">
               <a:buFont typeface="Arial" panose="020B0604020202020204" pitchFamily="34" charset="0"/>
               <a:buChar char="•"/>
             </a:pPr>
             <a:r>
-              <a:rPr lang="en-US" sz="1600" dirty="0">
+              <a:rPr lang="en-US" sz="1800" dirty="0">
                 <a:latin typeface="Roboto" panose="02000000000000000000" pitchFamily="2" charset="0"/>
                 <a:ea typeface="Roboto" panose="02000000000000000000" pitchFamily="2" charset="0"/>
                 <a:cs typeface="Roboto" panose="02000000000000000000" pitchFamily="2" charset="0"/>
@@ -10108,42 +7027,26 @@
             </a:r>
           </a:p>
           <a:p>
-            <a:pPr marL="285750" indent="-285750">
+            <a:pPr marL="351701" indent="-351701">
               <a:buFont typeface="Arial" panose="020B0604020202020204" pitchFamily="34" charset="0"/>
               <a:buChar char="•"/>
             </a:pPr>
             <a:r>
-              <a:rPr lang="en-US" sz="1600" dirty="0">
+              <a:rPr lang="en-US" sz="1800" dirty="0">
                 <a:latin typeface="Roboto" panose="02000000000000000000" pitchFamily="2" charset="0"/>
                 <a:ea typeface="Roboto" panose="02000000000000000000" pitchFamily="2" charset="0"/>
                 <a:cs typeface="Roboto" panose="02000000000000000000" pitchFamily="2" charset="0"/>
               </a:rPr>
-              <a:t>Engineering is the biggest </a:t>
-            </a:r>
-            <a:r>
-              <a:rPr lang="en-US" sz="1600" dirty="0" err="1">
-                <a:latin typeface="Roboto" panose="02000000000000000000" pitchFamily="2" charset="0"/>
-                <a:ea typeface="Roboto" panose="02000000000000000000" pitchFamily="2" charset="0"/>
-                <a:cs typeface="Roboto" panose="02000000000000000000" pitchFamily="2" charset="0"/>
-              </a:rPr>
-              <a:t>underutilizer</a:t>
-            </a:r>
-            <a:r>
-              <a:rPr lang="en-US" sz="1600" dirty="0">
-                <a:latin typeface="Roboto" panose="02000000000000000000" pitchFamily="2" charset="0"/>
-                <a:ea typeface="Roboto" panose="02000000000000000000" pitchFamily="2" charset="0"/>
-                <a:cs typeface="Roboto" panose="02000000000000000000" pitchFamily="2" charset="0"/>
-              </a:rPr>
-              <a:t>: only 1 occupied vs. 13 vacant — largest reallocation opportunity</a:t>
-            </a:r>
-          </a:p>
-          <a:p>
-            <a:pPr marL="285750" indent="-285750">
+              <a:t>Engineering is the biggest under utilizer: only 1 occupied vs. 13 vacant — largest reallocation opportunity</a:t>
+            </a:r>
+          </a:p>
+          <a:p>
+            <a:pPr marL="351701" indent="-351701">
               <a:buFont typeface="Arial" panose="020B0604020202020204" pitchFamily="34" charset="0"/>
               <a:buChar char="•"/>
             </a:pPr>
             <a:r>
-              <a:rPr lang="en-US" sz="1600" dirty="0">
+              <a:rPr lang="en-US" sz="1800" dirty="0">
                 <a:latin typeface="Roboto" panose="02000000000000000000" pitchFamily="2" charset="0"/>
                 <a:ea typeface="Roboto" panose="02000000000000000000" pitchFamily="2" charset="0"/>
                 <a:cs typeface="Roboto" panose="02000000000000000000" pitchFamily="2" charset="0"/>
@@ -10152,12 +7055,12 @@
             </a:r>
           </a:p>
           <a:p>
-            <a:pPr marL="285750" indent="-285750">
+            <a:pPr marL="351701" indent="-351701">
               <a:buFont typeface="Arial" panose="020B0604020202020204" pitchFamily="34" charset="0"/>
               <a:buChar char="•"/>
             </a:pPr>
             <a:r>
-              <a:rPr lang="en-US" sz="1600" dirty="0">
+              <a:rPr lang="en-US" sz="1800" dirty="0">
                 <a:latin typeface="Roboto" panose="02000000000000000000" pitchFamily="2" charset="0"/>
                 <a:ea typeface="Roboto" panose="02000000000000000000" pitchFamily="2" charset="0"/>
                 <a:cs typeface="Roboto" panose="02000000000000000000" pitchFamily="2" charset="0"/>
@@ -10172,7 +7075,7 @@
           <p:cNvPr id="4" name="Title 3">
             <a:extLst>
               <a:ext uri="{FF2B5EF4-FFF2-40B4-BE49-F238E27FC236}">
-                <a16:creationId xmlns:a16="http://schemas.microsoft.com/office/drawing/2014/main" id="{1998208A-A378-4642-D54A-C197C9523992}"/>
+                <a16:creationId xmlns:a16="http://schemas.microsoft.com/office/drawing/2014/main" id="{0EE9CC35-2803-3057-FE38-375F5E86AC30}"/>
               </a:ext>
             </a:extLst>
           </p:cNvPr>
@@ -10189,18 +7092,80 @@
           <a:lstStyle/>
           <a:p>
             <a:r>
-              <a:rPr lang="en-US" b="1" kern="1400" spc="200" dirty="0"/>
-              <a:t>Floor 1 Seating Map — Occupancy by Business Unit</a:t>
+              <a:rPr lang="en-US" b="1" spc="246" dirty="0"/>
+              <a:t>Floor 1 Seating Map – Occupancy by Business Unit</a:t>
+            </a:r>
+            <a:endParaRPr lang="en-US" spc="246" dirty="0"/>
+          </a:p>
+        </p:txBody>
+      </p:sp>
+      <p:sp>
+        <p:nvSpPr>
+          <p:cNvPr id="7" name="Rectangle: Rounded Corners 6">
+            <a:extLst>
+              <a:ext uri="{FF2B5EF4-FFF2-40B4-BE49-F238E27FC236}">
+                <a16:creationId xmlns:a16="http://schemas.microsoft.com/office/drawing/2014/main" id="{A755E132-22DE-4357-6737-5E4115A68CC8}"/>
+              </a:ext>
+            </a:extLst>
+          </p:cNvPr>
+          <p:cNvSpPr/>
+          <p:nvPr/>
+        </p:nvSpPr>
+        <p:spPr>
+          <a:xfrm>
+            <a:off x="855406" y="1366684"/>
+            <a:ext cx="4355691" cy="599768"/>
+          </a:xfrm>
+          <a:prstGeom prst="roundRect">
+            <a:avLst>
+              <a:gd name="adj" fmla="val 50000"/>
+            </a:avLst>
+          </a:prstGeom>
+          <a:solidFill>
+            <a:srgbClr val="1767D2"/>
+          </a:solidFill>
+          <a:ln>
+            <a:solidFill>
+              <a:srgbClr val="1767D2"/>
+            </a:solidFill>
+          </a:ln>
+        </p:spPr>
+        <p:style>
+          <a:lnRef idx="2">
+            <a:schemeClr val="accent1">
+              <a:shade val="15000"/>
+            </a:schemeClr>
+          </a:lnRef>
+          <a:fillRef idx="1">
+            <a:schemeClr val="accent1"/>
+          </a:fillRef>
+          <a:effectRef idx="0">
+            <a:schemeClr val="accent1"/>
+          </a:effectRef>
+          <a:fontRef idx="minor">
+            <a:schemeClr val="lt1"/>
+          </a:fontRef>
+        </p:style>
+        <p:txBody>
+          <a:bodyPr rtlCol="0" anchor="ctr"/>
+          <a:lstStyle/>
+          <a:p>
+            <a:pPr algn="ctr"/>
+            <a:r>
+              <a:rPr lang="en-US" sz="1600" b="1" dirty="0">
+                <a:latin typeface="+mj-lt"/>
+              </a:rPr>
+              <a:t>38/53 DESKS OCCUPIED (~72%)</a:t>
             </a:r>
           </a:p>
         </p:txBody>
       </p:sp>
       <p:pic>
         <p:nvPicPr>
-          <p:cNvPr id="6" name="Picture 5">
+          <p:cNvPr id="8" name="Picture 7">
             <a:extLst>
               <a:ext uri="{FF2B5EF4-FFF2-40B4-BE49-F238E27FC236}">
-                <a16:creationId xmlns:a16="http://schemas.microsoft.com/office/drawing/2014/main" id="{FFB9B392-2260-771C-C3E2-1E37FE00FDE1}"/>
+                <a16:creationId xmlns:a16="http://schemas.microsoft.com/office/drawing/2014/main" id="{A30120DD-571A-EA50-5181-F8CB770FDF1A}"/>
               </a:ext>
             </a:extLst>
           </p:cNvPr>
@@ -10224,8 +7189,8 @@
         </p:blipFill>
         <p:spPr>
           <a:xfrm>
-            <a:off x="4953000" y="1358041"/>
-            <a:ext cx="4857750" cy="4785891"/>
+            <a:off x="6312310" y="1093241"/>
+            <a:ext cx="5762459" cy="5677217"/>
           </a:xfrm>
           <a:prstGeom prst="rect">
             <a:avLst/>
@@ -10235,7 +7200,7 @@
     </p:spTree>
     <p:extLst>
       <p:ext uri="{BB962C8B-B14F-4D97-AF65-F5344CB8AC3E}">
-        <p14:creationId xmlns:p14="http://schemas.microsoft.com/office/powerpoint/2010/main" val="463813063"/>
+        <p14:creationId xmlns:p14="http://schemas.microsoft.com/office/powerpoint/2010/main" val="2304663435"/>
       </p:ext>
     </p:extLst>
   </p:cSld>
@@ -10270,6 +7235,66 @@
       </p:grpSpPr>
       <p:sp>
         <p:nvSpPr>
+          <p:cNvPr id="5" name="Rectangle: Rounded Corners 4">
+            <a:extLst>
+              <a:ext uri="{FF2B5EF4-FFF2-40B4-BE49-F238E27FC236}">
+                <a16:creationId xmlns:a16="http://schemas.microsoft.com/office/drawing/2014/main" id="{635D17DF-561F-F5C7-C239-7BC8883F710A}"/>
+              </a:ext>
+            </a:extLst>
+          </p:cNvPr>
+          <p:cNvSpPr/>
+          <p:nvPr/>
+        </p:nvSpPr>
+        <p:spPr>
+          <a:xfrm>
+            <a:off x="479064" y="1079239"/>
+            <a:ext cx="11172162" cy="5587609"/>
+          </a:xfrm>
+          <a:prstGeom prst="roundRect">
+            <a:avLst>
+              <a:gd name="adj" fmla="val 6066"/>
+            </a:avLst>
+          </a:prstGeom>
+          <a:solidFill>
+            <a:schemeClr val="bg1">
+              <a:lumMod val="95000"/>
+            </a:schemeClr>
+          </a:solidFill>
+          <a:ln>
+            <a:solidFill>
+              <a:schemeClr val="bg1">
+                <a:lumMod val="95000"/>
+              </a:schemeClr>
+            </a:solidFill>
+          </a:ln>
+        </p:spPr>
+        <p:style>
+          <a:lnRef idx="2">
+            <a:schemeClr val="accent1">
+              <a:shade val="15000"/>
+            </a:schemeClr>
+          </a:lnRef>
+          <a:fillRef idx="1">
+            <a:schemeClr val="accent1"/>
+          </a:fillRef>
+          <a:effectRef idx="0">
+            <a:schemeClr val="accent1"/>
+          </a:effectRef>
+          <a:fontRef idx="minor">
+            <a:schemeClr val="lt1"/>
+          </a:fontRef>
+        </p:style>
+        <p:txBody>
+          <a:bodyPr rtlCol="0" anchor="ctr"/>
+          <a:lstStyle/>
+          <a:p>
+            <a:pPr algn="ctr"/>
+            <a:endParaRPr lang="en-US"/>
+          </a:p>
+        </p:txBody>
+      </p:sp>
+      <p:sp>
+        <p:nvSpPr>
           <p:cNvPr id="3" name="Content Placeholder 2">
             <a:extLst>
               <a:ext uri="{FF2B5EF4-FFF2-40B4-BE49-F238E27FC236}">
@@ -10286,8 +7311,8 @@
         </p:nvSpPr>
         <p:spPr>
           <a:xfrm>
-            <a:off x="596204" y="1000126"/>
-            <a:ext cx="8156836" cy="5591174"/>
+            <a:off x="733791" y="1115592"/>
+            <a:ext cx="10039181" cy="5551256"/>
           </a:xfrm>
         </p:spPr>
         <p:txBody>
@@ -10297,7 +7322,7 @@
           <a:lstStyle/>
           <a:p>
             <a:r>
-              <a:rPr lang="en-US" sz="1800" b="1" dirty="0">
+              <a:rPr lang="en-US" sz="2000" b="1" dirty="0">
                 <a:latin typeface="Roboto" panose="02000000000000000000" pitchFamily="2" charset="0"/>
                 <a:ea typeface="Roboto" panose="02000000000000000000" pitchFamily="2" charset="0"/>
                 <a:cs typeface="Roboto" panose="02000000000000000000" pitchFamily="2" charset="0"/>
@@ -10307,7 +7332,7 @@
           </a:p>
           <a:p>
             <a:r>
-              <a:rPr lang="en-US" sz="1800" dirty="0">
+              <a:rPr lang="en-US" sz="2000" dirty="0">
                 <a:latin typeface="Roboto" panose="02000000000000000000" pitchFamily="2" charset="0"/>
                 <a:ea typeface="Roboto" panose="02000000000000000000" pitchFamily="2" charset="0"/>
                 <a:cs typeface="Roboto" panose="02000000000000000000" pitchFamily="2" charset="0"/>
@@ -10316,7 +7341,7 @@
             </a:r>
           </a:p>
           <a:p>
-            <a:endParaRPr lang="en-US" sz="1800" dirty="0">
+            <a:endParaRPr lang="en-US" sz="2000" dirty="0">
               <a:latin typeface="Roboto" panose="02000000000000000000" pitchFamily="2" charset="0"/>
               <a:ea typeface="Roboto" panose="02000000000000000000" pitchFamily="2" charset="0"/>
               <a:cs typeface="Roboto" panose="02000000000000000000" pitchFamily="2" charset="0"/>
@@ -10324,7 +7349,7 @@
           </a:p>
           <a:p>
             <a:r>
-              <a:rPr lang="en-US" sz="1800" b="1" dirty="0">
+              <a:rPr lang="en-US" sz="2000" b="1" dirty="0">
                 <a:latin typeface="Roboto" panose="02000000000000000000" pitchFamily="2" charset="0"/>
                 <a:ea typeface="Roboto" panose="02000000000000000000" pitchFamily="2" charset="0"/>
                 <a:cs typeface="Roboto" panose="02000000000000000000" pitchFamily="2" charset="0"/>
@@ -10334,7 +7359,7 @@
           </a:p>
           <a:p>
             <a:r>
-              <a:rPr lang="en-US" sz="1800" dirty="0">
+              <a:rPr lang="en-US" sz="2000" dirty="0">
                 <a:latin typeface="Roboto" panose="02000000000000000000" pitchFamily="2" charset="0"/>
                 <a:ea typeface="Roboto" panose="02000000000000000000" pitchFamily="2" charset="0"/>
                 <a:cs typeface="Roboto" panose="02000000000000000000" pitchFamily="2" charset="0"/>
@@ -10343,7 +7368,7 @@
             </a:r>
           </a:p>
           <a:p>
-            <a:endParaRPr lang="en-US" sz="1800" dirty="0">
+            <a:endParaRPr lang="en-US" sz="2000" dirty="0">
               <a:latin typeface="Roboto" panose="02000000000000000000" pitchFamily="2" charset="0"/>
               <a:ea typeface="Roboto" panose="02000000000000000000" pitchFamily="2" charset="0"/>
               <a:cs typeface="Roboto" panose="02000000000000000000" pitchFamily="2" charset="0"/>
@@ -10351,7 +7376,7 @@
           </a:p>
           <a:p>
             <a:r>
-              <a:rPr lang="en-US" sz="1800" b="1" dirty="0">
+              <a:rPr lang="en-US" sz="2000" b="1" dirty="0">
                 <a:latin typeface="Roboto" panose="02000000000000000000" pitchFamily="2" charset="0"/>
                 <a:ea typeface="Roboto" panose="02000000000000000000" pitchFamily="2" charset="0"/>
                 <a:cs typeface="Roboto" panose="02000000000000000000" pitchFamily="2" charset="0"/>
@@ -10361,14 +7386,14 @@
           </a:p>
           <a:p>
             <a:r>
-              <a:rPr lang="en-US" sz="1800" dirty="0">
+              <a:rPr lang="en-US" sz="2000" dirty="0">
                 <a:latin typeface="Roboto" panose="02000000000000000000" pitchFamily="2" charset="0"/>
                 <a:ea typeface="Roboto" panose="02000000000000000000" pitchFamily="2" charset="0"/>
                 <a:cs typeface="Roboto" panose="02000000000000000000" pitchFamily="2" charset="0"/>
               </a:rPr>
               <a:t>Supplement permanent allocations with touchdown and project/team room seats on Floor 1 to absorb overflow and improve the 72% alignment score. Monitor weekly.</a:t>
             </a:r>
-            <a:endParaRPr lang="en-US" sz="1600" dirty="0">
+            <a:endParaRPr lang="en-US" sz="1800" dirty="0">
               <a:latin typeface="Roboto" panose="02000000000000000000" pitchFamily="2" charset="0"/>
               <a:ea typeface="Roboto" panose="02000000000000000000" pitchFamily="2" charset="0"/>
               <a:cs typeface="Roboto" panose="02000000000000000000" pitchFamily="2" charset="0"/>
@@ -10398,7 +7423,7 @@
           <a:lstStyle/>
           <a:p>
             <a:r>
-              <a:rPr lang="en-US" b="1" kern="1400" spc="200" dirty="0"/>
+              <a:rPr lang="en-US" b="1" kern="1400" spc="246" dirty="0"/>
               <a:t>Action Plan — Building F Space Optimization</a:t>
             </a:r>
           </a:p>
@@ -10830,321 +7855,6 @@
         <a:sysClr val="window" lastClr="FFFFFF"/>
       </a:lt1>
       <a:dk2>
-        <a:srgbClr val="0E2841"/>
-      </a:dk2>
-      <a:lt2>
-        <a:srgbClr val="E8E8E8"/>
-      </a:lt2>
-      <a:accent1>
-        <a:srgbClr val="156082"/>
-      </a:accent1>
-      <a:accent2>
-        <a:srgbClr val="E97132"/>
-      </a:accent2>
-      <a:accent3>
-        <a:srgbClr val="196B24"/>
-      </a:accent3>
-      <a:accent4>
-        <a:srgbClr val="0F9ED5"/>
-      </a:accent4>
-      <a:accent5>
-        <a:srgbClr val="A02B93"/>
-      </a:accent5>
-      <a:accent6>
-        <a:srgbClr val="4EA72E"/>
-      </a:accent6>
-      <a:hlink>
-        <a:srgbClr val="467886"/>
-      </a:hlink>
-      <a:folHlink>
-        <a:srgbClr val="96607D"/>
-      </a:folHlink>
-    </a:clrScheme>
-    <a:fontScheme name="Office">
-      <a:majorFont>
-        <a:latin typeface="Aptos Display" panose="02110004020202020204"/>
-        <a:ea typeface=""/>
-        <a:cs typeface=""/>
-        <a:font script="Jpan" typeface="游ゴシック Light"/>
-        <a:font script="Hang" typeface="맑은 고딕"/>
-        <a:font script="Hans" typeface="等线 Light"/>
-        <a:font script="Hant" typeface="新細明體"/>
-        <a:font script="Arab" typeface="Times New Roman"/>
-        <a:font script="Hebr" typeface="Times New Roman"/>
-        <a:font script="Thai" typeface="Angsana New"/>
-        <a:font script="Ethi" typeface="Nyala"/>
-        <a:font script="Beng" typeface="Vrinda"/>
-        <a:font script="Gujr" typeface="Shruti"/>
-        <a:font script="Khmr" typeface="MoolBoran"/>
-        <a:font script="Knda" typeface="Tunga"/>
-        <a:font script="Guru" typeface="Raavi"/>
-        <a:font script="Cans" typeface="Euphemia"/>
-        <a:font script="Cher" typeface="Plantagenet Cherokee"/>
-        <a:font script="Yiii" typeface="Microsoft Yi Baiti"/>
-        <a:font script="Tibt" typeface="Microsoft Himalaya"/>
-        <a:font script="Thaa" typeface="MV Boli"/>
-        <a:font script="Deva" typeface="Mangal"/>
-        <a:font script="Telu" typeface="Gautami"/>
-        <a:font script="Taml" typeface="Latha"/>
-        <a:font script="Syrc" typeface="Estrangelo Edessa"/>
-        <a:font script="Orya" typeface="Kalinga"/>
-        <a:font script="Mlym" typeface="Kartika"/>
-        <a:font script="Laoo" typeface="DokChampa"/>
-        <a:font script="Sinh" typeface="Iskoola Pota"/>
-        <a:font script="Mong" typeface="Mongolian Baiti"/>
-        <a:font script="Viet" typeface="Times New Roman"/>
-        <a:font script="Uigh" typeface="Microsoft Uighur"/>
-        <a:font script="Geor" typeface="Sylfaen"/>
-        <a:font script="Armn" typeface="Arial"/>
-        <a:font script="Bugi" typeface="Leelawadee UI"/>
-        <a:font script="Bopo" typeface="Microsoft JhengHei"/>
-        <a:font script="Java" typeface="Javanese Text"/>
-        <a:font script="Lisu" typeface="Segoe UI"/>
-        <a:font script="Mymr" typeface="Myanmar Text"/>
-        <a:font script="Nkoo" typeface="Ebrima"/>
-        <a:font script="Olck" typeface="Nirmala UI"/>
-        <a:font script="Osma" typeface="Ebrima"/>
-        <a:font script="Phag" typeface="Phagspa"/>
-        <a:font script="Syrn" typeface="Estrangelo Edessa"/>
-        <a:font script="Syrj" typeface="Estrangelo Edessa"/>
-        <a:font script="Syre" typeface="Estrangelo Edessa"/>
-        <a:font script="Sora" typeface="Nirmala UI"/>
-        <a:font script="Tale" typeface="Microsoft Tai Le"/>
-        <a:font script="Talu" typeface="Microsoft New Tai Lue"/>
-        <a:font script="Tfng" typeface="Ebrima"/>
-      </a:majorFont>
-      <a:minorFont>
-        <a:latin typeface="Aptos" panose="02110004020202020204"/>
-        <a:ea typeface=""/>
-        <a:cs typeface=""/>
-        <a:font script="Jpan" typeface="游ゴシック"/>
-        <a:font script="Hang" typeface="맑은 고딕"/>
-        <a:font script="Hans" typeface="等线"/>
-        <a:font script="Hant" typeface="新細明體"/>
-        <a:font script="Arab" typeface="Arial"/>
-        <a:font script="Hebr" typeface="Arial"/>
-        <a:font script="Thai" typeface="Cordia New"/>
-        <a:font script="Ethi" typeface="Nyala"/>
-        <a:font script="Beng" typeface="Vrinda"/>
-        <a:font script="Gujr" typeface="Shruti"/>
-        <a:font script="Khmr" typeface="DaunPenh"/>
-        <a:font script="Knda" typeface="Tunga"/>
-        <a:font script="Guru" typeface="Raavi"/>
-        <a:font script="Cans" typeface="Euphemia"/>
-        <a:font script="Cher" typeface="Plantagenet Cherokee"/>
-        <a:font script="Yiii" typeface="Microsoft Yi Baiti"/>
-        <a:font script="Tibt" typeface="Microsoft Himalaya"/>
-        <a:font script="Thaa" typeface="MV Boli"/>
-        <a:font script="Deva" typeface="Mangal"/>
-        <a:font script="Telu" typeface="Gautami"/>
-        <a:font script="Taml" typeface="Latha"/>
-        <a:font script="Syrc" typeface="Estrangelo Edessa"/>
-        <a:font script="Orya" typeface="Kalinga"/>
-        <a:font script="Mlym" typeface="Kartika"/>
-        <a:font script="Laoo" typeface="DokChampa"/>
-        <a:font script="Sinh" typeface="Iskoola Pota"/>
-        <a:font script="Mong" typeface="Mongolian Baiti"/>
-        <a:font script="Viet" typeface="Arial"/>
-        <a:font script="Uigh" typeface="Microsoft Uighur"/>
-        <a:font script="Geor" typeface="Sylfaen"/>
-        <a:font script="Armn" typeface="Arial"/>
-        <a:font script="Bugi" typeface="Leelawadee UI"/>
-        <a:font script="Bopo" typeface="Microsoft JhengHei"/>
-        <a:font script="Java" typeface="Javanese Text"/>
-        <a:font script="Lisu" typeface="Segoe UI"/>
-        <a:font script="Mymr" typeface="Myanmar Text"/>
-        <a:font script="Nkoo" typeface="Ebrima"/>
-        <a:font script="Olck" typeface="Nirmala UI"/>
-        <a:font script="Osma" typeface="Ebrima"/>
-        <a:font script="Phag" typeface="Phagspa"/>
-        <a:font script="Syrn" typeface="Estrangelo Edessa"/>
-        <a:font script="Syrj" typeface="Estrangelo Edessa"/>
-        <a:font script="Syre" typeface="Estrangelo Edessa"/>
-        <a:font script="Sora" typeface="Nirmala UI"/>
-        <a:font script="Tale" typeface="Microsoft Tai Le"/>
-        <a:font script="Talu" typeface="Microsoft New Tai Lue"/>
-        <a:font script="Tfng" typeface="Ebrima"/>
-      </a:minorFont>
-    </a:fontScheme>
-    <a:fmtScheme name="Office">
-      <a:fillStyleLst>
-        <a:solidFill>
-          <a:schemeClr val="phClr"/>
-        </a:solidFill>
-        <a:gradFill rotWithShape="1">
-          <a:gsLst>
-            <a:gs pos="0">
-              <a:schemeClr val="phClr">
-                <a:lumMod val="110000"/>
-                <a:satMod val="105000"/>
-                <a:tint val="67000"/>
-              </a:schemeClr>
-            </a:gs>
-            <a:gs pos="50000">
-              <a:schemeClr val="phClr">
-                <a:lumMod val="105000"/>
-                <a:satMod val="103000"/>
-                <a:tint val="73000"/>
-              </a:schemeClr>
-            </a:gs>
-            <a:gs pos="100000">
-              <a:schemeClr val="phClr">
-                <a:lumMod val="105000"/>
-                <a:satMod val="109000"/>
-                <a:tint val="81000"/>
-              </a:schemeClr>
-            </a:gs>
-          </a:gsLst>
-          <a:lin ang="5400000" scaled="0"/>
-        </a:gradFill>
-        <a:gradFill rotWithShape="1">
-          <a:gsLst>
-            <a:gs pos="0">
-              <a:schemeClr val="phClr">
-                <a:satMod val="103000"/>
-                <a:lumMod val="102000"/>
-                <a:tint val="94000"/>
-              </a:schemeClr>
-            </a:gs>
-            <a:gs pos="50000">
-              <a:schemeClr val="phClr">
-                <a:satMod val="110000"/>
-                <a:lumMod val="100000"/>
-                <a:shade val="100000"/>
-              </a:schemeClr>
-            </a:gs>
-            <a:gs pos="100000">
-              <a:schemeClr val="phClr">
-                <a:lumMod val="99000"/>
-                <a:satMod val="120000"/>
-                <a:shade val="78000"/>
-              </a:schemeClr>
-            </a:gs>
-          </a:gsLst>
-          <a:lin ang="5400000" scaled="0"/>
-        </a:gradFill>
-      </a:fillStyleLst>
-      <a:lnStyleLst>
-        <a:ln w="12700" cap="flat" cmpd="sng" algn="ctr">
-          <a:solidFill>
-            <a:schemeClr val="phClr"/>
-          </a:solidFill>
-          <a:prstDash val="solid"/>
-          <a:miter lim="800000"/>
-        </a:ln>
-        <a:ln w="19050" cap="flat" cmpd="sng" algn="ctr">
-          <a:solidFill>
-            <a:schemeClr val="phClr"/>
-          </a:solidFill>
-          <a:prstDash val="solid"/>
-          <a:miter lim="800000"/>
-        </a:ln>
-        <a:ln w="25400" cap="flat" cmpd="sng" algn="ctr">
-          <a:solidFill>
-            <a:schemeClr val="phClr"/>
-          </a:solidFill>
-          <a:prstDash val="solid"/>
-          <a:miter lim="800000"/>
-        </a:ln>
-      </a:lnStyleLst>
-      <a:effectStyleLst>
-        <a:effectStyle>
-          <a:effectLst/>
-        </a:effectStyle>
-        <a:effectStyle>
-          <a:effectLst/>
-        </a:effectStyle>
-        <a:effectStyle>
-          <a:effectLst>
-            <a:outerShdw blurRad="57150" dist="19050" dir="5400000" algn="ctr" rotWithShape="0">
-              <a:srgbClr val="000000">
-                <a:alpha val="63000"/>
-              </a:srgbClr>
-            </a:outerShdw>
-          </a:effectLst>
-        </a:effectStyle>
-      </a:effectStyleLst>
-      <a:bgFillStyleLst>
-        <a:solidFill>
-          <a:schemeClr val="phClr"/>
-        </a:solidFill>
-        <a:solidFill>
-          <a:schemeClr val="phClr">
-            <a:tint val="95000"/>
-            <a:satMod val="170000"/>
-          </a:schemeClr>
-        </a:solidFill>
-        <a:gradFill rotWithShape="1">
-          <a:gsLst>
-            <a:gs pos="0">
-              <a:schemeClr val="phClr">
-                <a:tint val="93000"/>
-                <a:satMod val="150000"/>
-                <a:shade val="98000"/>
-                <a:lumMod val="102000"/>
-              </a:schemeClr>
-            </a:gs>
-            <a:gs pos="50000">
-              <a:schemeClr val="phClr">
-                <a:tint val="98000"/>
-                <a:satMod val="130000"/>
-                <a:shade val="90000"/>
-                <a:lumMod val="103000"/>
-              </a:schemeClr>
-            </a:gs>
-            <a:gs pos="100000">
-              <a:schemeClr val="phClr">
-                <a:shade val="63000"/>
-                <a:satMod val="120000"/>
-              </a:schemeClr>
-            </a:gs>
-          </a:gsLst>
-          <a:lin ang="5400000" scaled="0"/>
-        </a:gradFill>
-      </a:bgFillStyleLst>
-    </a:fmtScheme>
-  </a:themeElements>
-  <a:objectDefaults>
-    <a:lnDef>
-      <a:spPr/>
-      <a:bodyPr/>
-      <a:lstStyle/>
-      <a:style>
-        <a:lnRef idx="2">
-          <a:schemeClr val="accent1"/>
-        </a:lnRef>
-        <a:fillRef idx="0">
-          <a:schemeClr val="accent1"/>
-        </a:fillRef>
-        <a:effectRef idx="1">
-          <a:schemeClr val="accent1"/>
-        </a:effectRef>
-        <a:fontRef idx="minor">
-          <a:schemeClr val="tx1"/>
-        </a:fontRef>
-      </a:style>
-    </a:lnDef>
-  </a:objectDefaults>
-  <a:extraClrSchemeLst/>
-  <a:extLst>
-    <a:ext uri="{05A4C25C-085E-4340-85A3-A5531E510DB2}">
-      <thm15:themeFamily xmlns:thm15="http://schemas.microsoft.com/office/thememl/2012/main" name="Office Theme" id="{2E142A2C-CD16-42D6-873A-C26D2A0506FA}" vid="{1BDDFF52-6CD6-40A5-AB3C-68EB2F1E4D0A}"/>
-    </a:ext>
-  </a:extLst>
-</a:theme>
-</file>
-
-<file path=ppt/theme/theme4.xml><?xml version="1.0" encoding="utf-8"?>
-<a:theme xmlns:a="http://schemas.openxmlformats.org/drawingml/2006/main" name="Office Theme">
-  <a:themeElements>
-    <a:clrScheme name="Office">
-      <a:dk1>
-        <a:sysClr val="windowText" lastClr="000000"/>
-      </a:dk1>
-      <a:lt1>
-        <a:sysClr val="window" lastClr="FFFFFF"/>
-      </a:lt1>
-      <a:dk2>
         <a:srgbClr val="44546A"/>
       </a:dk2>
       <a:lt2>
@@ -11395,7 +8105,7 @@
 </a:theme>
 </file>
 
-<file path=ppt/theme/theme5.xml><?xml version="1.0" encoding="utf-8"?>
+<file path=ppt/theme/theme4.xml><?xml version="1.0" encoding="utf-8"?>
 <a:theme xmlns:a="http://schemas.openxmlformats.org/drawingml/2006/main" name="Office Theme">
   <a:themeElements>
     <a:clrScheme name="Office">
@@ -11903,16 +8613,16 @@
 <file path=customXml/itemProps1.xml><?xml version="1.0" encoding="utf-8"?>
 <ds:datastoreItem xmlns:ds="http://schemas.openxmlformats.org/officeDocument/2006/customXml" ds:itemID="{B45D76EC-F2F5-48B8-95DA-EF0FB4B2183F}">
   <ds:schemaRefs>
+    <ds:schemaRef ds:uri="http://purl.org/dc/terms/"/>
+    <ds:schemaRef ds:uri="http://www.w3.org/XML/1998/namespace"/>
+    <ds:schemaRef ds:uri="153ae615-e700-431c-905c-1e4cee6d6937"/>
+    <ds:schemaRef ds:uri="http://schemas.microsoft.com/office/2006/metadata/properties"/>
     <ds:schemaRef ds:uri="http://purl.org/dc/elements/1.1/"/>
-    <ds:schemaRef ds:uri="http://schemas.microsoft.com/office/2006/metadata/properties"/>
+    <ds:schemaRef ds:uri="http://purl.org/dc/dcmitype/"/>
+    <ds:schemaRef ds:uri="http://schemas.microsoft.com/office/2006/documentManagement/types"/>
+    <ds:schemaRef ds:uri="http://schemas.openxmlformats.org/package/2006/metadata/core-properties"/>
+    <ds:schemaRef ds:uri="http://schemas.microsoft.com/office/infopath/2007/PartnerControls"/>
     <ds:schemaRef ds:uri="1c75bd5f-743b-40f2-bae2-8e86a640c5ff"/>
-    <ds:schemaRef ds:uri="http://purl.org/dc/terms/"/>
-    <ds:schemaRef ds:uri="153ae615-e700-431c-905c-1e4cee6d6937"/>
-    <ds:schemaRef ds:uri="http://schemas.microsoft.com/office/2006/documentManagement/types"/>
-    <ds:schemaRef ds:uri="http://schemas.microsoft.com/office/infopath/2007/PartnerControls"/>
-    <ds:schemaRef ds:uri="http://schemas.openxmlformats.org/package/2006/metadata/core-properties"/>
-    <ds:schemaRef ds:uri="http://www.w3.org/XML/1998/namespace"/>
-    <ds:schemaRef ds:uri="http://purl.org/dc/dcmitype/"/>
   </ds:schemaRefs>
 </ds:datastoreItem>
 </file>
